--- a/slides/Part 4 DAGitty Exercises.pptx
+++ b/slides/Part 4 DAGitty Exercises.pptx
@@ -1,36 +1,136 @@
 
 <file path=ppt/presentation.xml><?xml version="1.0" encoding="utf-8"?>
-<p:presentation xmlns:a="http://schemas.openxmlformats.org/drawingml/2006/main" xmlns:p="http://schemas.openxmlformats.org/presentationml/2006/main" xmlns:r="http://schemas.openxmlformats.org/officeDocument/2006/relationships" xmlns:p14="http://schemas.microsoft.com/office/powerpoint/2010/main" xmlns:p15="http://schemas.microsoft.com/office/powerpoint/2012/main" xmlns:mc="http://schemas.openxmlformats.org/markup-compatibility/2006">
+<p:presentation xmlns:a="http://schemas.openxmlformats.org/drawingml/2006/main" xmlns:r="http://schemas.openxmlformats.org/officeDocument/2006/relationships" xmlns:p="http://schemas.openxmlformats.org/presentationml/2006/main">
   <p:sldMasterIdLst>
-    <p:sldMasterId id="2147483648" r:id="rId2"/>
+    <p:sldMasterId id="2147483648" r:id="rId1"/>
   </p:sldMasterIdLst>
   <p:notesMasterIdLst>
-    <p:notesMasterId r:id="rId3"/>
+    <p:notesMasterId r:id="rId16"/>
   </p:notesMasterIdLst>
   <p:sldIdLst>
-    <p:sldId id="256" r:id="rId4"/>
-    <p:sldId id="257" r:id="rId5"/>
-    <p:sldId id="258" r:id="rId6"/>
-    <p:sldId id="259" r:id="rId7"/>
-    <p:sldId id="260" r:id="rId8"/>
-    <p:sldId id="261" r:id="rId9"/>
-    <p:sldId id="262" r:id="rId10"/>
-    <p:sldId id="263" r:id="rId11"/>
-    <p:sldId id="264" r:id="rId12"/>
-    <p:sldId id="265" r:id="rId13"/>
-    <p:sldId id="266" r:id="rId14"/>
-    <p:sldId id="267" r:id="rId15"/>
-    <p:sldId id="268" r:id="rId16"/>
-    <p:sldId id="269" r:id="rId17"/>
+    <p:sldId id="256" r:id="rId2"/>
+    <p:sldId id="257" r:id="rId3"/>
+    <p:sldId id="258" r:id="rId4"/>
+    <p:sldId id="259" r:id="rId5"/>
+    <p:sldId id="260" r:id="rId6"/>
+    <p:sldId id="261" r:id="rId7"/>
+    <p:sldId id="262" r:id="rId8"/>
+    <p:sldId id="263" r:id="rId9"/>
+    <p:sldId id="264" r:id="rId10"/>
+    <p:sldId id="265" r:id="rId11"/>
+    <p:sldId id="266" r:id="rId12"/>
+    <p:sldId id="267" r:id="rId13"/>
+    <p:sldId id="268" r:id="rId14"/>
+    <p:sldId id="269" r:id="rId15"/>
   </p:sldIdLst>
-  <p:sldSz cx="9144000" cy="5143500"/>
+  <p:sldSz cx="9144000" cy="5143500" type="screen16x9"/>
   <p:notesSz cx="5143500" cy="9144000"/>
+  <p:defaultTextStyle>
+    <a:defPPr>
+      <a:defRPr lang="en-SE"/>
+    </a:defPPr>
+    <a:lvl1pPr marL="0" algn="l" defTabSz="914400" rtl="0" eaLnBrk="1" latinLnBrk="0" hangingPunct="1">
+      <a:defRPr sz="1800" kern="1200">
+        <a:solidFill>
+          <a:schemeClr val="tx1"/>
+        </a:solidFill>
+        <a:latin typeface="+mn-lt"/>
+        <a:ea typeface="+mn-ea"/>
+        <a:cs typeface="+mn-cs"/>
+      </a:defRPr>
+    </a:lvl1pPr>
+    <a:lvl2pPr marL="457200" algn="l" defTabSz="914400" rtl="0" eaLnBrk="1" latinLnBrk="0" hangingPunct="1">
+      <a:defRPr sz="1800" kern="1200">
+        <a:solidFill>
+          <a:schemeClr val="tx1"/>
+        </a:solidFill>
+        <a:latin typeface="+mn-lt"/>
+        <a:ea typeface="+mn-ea"/>
+        <a:cs typeface="+mn-cs"/>
+      </a:defRPr>
+    </a:lvl2pPr>
+    <a:lvl3pPr marL="914400" algn="l" defTabSz="914400" rtl="0" eaLnBrk="1" latinLnBrk="0" hangingPunct="1">
+      <a:defRPr sz="1800" kern="1200">
+        <a:solidFill>
+          <a:schemeClr val="tx1"/>
+        </a:solidFill>
+        <a:latin typeface="+mn-lt"/>
+        <a:ea typeface="+mn-ea"/>
+        <a:cs typeface="+mn-cs"/>
+      </a:defRPr>
+    </a:lvl3pPr>
+    <a:lvl4pPr marL="1371600" algn="l" defTabSz="914400" rtl="0" eaLnBrk="1" latinLnBrk="0" hangingPunct="1">
+      <a:defRPr sz="1800" kern="1200">
+        <a:solidFill>
+          <a:schemeClr val="tx1"/>
+        </a:solidFill>
+        <a:latin typeface="+mn-lt"/>
+        <a:ea typeface="+mn-ea"/>
+        <a:cs typeface="+mn-cs"/>
+      </a:defRPr>
+    </a:lvl4pPr>
+    <a:lvl5pPr marL="1828800" algn="l" defTabSz="914400" rtl="0" eaLnBrk="1" latinLnBrk="0" hangingPunct="1">
+      <a:defRPr sz="1800" kern="1200">
+        <a:solidFill>
+          <a:schemeClr val="tx1"/>
+        </a:solidFill>
+        <a:latin typeface="+mn-lt"/>
+        <a:ea typeface="+mn-ea"/>
+        <a:cs typeface="+mn-cs"/>
+      </a:defRPr>
+    </a:lvl5pPr>
+    <a:lvl6pPr marL="2286000" algn="l" defTabSz="914400" rtl="0" eaLnBrk="1" latinLnBrk="0" hangingPunct="1">
+      <a:defRPr sz="1800" kern="1200">
+        <a:solidFill>
+          <a:schemeClr val="tx1"/>
+        </a:solidFill>
+        <a:latin typeface="+mn-lt"/>
+        <a:ea typeface="+mn-ea"/>
+        <a:cs typeface="+mn-cs"/>
+      </a:defRPr>
+    </a:lvl6pPr>
+    <a:lvl7pPr marL="2743200" algn="l" defTabSz="914400" rtl="0" eaLnBrk="1" latinLnBrk="0" hangingPunct="1">
+      <a:defRPr sz="1800" kern="1200">
+        <a:solidFill>
+          <a:schemeClr val="tx1"/>
+        </a:solidFill>
+        <a:latin typeface="+mn-lt"/>
+        <a:ea typeface="+mn-ea"/>
+        <a:cs typeface="+mn-cs"/>
+      </a:defRPr>
+    </a:lvl7pPr>
+    <a:lvl8pPr marL="3200400" algn="l" defTabSz="914400" rtl="0" eaLnBrk="1" latinLnBrk="0" hangingPunct="1">
+      <a:defRPr sz="1800" kern="1200">
+        <a:solidFill>
+          <a:schemeClr val="tx1"/>
+        </a:solidFill>
+        <a:latin typeface="+mn-lt"/>
+        <a:ea typeface="+mn-ea"/>
+        <a:cs typeface="+mn-cs"/>
+      </a:defRPr>
+    </a:lvl8pPr>
+    <a:lvl9pPr marL="3657600" algn="l" defTabSz="914400" rtl="0" eaLnBrk="1" latinLnBrk="0" hangingPunct="1">
+      <a:defRPr sz="1800" kern="1200">
+        <a:solidFill>
+          <a:schemeClr val="tx1"/>
+        </a:solidFill>
+        <a:latin typeface="+mn-lt"/>
+        <a:ea typeface="+mn-ea"/>
+        <a:cs typeface="+mn-cs"/>
+      </a:defRPr>
+    </a:lvl9pPr>
+  </p:defaultTextStyle>
 </p:presentation>
 </file>
 
 <file path=ppt/notesMasters/notesMaster1.xml><?xml version="1.0" encoding="utf-8"?>
-<p:notesMaster xmlns:a="http://schemas.openxmlformats.org/drawingml/2006/main" xmlns:p="http://schemas.openxmlformats.org/presentationml/2006/main" xmlns:r="http://schemas.openxmlformats.org/officeDocument/2006/relationships" xmlns:p14="http://schemas.microsoft.com/office/powerpoint/2010/main" xmlns:p15="http://schemas.microsoft.com/office/powerpoint/2012/main" xmlns:mc="http://schemas.openxmlformats.org/markup-compatibility/2006">
+<p:notesMaster xmlns:a="http://schemas.openxmlformats.org/drawingml/2006/main" xmlns:r="http://schemas.openxmlformats.org/officeDocument/2006/relationships" xmlns:p="http://schemas.openxmlformats.org/presentationml/2006/main">
   <p:cSld>
+    <p:bg>
+      <p:bgRef idx="1001">
+        <a:schemeClr val="bg1"/>
+      </p:bgRef>
+    </p:bg>
     <p:spTree>
       <p:nvGrpSpPr>
         <p:cNvPr id="1" name=""/>
@@ -49,7 +149,7 @@
         <p:nvSpPr>
           <p:cNvPr id="44" name="PlaceHolder 1"/>
           <p:cNvSpPr>
-            <a:spLocks noGrp="1"/>
+            <a:spLocks noGrp="1" noRot="1" noChangeAspect="1"/>
           </p:cNvSpPr>
           <p:nvPr>
             <p:ph type="sldImg"/>
@@ -72,6 +172,7 @@
           <a:bodyPr lIns="0" tIns="0" rIns="0" bIns="0" anchor="ctr">
             <a:noAutofit/>
           </a:bodyPr>
+          <a:lstStyle/>
           <a:p>
             <a:pPr defTabSz="914400">
               <a:lnSpc>
@@ -89,14 +190,6 @@
               </a:rPr>
               <a:t>Click to move the slide</a:t>
             </a:r>
-            <a:endParaRPr lang="en-GB" sz="2600" b="1" u="none" strike="noStrike">
-              <a:solidFill>
-                <a:srgbClr val="1E3A5F"/>
-              </a:solidFill>
-              <a:effectLst/>
-              <a:uFillTx/>
-              <a:latin typeface="Cambria"/>
-            </a:endParaRPr>
           </a:p>
         </p:txBody>
       </p:sp>
@@ -127,6 +220,7 @@
           <a:bodyPr lIns="0" tIns="0" rIns="0" bIns="0" anchor="t">
             <a:noAutofit/>
           </a:bodyPr>
+          <a:lstStyle/>
           <a:p>
             <a:pPr indent="0" algn="l">
               <a:buNone/>
@@ -142,14 +236,6 @@
               </a:rPr>
               <a:t>Click to edit the notes' format</a:t>
             </a:r>
-            <a:endParaRPr lang="en-GB" sz="2000" b="0" u="none" strike="noStrike">
-              <a:solidFill>
-                <a:srgbClr val="000000"/>
-              </a:solidFill>
-              <a:effectLst/>
-              <a:uFillTx/>
-              <a:latin typeface="Arial"/>
-            </a:endParaRPr>
           </a:p>
         </p:txBody>
       </p:sp>
@@ -180,6 +266,7 @@
           <a:bodyPr lIns="0" tIns="0" rIns="0" bIns="0" anchor="t">
             <a:noAutofit/>
           </a:bodyPr>
+          <a:lstStyle/>
           <a:p>
             <a:pPr indent="0" algn="l">
               <a:buNone/>
@@ -195,14 +282,6 @@
               </a:rPr>
               <a:t>&lt;header&gt;</a:t>
             </a:r>
-            <a:endParaRPr lang="en-GB" sz="1400" b="0" u="none" strike="noStrike">
-              <a:solidFill>
-                <a:srgbClr val="000000"/>
-              </a:solidFill>
-              <a:effectLst/>
-              <a:uFillTx/>
-              <a:latin typeface="Times New Roman"/>
-            </a:endParaRPr>
           </a:p>
         </p:txBody>
       </p:sp>
@@ -261,14 +340,6 @@
               </a:rPr>
               <a:t>&lt;date/time&gt;</a:t>
             </a:r>
-            <a:endParaRPr lang="en-GB" sz="1400" b="0" u="none" strike="noStrike">
-              <a:solidFill>
-                <a:srgbClr val="000000"/>
-              </a:solidFill>
-              <a:effectLst/>
-              <a:uFillTx/>
-              <a:latin typeface="Times New Roman"/>
-            </a:endParaRPr>
           </a:p>
         </p:txBody>
       </p:sp>
@@ -327,14 +398,6 @@
               </a:rPr>
               <a:t>&lt;footer&gt;</a:t>
             </a:r>
-            <a:endParaRPr lang="en-GB" sz="1400" b="0" u="none" strike="noStrike">
-              <a:solidFill>
-                <a:srgbClr val="000000"/>
-              </a:solidFill>
-              <a:effectLst/>
-              <a:uFillTx/>
-              <a:latin typeface="Times New Roman"/>
-            </a:endParaRPr>
           </a:p>
         </p:txBody>
       </p:sp>
@@ -391,7 +454,7 @@
                 <a:uFillTx/>
                 <a:latin typeface="Times New Roman"/>
               </a:rPr>
-              <a:t>&lt;number&gt;</a:t>
+              <a:t>‹#›</a:t>
             </a:fld>
             <a:endParaRPr lang="en-GB" sz="1400" b="0" u="none" strike="noStrike">
               <a:solidFill>
@@ -406,12 +469,104 @@
       </p:sp>
     </p:spTree>
   </p:cSld>
-  <p:clrMap bg1="lt1" bg2="lt2" tx1="dk1" tx2="dk2" accent1="accent1" accent2="accent2" accent3="accent3" accent4="accent4" accent5="accent5" accent6="accent6" hlink="hlink" folHlink="folHlink"/>
+  <p:clrMap bg1="lt1" tx1="dk1" bg2="lt2" tx2="dk2" accent1="accent1" accent2="accent2" accent3="accent3" accent4="accent4" accent5="accent5" accent6="accent6" hlink="hlink" folHlink="folHlink"/>
+  <p:notesStyle>
+    <a:lvl1pPr marL="0" algn="l" defTabSz="914400" rtl="0" eaLnBrk="1" latinLnBrk="0" hangingPunct="1">
+      <a:defRPr sz="1200" kern="1200">
+        <a:solidFill>
+          <a:schemeClr val="tx1"/>
+        </a:solidFill>
+        <a:latin typeface="+mn-lt"/>
+        <a:ea typeface="+mn-ea"/>
+        <a:cs typeface="+mn-cs"/>
+      </a:defRPr>
+    </a:lvl1pPr>
+    <a:lvl2pPr marL="457200" algn="l" defTabSz="914400" rtl="0" eaLnBrk="1" latinLnBrk="0" hangingPunct="1">
+      <a:defRPr sz="1200" kern="1200">
+        <a:solidFill>
+          <a:schemeClr val="tx1"/>
+        </a:solidFill>
+        <a:latin typeface="+mn-lt"/>
+        <a:ea typeface="+mn-ea"/>
+        <a:cs typeface="+mn-cs"/>
+      </a:defRPr>
+    </a:lvl2pPr>
+    <a:lvl3pPr marL="914400" algn="l" defTabSz="914400" rtl="0" eaLnBrk="1" latinLnBrk="0" hangingPunct="1">
+      <a:defRPr sz="1200" kern="1200">
+        <a:solidFill>
+          <a:schemeClr val="tx1"/>
+        </a:solidFill>
+        <a:latin typeface="+mn-lt"/>
+        <a:ea typeface="+mn-ea"/>
+        <a:cs typeface="+mn-cs"/>
+      </a:defRPr>
+    </a:lvl3pPr>
+    <a:lvl4pPr marL="1371600" algn="l" defTabSz="914400" rtl="0" eaLnBrk="1" latinLnBrk="0" hangingPunct="1">
+      <a:defRPr sz="1200" kern="1200">
+        <a:solidFill>
+          <a:schemeClr val="tx1"/>
+        </a:solidFill>
+        <a:latin typeface="+mn-lt"/>
+        <a:ea typeface="+mn-ea"/>
+        <a:cs typeface="+mn-cs"/>
+      </a:defRPr>
+    </a:lvl4pPr>
+    <a:lvl5pPr marL="1828800" algn="l" defTabSz="914400" rtl="0" eaLnBrk="1" latinLnBrk="0" hangingPunct="1">
+      <a:defRPr sz="1200" kern="1200">
+        <a:solidFill>
+          <a:schemeClr val="tx1"/>
+        </a:solidFill>
+        <a:latin typeface="+mn-lt"/>
+        <a:ea typeface="+mn-ea"/>
+        <a:cs typeface="+mn-cs"/>
+      </a:defRPr>
+    </a:lvl5pPr>
+    <a:lvl6pPr marL="2286000" algn="l" defTabSz="914400" rtl="0" eaLnBrk="1" latinLnBrk="0" hangingPunct="1">
+      <a:defRPr sz="1200" kern="1200">
+        <a:solidFill>
+          <a:schemeClr val="tx1"/>
+        </a:solidFill>
+        <a:latin typeface="+mn-lt"/>
+        <a:ea typeface="+mn-ea"/>
+        <a:cs typeface="+mn-cs"/>
+      </a:defRPr>
+    </a:lvl6pPr>
+    <a:lvl7pPr marL="2743200" algn="l" defTabSz="914400" rtl="0" eaLnBrk="1" latinLnBrk="0" hangingPunct="1">
+      <a:defRPr sz="1200" kern="1200">
+        <a:solidFill>
+          <a:schemeClr val="tx1"/>
+        </a:solidFill>
+        <a:latin typeface="+mn-lt"/>
+        <a:ea typeface="+mn-ea"/>
+        <a:cs typeface="+mn-cs"/>
+      </a:defRPr>
+    </a:lvl7pPr>
+    <a:lvl8pPr marL="3200400" algn="l" defTabSz="914400" rtl="0" eaLnBrk="1" latinLnBrk="0" hangingPunct="1">
+      <a:defRPr sz="1200" kern="1200">
+        <a:solidFill>
+          <a:schemeClr val="tx1"/>
+        </a:solidFill>
+        <a:latin typeface="+mn-lt"/>
+        <a:ea typeface="+mn-ea"/>
+        <a:cs typeface="+mn-cs"/>
+      </a:defRPr>
+    </a:lvl8pPr>
+    <a:lvl9pPr marL="3657600" algn="l" defTabSz="914400" rtl="0" eaLnBrk="1" latinLnBrk="0" hangingPunct="1">
+      <a:defRPr sz="1200" kern="1200">
+        <a:solidFill>
+          <a:schemeClr val="tx1"/>
+        </a:solidFill>
+        <a:latin typeface="+mn-lt"/>
+        <a:ea typeface="+mn-ea"/>
+        <a:cs typeface="+mn-cs"/>
+      </a:defRPr>
+    </a:lvl9pPr>
+  </p:notesStyle>
 </p:notesMaster>
 </file>
 
 <file path=ppt/notesSlides/notesSlide1.xml><?xml version="1.0" encoding="utf-8"?>
-<p:notes xmlns:a="http://schemas.openxmlformats.org/drawingml/2006/main" xmlns:p="http://schemas.openxmlformats.org/presentationml/2006/main" xmlns:r="http://schemas.openxmlformats.org/officeDocument/2006/relationships" xmlns:p14="http://schemas.microsoft.com/office/powerpoint/2010/main" xmlns:p15="http://schemas.microsoft.com/office/powerpoint/2012/main" xmlns:mc="http://schemas.openxmlformats.org/markup-compatibility/2006">
+<p:notes xmlns:a="http://schemas.openxmlformats.org/drawingml/2006/main" xmlns:r="http://schemas.openxmlformats.org/officeDocument/2006/relationships" xmlns:p="http://schemas.openxmlformats.org/presentationml/2006/main">
   <p:cSld>
     <p:spTree>
       <p:nvGrpSpPr>
@@ -431,7 +586,7 @@
         <p:nvSpPr>
           <p:cNvPr id="240" name="PlaceHolder 1"/>
           <p:cNvSpPr>
-            <a:spLocks noGrp="1"/>
+            <a:spLocks noGrp="1" noRot="1" noChangeAspect="1"/>
           </p:cNvSpPr>
           <p:nvPr>
             <p:ph type="sldImg"/>
@@ -477,6 +632,7 @@
           <a:bodyPr lIns="90000" tIns="-45000" rIns="90000" bIns="-45000" anchor="t">
             <a:noAutofit/>
           </a:bodyPr>
+          <a:lstStyle/>
           <a:p>
             <a:pPr indent="0" algn="l">
               <a:buNone/>
@@ -553,7 +709,7 @@
                 <a:latin typeface="+mn-lt"/>
                 <a:ea typeface="+mn-ea"/>
               </a:rPr>
-              <a:t>&lt;number&gt;</a:t>
+              <a:t>1</a:t>
             </a:fld>
             <a:endParaRPr lang="en-GB" sz="1800" b="0" u="none" strike="noStrike">
               <a:solidFill>
@@ -568,11 +724,14 @@
       </p:sp>
     </p:spTree>
   </p:cSld>
+  <p:clrMapOvr>
+    <a:masterClrMapping/>
+  </p:clrMapOvr>
 </p:notes>
 </file>
 
 <file path=ppt/notesSlides/notesSlide10.xml><?xml version="1.0" encoding="utf-8"?>
-<p:notes xmlns:a="http://schemas.openxmlformats.org/drawingml/2006/main" xmlns:p="http://schemas.openxmlformats.org/presentationml/2006/main" xmlns:r="http://schemas.openxmlformats.org/officeDocument/2006/relationships" xmlns:p14="http://schemas.microsoft.com/office/powerpoint/2010/main" xmlns:p15="http://schemas.microsoft.com/office/powerpoint/2012/main" xmlns:mc="http://schemas.openxmlformats.org/markup-compatibility/2006">
+<p:notes xmlns:a="http://schemas.openxmlformats.org/drawingml/2006/main" xmlns:r="http://schemas.openxmlformats.org/officeDocument/2006/relationships" xmlns:p="http://schemas.openxmlformats.org/presentationml/2006/main">
   <p:cSld>
     <p:spTree>
       <p:nvGrpSpPr>
@@ -592,7 +751,7 @@
         <p:nvSpPr>
           <p:cNvPr id="267" name="PlaceHolder 1"/>
           <p:cNvSpPr>
-            <a:spLocks noGrp="1"/>
+            <a:spLocks noGrp="1" noRot="1" noChangeAspect="1"/>
           </p:cNvSpPr>
           <p:nvPr>
             <p:ph type="sldImg"/>
@@ -638,6 +797,7 @@
           <a:bodyPr lIns="90000" tIns="-45000" rIns="90000" bIns="-45000" anchor="t">
             <a:noAutofit/>
           </a:bodyPr>
+          <a:lstStyle/>
           <a:p>
             <a:pPr indent="0" algn="l">
               <a:buNone/>
@@ -680,6 +840,7 @@
           <a:bodyPr lIns="90000" tIns="-45000" rIns="90000" bIns="-45000" anchor="t">
             <a:noAutofit/>
           </a:bodyPr>
+          <a:lstStyle/>
           <a:p>
             <a:pPr indent="0" algn="l">
               <a:buNone/>
@@ -697,11 +858,14 @@
       </p:sp>
     </p:spTree>
   </p:cSld>
+  <p:clrMapOvr>
+    <a:masterClrMapping/>
+  </p:clrMapOvr>
 </p:notes>
 </file>
 
 <file path=ppt/notesSlides/notesSlide11.xml><?xml version="1.0" encoding="utf-8"?>
-<p:notes xmlns:a="http://schemas.openxmlformats.org/drawingml/2006/main" xmlns:p="http://schemas.openxmlformats.org/presentationml/2006/main" xmlns:r="http://schemas.openxmlformats.org/officeDocument/2006/relationships" xmlns:p14="http://schemas.microsoft.com/office/powerpoint/2010/main" xmlns:p15="http://schemas.microsoft.com/office/powerpoint/2012/main" xmlns:mc="http://schemas.openxmlformats.org/markup-compatibility/2006">
+<p:notes xmlns:a="http://schemas.openxmlformats.org/drawingml/2006/main" xmlns:r="http://schemas.openxmlformats.org/officeDocument/2006/relationships" xmlns:p="http://schemas.openxmlformats.org/presentationml/2006/main">
   <p:cSld>
     <p:spTree>
       <p:nvGrpSpPr>
@@ -721,7 +885,7 @@
         <p:nvSpPr>
           <p:cNvPr id="270" name="PlaceHolder 1"/>
           <p:cNvSpPr>
-            <a:spLocks noGrp="1"/>
+            <a:spLocks noGrp="1" noRot="1" noChangeAspect="1"/>
           </p:cNvSpPr>
           <p:nvPr>
             <p:ph type="sldImg"/>
@@ -767,6 +931,7 @@
           <a:bodyPr lIns="90000" tIns="-45000" rIns="90000" bIns="-45000" anchor="t">
             <a:noAutofit/>
           </a:bodyPr>
+          <a:lstStyle/>
           <a:p>
             <a:pPr indent="0" algn="l">
               <a:buNone/>
@@ -809,6 +974,7 @@
           <a:bodyPr lIns="90000" tIns="-45000" rIns="90000" bIns="-45000" anchor="t">
             <a:noAutofit/>
           </a:bodyPr>
+          <a:lstStyle/>
           <a:p>
             <a:pPr indent="0" algn="l">
               <a:buNone/>
@@ -826,11 +992,14 @@
       </p:sp>
     </p:spTree>
   </p:cSld>
+  <p:clrMapOvr>
+    <a:masterClrMapping/>
+  </p:clrMapOvr>
 </p:notes>
 </file>
 
 <file path=ppt/notesSlides/notesSlide12.xml><?xml version="1.0" encoding="utf-8"?>
-<p:notes xmlns:a="http://schemas.openxmlformats.org/drawingml/2006/main" xmlns:p="http://schemas.openxmlformats.org/presentationml/2006/main" xmlns:r="http://schemas.openxmlformats.org/officeDocument/2006/relationships" xmlns:p14="http://schemas.microsoft.com/office/powerpoint/2010/main" xmlns:p15="http://schemas.microsoft.com/office/powerpoint/2012/main" xmlns:mc="http://schemas.openxmlformats.org/markup-compatibility/2006">
+<p:notes xmlns:a="http://schemas.openxmlformats.org/drawingml/2006/main" xmlns:r="http://schemas.openxmlformats.org/officeDocument/2006/relationships" xmlns:p="http://schemas.openxmlformats.org/presentationml/2006/main">
   <p:cSld>
     <p:spTree>
       <p:nvGrpSpPr>
@@ -850,7 +1019,7 @@
         <p:nvSpPr>
           <p:cNvPr id="273" name="PlaceHolder 1"/>
           <p:cNvSpPr>
-            <a:spLocks noGrp="1"/>
+            <a:spLocks noGrp="1" noRot="1" noChangeAspect="1"/>
           </p:cNvSpPr>
           <p:nvPr>
             <p:ph type="sldImg"/>
@@ -896,6 +1065,7 @@
           <a:bodyPr lIns="90000" tIns="-45000" rIns="90000" bIns="-45000" anchor="t">
             <a:noAutofit/>
           </a:bodyPr>
+          <a:lstStyle/>
           <a:p>
             <a:pPr indent="0" algn="l">
               <a:buNone/>
@@ -938,6 +1108,7 @@
           <a:bodyPr lIns="90000" tIns="-45000" rIns="90000" bIns="-45000" anchor="t">
             <a:noAutofit/>
           </a:bodyPr>
+          <a:lstStyle/>
           <a:p>
             <a:pPr indent="0" algn="l">
               <a:buNone/>
@@ -955,11 +1126,14 @@
       </p:sp>
     </p:spTree>
   </p:cSld>
+  <p:clrMapOvr>
+    <a:masterClrMapping/>
+  </p:clrMapOvr>
 </p:notes>
 </file>
 
 <file path=ppt/notesSlides/notesSlide13.xml><?xml version="1.0" encoding="utf-8"?>
-<p:notes xmlns:a="http://schemas.openxmlformats.org/drawingml/2006/main" xmlns:p="http://schemas.openxmlformats.org/presentationml/2006/main" xmlns:r="http://schemas.openxmlformats.org/officeDocument/2006/relationships" xmlns:p14="http://schemas.microsoft.com/office/powerpoint/2010/main" xmlns:p15="http://schemas.microsoft.com/office/powerpoint/2012/main" xmlns:mc="http://schemas.openxmlformats.org/markup-compatibility/2006">
+<p:notes xmlns:a="http://schemas.openxmlformats.org/drawingml/2006/main" xmlns:r="http://schemas.openxmlformats.org/officeDocument/2006/relationships" xmlns:p="http://schemas.openxmlformats.org/presentationml/2006/main">
   <p:cSld>
     <p:spTree>
       <p:nvGrpSpPr>
@@ -979,7 +1153,7 @@
         <p:nvSpPr>
           <p:cNvPr id="276" name="PlaceHolder 1"/>
           <p:cNvSpPr>
-            <a:spLocks noGrp="1"/>
+            <a:spLocks noGrp="1" noRot="1" noChangeAspect="1"/>
           </p:cNvSpPr>
           <p:nvPr>
             <p:ph type="sldImg"/>
@@ -1025,6 +1199,7 @@
           <a:bodyPr lIns="90000" tIns="-45000" rIns="90000" bIns="-45000" anchor="t">
             <a:noAutofit/>
           </a:bodyPr>
+          <a:lstStyle/>
           <a:p>
             <a:pPr indent="0" algn="l">
               <a:buNone/>
@@ -1067,6 +1242,7 @@
           <a:bodyPr lIns="90000" tIns="-45000" rIns="90000" bIns="-45000" anchor="t">
             <a:noAutofit/>
           </a:bodyPr>
+          <a:lstStyle/>
           <a:p>
             <a:pPr indent="0" algn="l">
               <a:buNone/>
@@ -1084,11 +1260,14 @@
       </p:sp>
     </p:spTree>
   </p:cSld>
+  <p:clrMapOvr>
+    <a:masterClrMapping/>
+  </p:clrMapOvr>
 </p:notes>
 </file>
 
 <file path=ppt/notesSlides/notesSlide14.xml><?xml version="1.0" encoding="utf-8"?>
-<p:notes xmlns:a="http://schemas.openxmlformats.org/drawingml/2006/main" xmlns:p="http://schemas.openxmlformats.org/presentationml/2006/main" xmlns:r="http://schemas.openxmlformats.org/officeDocument/2006/relationships" xmlns:p14="http://schemas.microsoft.com/office/powerpoint/2010/main" xmlns:p15="http://schemas.microsoft.com/office/powerpoint/2012/main" xmlns:mc="http://schemas.openxmlformats.org/markup-compatibility/2006">
+<p:notes xmlns:a="http://schemas.openxmlformats.org/drawingml/2006/main" xmlns:r="http://schemas.openxmlformats.org/officeDocument/2006/relationships" xmlns:p="http://schemas.openxmlformats.org/presentationml/2006/main">
   <p:cSld>
     <p:spTree>
       <p:nvGrpSpPr>
@@ -1108,7 +1287,7 @@
         <p:nvSpPr>
           <p:cNvPr id="279" name="PlaceHolder 1"/>
           <p:cNvSpPr>
-            <a:spLocks noGrp="1"/>
+            <a:spLocks noGrp="1" noRot="1" noChangeAspect="1"/>
           </p:cNvSpPr>
           <p:nvPr>
             <p:ph type="sldImg"/>
@@ -1154,6 +1333,7 @@
           <a:bodyPr lIns="90000" tIns="-45000" rIns="90000" bIns="-45000" anchor="t">
             <a:noAutofit/>
           </a:bodyPr>
+          <a:lstStyle/>
           <a:p>
             <a:pPr indent="0" algn="l">
               <a:buNone/>
@@ -1196,6 +1376,7 @@
           <a:bodyPr lIns="90000" tIns="-45000" rIns="90000" bIns="-45000" anchor="t">
             <a:noAutofit/>
           </a:bodyPr>
+          <a:lstStyle/>
           <a:p>
             <a:pPr indent="0" algn="l">
               <a:buNone/>
@@ -1213,11 +1394,14 @@
       </p:sp>
     </p:spTree>
   </p:cSld>
+  <p:clrMapOvr>
+    <a:masterClrMapping/>
+  </p:clrMapOvr>
 </p:notes>
 </file>
 
 <file path=ppt/notesSlides/notesSlide2.xml><?xml version="1.0" encoding="utf-8"?>
-<p:notes xmlns:a="http://schemas.openxmlformats.org/drawingml/2006/main" xmlns:p="http://schemas.openxmlformats.org/presentationml/2006/main" xmlns:r="http://schemas.openxmlformats.org/officeDocument/2006/relationships" xmlns:p14="http://schemas.microsoft.com/office/powerpoint/2010/main" xmlns:p15="http://schemas.microsoft.com/office/powerpoint/2012/main" xmlns:mc="http://schemas.openxmlformats.org/markup-compatibility/2006">
+<p:notes xmlns:a="http://schemas.openxmlformats.org/drawingml/2006/main" xmlns:r="http://schemas.openxmlformats.org/officeDocument/2006/relationships" xmlns:p="http://schemas.openxmlformats.org/presentationml/2006/main">
   <p:cSld>
     <p:spTree>
       <p:nvGrpSpPr>
@@ -1237,7 +1421,7 @@
         <p:nvSpPr>
           <p:cNvPr id="243" name="PlaceHolder 1"/>
           <p:cNvSpPr>
-            <a:spLocks noGrp="1"/>
+            <a:spLocks noGrp="1" noRot="1" noChangeAspect="1"/>
           </p:cNvSpPr>
           <p:nvPr>
             <p:ph type="sldImg"/>
@@ -1283,6 +1467,7 @@
           <a:bodyPr lIns="90000" tIns="-45000" rIns="90000" bIns="-45000" anchor="t">
             <a:noAutofit/>
           </a:bodyPr>
+          <a:lstStyle/>
           <a:p>
             <a:pPr indent="0" algn="l">
               <a:buNone/>
@@ -1359,7 +1544,7 @@
                 <a:latin typeface="+mn-lt"/>
                 <a:ea typeface="+mn-ea"/>
               </a:rPr>
-              <a:t>&lt;number&gt;</a:t>
+              <a:t>2</a:t>
             </a:fld>
             <a:endParaRPr lang="en-GB" sz="1800" b="0" u="none" strike="noStrike">
               <a:solidFill>
@@ -1374,11 +1559,14 @@
       </p:sp>
     </p:spTree>
   </p:cSld>
+  <p:clrMapOvr>
+    <a:masterClrMapping/>
+  </p:clrMapOvr>
 </p:notes>
 </file>
 
 <file path=ppt/notesSlides/notesSlide3.xml><?xml version="1.0" encoding="utf-8"?>
-<p:notes xmlns:a="http://schemas.openxmlformats.org/drawingml/2006/main" xmlns:p="http://schemas.openxmlformats.org/presentationml/2006/main" xmlns:r="http://schemas.openxmlformats.org/officeDocument/2006/relationships" xmlns:p14="http://schemas.microsoft.com/office/powerpoint/2010/main" xmlns:p15="http://schemas.microsoft.com/office/powerpoint/2012/main" xmlns:mc="http://schemas.openxmlformats.org/markup-compatibility/2006">
+<p:notes xmlns:a="http://schemas.openxmlformats.org/drawingml/2006/main" xmlns:r="http://schemas.openxmlformats.org/officeDocument/2006/relationships" xmlns:p="http://schemas.openxmlformats.org/presentationml/2006/main">
   <p:cSld>
     <p:spTree>
       <p:nvGrpSpPr>
@@ -1398,7 +1586,7 @@
         <p:nvSpPr>
           <p:cNvPr id="246" name="PlaceHolder 1"/>
           <p:cNvSpPr>
-            <a:spLocks noGrp="1"/>
+            <a:spLocks noGrp="1" noRot="1" noChangeAspect="1"/>
           </p:cNvSpPr>
           <p:nvPr>
             <p:ph type="sldImg"/>
@@ -1444,6 +1632,7 @@
           <a:bodyPr lIns="90000" tIns="-45000" rIns="90000" bIns="-45000" anchor="t">
             <a:noAutofit/>
           </a:bodyPr>
+          <a:lstStyle/>
           <a:p>
             <a:pPr indent="0" algn="l">
               <a:buNone/>
@@ -1486,6 +1675,7 @@
           <a:bodyPr lIns="90000" tIns="-45000" rIns="90000" bIns="-45000" anchor="t">
             <a:noAutofit/>
           </a:bodyPr>
+          <a:lstStyle/>
           <a:p>
             <a:pPr indent="0" algn="l">
               <a:buNone/>
@@ -1503,11 +1693,14 @@
       </p:sp>
     </p:spTree>
   </p:cSld>
+  <p:clrMapOvr>
+    <a:masterClrMapping/>
+  </p:clrMapOvr>
 </p:notes>
 </file>
 
 <file path=ppt/notesSlides/notesSlide4.xml><?xml version="1.0" encoding="utf-8"?>
-<p:notes xmlns:a="http://schemas.openxmlformats.org/drawingml/2006/main" xmlns:p="http://schemas.openxmlformats.org/presentationml/2006/main" xmlns:r="http://schemas.openxmlformats.org/officeDocument/2006/relationships" xmlns:p14="http://schemas.microsoft.com/office/powerpoint/2010/main" xmlns:p15="http://schemas.microsoft.com/office/powerpoint/2012/main" xmlns:mc="http://schemas.openxmlformats.org/markup-compatibility/2006">
+<p:notes xmlns:a="http://schemas.openxmlformats.org/drawingml/2006/main" xmlns:r="http://schemas.openxmlformats.org/officeDocument/2006/relationships" xmlns:p="http://schemas.openxmlformats.org/presentationml/2006/main">
   <p:cSld>
     <p:spTree>
       <p:nvGrpSpPr>
@@ -1527,7 +1720,7 @@
         <p:nvSpPr>
           <p:cNvPr id="249" name="PlaceHolder 1"/>
           <p:cNvSpPr>
-            <a:spLocks noGrp="1"/>
+            <a:spLocks noGrp="1" noRot="1" noChangeAspect="1"/>
           </p:cNvSpPr>
           <p:nvPr>
             <p:ph type="sldImg"/>
@@ -1573,6 +1766,7 @@
           <a:bodyPr lIns="90000" tIns="-45000" rIns="90000" bIns="-45000" anchor="t">
             <a:noAutofit/>
           </a:bodyPr>
+          <a:lstStyle/>
           <a:p>
             <a:pPr indent="0" algn="l">
               <a:buNone/>
@@ -1649,7 +1843,7 @@
                 <a:latin typeface="+mn-lt"/>
                 <a:ea typeface="+mn-ea"/>
               </a:rPr>
-              <a:t>&lt;number&gt;</a:t>
+              <a:t>4</a:t>
             </a:fld>
             <a:endParaRPr lang="en-GB" sz="1800" b="0" u="none" strike="noStrike">
               <a:solidFill>
@@ -1664,11 +1858,14 @@
       </p:sp>
     </p:spTree>
   </p:cSld>
+  <p:clrMapOvr>
+    <a:masterClrMapping/>
+  </p:clrMapOvr>
 </p:notes>
 </file>
 
 <file path=ppt/notesSlides/notesSlide5.xml><?xml version="1.0" encoding="utf-8"?>
-<p:notes xmlns:a="http://schemas.openxmlformats.org/drawingml/2006/main" xmlns:p="http://schemas.openxmlformats.org/presentationml/2006/main" xmlns:r="http://schemas.openxmlformats.org/officeDocument/2006/relationships" xmlns:p14="http://schemas.microsoft.com/office/powerpoint/2010/main" xmlns:p15="http://schemas.microsoft.com/office/powerpoint/2012/main" xmlns:mc="http://schemas.openxmlformats.org/markup-compatibility/2006">
+<p:notes xmlns:a="http://schemas.openxmlformats.org/drawingml/2006/main" xmlns:r="http://schemas.openxmlformats.org/officeDocument/2006/relationships" xmlns:p="http://schemas.openxmlformats.org/presentationml/2006/main">
   <p:cSld>
     <p:spTree>
       <p:nvGrpSpPr>
@@ -1688,7 +1885,7 @@
         <p:nvSpPr>
           <p:cNvPr id="252" name="PlaceHolder 1"/>
           <p:cNvSpPr>
-            <a:spLocks noGrp="1"/>
+            <a:spLocks noGrp="1" noRot="1" noChangeAspect="1"/>
           </p:cNvSpPr>
           <p:nvPr>
             <p:ph type="sldImg"/>
@@ -1734,6 +1931,7 @@
           <a:bodyPr lIns="90000" tIns="-45000" rIns="90000" bIns="-45000" anchor="t">
             <a:noAutofit/>
           </a:bodyPr>
+          <a:lstStyle/>
           <a:p>
             <a:pPr indent="0" algn="l">
               <a:buNone/>
@@ -1776,6 +1974,7 @@
           <a:bodyPr lIns="90000" tIns="-45000" rIns="90000" bIns="-45000" anchor="t">
             <a:noAutofit/>
           </a:bodyPr>
+          <a:lstStyle/>
           <a:p>
             <a:pPr indent="0" algn="l">
               <a:buNone/>
@@ -1793,11 +1992,14 @@
       </p:sp>
     </p:spTree>
   </p:cSld>
+  <p:clrMapOvr>
+    <a:masterClrMapping/>
+  </p:clrMapOvr>
 </p:notes>
 </file>
 
 <file path=ppt/notesSlides/notesSlide6.xml><?xml version="1.0" encoding="utf-8"?>
-<p:notes xmlns:a="http://schemas.openxmlformats.org/drawingml/2006/main" xmlns:p="http://schemas.openxmlformats.org/presentationml/2006/main" xmlns:r="http://schemas.openxmlformats.org/officeDocument/2006/relationships" xmlns:p14="http://schemas.microsoft.com/office/powerpoint/2010/main" xmlns:p15="http://schemas.microsoft.com/office/powerpoint/2012/main" xmlns:mc="http://schemas.openxmlformats.org/markup-compatibility/2006">
+<p:notes xmlns:a="http://schemas.openxmlformats.org/drawingml/2006/main" xmlns:r="http://schemas.openxmlformats.org/officeDocument/2006/relationships" xmlns:p="http://schemas.openxmlformats.org/presentationml/2006/main">
   <p:cSld>
     <p:spTree>
       <p:nvGrpSpPr>
@@ -1817,7 +2019,7 @@
         <p:nvSpPr>
           <p:cNvPr id="255" name="PlaceHolder 1"/>
           <p:cNvSpPr>
-            <a:spLocks noGrp="1"/>
+            <a:spLocks noGrp="1" noRot="1" noChangeAspect="1"/>
           </p:cNvSpPr>
           <p:nvPr>
             <p:ph type="sldImg"/>
@@ -1863,6 +2065,7 @@
           <a:bodyPr lIns="90000" tIns="-45000" rIns="90000" bIns="-45000" anchor="t">
             <a:noAutofit/>
           </a:bodyPr>
+          <a:lstStyle/>
           <a:p>
             <a:pPr indent="0" algn="l">
               <a:buNone/>
@@ -1905,6 +2108,7 @@
           <a:bodyPr lIns="90000" tIns="-45000" rIns="90000" bIns="-45000" anchor="t">
             <a:noAutofit/>
           </a:bodyPr>
+          <a:lstStyle/>
           <a:p>
             <a:pPr indent="0" algn="l">
               <a:buNone/>
@@ -1922,11 +2126,14 @@
       </p:sp>
     </p:spTree>
   </p:cSld>
+  <p:clrMapOvr>
+    <a:masterClrMapping/>
+  </p:clrMapOvr>
 </p:notes>
 </file>
 
 <file path=ppt/notesSlides/notesSlide7.xml><?xml version="1.0" encoding="utf-8"?>
-<p:notes xmlns:a="http://schemas.openxmlformats.org/drawingml/2006/main" xmlns:p="http://schemas.openxmlformats.org/presentationml/2006/main" xmlns:r="http://schemas.openxmlformats.org/officeDocument/2006/relationships" xmlns:p14="http://schemas.microsoft.com/office/powerpoint/2010/main" xmlns:p15="http://schemas.microsoft.com/office/powerpoint/2012/main" xmlns:mc="http://schemas.openxmlformats.org/markup-compatibility/2006">
+<p:notes xmlns:a="http://schemas.openxmlformats.org/drawingml/2006/main" xmlns:r="http://schemas.openxmlformats.org/officeDocument/2006/relationships" xmlns:p="http://schemas.openxmlformats.org/presentationml/2006/main">
   <p:cSld>
     <p:spTree>
       <p:nvGrpSpPr>
@@ -1946,7 +2153,7 @@
         <p:nvSpPr>
           <p:cNvPr id="258" name="PlaceHolder 1"/>
           <p:cNvSpPr>
-            <a:spLocks noGrp="1"/>
+            <a:spLocks noGrp="1" noRot="1" noChangeAspect="1"/>
           </p:cNvSpPr>
           <p:nvPr>
             <p:ph type="sldImg"/>
@@ -1992,6 +2199,7 @@
           <a:bodyPr lIns="90000" tIns="-45000" rIns="90000" bIns="-45000" anchor="t">
             <a:noAutofit/>
           </a:bodyPr>
+          <a:lstStyle/>
           <a:p>
             <a:pPr indent="0" algn="l">
               <a:buNone/>
@@ -2034,6 +2242,7 @@
           <a:bodyPr lIns="90000" tIns="-45000" rIns="90000" bIns="-45000" anchor="t">
             <a:noAutofit/>
           </a:bodyPr>
+          <a:lstStyle/>
           <a:p>
             <a:pPr indent="0" algn="l">
               <a:buNone/>
@@ -2051,11 +2260,14 @@
       </p:sp>
     </p:spTree>
   </p:cSld>
+  <p:clrMapOvr>
+    <a:masterClrMapping/>
+  </p:clrMapOvr>
 </p:notes>
 </file>
 
 <file path=ppt/notesSlides/notesSlide8.xml><?xml version="1.0" encoding="utf-8"?>
-<p:notes xmlns:a="http://schemas.openxmlformats.org/drawingml/2006/main" xmlns:p="http://schemas.openxmlformats.org/presentationml/2006/main" xmlns:r="http://schemas.openxmlformats.org/officeDocument/2006/relationships" xmlns:p14="http://schemas.microsoft.com/office/powerpoint/2010/main" xmlns:p15="http://schemas.microsoft.com/office/powerpoint/2012/main" xmlns:mc="http://schemas.openxmlformats.org/markup-compatibility/2006">
+<p:notes xmlns:a="http://schemas.openxmlformats.org/drawingml/2006/main" xmlns:r="http://schemas.openxmlformats.org/officeDocument/2006/relationships" xmlns:p="http://schemas.openxmlformats.org/presentationml/2006/main">
   <p:cSld>
     <p:spTree>
       <p:nvGrpSpPr>
@@ -2075,7 +2287,7 @@
         <p:nvSpPr>
           <p:cNvPr id="261" name="PlaceHolder 1"/>
           <p:cNvSpPr>
-            <a:spLocks noGrp="1"/>
+            <a:spLocks noGrp="1" noRot="1" noChangeAspect="1"/>
           </p:cNvSpPr>
           <p:nvPr>
             <p:ph type="sldImg"/>
@@ -2121,6 +2333,7 @@
           <a:bodyPr lIns="90000" tIns="-45000" rIns="90000" bIns="-45000" anchor="t">
             <a:noAutofit/>
           </a:bodyPr>
+          <a:lstStyle/>
           <a:p>
             <a:pPr indent="0" algn="l">
               <a:buNone/>
@@ -2163,6 +2376,7 @@
           <a:bodyPr lIns="90000" tIns="-45000" rIns="90000" bIns="-45000" anchor="t">
             <a:noAutofit/>
           </a:bodyPr>
+          <a:lstStyle/>
           <a:p>
             <a:pPr indent="0" algn="l">
               <a:buNone/>
@@ -2180,11 +2394,14 @@
       </p:sp>
     </p:spTree>
   </p:cSld>
+  <p:clrMapOvr>
+    <a:masterClrMapping/>
+  </p:clrMapOvr>
 </p:notes>
 </file>
 
 <file path=ppt/notesSlides/notesSlide9.xml><?xml version="1.0" encoding="utf-8"?>
-<p:notes xmlns:a="http://schemas.openxmlformats.org/drawingml/2006/main" xmlns:p="http://schemas.openxmlformats.org/presentationml/2006/main" xmlns:r="http://schemas.openxmlformats.org/officeDocument/2006/relationships" xmlns:p14="http://schemas.microsoft.com/office/powerpoint/2010/main" xmlns:p15="http://schemas.microsoft.com/office/powerpoint/2012/main" xmlns:mc="http://schemas.openxmlformats.org/markup-compatibility/2006">
+<p:notes xmlns:a="http://schemas.openxmlformats.org/drawingml/2006/main" xmlns:r="http://schemas.openxmlformats.org/officeDocument/2006/relationships" xmlns:p="http://schemas.openxmlformats.org/presentationml/2006/main">
   <p:cSld>
     <p:spTree>
       <p:nvGrpSpPr>
@@ -2204,7 +2421,7 @@
         <p:nvSpPr>
           <p:cNvPr id="264" name="PlaceHolder 1"/>
           <p:cNvSpPr>
-            <a:spLocks noGrp="1"/>
+            <a:spLocks noGrp="1" noRot="1" noChangeAspect="1"/>
           </p:cNvSpPr>
           <p:nvPr>
             <p:ph type="sldImg"/>
@@ -2250,6 +2467,7 @@
           <a:bodyPr lIns="90000" tIns="-45000" rIns="90000" bIns="-45000" anchor="t">
             <a:noAutofit/>
           </a:bodyPr>
+          <a:lstStyle/>
           <a:p>
             <a:pPr indent="0" algn="l">
               <a:buNone/>
@@ -2292,6 +2510,7 @@
           <a:bodyPr lIns="90000" tIns="-45000" rIns="90000" bIns="-45000" anchor="t">
             <a:noAutofit/>
           </a:bodyPr>
+          <a:lstStyle/>
           <a:p>
             <a:pPr indent="0" algn="l">
               <a:buNone/>
@@ -2309,17 +2528,21 @@
       </p:sp>
     </p:spTree>
   </p:cSld>
+  <p:clrMapOvr>
+    <a:masterClrMapping/>
+  </p:clrMapOvr>
 </p:notes>
 </file>
 
 <file path=ppt/slideLayouts/slideLayout1.xml><?xml version="1.0" encoding="utf-8"?>
-<p:sldLayout xmlns:a="http://schemas.openxmlformats.org/drawingml/2006/main" xmlns:p="http://schemas.openxmlformats.org/presentationml/2006/main" xmlns:r="http://schemas.openxmlformats.org/officeDocument/2006/relationships" xmlns:p14="http://schemas.microsoft.com/office/powerpoint/2010/main" xmlns:p15="http://schemas.microsoft.com/office/powerpoint/2012/main" xmlns:mc="http://schemas.openxmlformats.org/markup-compatibility/2006" type="blank" preserve="1">
+<p:sldLayout xmlns:a="http://schemas.openxmlformats.org/drawingml/2006/main" xmlns:r="http://schemas.openxmlformats.org/officeDocument/2006/relationships" xmlns:p="http://schemas.openxmlformats.org/presentationml/2006/main" type="blank" preserve="1">
   <p:cSld name="Rubrik och innehåll">
     <p:bg>
       <p:bgPr>
         <a:solidFill>
           <a:srgbClr val="FFFFFF"/>
         </a:solidFill>
+        <a:effectLst/>
       </p:bgPr>
     </p:bg>
     <p:spTree>
@@ -2452,15 +2675,22 @@
           </a:ln>
         </p:spPr>
         <p:style>
-          <a:lnRef idx="0"/>
-          <a:fillRef idx="0"/>
-          <a:effectRef idx="0"/>
+          <a:lnRef idx="0">
+            <a:scrgbClr r="0" g="0" b="0"/>
+          </a:lnRef>
+          <a:fillRef idx="0">
+            <a:scrgbClr r="0" g="0" b="0"/>
+          </a:fillRef>
+          <a:effectRef idx="0">
+            <a:scrgbClr r="0" g="0" b="0"/>
+          </a:effectRef>
           <a:fontRef idx="minor"/>
         </p:style>
         <p:txBody>
           <a:bodyPr lIns="0" tIns="0" rIns="0" bIns="0" anchor="ctr">
             <a:noAutofit/>
           </a:bodyPr>
+          <a:lstStyle/>
           <a:p>
             <a:pPr defTabSz="914400">
               <a:lnSpc>
@@ -2548,14 +2778,6 @@
               </a:rPr>
               <a:t> </a:t>
             </a:r>
-            <a:endParaRPr lang="en-GB" sz="1400" b="0" u="none" strike="noStrike">
-              <a:solidFill>
-                <a:srgbClr val="000000"/>
-              </a:solidFill>
-              <a:effectLst/>
-              <a:uFillTx/>
-              <a:latin typeface="Times New Roman"/>
-            </a:endParaRPr>
           </a:p>
         </p:txBody>
       </p:sp>
@@ -3010,7 +3232,7 @@
                 <a:latin typeface="Calibri"/>
                 <a:ea typeface="Calibri"/>
               </a:rPr>
-              <a:t>12</a:t>
+              <a:t>‹#›</a:t>
             </a:fld>
             <a:endParaRPr lang="en-GB" sz="900" b="0" u="none" strike="noStrike">
               <a:solidFill>
@@ -3025,17 +3247,21 @@
       </p:sp>
     </p:spTree>
   </p:cSld>
+  <p:clrMapOvr>
+    <a:masterClrMapping/>
+  </p:clrMapOvr>
 </p:sldLayout>
 </file>
 
 <file path=ppt/slideLayouts/slideLayout2.xml><?xml version="1.0" encoding="utf-8"?>
-<p:sldLayout xmlns:a="http://schemas.openxmlformats.org/drawingml/2006/main" xmlns:p="http://schemas.openxmlformats.org/presentationml/2006/main" xmlns:r="http://schemas.openxmlformats.org/officeDocument/2006/relationships" xmlns:p14="http://schemas.microsoft.com/office/powerpoint/2010/main" xmlns:p15="http://schemas.microsoft.com/office/powerpoint/2012/main" xmlns:mc="http://schemas.openxmlformats.org/markup-compatibility/2006" type="blank" preserve="1">
+<p:sldLayout xmlns:a="http://schemas.openxmlformats.org/drawingml/2006/main" xmlns:r="http://schemas.openxmlformats.org/officeDocument/2006/relationships" xmlns:p="http://schemas.openxmlformats.org/presentationml/2006/main" type="blank" preserve="1">
   <p:cSld name="Endast rubrik">
     <p:bg>
       <p:bgPr>
         <a:solidFill>
           <a:srgbClr val="FFFFFF"/>
         </a:solidFill>
+        <a:effectLst/>
       </p:bgPr>
     </p:bg>
     <p:spTree>
@@ -3168,15 +3394,22 @@
           </a:ln>
         </p:spPr>
         <p:style>
-          <a:lnRef idx="0"/>
-          <a:fillRef idx="0"/>
-          <a:effectRef idx="0"/>
+          <a:lnRef idx="0">
+            <a:scrgbClr r="0" g="0" b="0"/>
+          </a:lnRef>
+          <a:fillRef idx="0">
+            <a:scrgbClr r="0" g="0" b="0"/>
+          </a:fillRef>
+          <a:effectRef idx="0">
+            <a:scrgbClr r="0" g="0" b="0"/>
+          </a:effectRef>
           <a:fontRef idx="minor"/>
         </p:style>
         <p:txBody>
           <a:bodyPr lIns="0" tIns="0" rIns="0" bIns="0" anchor="ctr">
             <a:noAutofit/>
           </a:bodyPr>
+          <a:lstStyle/>
           <a:p>
             <a:pPr defTabSz="914400">
               <a:lnSpc>
@@ -3264,14 +3497,6 @@
               </a:rPr>
               <a:t> </a:t>
             </a:r>
-            <a:endParaRPr lang="en-GB" sz="1400" b="0" u="none" strike="noStrike">
-              <a:solidFill>
-                <a:srgbClr val="000000"/>
-              </a:solidFill>
-              <a:effectLst/>
-              <a:uFillTx/>
-              <a:latin typeface="Times New Roman"/>
-            </a:endParaRPr>
           </a:p>
         </p:txBody>
       </p:sp>
@@ -3410,7 +3635,7 @@
                 <a:latin typeface="Calibri"/>
                 <a:ea typeface="Calibri"/>
               </a:rPr>
-              <a:t>12</a:t>
+              <a:t>‹#›</a:t>
             </a:fld>
             <a:endParaRPr lang="en-GB" sz="900" b="0" u="none" strike="noStrike">
               <a:solidFill>
@@ -3632,14 +3857,6 @@
               </a:rPr>
               <a:t>Click to edit the outline text format</a:t>
             </a:r>
-            <a:endParaRPr lang="en-GB" sz="2000" b="0" u="none" strike="noStrike">
-              <a:solidFill>
-                <a:schemeClr val="dk1"/>
-              </a:solidFill>
-              <a:effectLst/>
-              <a:uFillTx/>
-              <a:latin typeface="Calibri"/>
-            </a:endParaRPr>
           </a:p>
           <a:p>
             <a:pPr marL="864000" lvl="1" indent="-324000" algn="l">
@@ -3667,14 +3884,6 @@
               </a:rPr>
               <a:t>Second Outline Level</a:t>
             </a:r>
-            <a:endParaRPr lang="en-GB" sz="1600" b="0" u="none" strike="noStrike">
-              <a:solidFill>
-                <a:schemeClr val="dk1"/>
-              </a:solidFill>
-              <a:effectLst/>
-              <a:uFillTx/>
-              <a:latin typeface="Calibri"/>
-            </a:endParaRPr>
           </a:p>
           <a:p>
             <a:pPr marL="1296000" lvl="2" indent="-288000" algn="l">
@@ -3702,14 +3911,6 @@
               </a:rPr>
               <a:t>Third Outline Level</a:t>
             </a:r>
-            <a:endParaRPr lang="en-GB" sz="1600" b="0" u="none" strike="noStrike">
-              <a:solidFill>
-                <a:schemeClr val="dk1"/>
-              </a:solidFill>
-              <a:effectLst/>
-              <a:uFillTx/>
-              <a:latin typeface="Calibri"/>
-            </a:endParaRPr>
           </a:p>
           <a:p>
             <a:pPr marL="1728000" lvl="3" indent="-216000" algn="l">
@@ -3737,14 +3938,6 @@
               </a:rPr>
               <a:t>Fourth Outline Level</a:t>
             </a:r>
-            <a:endParaRPr lang="en-GB" sz="1600" b="0" u="none" strike="noStrike">
-              <a:solidFill>
-                <a:schemeClr val="dk1"/>
-              </a:solidFill>
-              <a:effectLst/>
-              <a:uFillTx/>
-              <a:latin typeface="Calibri"/>
-            </a:endParaRPr>
           </a:p>
           <a:p>
             <a:pPr marL="2160000" lvl="4" indent="-216000" algn="l">
@@ -3772,14 +3965,6 @@
               </a:rPr>
               <a:t>Fifth Outline Level</a:t>
             </a:r>
-            <a:endParaRPr lang="en-GB" sz="2000" b="0" u="none" strike="noStrike">
-              <a:solidFill>
-                <a:schemeClr val="dk1"/>
-              </a:solidFill>
-              <a:effectLst/>
-              <a:uFillTx/>
-              <a:latin typeface="Calibri"/>
-            </a:endParaRPr>
           </a:p>
           <a:p>
             <a:pPr marL="2592000" lvl="5" indent="-216000" algn="l">
@@ -3807,14 +3992,6 @@
               </a:rPr>
               <a:t>Sixth Outline Level</a:t>
             </a:r>
-            <a:endParaRPr lang="en-GB" sz="2000" b="0" u="none" strike="noStrike">
-              <a:solidFill>
-                <a:schemeClr val="dk1"/>
-              </a:solidFill>
-              <a:effectLst/>
-              <a:uFillTx/>
-              <a:latin typeface="Calibri"/>
-            </a:endParaRPr>
           </a:p>
           <a:p>
             <a:pPr marL="3024000" lvl="6" indent="-216000" algn="l">
@@ -3842,30 +4019,26 @@
               </a:rPr>
               <a:t>Seventh Outline Level</a:t>
             </a:r>
-            <a:endParaRPr lang="en-GB" sz="2000" b="0" u="none" strike="noStrike">
-              <a:solidFill>
-                <a:schemeClr val="dk1"/>
-              </a:solidFill>
-              <a:effectLst/>
-              <a:uFillTx/>
-              <a:latin typeface="Calibri"/>
-            </a:endParaRPr>
           </a:p>
         </p:txBody>
       </p:sp>
     </p:spTree>
   </p:cSld>
+  <p:clrMapOvr>
+    <a:masterClrMapping/>
+  </p:clrMapOvr>
 </p:sldLayout>
 </file>
 
 <file path=ppt/slideLayouts/slideLayout3.xml><?xml version="1.0" encoding="utf-8"?>
-<p:sldLayout xmlns:a="http://schemas.openxmlformats.org/drawingml/2006/main" xmlns:p="http://schemas.openxmlformats.org/presentationml/2006/main" xmlns:r="http://schemas.openxmlformats.org/officeDocument/2006/relationships" xmlns:p14="http://schemas.microsoft.com/office/powerpoint/2010/main" xmlns:p15="http://schemas.microsoft.com/office/powerpoint/2012/main" xmlns:mc="http://schemas.openxmlformats.org/markup-compatibility/2006" type="blank" preserve="1">
+<p:sldLayout xmlns:a="http://schemas.openxmlformats.org/drawingml/2006/main" xmlns:r="http://schemas.openxmlformats.org/officeDocument/2006/relationships" xmlns:p="http://schemas.openxmlformats.org/presentationml/2006/main" type="blank" preserve="1">
   <p:cSld name="Två delar">
     <p:bg>
       <p:bgPr>
         <a:solidFill>
           <a:srgbClr val="FFFFFF"/>
         </a:solidFill>
+        <a:effectLst/>
       </p:bgPr>
     </p:bg>
     <p:spTree>
@@ -3998,15 +4171,22 @@
           </a:ln>
         </p:spPr>
         <p:style>
-          <a:lnRef idx="0"/>
-          <a:fillRef idx="0"/>
-          <a:effectRef idx="0"/>
+          <a:lnRef idx="0">
+            <a:scrgbClr r="0" g="0" b="0"/>
+          </a:lnRef>
+          <a:fillRef idx="0">
+            <a:scrgbClr r="0" g="0" b="0"/>
+          </a:fillRef>
+          <a:effectRef idx="0">
+            <a:scrgbClr r="0" g="0" b="0"/>
+          </a:effectRef>
           <a:fontRef idx="minor"/>
         </p:style>
         <p:txBody>
           <a:bodyPr lIns="0" tIns="0" rIns="0" bIns="0" anchor="ctr">
             <a:noAutofit/>
           </a:bodyPr>
+          <a:lstStyle/>
           <a:p>
             <a:pPr defTabSz="914400">
               <a:lnSpc>
@@ -4726,14 +4906,6 @@
               </a:rPr>
               <a:t>&lt;footer&gt;</a:t>
             </a:r>
-            <a:endParaRPr lang="en-GB" sz="1400" b="0" u="none" strike="noStrike">
-              <a:solidFill>
-                <a:srgbClr val="000000"/>
-              </a:solidFill>
-              <a:effectLst/>
-              <a:uFillTx/>
-              <a:latin typeface="Times New Roman"/>
-            </a:endParaRPr>
           </a:p>
         </p:txBody>
       </p:sp>
@@ -4798,463 +4970,7 @@
                 <a:latin typeface="Cambria"/>
                 <a:ea typeface="Cambria"/>
               </a:rPr>
-              <a:t>K</a:t>
-            </a:r>
-            <a:r>
-              <a:rPr lang="sv-SE" sz="2600" b="1" u="none" strike="noStrike">
-                <a:solidFill>
-                  <a:srgbClr val="1E3A5F"/>
-                </a:solidFill>
-                <a:effectLst/>
-                <a:uFillTx/>
-                <a:latin typeface="Cambria"/>
-                <a:ea typeface="Cambria"/>
-              </a:rPr>
-              <a:t>l</a:t>
-            </a:r>
-            <a:r>
-              <a:rPr lang="sv-SE" sz="2600" b="1" u="none" strike="noStrike">
-                <a:solidFill>
-                  <a:srgbClr val="1E3A5F"/>
-                </a:solidFill>
-                <a:effectLst/>
-                <a:uFillTx/>
-                <a:latin typeface="Cambria"/>
-                <a:ea typeface="Cambria"/>
-              </a:rPr>
-              <a:t>i</a:t>
-            </a:r>
-            <a:r>
-              <a:rPr lang="sv-SE" sz="2600" b="1" u="none" strike="noStrike">
-                <a:solidFill>
-                  <a:srgbClr val="1E3A5F"/>
-                </a:solidFill>
-                <a:effectLst/>
-                <a:uFillTx/>
-                <a:latin typeface="Cambria"/>
-                <a:ea typeface="Cambria"/>
-              </a:rPr>
-              <a:t>c</a:t>
-            </a:r>
-            <a:r>
-              <a:rPr lang="sv-SE" sz="2600" b="1" u="none" strike="noStrike">
-                <a:solidFill>
-                  <a:srgbClr val="1E3A5F"/>
-                </a:solidFill>
-                <a:effectLst/>
-                <a:uFillTx/>
-                <a:latin typeface="Cambria"/>
-                <a:ea typeface="Cambria"/>
-              </a:rPr>
-              <a:t>k</a:t>
-            </a:r>
-            <a:r>
-              <a:rPr lang="sv-SE" sz="2600" b="1" u="none" strike="noStrike">
-                <a:solidFill>
-                  <a:srgbClr val="1E3A5F"/>
-                </a:solidFill>
-                <a:effectLst/>
-                <a:uFillTx/>
-                <a:latin typeface="Cambria"/>
-                <a:ea typeface="Cambria"/>
-              </a:rPr>
-              <a:t>a </a:t>
-            </a:r>
-            <a:r>
-              <a:rPr lang="sv-SE" sz="2600" b="1" u="none" strike="noStrike">
-                <a:solidFill>
-                  <a:srgbClr val="1E3A5F"/>
-                </a:solidFill>
-                <a:effectLst/>
-                <a:uFillTx/>
-                <a:latin typeface="Cambria"/>
-                <a:ea typeface="Cambria"/>
-              </a:rPr>
-              <a:t>h</a:t>
-            </a:r>
-            <a:r>
-              <a:rPr lang="sv-SE" sz="2600" b="1" u="none" strike="noStrike">
-                <a:solidFill>
-                  <a:srgbClr val="1E3A5F"/>
-                </a:solidFill>
-                <a:effectLst/>
-                <a:uFillTx/>
-                <a:latin typeface="Cambria"/>
-                <a:ea typeface="Cambria"/>
-              </a:rPr>
-              <a:t>ä</a:t>
-            </a:r>
-            <a:r>
-              <a:rPr lang="sv-SE" sz="2600" b="1" u="none" strike="noStrike">
-                <a:solidFill>
-                  <a:srgbClr val="1E3A5F"/>
-                </a:solidFill>
-                <a:effectLst/>
-                <a:uFillTx/>
-                <a:latin typeface="Cambria"/>
-                <a:ea typeface="Cambria"/>
-              </a:rPr>
-              <a:t>r </a:t>
-            </a:r>
-            <a:r>
-              <a:rPr lang="sv-SE" sz="2600" b="1" u="none" strike="noStrike">
-                <a:solidFill>
-                  <a:srgbClr val="1E3A5F"/>
-                </a:solidFill>
-                <a:effectLst/>
-                <a:uFillTx/>
-                <a:latin typeface="Cambria"/>
-                <a:ea typeface="Cambria"/>
-              </a:rPr>
-              <a:t>f</a:t>
-            </a:r>
-            <a:r>
-              <a:rPr lang="sv-SE" sz="2600" b="1" u="none" strike="noStrike">
-                <a:solidFill>
-                  <a:srgbClr val="1E3A5F"/>
-                </a:solidFill>
-                <a:effectLst/>
-                <a:uFillTx/>
-                <a:latin typeface="Cambria"/>
-                <a:ea typeface="Cambria"/>
-              </a:rPr>
-              <a:t>ö</a:t>
-            </a:r>
-            <a:r>
-              <a:rPr lang="sv-SE" sz="2600" b="1" u="none" strike="noStrike">
-                <a:solidFill>
-                  <a:srgbClr val="1E3A5F"/>
-                </a:solidFill>
-                <a:effectLst/>
-                <a:uFillTx/>
-                <a:latin typeface="Cambria"/>
-                <a:ea typeface="Cambria"/>
-              </a:rPr>
-              <a:t>r </a:t>
-            </a:r>
-            <a:r>
-              <a:rPr lang="sv-SE" sz="2600" b="1" u="none" strike="noStrike">
-                <a:solidFill>
-                  <a:srgbClr val="1E3A5F"/>
-                </a:solidFill>
-                <a:effectLst/>
-                <a:uFillTx/>
-                <a:latin typeface="Cambria"/>
-                <a:ea typeface="Cambria"/>
-              </a:rPr>
-              <a:t>a</a:t>
-            </a:r>
-            <a:r>
-              <a:rPr lang="sv-SE" sz="2600" b="1" u="none" strike="noStrike">
-                <a:solidFill>
-                  <a:srgbClr val="1E3A5F"/>
-                </a:solidFill>
-                <a:effectLst/>
-                <a:uFillTx/>
-                <a:latin typeface="Cambria"/>
-                <a:ea typeface="Cambria"/>
-              </a:rPr>
-              <a:t>t</a:t>
-            </a:r>
-            <a:r>
-              <a:rPr lang="sv-SE" sz="2600" b="1" u="none" strike="noStrike">
-                <a:solidFill>
-                  <a:srgbClr val="1E3A5F"/>
-                </a:solidFill>
-                <a:effectLst/>
-                <a:uFillTx/>
-                <a:latin typeface="Cambria"/>
-                <a:ea typeface="Cambria"/>
-              </a:rPr>
-              <a:t>t </a:t>
-            </a:r>
-            <a:r>
-              <a:rPr lang="sv-SE" sz="2600" b="1" u="none" strike="noStrike">
-                <a:solidFill>
-                  <a:srgbClr val="1E3A5F"/>
-                </a:solidFill>
-                <a:effectLst/>
-                <a:uFillTx/>
-                <a:latin typeface="Cambria"/>
-                <a:ea typeface="Cambria"/>
-              </a:rPr>
-              <a:t>ä</a:t>
-            </a:r>
-            <a:r>
-              <a:rPr lang="sv-SE" sz="2600" b="1" u="none" strike="noStrike">
-                <a:solidFill>
-                  <a:srgbClr val="1E3A5F"/>
-                </a:solidFill>
-                <a:effectLst/>
-                <a:uFillTx/>
-                <a:latin typeface="Cambria"/>
-                <a:ea typeface="Cambria"/>
-              </a:rPr>
-              <a:t>n</a:t>
-            </a:r>
-            <a:r>
-              <a:rPr lang="sv-SE" sz="2600" b="1" u="none" strike="noStrike">
-                <a:solidFill>
-                  <a:srgbClr val="1E3A5F"/>
-                </a:solidFill>
-                <a:effectLst/>
-                <a:uFillTx/>
-                <a:latin typeface="Cambria"/>
-                <a:ea typeface="Cambria"/>
-              </a:rPr>
-              <a:t>d</a:t>
-            </a:r>
-            <a:r>
-              <a:rPr lang="sv-SE" sz="2600" b="1" u="none" strike="noStrike">
-                <a:solidFill>
-                  <a:srgbClr val="1E3A5F"/>
-                </a:solidFill>
-                <a:effectLst/>
-                <a:uFillTx/>
-                <a:latin typeface="Cambria"/>
-                <a:ea typeface="Cambria"/>
-              </a:rPr>
-              <a:t>r</a:t>
-            </a:r>
-            <a:r>
-              <a:rPr lang="sv-SE" sz="2600" b="1" u="none" strike="noStrike">
-                <a:solidFill>
-                  <a:srgbClr val="1E3A5F"/>
-                </a:solidFill>
-                <a:effectLst/>
-                <a:uFillTx/>
-                <a:latin typeface="Cambria"/>
-                <a:ea typeface="Cambria"/>
-              </a:rPr>
-              <a:t>a </a:t>
-            </a:r>
-            <a:r>
-              <a:rPr lang="sv-SE" sz="2600" b="1" u="none" strike="noStrike">
-                <a:solidFill>
-                  <a:srgbClr val="1E3A5F"/>
-                </a:solidFill>
-                <a:effectLst/>
-                <a:uFillTx/>
-                <a:latin typeface="Cambria"/>
-                <a:ea typeface="Cambria"/>
-              </a:rPr>
-              <a:t>m</a:t>
-            </a:r>
-            <a:r>
-              <a:rPr lang="sv-SE" sz="2600" b="1" u="none" strike="noStrike">
-                <a:solidFill>
-                  <a:srgbClr val="1E3A5F"/>
-                </a:solidFill>
-                <a:effectLst/>
-                <a:uFillTx/>
-                <a:latin typeface="Cambria"/>
-                <a:ea typeface="Cambria"/>
-              </a:rPr>
-              <a:t>a</a:t>
-            </a:r>
-            <a:r>
-              <a:rPr lang="sv-SE" sz="2600" b="1" u="none" strike="noStrike">
-                <a:solidFill>
-                  <a:srgbClr val="1E3A5F"/>
-                </a:solidFill>
-                <a:effectLst/>
-                <a:uFillTx/>
-                <a:latin typeface="Cambria"/>
-                <a:ea typeface="Cambria"/>
-              </a:rPr>
-              <a:t>l</a:t>
-            </a:r>
-            <a:r>
-              <a:rPr lang="sv-SE" sz="2600" b="1" u="none" strike="noStrike">
-                <a:solidFill>
-                  <a:srgbClr val="1E3A5F"/>
-                </a:solidFill>
-                <a:effectLst/>
-                <a:uFillTx/>
-                <a:latin typeface="Cambria"/>
-                <a:ea typeface="Cambria"/>
-              </a:rPr>
-              <a:t>l </a:t>
-            </a:r>
-            <a:r>
-              <a:rPr lang="sv-SE" sz="2600" b="1" u="none" strike="noStrike">
-                <a:solidFill>
-                  <a:srgbClr val="1E3A5F"/>
-                </a:solidFill>
-                <a:effectLst/>
-                <a:uFillTx/>
-                <a:latin typeface="Cambria"/>
-                <a:ea typeface="Cambria"/>
-              </a:rPr>
-              <a:t>f</a:t>
-            </a:r>
-            <a:r>
-              <a:rPr lang="sv-SE" sz="2600" b="1" u="none" strike="noStrike">
-                <a:solidFill>
-                  <a:srgbClr val="1E3A5F"/>
-                </a:solidFill>
-                <a:effectLst/>
-                <a:uFillTx/>
-                <a:latin typeface="Cambria"/>
-                <a:ea typeface="Cambria"/>
-              </a:rPr>
-              <a:t>ö</a:t>
-            </a:r>
-            <a:r>
-              <a:rPr lang="sv-SE" sz="2600" b="1" u="none" strike="noStrike">
-                <a:solidFill>
-                  <a:srgbClr val="1E3A5F"/>
-                </a:solidFill>
-                <a:effectLst/>
-                <a:uFillTx/>
-                <a:latin typeface="Cambria"/>
-                <a:ea typeface="Cambria"/>
-              </a:rPr>
-              <a:t>r </a:t>
-            </a:r>
-            <a:r>
-              <a:rPr lang="sv-SE" sz="2600" b="1" u="none" strike="noStrike">
-                <a:solidFill>
-                  <a:srgbClr val="1E3A5F"/>
-                </a:solidFill>
-                <a:effectLst/>
-                <a:uFillTx/>
-                <a:latin typeface="Cambria"/>
-                <a:ea typeface="Cambria"/>
-              </a:rPr>
-              <a:t>r</a:t>
-            </a:r>
-            <a:r>
-              <a:rPr lang="sv-SE" sz="2600" b="1" u="none" strike="noStrike">
-                <a:solidFill>
-                  <a:srgbClr val="1E3A5F"/>
-                </a:solidFill>
-                <a:effectLst/>
-                <a:uFillTx/>
-                <a:latin typeface="Cambria"/>
-                <a:ea typeface="Cambria"/>
-              </a:rPr>
-              <a:t>u</a:t>
-            </a:r>
-            <a:r>
-              <a:rPr lang="sv-SE" sz="2600" b="1" u="none" strike="noStrike">
-                <a:solidFill>
-                  <a:srgbClr val="1E3A5F"/>
-                </a:solidFill>
-                <a:effectLst/>
-                <a:uFillTx/>
-                <a:latin typeface="Cambria"/>
-                <a:ea typeface="Cambria"/>
-              </a:rPr>
-              <a:t>b</a:t>
-            </a:r>
-            <a:r>
-              <a:rPr lang="sv-SE" sz="2600" b="1" u="none" strike="noStrike">
-                <a:solidFill>
-                  <a:srgbClr val="1E3A5F"/>
-                </a:solidFill>
-                <a:effectLst/>
-                <a:uFillTx/>
-                <a:latin typeface="Cambria"/>
-                <a:ea typeface="Cambria"/>
-              </a:rPr>
-              <a:t>r</a:t>
-            </a:r>
-            <a:r>
-              <a:rPr lang="sv-SE" sz="2600" b="1" u="none" strike="noStrike">
-                <a:solidFill>
-                  <a:srgbClr val="1E3A5F"/>
-                </a:solidFill>
-                <a:effectLst/>
-                <a:uFillTx/>
-                <a:latin typeface="Cambria"/>
-                <a:ea typeface="Cambria"/>
-              </a:rPr>
-              <a:t>i</a:t>
-            </a:r>
-            <a:r>
-              <a:rPr lang="sv-SE" sz="2600" b="1" u="none" strike="noStrike">
-                <a:solidFill>
-                  <a:srgbClr val="1E3A5F"/>
-                </a:solidFill>
-                <a:effectLst/>
-                <a:uFillTx/>
-                <a:latin typeface="Cambria"/>
-                <a:ea typeface="Cambria"/>
-              </a:rPr>
-              <a:t>k</a:t>
-            </a:r>
-            <a:r>
-              <a:rPr lang="sv-SE" sz="2600" b="1" u="none" strike="noStrike">
-                <a:solidFill>
-                  <a:srgbClr val="1E3A5F"/>
-                </a:solidFill>
-                <a:effectLst/>
-                <a:uFillTx/>
-                <a:latin typeface="Cambria"/>
-                <a:ea typeface="Cambria"/>
-              </a:rPr>
-              <a:t>f</a:t>
-            </a:r>
-            <a:r>
-              <a:rPr lang="sv-SE" sz="2600" b="1" u="none" strike="noStrike">
-                <a:solidFill>
-                  <a:srgbClr val="1E3A5F"/>
-                </a:solidFill>
-                <a:effectLst/>
-                <a:uFillTx/>
-                <a:latin typeface="Cambria"/>
-                <a:ea typeface="Cambria"/>
-              </a:rPr>
-              <a:t>o</a:t>
-            </a:r>
-            <a:r>
-              <a:rPr lang="sv-SE" sz="2600" b="1" u="none" strike="noStrike">
-                <a:solidFill>
-                  <a:srgbClr val="1E3A5F"/>
-                </a:solidFill>
-                <a:effectLst/>
-                <a:uFillTx/>
-                <a:latin typeface="Cambria"/>
-                <a:ea typeface="Cambria"/>
-              </a:rPr>
-              <a:t>r</a:t>
-            </a:r>
-            <a:r>
-              <a:rPr lang="sv-SE" sz="2600" b="1" u="none" strike="noStrike">
-                <a:solidFill>
-                  <a:srgbClr val="1E3A5F"/>
-                </a:solidFill>
-                <a:effectLst/>
-                <a:uFillTx/>
-                <a:latin typeface="Cambria"/>
-                <a:ea typeface="Cambria"/>
-              </a:rPr>
-              <a:t>m</a:t>
-            </a:r>
-            <a:r>
-              <a:rPr lang="sv-SE" sz="2600" b="1" u="none" strike="noStrike">
-                <a:solidFill>
-                  <a:srgbClr val="1E3A5F"/>
-                </a:solidFill>
-                <a:effectLst/>
-                <a:uFillTx/>
-                <a:latin typeface="Cambria"/>
-                <a:ea typeface="Cambria"/>
-              </a:rPr>
-              <a:t>a</a:t>
-            </a:r>
-            <a:r>
-              <a:rPr lang="sv-SE" sz="2600" b="1" u="none" strike="noStrike">
-                <a:solidFill>
-                  <a:srgbClr val="1E3A5F"/>
-                </a:solidFill>
-                <a:effectLst/>
-                <a:uFillTx/>
-                <a:latin typeface="Cambria"/>
-                <a:ea typeface="Cambria"/>
-              </a:rPr>
-              <a:t>t</a:t>
+              <a:t>Klicka här för att ändra mall för rubrikformat</a:t>
             </a:r>
             <a:endParaRPr lang="en-GB" sz="2600" b="1" u="none" strike="noStrike">
               <a:solidFill>
@@ -5328,7 +5044,7 @@
                 <a:latin typeface="Calibri"/>
                 <a:ea typeface="Calibri"/>
               </a:rPr>
-              <a:t>&lt;number&gt;</a:t>
+              <a:t>‹#›</a:t>
             </a:fld>
             <a:endParaRPr lang="en-GB" sz="900" b="0" u="none" strike="noStrike">
               <a:solidFill>
@@ -5343,17 +5059,21 @@
       </p:sp>
     </p:spTree>
   </p:cSld>
+  <p:clrMapOvr>
+    <a:masterClrMapping/>
+  </p:clrMapOvr>
 </p:sldLayout>
 </file>
 
 <file path=ppt/slideLayouts/slideLayout4.xml><?xml version="1.0" encoding="utf-8"?>
-<p:sldLayout xmlns:a="http://schemas.openxmlformats.org/drawingml/2006/main" xmlns:p="http://schemas.openxmlformats.org/presentationml/2006/main" xmlns:r="http://schemas.openxmlformats.org/officeDocument/2006/relationships" xmlns:p14="http://schemas.microsoft.com/office/powerpoint/2010/main" xmlns:p15="http://schemas.microsoft.com/office/powerpoint/2012/main" xmlns:mc="http://schemas.openxmlformats.org/markup-compatibility/2006" type="blank" preserve="1">
+<p:sldLayout xmlns:a="http://schemas.openxmlformats.org/drawingml/2006/main" xmlns:r="http://schemas.openxmlformats.org/officeDocument/2006/relationships" xmlns:p="http://schemas.openxmlformats.org/presentationml/2006/main" type="blank" preserve="1">
   <p:cSld name="Rubrikbild">
     <p:bg>
       <p:bgPr>
         <a:solidFill>
           <a:srgbClr val="FFFFFF"/>
         </a:solidFill>
+        <a:effectLst/>
       </p:bgPr>
     </p:bg>
     <p:spTree>
@@ -5486,15 +5206,22 @@
           </a:ln>
         </p:spPr>
         <p:style>
-          <a:lnRef idx="0"/>
-          <a:fillRef idx="0"/>
-          <a:effectRef idx="0"/>
+          <a:lnRef idx="0">
+            <a:scrgbClr r="0" g="0" b="0"/>
+          </a:lnRef>
+          <a:fillRef idx="0">
+            <a:scrgbClr r="0" g="0" b="0"/>
+          </a:fillRef>
+          <a:effectRef idx="0">
+            <a:scrgbClr r="0" g="0" b="0"/>
+          </a:effectRef>
           <a:fontRef idx="minor"/>
         </p:style>
         <p:txBody>
           <a:bodyPr lIns="0" tIns="0" rIns="0" bIns="0" anchor="ctr">
             <a:noAutofit/>
           </a:bodyPr>
+          <a:lstStyle/>
           <a:p>
             <a:pPr defTabSz="914400">
               <a:lnSpc>
@@ -5582,14 +5309,6 @@
               </a:rPr>
               <a:t>&lt;footer&gt;</a:t>
             </a:r>
-            <a:endParaRPr lang="en-GB" sz="1400" b="0" u="none" strike="noStrike">
-              <a:solidFill>
-                <a:srgbClr val="000000"/>
-              </a:solidFill>
-              <a:effectLst/>
-              <a:uFillTx/>
-              <a:latin typeface="Times New Roman"/>
-            </a:endParaRPr>
           </a:p>
         </p:txBody>
       </p:sp>
@@ -5654,7 +5373,7 @@
                 <a:latin typeface="Calibri"/>
                 <a:ea typeface="Calibri"/>
               </a:rPr>
-              <a:t>&lt;number&gt;</a:t>
+              <a:t>‹#›</a:t>
             </a:fld>
             <a:endParaRPr lang="en-GB" sz="900" b="0" u="none" strike="noStrike">
               <a:solidFill>
@@ -5669,17 +5388,21 @@
       </p:sp>
     </p:spTree>
   </p:cSld>
+  <p:clrMapOvr>
+    <a:masterClrMapping/>
+  </p:clrMapOvr>
 </p:sldLayout>
 </file>
 
 <file path=ppt/slideLayouts/slideLayout5.xml><?xml version="1.0" encoding="utf-8"?>
-<p:sldLayout xmlns:a="http://schemas.openxmlformats.org/drawingml/2006/main" xmlns:p="http://schemas.openxmlformats.org/presentationml/2006/main" xmlns:r="http://schemas.openxmlformats.org/officeDocument/2006/relationships" xmlns:p14="http://schemas.microsoft.com/office/powerpoint/2010/main" xmlns:p15="http://schemas.microsoft.com/office/powerpoint/2012/main" xmlns:mc="http://schemas.openxmlformats.org/markup-compatibility/2006" type="blank" preserve="1">
+<p:sldLayout xmlns:a="http://schemas.openxmlformats.org/drawingml/2006/main" xmlns:r="http://schemas.openxmlformats.org/officeDocument/2006/relationships" xmlns:p="http://schemas.openxmlformats.org/presentationml/2006/main" type="blank" preserve="1">
   <p:cSld name="DEFAULT">
     <p:bg>
       <p:bgPr>
         <a:solidFill>
           <a:srgbClr val="FFFFFF"/>
         </a:solidFill>
+        <a:effectLst/>
       </p:bgPr>
     </p:bg>
     <p:spTree>
@@ -5812,15 +5535,22 @@
           </a:ln>
         </p:spPr>
         <p:style>
-          <a:lnRef idx="0"/>
-          <a:fillRef idx="0"/>
-          <a:effectRef idx="0"/>
+          <a:lnRef idx="0">
+            <a:scrgbClr r="0" g="0" b="0"/>
+          </a:lnRef>
+          <a:fillRef idx="0">
+            <a:scrgbClr r="0" g="0" b="0"/>
+          </a:fillRef>
+          <a:effectRef idx="0">
+            <a:scrgbClr r="0" g="0" b="0"/>
+          </a:effectRef>
           <a:fontRef idx="minor"/>
         </p:style>
         <p:txBody>
           <a:bodyPr lIns="0" tIns="0" rIns="0" bIns="0" anchor="ctr">
             <a:noAutofit/>
           </a:bodyPr>
+          <a:lstStyle/>
           <a:p>
             <a:pPr defTabSz="914400">
               <a:lnSpc>
@@ -5914,14 +5644,6 @@
               </a:rPr>
               <a:t>Click to edit the title text format</a:t>
             </a:r>
-            <a:endParaRPr lang="en-GB" sz="2600" b="1" u="none" strike="noStrike">
-              <a:solidFill>
-                <a:srgbClr val="1E3A5F"/>
-              </a:solidFill>
-              <a:effectLst/>
-              <a:uFillTx/>
-              <a:latin typeface="Cambria"/>
-            </a:endParaRPr>
           </a:p>
         </p:txBody>
       </p:sp>
@@ -6134,14 +5856,6 @@
               </a:rPr>
               <a:t>Click to edit the outline text format</a:t>
             </a:r>
-            <a:endParaRPr lang="en-GB" sz="2000" b="0" u="none" strike="noStrike">
-              <a:solidFill>
-                <a:schemeClr val="dk1"/>
-              </a:solidFill>
-              <a:effectLst/>
-              <a:uFillTx/>
-              <a:latin typeface="Calibri"/>
-            </a:endParaRPr>
           </a:p>
           <a:p>
             <a:pPr marL="864000" lvl="1" indent="-324000" algn="l">
@@ -6169,14 +5883,6 @@
               </a:rPr>
               <a:t>Second Outline Level</a:t>
             </a:r>
-            <a:endParaRPr lang="en-GB" sz="1600" b="0" u="none" strike="noStrike">
-              <a:solidFill>
-                <a:schemeClr val="dk1"/>
-              </a:solidFill>
-              <a:effectLst/>
-              <a:uFillTx/>
-              <a:latin typeface="Calibri"/>
-            </a:endParaRPr>
           </a:p>
           <a:p>
             <a:pPr marL="1296000" lvl="2" indent="-288000" algn="l">
@@ -6204,14 +5910,6 @@
               </a:rPr>
               <a:t>Third Outline Level</a:t>
             </a:r>
-            <a:endParaRPr lang="en-GB" sz="1600" b="0" u="none" strike="noStrike">
-              <a:solidFill>
-                <a:schemeClr val="dk1"/>
-              </a:solidFill>
-              <a:effectLst/>
-              <a:uFillTx/>
-              <a:latin typeface="Calibri"/>
-            </a:endParaRPr>
           </a:p>
           <a:p>
             <a:pPr marL="1728000" lvl="3" indent="-216000" algn="l">
@@ -6239,14 +5937,6 @@
               </a:rPr>
               <a:t>Fourth Outline Level</a:t>
             </a:r>
-            <a:endParaRPr lang="en-GB" sz="1600" b="0" u="none" strike="noStrike">
-              <a:solidFill>
-                <a:schemeClr val="dk1"/>
-              </a:solidFill>
-              <a:effectLst/>
-              <a:uFillTx/>
-              <a:latin typeface="Calibri"/>
-            </a:endParaRPr>
           </a:p>
           <a:p>
             <a:pPr marL="2160000" lvl="4" indent="-216000" algn="l">
@@ -6274,14 +5964,6 @@
               </a:rPr>
               <a:t>Fifth Outline Level</a:t>
             </a:r>
-            <a:endParaRPr lang="en-GB" sz="2000" b="0" u="none" strike="noStrike">
-              <a:solidFill>
-                <a:schemeClr val="dk1"/>
-              </a:solidFill>
-              <a:effectLst/>
-              <a:uFillTx/>
-              <a:latin typeface="Calibri"/>
-            </a:endParaRPr>
           </a:p>
           <a:p>
             <a:pPr marL="2592000" lvl="5" indent="-216000" algn="l">
@@ -6309,14 +5991,6 @@
               </a:rPr>
               <a:t>Sixth Outline Level</a:t>
             </a:r>
-            <a:endParaRPr lang="en-GB" sz="2000" b="0" u="none" strike="noStrike">
-              <a:solidFill>
-                <a:schemeClr val="dk1"/>
-              </a:solidFill>
-              <a:effectLst/>
-              <a:uFillTx/>
-              <a:latin typeface="Calibri"/>
-            </a:endParaRPr>
           </a:p>
           <a:p>
             <a:pPr marL="3024000" lvl="6" indent="-216000" algn="l">
@@ -6344,25 +6018,25 @@
               </a:rPr>
               <a:t>Seventh Outline Level</a:t>
             </a:r>
-            <a:endParaRPr lang="en-GB" sz="2000" b="0" u="none" strike="noStrike">
-              <a:solidFill>
-                <a:schemeClr val="dk1"/>
-              </a:solidFill>
-              <a:effectLst/>
-              <a:uFillTx/>
-              <a:latin typeface="Calibri"/>
-            </a:endParaRPr>
           </a:p>
         </p:txBody>
       </p:sp>
     </p:spTree>
   </p:cSld>
+  <p:clrMapOvr>
+    <a:masterClrMapping/>
+  </p:clrMapOvr>
 </p:sldLayout>
 </file>
 
 <file path=ppt/slideMasters/slideMaster1.xml><?xml version="1.0" encoding="utf-8"?>
-<p:sldMaster xmlns:a="http://schemas.openxmlformats.org/drawingml/2006/main" xmlns:p="http://schemas.openxmlformats.org/presentationml/2006/main" xmlns:r="http://schemas.openxmlformats.org/officeDocument/2006/relationships" xmlns:p14="http://schemas.microsoft.com/office/powerpoint/2010/main" xmlns:p15="http://schemas.microsoft.com/office/powerpoint/2012/main" xmlns:mc="http://schemas.openxmlformats.org/markup-compatibility/2006">
+<p:sldMaster xmlns:a="http://schemas.openxmlformats.org/drawingml/2006/main" xmlns:r="http://schemas.openxmlformats.org/officeDocument/2006/relationships" xmlns:p="http://schemas.openxmlformats.org/presentationml/2006/main">
   <p:cSld>
+    <p:bg>
+      <p:bgRef idx="1001">
+        <a:schemeClr val="bg1"/>
+      </p:bgRef>
+    </p:bg>
     <p:spTree>
       <p:nvGrpSpPr>
         <p:cNvPr id="1" name=""/>
@@ -6381,23 +6055,304 @@
   </p:cSld>
   <p:clrMap bg1="lt1" tx1="dk1" bg2="lt2" tx2="dk2" accent1="accent1" accent2="accent2" accent3="accent3" accent4="accent4" accent5="accent5" accent6="accent6" hlink="hlink" folHlink="folHlink"/>
   <p:sldLayoutIdLst>
-    <p:sldLayoutId id="2147483649" r:id="rId2"/>
-    <p:sldLayoutId id="2147483650" r:id="rId3"/>
-    <p:sldLayoutId id="2147483651" r:id="rId4"/>
-    <p:sldLayoutId id="2147483652" r:id="rId5"/>
-    <p:sldLayoutId id="2147483653" r:id="rId6"/>
+    <p:sldLayoutId id="2147483649" r:id="rId1"/>
+    <p:sldLayoutId id="2147483650" r:id="rId2"/>
+    <p:sldLayoutId id="2147483651" r:id="rId3"/>
+    <p:sldLayoutId id="2147483652" r:id="rId4"/>
+    <p:sldLayoutId id="2147483653" r:id="rId5"/>
   </p:sldLayoutIdLst>
+  <p:txStyles>
+    <p:titleStyle>
+      <a:lvl1pPr algn="l" defTabSz="914400" rtl="0" eaLnBrk="1" latinLnBrk="0" hangingPunct="1">
+        <a:lnSpc>
+          <a:spcPct val="90000"/>
+        </a:lnSpc>
+        <a:spcBef>
+          <a:spcPct val="0"/>
+        </a:spcBef>
+        <a:buNone/>
+        <a:defRPr sz="4400" kern="1200">
+          <a:solidFill>
+            <a:schemeClr val="tx1"/>
+          </a:solidFill>
+          <a:latin typeface="+mj-lt"/>
+          <a:ea typeface="+mj-ea"/>
+          <a:cs typeface="+mj-cs"/>
+        </a:defRPr>
+      </a:lvl1pPr>
+    </p:titleStyle>
+    <p:bodyStyle>
+      <a:lvl1pPr marL="228600" indent="-228600" algn="l" defTabSz="914400" rtl="0" eaLnBrk="1" latinLnBrk="0" hangingPunct="1">
+        <a:lnSpc>
+          <a:spcPct val="90000"/>
+        </a:lnSpc>
+        <a:spcBef>
+          <a:spcPts val="1000"/>
+        </a:spcBef>
+        <a:buFont typeface="Arial" panose="020B0604020202020204" pitchFamily="34" charset="0"/>
+        <a:buChar char="•"/>
+        <a:defRPr sz="2800" kern="1200">
+          <a:solidFill>
+            <a:schemeClr val="tx1"/>
+          </a:solidFill>
+          <a:latin typeface="+mn-lt"/>
+          <a:ea typeface="+mn-ea"/>
+          <a:cs typeface="+mn-cs"/>
+        </a:defRPr>
+      </a:lvl1pPr>
+      <a:lvl2pPr marL="685800" indent="-228600" algn="l" defTabSz="914400" rtl="0" eaLnBrk="1" latinLnBrk="0" hangingPunct="1">
+        <a:lnSpc>
+          <a:spcPct val="90000"/>
+        </a:lnSpc>
+        <a:spcBef>
+          <a:spcPts val="500"/>
+        </a:spcBef>
+        <a:buFont typeface="Arial" panose="020B0604020202020204" pitchFamily="34" charset="0"/>
+        <a:buChar char="•"/>
+        <a:defRPr sz="2400" kern="1200">
+          <a:solidFill>
+            <a:schemeClr val="tx1"/>
+          </a:solidFill>
+          <a:latin typeface="+mn-lt"/>
+          <a:ea typeface="+mn-ea"/>
+          <a:cs typeface="+mn-cs"/>
+        </a:defRPr>
+      </a:lvl2pPr>
+      <a:lvl3pPr marL="1143000" indent="-228600" algn="l" defTabSz="914400" rtl="0" eaLnBrk="1" latinLnBrk="0" hangingPunct="1">
+        <a:lnSpc>
+          <a:spcPct val="90000"/>
+        </a:lnSpc>
+        <a:spcBef>
+          <a:spcPts val="500"/>
+        </a:spcBef>
+        <a:buFont typeface="Arial" panose="020B0604020202020204" pitchFamily="34" charset="0"/>
+        <a:buChar char="•"/>
+        <a:defRPr sz="2000" kern="1200">
+          <a:solidFill>
+            <a:schemeClr val="tx1"/>
+          </a:solidFill>
+          <a:latin typeface="+mn-lt"/>
+          <a:ea typeface="+mn-ea"/>
+          <a:cs typeface="+mn-cs"/>
+        </a:defRPr>
+      </a:lvl3pPr>
+      <a:lvl4pPr marL="1600200" indent="-228600" algn="l" defTabSz="914400" rtl="0" eaLnBrk="1" latinLnBrk="0" hangingPunct="1">
+        <a:lnSpc>
+          <a:spcPct val="90000"/>
+        </a:lnSpc>
+        <a:spcBef>
+          <a:spcPts val="500"/>
+        </a:spcBef>
+        <a:buFont typeface="Arial" panose="020B0604020202020204" pitchFamily="34" charset="0"/>
+        <a:buChar char="•"/>
+        <a:defRPr sz="1800" kern="1200">
+          <a:solidFill>
+            <a:schemeClr val="tx1"/>
+          </a:solidFill>
+          <a:latin typeface="+mn-lt"/>
+          <a:ea typeface="+mn-ea"/>
+          <a:cs typeface="+mn-cs"/>
+        </a:defRPr>
+      </a:lvl4pPr>
+      <a:lvl5pPr marL="2057400" indent="-228600" algn="l" defTabSz="914400" rtl="0" eaLnBrk="1" latinLnBrk="0" hangingPunct="1">
+        <a:lnSpc>
+          <a:spcPct val="90000"/>
+        </a:lnSpc>
+        <a:spcBef>
+          <a:spcPts val="500"/>
+        </a:spcBef>
+        <a:buFont typeface="Arial" panose="020B0604020202020204" pitchFamily="34" charset="0"/>
+        <a:buChar char="•"/>
+        <a:defRPr sz="1800" kern="1200">
+          <a:solidFill>
+            <a:schemeClr val="tx1"/>
+          </a:solidFill>
+          <a:latin typeface="+mn-lt"/>
+          <a:ea typeface="+mn-ea"/>
+          <a:cs typeface="+mn-cs"/>
+        </a:defRPr>
+      </a:lvl5pPr>
+      <a:lvl6pPr marL="2514600" indent="-228600" algn="l" defTabSz="914400" rtl="0" eaLnBrk="1" latinLnBrk="0" hangingPunct="1">
+        <a:lnSpc>
+          <a:spcPct val="90000"/>
+        </a:lnSpc>
+        <a:spcBef>
+          <a:spcPts val="500"/>
+        </a:spcBef>
+        <a:buFont typeface="Arial" panose="020B0604020202020204" pitchFamily="34" charset="0"/>
+        <a:buChar char="•"/>
+        <a:defRPr sz="1800" kern="1200">
+          <a:solidFill>
+            <a:schemeClr val="tx1"/>
+          </a:solidFill>
+          <a:latin typeface="+mn-lt"/>
+          <a:ea typeface="+mn-ea"/>
+          <a:cs typeface="+mn-cs"/>
+        </a:defRPr>
+      </a:lvl6pPr>
+      <a:lvl7pPr marL="2971800" indent="-228600" algn="l" defTabSz="914400" rtl="0" eaLnBrk="1" latinLnBrk="0" hangingPunct="1">
+        <a:lnSpc>
+          <a:spcPct val="90000"/>
+        </a:lnSpc>
+        <a:spcBef>
+          <a:spcPts val="500"/>
+        </a:spcBef>
+        <a:buFont typeface="Arial" panose="020B0604020202020204" pitchFamily="34" charset="0"/>
+        <a:buChar char="•"/>
+        <a:defRPr sz="1800" kern="1200">
+          <a:solidFill>
+            <a:schemeClr val="tx1"/>
+          </a:solidFill>
+          <a:latin typeface="+mn-lt"/>
+          <a:ea typeface="+mn-ea"/>
+          <a:cs typeface="+mn-cs"/>
+        </a:defRPr>
+      </a:lvl7pPr>
+      <a:lvl8pPr marL="3429000" indent="-228600" algn="l" defTabSz="914400" rtl="0" eaLnBrk="1" latinLnBrk="0" hangingPunct="1">
+        <a:lnSpc>
+          <a:spcPct val="90000"/>
+        </a:lnSpc>
+        <a:spcBef>
+          <a:spcPts val="500"/>
+        </a:spcBef>
+        <a:buFont typeface="Arial" panose="020B0604020202020204" pitchFamily="34" charset="0"/>
+        <a:buChar char="•"/>
+        <a:defRPr sz="1800" kern="1200">
+          <a:solidFill>
+            <a:schemeClr val="tx1"/>
+          </a:solidFill>
+          <a:latin typeface="+mn-lt"/>
+          <a:ea typeface="+mn-ea"/>
+          <a:cs typeface="+mn-cs"/>
+        </a:defRPr>
+      </a:lvl8pPr>
+      <a:lvl9pPr marL="3886200" indent="-228600" algn="l" defTabSz="914400" rtl="0" eaLnBrk="1" latinLnBrk="0" hangingPunct="1">
+        <a:lnSpc>
+          <a:spcPct val="90000"/>
+        </a:lnSpc>
+        <a:spcBef>
+          <a:spcPts val="500"/>
+        </a:spcBef>
+        <a:buFont typeface="Arial" panose="020B0604020202020204" pitchFamily="34" charset="0"/>
+        <a:buChar char="•"/>
+        <a:defRPr sz="1800" kern="1200">
+          <a:solidFill>
+            <a:schemeClr val="tx1"/>
+          </a:solidFill>
+          <a:latin typeface="+mn-lt"/>
+          <a:ea typeface="+mn-ea"/>
+          <a:cs typeface="+mn-cs"/>
+        </a:defRPr>
+      </a:lvl9pPr>
+    </p:bodyStyle>
+    <p:otherStyle>
+      <a:defPPr>
+        <a:defRPr lang="en-SE"/>
+      </a:defPPr>
+      <a:lvl1pPr marL="0" algn="l" defTabSz="914400" rtl="0" eaLnBrk="1" latinLnBrk="0" hangingPunct="1">
+        <a:defRPr sz="1800" kern="1200">
+          <a:solidFill>
+            <a:schemeClr val="tx1"/>
+          </a:solidFill>
+          <a:latin typeface="+mn-lt"/>
+          <a:ea typeface="+mn-ea"/>
+          <a:cs typeface="+mn-cs"/>
+        </a:defRPr>
+      </a:lvl1pPr>
+      <a:lvl2pPr marL="457200" algn="l" defTabSz="914400" rtl="0" eaLnBrk="1" latinLnBrk="0" hangingPunct="1">
+        <a:defRPr sz="1800" kern="1200">
+          <a:solidFill>
+            <a:schemeClr val="tx1"/>
+          </a:solidFill>
+          <a:latin typeface="+mn-lt"/>
+          <a:ea typeface="+mn-ea"/>
+          <a:cs typeface="+mn-cs"/>
+        </a:defRPr>
+      </a:lvl2pPr>
+      <a:lvl3pPr marL="914400" algn="l" defTabSz="914400" rtl="0" eaLnBrk="1" latinLnBrk="0" hangingPunct="1">
+        <a:defRPr sz="1800" kern="1200">
+          <a:solidFill>
+            <a:schemeClr val="tx1"/>
+          </a:solidFill>
+          <a:latin typeface="+mn-lt"/>
+          <a:ea typeface="+mn-ea"/>
+          <a:cs typeface="+mn-cs"/>
+        </a:defRPr>
+      </a:lvl3pPr>
+      <a:lvl4pPr marL="1371600" algn="l" defTabSz="914400" rtl="0" eaLnBrk="1" latinLnBrk="0" hangingPunct="1">
+        <a:defRPr sz="1800" kern="1200">
+          <a:solidFill>
+            <a:schemeClr val="tx1"/>
+          </a:solidFill>
+          <a:latin typeface="+mn-lt"/>
+          <a:ea typeface="+mn-ea"/>
+          <a:cs typeface="+mn-cs"/>
+        </a:defRPr>
+      </a:lvl4pPr>
+      <a:lvl5pPr marL="1828800" algn="l" defTabSz="914400" rtl="0" eaLnBrk="1" latinLnBrk="0" hangingPunct="1">
+        <a:defRPr sz="1800" kern="1200">
+          <a:solidFill>
+            <a:schemeClr val="tx1"/>
+          </a:solidFill>
+          <a:latin typeface="+mn-lt"/>
+          <a:ea typeface="+mn-ea"/>
+          <a:cs typeface="+mn-cs"/>
+        </a:defRPr>
+      </a:lvl5pPr>
+      <a:lvl6pPr marL="2286000" algn="l" defTabSz="914400" rtl="0" eaLnBrk="1" latinLnBrk="0" hangingPunct="1">
+        <a:defRPr sz="1800" kern="1200">
+          <a:solidFill>
+            <a:schemeClr val="tx1"/>
+          </a:solidFill>
+          <a:latin typeface="+mn-lt"/>
+          <a:ea typeface="+mn-ea"/>
+          <a:cs typeface="+mn-cs"/>
+        </a:defRPr>
+      </a:lvl6pPr>
+      <a:lvl7pPr marL="2743200" algn="l" defTabSz="914400" rtl="0" eaLnBrk="1" latinLnBrk="0" hangingPunct="1">
+        <a:defRPr sz="1800" kern="1200">
+          <a:solidFill>
+            <a:schemeClr val="tx1"/>
+          </a:solidFill>
+          <a:latin typeface="+mn-lt"/>
+          <a:ea typeface="+mn-ea"/>
+          <a:cs typeface="+mn-cs"/>
+        </a:defRPr>
+      </a:lvl7pPr>
+      <a:lvl8pPr marL="3200400" algn="l" defTabSz="914400" rtl="0" eaLnBrk="1" latinLnBrk="0" hangingPunct="1">
+        <a:defRPr sz="1800" kern="1200">
+          <a:solidFill>
+            <a:schemeClr val="tx1"/>
+          </a:solidFill>
+          <a:latin typeface="+mn-lt"/>
+          <a:ea typeface="+mn-ea"/>
+          <a:cs typeface="+mn-cs"/>
+        </a:defRPr>
+      </a:lvl8pPr>
+      <a:lvl9pPr marL="3657600" algn="l" defTabSz="914400" rtl="0" eaLnBrk="1" latinLnBrk="0" hangingPunct="1">
+        <a:defRPr sz="1800" kern="1200">
+          <a:solidFill>
+            <a:schemeClr val="tx1"/>
+          </a:solidFill>
+          <a:latin typeface="+mn-lt"/>
+          <a:ea typeface="+mn-ea"/>
+          <a:cs typeface="+mn-cs"/>
+        </a:defRPr>
+      </a:lvl9pPr>
+    </p:otherStyle>
+  </p:txStyles>
 </p:sldMaster>
 </file>
 
 <file path=ppt/slides/slide1.xml><?xml version="1.0" encoding="utf-8"?>
-<p:sld xmlns:a="http://schemas.openxmlformats.org/drawingml/2006/main" xmlns:p="http://schemas.openxmlformats.org/presentationml/2006/main" xmlns:r="http://schemas.openxmlformats.org/officeDocument/2006/relationships" xmlns:p14="http://schemas.microsoft.com/office/powerpoint/2010/main" xmlns:p15="http://schemas.microsoft.com/office/powerpoint/2012/main" xmlns:mc="http://schemas.openxmlformats.org/markup-compatibility/2006">
+<p:sld xmlns:a="http://schemas.openxmlformats.org/drawingml/2006/main" xmlns:r="http://schemas.openxmlformats.org/officeDocument/2006/relationships" xmlns:p="http://schemas.openxmlformats.org/presentationml/2006/main">
   <p:cSld>
     <p:bg>
       <p:bgPr>
         <a:solidFill>
           <a:srgbClr val="FFFFFF"/>
         </a:solidFill>
+        <a:effectLst/>
       </p:bgPr>
     </p:bg>
     <p:spTree>
@@ -6421,7 +6376,7 @@
           <p:nvPr/>
         </p:nvPicPr>
         <p:blipFill>
-          <a:blip r:embed="rId1"/>
+          <a:blip r:embed="rId3"/>
           <a:stretch/>
         </p:blipFill>
         <p:spPr>
@@ -6445,7 +6400,7 @@
           <p:nvPr/>
         </p:nvPicPr>
         <p:blipFill>
-          <a:blip r:embed="rId2"/>
+          <a:blip r:embed="rId4"/>
           <a:stretch/>
         </p:blipFill>
         <p:spPr>
@@ -6469,7 +6424,7 @@
           <p:nvPr/>
         </p:nvPicPr>
         <p:blipFill>
-          <a:blip r:embed="rId3"/>
+          <a:blip r:embed="rId5"/>
           <a:stretch/>
         </p:blipFill>
         <p:spPr>
@@ -6493,7 +6448,7 @@
           <p:nvPr/>
         </p:nvPicPr>
         <p:blipFill>
-          <a:blip r:embed="rId4"/>
+          <a:blip r:embed="rId6"/>
           <a:stretch/>
         </p:blipFill>
         <p:spPr>
@@ -6530,15 +6485,22 @@
           </a:ln>
         </p:spPr>
         <p:style>
-          <a:lnRef idx="0"/>
-          <a:fillRef idx="0"/>
-          <a:effectRef idx="0"/>
+          <a:lnRef idx="0">
+            <a:scrgbClr r="0" g="0" b="0"/>
+          </a:lnRef>
+          <a:fillRef idx="0">
+            <a:scrgbClr r="0" g="0" b="0"/>
+          </a:fillRef>
+          <a:effectRef idx="0">
+            <a:scrgbClr r="0" g="0" b="0"/>
+          </a:effectRef>
           <a:fontRef idx="minor"/>
         </p:style>
         <p:txBody>
           <a:bodyPr lIns="0" tIns="0" rIns="0" bIns="0" anchor="ctr">
             <a:noAutofit/>
           </a:bodyPr>
+          <a:lstStyle/>
           <a:p>
             <a:pPr algn="ctr" defTabSz="914400">
               <a:lnSpc>
@@ -6591,15 +6553,22 @@
           </a:ln>
         </p:spPr>
         <p:style>
-          <a:lnRef idx="0"/>
-          <a:fillRef idx="0"/>
-          <a:effectRef idx="0"/>
+          <a:lnRef idx="0">
+            <a:scrgbClr r="0" g="0" b="0"/>
+          </a:lnRef>
+          <a:fillRef idx="0">
+            <a:scrgbClr r="0" g="0" b="0"/>
+          </a:fillRef>
+          <a:effectRef idx="0">
+            <a:scrgbClr r="0" g="0" b="0"/>
+          </a:effectRef>
           <a:fontRef idx="minor"/>
         </p:style>
         <p:txBody>
           <a:bodyPr lIns="0" tIns="0" rIns="0" bIns="0" anchor="ctr">
             <a:noAutofit/>
           </a:bodyPr>
+          <a:lstStyle/>
           <a:p>
             <a:pPr algn="ctr" defTabSz="914400">
               <a:lnSpc>
@@ -6652,15 +6621,22 @@
           </a:ln>
         </p:spPr>
         <p:style>
-          <a:lnRef idx="0"/>
-          <a:fillRef idx="0"/>
-          <a:effectRef idx="0"/>
+          <a:lnRef idx="0">
+            <a:scrgbClr r="0" g="0" b="0"/>
+          </a:lnRef>
+          <a:fillRef idx="0">
+            <a:scrgbClr r="0" g="0" b="0"/>
+          </a:fillRef>
+          <a:effectRef idx="0">
+            <a:scrgbClr r="0" g="0" b="0"/>
+          </a:effectRef>
           <a:fontRef idx="minor"/>
         </p:style>
         <p:txBody>
           <a:bodyPr lIns="0" tIns="0" rIns="0" bIns="0" anchor="ctr">
             <a:noAutofit/>
           </a:bodyPr>
+          <a:lstStyle/>
           <a:p>
             <a:pPr algn="ctr" defTabSz="914400">
               <a:lnSpc>
@@ -6680,331 +6656,7 @@
                 <a:latin typeface="Calibri"/>
                 <a:ea typeface="Calibri"/>
               </a:rPr>
-              <a:t>Juli</a:t>
-            </a:r>
-            <a:r>
-              <a:rPr lang="en-US" sz="1200" b="0" u="none" strike="noStrike">
-                <a:solidFill>
-                  <a:srgbClr val="2B2B2B"/>
-                </a:solidFill>
-                <a:effectLst/>
-                <a:uFillTx/>
-                <a:latin typeface="Calibri"/>
-                <a:ea typeface="Calibri"/>
-              </a:rPr>
-              <a:t>en </a:t>
-            </a:r>
-            <a:r>
-              <a:rPr lang="en-US" sz="1200" b="0" u="none" strike="noStrike">
-                <a:solidFill>
-                  <a:srgbClr val="2B2B2B"/>
-                </a:solidFill>
-                <a:effectLst/>
-                <a:uFillTx/>
-                <a:latin typeface="Calibri"/>
-                <a:ea typeface="Calibri"/>
-              </a:rPr>
-              <a:t>Sie</a:t>
-            </a:r>
-            <a:r>
-              <a:rPr lang="en-US" sz="1200" b="0" u="none" strike="noStrike">
-                <a:solidFill>
-                  <a:srgbClr val="2B2B2B"/>
-                </a:solidFill>
-                <a:effectLst/>
-                <a:uFillTx/>
-                <a:latin typeface="Calibri"/>
-                <a:ea typeface="Calibri"/>
-              </a:rPr>
-              <a:t>be</a:t>
-            </a:r>
-            <a:r>
-              <a:rPr lang="en-US" sz="1200" b="0" u="none" strike="noStrike">
-                <a:solidFill>
-                  <a:srgbClr val="2B2B2B"/>
-                </a:solidFill>
-                <a:effectLst/>
-                <a:uFillTx/>
-                <a:latin typeface="Calibri"/>
-                <a:ea typeface="Calibri"/>
-              </a:rPr>
-              <a:t>rt  </a:t>
-            </a:r>
-            <a:r>
-              <a:rPr lang="en-US" sz="1200" b="0" u="none" strike="noStrike">
-                <a:solidFill>
-                  <a:srgbClr val="2B2B2B"/>
-                </a:solidFill>
-                <a:effectLst/>
-                <a:uFillTx/>
-                <a:latin typeface="Calibri"/>
-                <a:ea typeface="Calibri"/>
-              </a:rPr>
-              <a:t>·  </a:t>
-            </a:r>
-            <a:r>
-              <a:rPr lang="en-US" sz="1200" b="0" u="none" strike="noStrike">
-                <a:solidFill>
-                  <a:srgbClr val="2B2B2B"/>
-                </a:solidFill>
-                <a:effectLst/>
-                <a:uFillTx/>
-                <a:latin typeface="Calibri"/>
-                <a:ea typeface="Calibri"/>
-              </a:rPr>
-              <a:t>Juli</a:t>
-            </a:r>
-            <a:r>
-              <a:rPr lang="en-US" sz="1200" b="0" u="none" strike="noStrike">
-                <a:solidFill>
-                  <a:srgbClr val="2B2B2B"/>
-                </a:solidFill>
-                <a:effectLst/>
-                <a:uFillTx/>
-                <a:latin typeface="Calibri"/>
-                <a:ea typeface="Calibri"/>
-              </a:rPr>
-              <a:t>an </a:t>
-            </a:r>
-            <a:r>
-              <a:rPr lang="en-US" sz="1200" b="0" u="none" strike="noStrike">
-                <a:solidFill>
-                  <a:srgbClr val="2B2B2B"/>
-                </a:solidFill>
-                <a:effectLst/>
-                <a:uFillTx/>
-                <a:latin typeface="Calibri"/>
-                <a:ea typeface="Calibri"/>
-              </a:rPr>
-              <a:t>Fra</a:t>
-            </a:r>
-            <a:r>
-              <a:rPr lang="en-US" sz="1200" b="0" u="none" strike="noStrike">
-                <a:solidFill>
-                  <a:srgbClr val="2B2B2B"/>
-                </a:solidFill>
-                <a:effectLst/>
-                <a:uFillTx/>
-                <a:latin typeface="Calibri"/>
-                <a:ea typeface="Calibri"/>
-              </a:rPr>
-              <a:t>tti</a:t>
-            </a:r>
-            <a:r>
-              <a:rPr lang="en-US" sz="1200" b="0" u="none" strike="noStrike">
-                <a:solidFill>
-                  <a:srgbClr val="2B2B2B"/>
-                </a:solidFill>
-                <a:effectLst/>
-                <a:uFillTx/>
-                <a:latin typeface="Calibri"/>
-                <a:ea typeface="Calibri"/>
-              </a:rPr>
-              <a:t>ni  </a:t>
-            </a:r>
-            <a:r>
-              <a:rPr lang="en-US" sz="1200" b="0" u="none" strike="noStrike">
-                <a:solidFill>
-                  <a:srgbClr val="2B2B2B"/>
-                </a:solidFill>
-                <a:effectLst/>
-                <a:uFillTx/>
-                <a:latin typeface="Calibri"/>
-                <a:ea typeface="Calibri"/>
-              </a:rPr>
-              <a:t>·  </a:t>
-            </a:r>
-            <a:r>
-              <a:rPr lang="en-US" sz="1200" b="0" u="none" strike="noStrike">
-                <a:solidFill>
-                  <a:srgbClr val="2B2B2B"/>
-                </a:solidFill>
-                <a:effectLst/>
-                <a:uFillTx/>
-                <a:latin typeface="Calibri"/>
-                <a:ea typeface="Calibri"/>
-              </a:rPr>
-              <a:t>Ha</a:t>
-            </a:r>
-            <a:r>
-              <a:rPr lang="en-US" sz="1200" b="0" u="none" strike="noStrike">
-                <a:solidFill>
-                  <a:srgbClr val="2B2B2B"/>
-                </a:solidFill>
-                <a:effectLst/>
-                <a:uFillTx/>
-                <a:latin typeface="Calibri"/>
-                <a:ea typeface="Calibri"/>
-              </a:rPr>
-              <a:t>ns-</a:t>
-            </a:r>
-            <a:r>
-              <a:rPr lang="en-US" sz="1200" b="0" u="none" strike="noStrike">
-                <a:solidFill>
-                  <a:srgbClr val="2B2B2B"/>
-                </a:solidFill>
-                <a:effectLst/>
-                <a:uFillTx/>
-                <a:latin typeface="Calibri"/>
-                <a:ea typeface="Calibri"/>
-              </a:rPr>
-              <a:t>M</a:t>
-            </a:r>
-            <a:r>
-              <a:rPr lang="en-US" sz="1200" b="0" u="none" strike="noStrike">
-                <a:solidFill>
-                  <a:srgbClr val="2B2B2B"/>
-                </a:solidFill>
-                <a:effectLst/>
-                <a:uFillTx/>
-                <a:latin typeface="Calibri"/>
-                <a:ea typeface="Calibri"/>
-              </a:rPr>
-              <a:t>art</a:t>
-            </a:r>
-            <a:r>
-              <a:rPr lang="en-US" sz="1200" b="0" u="none" strike="noStrike">
-                <a:solidFill>
-                  <a:srgbClr val="2B2B2B"/>
-                </a:solidFill>
-                <a:effectLst/>
-                <a:uFillTx/>
-                <a:latin typeface="Calibri"/>
-                <a:ea typeface="Calibri"/>
-              </a:rPr>
-              <a:t>in </a:t>
-            </a:r>
-            <a:r>
-              <a:rPr lang="en-US" sz="1200" b="0" u="none" strike="noStrike">
-                <a:solidFill>
-                  <a:srgbClr val="2B2B2B"/>
-                </a:solidFill>
-                <a:effectLst/>
-                <a:uFillTx/>
-                <a:latin typeface="Calibri"/>
-                <a:ea typeface="Calibri"/>
-              </a:rPr>
-              <a:t>He</a:t>
-            </a:r>
-            <a:r>
-              <a:rPr lang="en-US" sz="1200" b="0" u="none" strike="noStrike">
-                <a:solidFill>
-                  <a:srgbClr val="2B2B2B"/>
-                </a:solidFill>
-                <a:effectLst/>
-                <a:uFillTx/>
-                <a:latin typeface="Calibri"/>
-                <a:ea typeface="Calibri"/>
-              </a:rPr>
-              <a:t>yn  </a:t>
-            </a:r>
-            <a:r>
-              <a:rPr lang="en-US" sz="1200" b="0" u="none" strike="noStrike">
-                <a:solidFill>
-                  <a:srgbClr val="2B2B2B"/>
-                </a:solidFill>
-                <a:effectLst/>
-                <a:uFillTx/>
-                <a:latin typeface="Calibri"/>
-                <a:ea typeface="Calibri"/>
-              </a:rPr>
-              <a:t>·  </a:t>
-            </a:r>
-            <a:r>
-              <a:rPr lang="en-US" sz="1200" b="0" u="none" strike="noStrike">
-                <a:solidFill>
-                  <a:srgbClr val="2B2B2B"/>
-                </a:solidFill>
-                <a:effectLst/>
-                <a:uFillTx/>
-                <a:latin typeface="Calibri"/>
-                <a:ea typeface="Calibri"/>
-              </a:rPr>
-              <a:t>Ro</a:t>
-            </a:r>
-            <a:r>
-              <a:rPr lang="en-US" sz="1200" b="0" u="none" strike="noStrike">
-                <a:solidFill>
-                  <a:srgbClr val="2B2B2B"/>
-                </a:solidFill>
-                <a:effectLst/>
-                <a:uFillTx/>
-                <a:latin typeface="Calibri"/>
-                <a:ea typeface="Calibri"/>
-              </a:rPr>
-              <a:t>be</a:t>
-            </a:r>
-            <a:r>
-              <a:rPr lang="en-US" sz="1200" b="0" u="none" strike="noStrike">
-                <a:solidFill>
-                  <a:srgbClr val="2B2B2B"/>
-                </a:solidFill>
-                <a:effectLst/>
-                <a:uFillTx/>
-                <a:latin typeface="Calibri"/>
-                <a:ea typeface="Calibri"/>
-              </a:rPr>
-              <a:t>rto </a:t>
-            </a:r>
-            <a:r>
-              <a:rPr lang="en-US" sz="1200" b="0" u="none" strike="noStrike">
-                <a:solidFill>
-                  <a:srgbClr val="2B2B2B"/>
-                </a:solidFill>
-                <a:effectLst/>
-                <a:uFillTx/>
-                <a:latin typeface="Calibri"/>
-                <a:ea typeface="Calibri"/>
-              </a:rPr>
-              <a:t>Pie</a:t>
-            </a:r>
-            <a:r>
-              <a:rPr lang="en-US" sz="1200" b="0" u="none" strike="noStrike">
-                <a:solidFill>
-                  <a:srgbClr val="2B2B2B"/>
-                </a:solidFill>
-                <a:effectLst/>
-                <a:uFillTx/>
-                <a:latin typeface="Calibri"/>
-                <a:ea typeface="Calibri"/>
-              </a:rPr>
-              <a:t>tra</a:t>
-            </a:r>
-            <a:r>
-              <a:rPr lang="en-US" sz="1200" b="0" u="none" strike="noStrike">
-                <a:solidFill>
-                  <a:srgbClr val="2B2B2B"/>
-                </a:solidFill>
-                <a:effectLst/>
-                <a:uFillTx/>
-                <a:latin typeface="Calibri"/>
-                <a:ea typeface="Calibri"/>
-              </a:rPr>
-              <a:t>nt</a:t>
-            </a:r>
-            <a:r>
-              <a:rPr lang="en-US" sz="1200" b="0" u="none" strike="noStrike">
-                <a:solidFill>
-                  <a:srgbClr val="2B2B2B"/>
-                </a:solidFill>
-                <a:effectLst/>
-                <a:uFillTx/>
-                <a:latin typeface="Calibri"/>
-                <a:ea typeface="Calibri"/>
-              </a:rPr>
-              <a:t>uo</a:t>
-            </a:r>
-            <a:r>
-              <a:rPr lang="en-US" sz="1200" b="0" u="none" strike="noStrike">
-                <a:solidFill>
-                  <a:srgbClr val="2B2B2B"/>
-                </a:solidFill>
-                <a:effectLst/>
-                <a:uFillTx/>
-                <a:latin typeface="Calibri"/>
-                <a:ea typeface="Calibri"/>
-              </a:rPr>
-              <a:t>no</a:t>
+              <a:t>Julien Siebert  ·  Julian Frattini  ·  Hans-Martin Heyn  ·  Roberto Pietrantuono</a:t>
             </a:r>
             <a:endParaRPr lang="en-GB" sz="1200" b="0" u="none" strike="noStrike">
               <a:solidFill>
@@ -7037,15 +6689,22 @@
           </a:ln>
         </p:spPr>
         <p:style>
-          <a:lnRef idx="0"/>
-          <a:fillRef idx="0"/>
-          <a:effectRef idx="0"/>
+          <a:lnRef idx="0">
+            <a:scrgbClr r="0" g="0" b="0"/>
+          </a:lnRef>
+          <a:fillRef idx="0">
+            <a:scrgbClr r="0" g="0" b="0"/>
+          </a:fillRef>
+          <a:effectRef idx="0">
+            <a:scrgbClr r="0" g="0" b="0"/>
+          </a:effectRef>
           <a:fontRef idx="minor"/>
         </p:style>
         <p:txBody>
           <a:bodyPr lIns="0" tIns="0" rIns="0" bIns="0" anchor="ctr">
             <a:noAutofit/>
           </a:bodyPr>
+          <a:lstStyle/>
           <a:p>
             <a:endParaRPr lang="en-US" sz="900" b="0" u="none" strike="noStrike">
               <a:solidFill>
@@ -7060,19 +6719,14 @@
       </p:sp>
     </p:spTree>
   </p:cSld>
-  <mc:AlternateContent>
-    <mc:Choice Requires="p14">
-      <p:transition spd="slow" p14:dur="2000"/>
-    </mc:Choice>
-    <mc:Fallback>
-      <p:transition spd="slow"/>
-    </mc:Fallback>
-  </mc:AlternateContent>
+  <p:clrMapOvr>
+    <a:masterClrMapping/>
+  </p:clrMapOvr>
 </p:sld>
 </file>
 
 <file path=ppt/slides/slide10.xml><?xml version="1.0" encoding="utf-8"?>
-<p:sld xmlns:a="http://schemas.openxmlformats.org/drawingml/2006/main" xmlns:p="http://schemas.openxmlformats.org/presentationml/2006/main" xmlns:r="http://schemas.openxmlformats.org/officeDocument/2006/relationships" xmlns:p14="http://schemas.microsoft.com/office/powerpoint/2010/main" xmlns:p15="http://schemas.microsoft.com/office/powerpoint/2012/main" xmlns:mc="http://schemas.openxmlformats.org/markup-compatibility/2006">
+<p:sld xmlns:a="http://schemas.openxmlformats.org/drawingml/2006/main" xmlns:r="http://schemas.openxmlformats.org/officeDocument/2006/relationships" xmlns:p="http://schemas.openxmlformats.org/presentationml/2006/main">
   <p:cSld>
     <p:spTree>
       <p:nvGrpSpPr>
@@ -7195,6 +6849,7 @@
           <a:bodyPr lIns="91440" tIns="45720" rIns="91440" bIns="45720" anchor="ctr">
             <a:noAutofit/>
           </a:bodyPr>
+          <a:lstStyle/>
           <a:p>
             <a:pPr indent="0" algn="l" defTabSz="914400">
               <a:lnSpc>
@@ -7203,7 +6858,7 @@
               <a:buNone/>
             </a:pPr>
             <a:r>
-              <a:rPr lang="sv-SE" sz="2600" b="1" u="none" strike="noStrike">
+              <a:rPr lang="sv-SE" sz="2600" b="1" u="none" strike="noStrike" dirty="0">
                 <a:solidFill>
                   <a:srgbClr val="1E3A5F"/>
                 </a:solidFill>
@@ -7215,7 +6870,7 @@
               <a:t>Problem 3 Solution </a:t>
             </a:r>
             <a:r>
-              <a:rPr lang="sv-SE" sz="2600" b="1" u="sng" strike="noStrike">
+              <a:rPr lang="sv-SE" sz="2600" b="1" u="sng" strike="noStrike" dirty="0">
                 <a:solidFill>
                   <a:srgbClr val="467886"/>
                 </a:solidFill>
@@ -7223,12 +6878,12 @@
                 <a:uFillTx/>
                 <a:latin typeface="Cambria"/>
                 <a:ea typeface="Cambria"/>
-                <a:hlinkClick r:id="rId1"/>
+                <a:hlinkClick r:id="rId3"/>
               </a:rPr>
               <a:t>https://dagitty.net/mvzunz7xx</a:t>
             </a:r>
             <a:r>
-              <a:rPr lang="sv-SE" sz="2600" b="1" u="none" strike="noStrike">
+              <a:rPr lang="sv-SE" sz="2600" b="1" u="none" strike="noStrike" dirty="0">
                 <a:solidFill>
                   <a:srgbClr val="1E3A5F"/>
                 </a:solidFill>
@@ -7239,7 +6894,7 @@
               </a:rPr>
               <a:t> </a:t>
             </a:r>
-            <a:endParaRPr lang="en-GB" sz="2600" b="1" u="none" strike="noStrike">
+            <a:endParaRPr lang="en-GB" sz="2600" b="1" u="none" strike="noStrike" dirty="0">
               <a:solidFill>
                 <a:srgbClr val="1E3A5F"/>
               </a:solidFill>
@@ -7277,6 +6932,7 @@
           <a:bodyPr lIns="91440" tIns="45720" rIns="91440" bIns="45720" anchor="t">
             <a:noAutofit/>
           </a:bodyPr>
+          <a:lstStyle/>
           <a:p>
             <a:pPr marL="228600" indent="-228600" algn="l" defTabSz="914400">
               <a:lnSpc>
@@ -7399,7 +7055,7 @@
                 <a:latin typeface="Calibri"/>
                 <a:ea typeface="Calibri"/>
               </a:rPr>
-              <a:t>&lt;number&gt;</a:t>
+              <a:t>10</a:t>
             </a:fld>
             <a:endParaRPr lang="en-GB" sz="900" b="0" u="none" strike="noStrike">
               <a:solidFill>
@@ -7430,7 +7086,7 @@
             <a:solidFill>
               <a:srgbClr val="000000"/>
             </a:solidFill>
-            <a:tailEnd len="med" type="triangle" w="med"/>
+            <a:tailEnd type="triangle" w="med" len="med"/>
           </a:ln>
         </p:spPr>
       </p:cxnSp>
@@ -7475,6 +7131,7 @@
           <a:bodyPr lIns="90000" tIns="45000" rIns="90000" bIns="45000" anchor="ctr">
             <a:noAutofit/>
           </a:bodyPr>
+          <a:lstStyle/>
           <a:p>
             <a:pPr algn="ctr" defTabSz="914400">
               <a:lnSpc>
@@ -7545,6 +7202,7 @@
           <a:bodyPr lIns="90000" tIns="45000" rIns="90000" bIns="45000" anchor="ctr">
             <a:noAutofit/>
           </a:bodyPr>
+          <a:lstStyle/>
           <a:p>
             <a:pPr algn="ctr" defTabSz="914400">
               <a:lnSpc>
@@ -7619,6 +7277,7 @@
           <a:bodyPr lIns="90000" tIns="45000" rIns="90000" bIns="45000" anchor="ctr">
             <a:noAutofit/>
           </a:bodyPr>
+          <a:lstStyle/>
           <a:p>
             <a:pPr algn="ctr" defTabSz="914400">
               <a:lnSpc>
@@ -7693,6 +7352,7 @@
           <a:bodyPr lIns="90000" tIns="45000" rIns="90000" bIns="45000" anchor="ctr">
             <a:noAutofit/>
           </a:bodyPr>
+          <a:lstStyle/>
           <a:p>
             <a:pPr algn="ctr" defTabSz="914400">
               <a:lnSpc>
@@ -7740,7 +7400,7 @@
             <a:solidFill>
               <a:srgbClr val="000000"/>
             </a:solidFill>
-            <a:tailEnd len="med" type="triangle" w="med"/>
+            <a:tailEnd type="triangle" w="med" len="med"/>
           </a:ln>
         </p:spPr>
       </p:cxnSp>
@@ -7762,7 +7422,7 @@
             <a:solidFill>
               <a:srgbClr val="000000"/>
             </a:solidFill>
-            <a:tailEnd len="med" type="triangle" w="med"/>
+            <a:tailEnd type="triangle" w="med" len="med"/>
           </a:ln>
         </p:spPr>
       </p:cxnSp>
@@ -7809,6 +7469,7 @@
           <a:bodyPr lIns="90000" tIns="45000" rIns="90000" bIns="45000" anchor="ctr">
             <a:noAutofit/>
           </a:bodyPr>
+          <a:lstStyle/>
           <a:p>
             <a:pPr algn="ctr" defTabSz="914400">
               <a:lnSpc>
@@ -7856,7 +7517,7 @@
             <a:solidFill>
               <a:srgbClr val="000000"/>
             </a:solidFill>
-            <a:tailEnd len="med" type="triangle" w="med"/>
+            <a:tailEnd type="triangle" w="med" len="med"/>
           </a:ln>
         </p:spPr>
       </p:cxnSp>
@@ -7878,7 +7539,7 @@
             <a:solidFill>
               <a:srgbClr val="000000"/>
             </a:solidFill>
-            <a:tailEnd len="med" type="triangle" w="med"/>
+            <a:tailEnd type="triangle" w="med" len="med"/>
           </a:ln>
         </p:spPr>
       </p:cxnSp>
@@ -7900,7 +7561,7 @@
             <a:solidFill>
               <a:srgbClr val="000000"/>
             </a:solidFill>
-            <a:tailEnd len="med" type="triangle" w="med"/>
+            <a:tailEnd type="triangle" w="med" len="med"/>
           </a:ln>
         </p:spPr>
       </p:cxnSp>
@@ -7924,15 +7585,22 @@
           </a:ln>
         </p:spPr>
         <p:style>
-          <a:lnRef idx="0"/>
-          <a:fillRef idx="0"/>
-          <a:effectRef idx="0"/>
+          <a:lnRef idx="0">
+            <a:scrgbClr r="0" g="0" b="0"/>
+          </a:lnRef>
+          <a:fillRef idx="0">
+            <a:scrgbClr r="0" g="0" b="0"/>
+          </a:fillRef>
+          <a:effectRef idx="0">
+            <a:scrgbClr r="0" g="0" b="0"/>
+          </a:effectRef>
           <a:fontRef idx="minor"/>
         </p:style>
         <p:txBody>
           <a:bodyPr wrap="none" lIns="90000" tIns="45000" rIns="90000" bIns="45000" anchor="t">
             <a:spAutoFit/>
           </a:bodyPr>
+          <a:lstStyle/>
           <a:p>
             <a:pPr defTabSz="914400">
               <a:lnSpc>
@@ -7964,19 +7632,14 @@
       </p:sp>
     </p:spTree>
   </p:cSld>
-  <mc:AlternateContent>
-    <mc:Choice Requires="p14">
-      <p:transition spd="slow" p14:dur="2000"/>
-    </mc:Choice>
-    <mc:Fallback>
-      <p:transition spd="slow"/>
-    </mc:Fallback>
-  </mc:AlternateContent>
+  <p:clrMapOvr>
+    <a:masterClrMapping/>
+  </p:clrMapOvr>
 </p:sld>
 </file>
 
 <file path=ppt/slides/slide11.xml><?xml version="1.0" encoding="utf-8"?>
-<p:sld xmlns:a="http://schemas.openxmlformats.org/drawingml/2006/main" xmlns:p="http://schemas.openxmlformats.org/presentationml/2006/main" xmlns:r="http://schemas.openxmlformats.org/officeDocument/2006/relationships" xmlns:p14="http://schemas.microsoft.com/office/powerpoint/2010/main" xmlns:p15="http://schemas.microsoft.com/office/powerpoint/2012/main" xmlns:mc="http://schemas.openxmlformats.org/markup-compatibility/2006">
+<p:sld xmlns:a="http://schemas.openxmlformats.org/drawingml/2006/main" xmlns:r="http://schemas.openxmlformats.org/officeDocument/2006/relationships" xmlns:p="http://schemas.openxmlformats.org/presentationml/2006/main">
   <p:cSld>
     <p:spTree>
       <p:nvGrpSpPr>
@@ -8099,6 +7762,7 @@
           <a:bodyPr lIns="91440" tIns="45720" rIns="91440" bIns="45720" anchor="ctr">
             <a:noAutofit/>
           </a:bodyPr>
+          <a:lstStyle/>
           <a:p>
             <a:pPr indent="0" algn="l" defTabSz="914400">
               <a:lnSpc>
@@ -8156,6 +7820,7 @@
           <a:bodyPr lIns="91440" tIns="45720" rIns="91440" bIns="45720" anchor="t">
             <a:noAutofit/>
           </a:bodyPr>
+          <a:lstStyle/>
           <a:p>
             <a:pPr marL="228600" indent="-228600" algn="l" defTabSz="914400">
               <a:lnSpc>
@@ -8204,19 +7869,7 @@
                 <a:latin typeface="Calibri"/>
                 <a:ea typeface="Calibri"/>
               </a:rPr>
-              <a:t> of variables to block any backdoor causal path </a:t>
-            </a:r>
-            <a:r>
-              <a:rPr lang="sv-SE" sz="2000" b="0" u="none" strike="noStrike">
-                <a:solidFill>
-                  <a:schemeClr val="dk1"/>
-                </a:solidFill>
-                <a:effectLst/>
-                <a:uFillTx/>
-                <a:latin typeface="Calibri"/>
-                <a:ea typeface="Calibri"/>
-              </a:rPr>
-              <a:t>for the estimation of the direct effect of a on b. </a:t>
+              <a:t> of variables to block any backdoor causal path for the estimation of the direct effect of a on b. </a:t>
             </a:r>
             <a:endParaRPr lang="en-GB" sz="2000" b="0" u="none" strike="noStrike">
               <a:solidFill>
@@ -8290,7 +7943,7 @@
                 <a:latin typeface="Calibri"/>
                 <a:ea typeface="Calibri"/>
               </a:rPr>
-              <a:t>&lt;number&gt;</a:t>
+              <a:t>11</a:t>
             </a:fld>
             <a:endParaRPr lang="en-GB" sz="900" b="0" u="none" strike="noStrike">
               <a:solidFill>
@@ -8321,7 +7974,7 @@
             <a:solidFill>
               <a:srgbClr val="000000"/>
             </a:solidFill>
-            <a:tailEnd len="med" type="triangle" w="med"/>
+            <a:tailEnd type="triangle" w="med" len="med"/>
           </a:ln>
         </p:spPr>
       </p:cxnSp>
@@ -8366,6 +8019,7 @@
           <a:bodyPr lIns="90000" tIns="45000" rIns="90000" bIns="45000" anchor="ctr">
             <a:noAutofit/>
           </a:bodyPr>
+          <a:lstStyle/>
           <a:p>
             <a:pPr algn="ctr" defTabSz="914400">
               <a:lnSpc>
@@ -8436,6 +8090,7 @@
           <a:bodyPr lIns="90000" tIns="45000" rIns="90000" bIns="45000" anchor="ctr">
             <a:noAutofit/>
           </a:bodyPr>
+          <a:lstStyle/>
           <a:p>
             <a:pPr algn="ctr" defTabSz="914400">
               <a:lnSpc>
@@ -8510,6 +8165,7 @@
           <a:bodyPr lIns="90000" tIns="45000" rIns="90000" bIns="45000" anchor="ctr">
             <a:noAutofit/>
           </a:bodyPr>
+          <a:lstStyle/>
           <a:p>
             <a:pPr algn="ctr" defTabSz="914400">
               <a:lnSpc>
@@ -8584,6 +8240,7 @@
           <a:bodyPr lIns="90000" tIns="45000" rIns="90000" bIns="45000" anchor="ctr">
             <a:noAutofit/>
           </a:bodyPr>
+          <a:lstStyle/>
           <a:p>
             <a:pPr algn="ctr" defTabSz="914400">
               <a:lnSpc>
@@ -8631,7 +8288,7 @@
             <a:solidFill>
               <a:srgbClr val="000000"/>
             </a:solidFill>
-            <a:tailEnd len="med" type="triangle" w="med"/>
+            <a:tailEnd type="triangle" w="med" len="med"/>
           </a:ln>
         </p:spPr>
       </p:cxnSp>
@@ -8653,7 +8310,7 @@
             <a:solidFill>
               <a:srgbClr val="000000"/>
             </a:solidFill>
-            <a:tailEnd len="med" type="triangle" w="med"/>
+            <a:tailEnd type="triangle" w="med" len="med"/>
           </a:ln>
         </p:spPr>
       </p:cxnSp>
@@ -8700,6 +8357,7 @@
           <a:bodyPr lIns="90000" tIns="45000" rIns="90000" bIns="45000" anchor="ctr">
             <a:noAutofit/>
           </a:bodyPr>
+          <a:lstStyle/>
           <a:p>
             <a:pPr algn="ctr" defTabSz="914400">
               <a:lnSpc>
@@ -8747,7 +8405,7 @@
             <a:solidFill>
               <a:srgbClr val="000000"/>
             </a:solidFill>
-            <a:tailEnd len="med" type="triangle" w="med"/>
+            <a:tailEnd type="triangle" w="med" len="med"/>
           </a:ln>
         </p:spPr>
       </p:cxnSp>
@@ -8769,7 +8427,7 @@
             <a:solidFill>
               <a:srgbClr val="000000"/>
             </a:solidFill>
-            <a:tailEnd len="med" type="triangle" w="med"/>
+            <a:tailEnd type="triangle" w="med" len="med"/>
           </a:ln>
         </p:spPr>
       </p:cxnSp>
@@ -8791,7 +8449,7 @@
             <a:solidFill>
               <a:srgbClr val="000000"/>
             </a:solidFill>
-            <a:tailEnd len="med" type="triangle" w="med"/>
+            <a:tailEnd type="triangle" w="med" len="med"/>
           </a:ln>
         </p:spPr>
       </p:cxnSp>
@@ -8815,15 +8473,22 @@
           </a:ln>
         </p:spPr>
         <p:style>
-          <a:lnRef idx="0"/>
-          <a:fillRef idx="0"/>
-          <a:effectRef idx="0"/>
+          <a:lnRef idx="0">
+            <a:scrgbClr r="0" g="0" b="0"/>
+          </a:lnRef>
+          <a:fillRef idx="0">
+            <a:scrgbClr r="0" g="0" b="0"/>
+          </a:fillRef>
+          <a:effectRef idx="0">
+            <a:scrgbClr r="0" g="0" b="0"/>
+          </a:effectRef>
           <a:fontRef idx="minor"/>
         </p:style>
         <p:txBody>
           <a:bodyPr wrap="none" lIns="90000" tIns="45000" rIns="90000" bIns="45000" anchor="t">
             <a:spAutoFit/>
           </a:bodyPr>
+          <a:lstStyle/>
           <a:p>
             <a:pPr defTabSz="914400">
               <a:lnSpc>
@@ -8871,7 +8536,7 @@
             <a:solidFill>
               <a:srgbClr val="000000"/>
             </a:solidFill>
-            <a:tailEnd len="med" type="triangle" w="med"/>
+            <a:tailEnd type="triangle" w="med" len="med"/>
           </a:ln>
         </p:spPr>
       </p:cxnSp>
@@ -8916,6 +8581,7 @@
           <a:bodyPr lIns="90000" tIns="45000" rIns="90000" bIns="45000" anchor="ctr">
             <a:noAutofit/>
           </a:bodyPr>
+          <a:lstStyle/>
           <a:p>
             <a:pPr algn="ctr" defTabSz="914400">
               <a:lnSpc>
@@ -8986,6 +8652,7 @@
           <a:bodyPr lIns="90000" tIns="45000" rIns="90000" bIns="45000" anchor="ctr">
             <a:noAutofit/>
           </a:bodyPr>
+          <a:lstStyle/>
           <a:p>
             <a:pPr algn="ctr" defTabSz="914400">
               <a:lnSpc>
@@ -9060,6 +8727,7 @@
           <a:bodyPr lIns="90000" tIns="45000" rIns="90000" bIns="45000" anchor="ctr">
             <a:noAutofit/>
           </a:bodyPr>
+          <a:lstStyle/>
           <a:p>
             <a:pPr algn="ctr" defTabSz="914400">
               <a:lnSpc>
@@ -9134,6 +8802,7 @@
           <a:bodyPr lIns="90000" tIns="45000" rIns="90000" bIns="45000" anchor="ctr">
             <a:noAutofit/>
           </a:bodyPr>
+          <a:lstStyle/>
           <a:p>
             <a:pPr algn="ctr" defTabSz="914400">
               <a:lnSpc>
@@ -9181,7 +8850,7 @@
             <a:solidFill>
               <a:srgbClr val="000000"/>
             </a:solidFill>
-            <a:tailEnd len="med" type="triangle" w="med"/>
+            <a:tailEnd type="triangle" w="med" len="med"/>
           </a:ln>
         </p:spPr>
       </p:cxnSp>
@@ -9203,7 +8872,7 @@
             <a:solidFill>
               <a:srgbClr val="000000"/>
             </a:solidFill>
-            <a:tailEnd len="med" type="triangle" w="med"/>
+            <a:tailEnd type="triangle" w="med" len="med"/>
           </a:ln>
         </p:spPr>
       </p:cxnSp>
@@ -9250,6 +8919,7 @@
           <a:bodyPr lIns="90000" tIns="45000" rIns="90000" bIns="45000" anchor="ctr">
             <a:noAutofit/>
           </a:bodyPr>
+          <a:lstStyle/>
           <a:p>
             <a:pPr algn="ctr" defTabSz="914400">
               <a:lnSpc>
@@ -9297,7 +8967,7 @@
             <a:solidFill>
               <a:srgbClr val="000000"/>
             </a:solidFill>
-            <a:tailEnd len="med" type="triangle" w="med"/>
+            <a:tailEnd type="triangle" w="med" len="med"/>
           </a:ln>
         </p:spPr>
       </p:cxnSp>
@@ -9319,7 +8989,7 @@
             <a:solidFill>
               <a:srgbClr val="000000"/>
             </a:solidFill>
-            <a:tailEnd len="med" type="triangle" w="med"/>
+            <a:tailEnd type="triangle" w="med" len="med"/>
           </a:ln>
         </p:spPr>
       </p:cxnSp>
@@ -9341,25 +9011,20 @@
             <a:solidFill>
               <a:srgbClr val="000000"/>
             </a:solidFill>
-            <a:tailEnd len="med" type="triangle" w="med"/>
+            <a:tailEnd type="triangle" w="med" len="med"/>
           </a:ln>
         </p:spPr>
       </p:cxnSp>
     </p:spTree>
   </p:cSld>
-  <mc:AlternateContent>
-    <mc:Choice Requires="p14">
-      <p:transition spd="slow" p14:dur="2000"/>
-    </mc:Choice>
-    <mc:Fallback>
-      <p:transition spd="slow"/>
-    </mc:Fallback>
-  </mc:AlternateContent>
+  <p:clrMapOvr>
+    <a:masterClrMapping/>
+  </p:clrMapOvr>
 </p:sld>
 </file>
 
 <file path=ppt/slides/slide12.xml><?xml version="1.0" encoding="utf-8"?>
-<p:sld xmlns:a="http://schemas.openxmlformats.org/drawingml/2006/main" xmlns:p="http://schemas.openxmlformats.org/presentationml/2006/main" xmlns:r="http://schemas.openxmlformats.org/officeDocument/2006/relationships" xmlns:p14="http://schemas.microsoft.com/office/powerpoint/2010/main" xmlns:p15="http://schemas.microsoft.com/office/powerpoint/2012/main" xmlns:mc="http://schemas.openxmlformats.org/markup-compatibility/2006">
+<p:sld xmlns:a="http://schemas.openxmlformats.org/drawingml/2006/main" xmlns:r="http://schemas.openxmlformats.org/officeDocument/2006/relationships" xmlns:p="http://schemas.openxmlformats.org/presentationml/2006/main">
   <p:cSld>
     <p:spTree>
       <p:nvGrpSpPr>
@@ -9482,6 +9147,7 @@
           <a:bodyPr lIns="91440" tIns="45720" rIns="91440" bIns="45720" anchor="ctr">
             <a:noAutofit/>
           </a:bodyPr>
+          <a:lstStyle/>
           <a:p>
             <a:pPr indent="0" algn="l" defTabSz="914400">
               <a:lnSpc>
@@ -9490,7 +9156,7 @@
               <a:buNone/>
             </a:pPr>
             <a:r>
-              <a:rPr lang="sv-SE" sz="2600" b="1" u="none" strike="noStrike">
+              <a:rPr lang="sv-SE" sz="2600" b="1" u="none" strike="noStrike" dirty="0">
                 <a:solidFill>
                   <a:srgbClr val="1E3A5F"/>
                 </a:solidFill>
@@ -9502,7 +9168,7 @@
               <a:t>Problem 3 Solution </a:t>
             </a:r>
             <a:r>
-              <a:rPr lang="sv-SE" sz="2600" b="1" u="sng" strike="noStrike">
+              <a:rPr lang="sv-SE" sz="2600" b="1" u="sng" strike="noStrike" dirty="0">
                 <a:solidFill>
                   <a:srgbClr val="467886"/>
                 </a:solidFill>
@@ -9510,12 +9176,12 @@
                 <a:uFillTx/>
                 <a:latin typeface="Cambria"/>
                 <a:ea typeface="Cambria"/>
-                <a:hlinkClick r:id="rId1"/>
+                <a:hlinkClick r:id="rId3"/>
               </a:rPr>
               <a:t>https://dagitty.net/m7RVrEEnA</a:t>
             </a:r>
             <a:r>
-              <a:rPr lang="sv-SE" sz="2600" b="1" u="none" strike="noStrike">
+              <a:rPr lang="sv-SE" sz="2600" b="1" u="none" strike="noStrike" dirty="0">
                 <a:solidFill>
                   <a:srgbClr val="1E3A5F"/>
                 </a:solidFill>
@@ -9526,7 +9192,7 @@
               </a:rPr>
               <a:t> </a:t>
             </a:r>
-            <a:endParaRPr lang="en-GB" sz="2600" b="1" u="none" strike="noStrike">
+            <a:endParaRPr lang="en-GB" sz="2600" b="1" u="none" strike="noStrike" dirty="0">
               <a:solidFill>
                 <a:srgbClr val="1E3A5F"/>
               </a:solidFill>
@@ -9564,6 +9230,7 @@
           <a:bodyPr lIns="91440" tIns="45720" rIns="91440" bIns="45720" anchor="t">
             <a:noAutofit/>
           </a:bodyPr>
+          <a:lstStyle/>
           <a:p>
             <a:pPr marL="228600" indent="-228600" algn="l" defTabSz="914400">
               <a:lnSpc>
@@ -9612,43 +9279,7 @@
                 <a:latin typeface="Calibri"/>
                 <a:ea typeface="Calibri"/>
               </a:rPr>
-              <a:t> of </a:t>
-            </a:r>
-            <a:r>
-              <a:rPr lang="sv-SE" sz="2000" b="0" u="none" strike="noStrike">
-                <a:solidFill>
-                  <a:schemeClr val="dk1"/>
-                </a:solidFill>
-                <a:effectLst/>
-                <a:uFillTx/>
-                <a:latin typeface="Calibri"/>
-                <a:ea typeface="Calibri"/>
-              </a:rPr>
-              <a:t>variables to block any backdoor causal </a:t>
-            </a:r>
-            <a:r>
-              <a:rPr lang="sv-SE" sz="2000" b="0" u="none" strike="noStrike">
-                <a:solidFill>
-                  <a:schemeClr val="dk1"/>
-                </a:solidFill>
-                <a:effectLst/>
-                <a:uFillTx/>
-                <a:latin typeface="Calibri"/>
-                <a:ea typeface="Calibri"/>
-              </a:rPr>
-              <a:t>path for the estimation of the direct </a:t>
-            </a:r>
-            <a:r>
-              <a:rPr lang="sv-SE" sz="2000" b="0" u="none" strike="noStrike">
-                <a:solidFill>
-                  <a:schemeClr val="dk1"/>
-                </a:solidFill>
-                <a:effectLst/>
-                <a:uFillTx/>
-                <a:latin typeface="Calibri"/>
-                <a:ea typeface="Calibri"/>
-              </a:rPr>
-              <a:t>effect of a on b. </a:t>
+              <a:t> of variables to block any backdoor causal path for the estimation of the direct effect of a on b. </a:t>
             </a:r>
             <a:endParaRPr lang="en-GB" sz="2000" b="0" u="none" strike="noStrike">
               <a:solidFill>
@@ -9722,7 +9353,7 @@
                 <a:latin typeface="Calibri"/>
                 <a:ea typeface="Calibri"/>
               </a:rPr>
-              <a:t>&lt;number&gt;</a:t>
+              <a:t>12</a:t>
             </a:fld>
             <a:endParaRPr lang="en-GB" sz="900" b="0" u="none" strike="noStrike">
               <a:solidFill>
@@ -9753,7 +9384,7 @@
             <a:solidFill>
               <a:srgbClr val="000000"/>
             </a:solidFill>
-            <a:tailEnd len="med" type="triangle" w="med"/>
+            <a:tailEnd type="triangle" w="med" len="med"/>
           </a:ln>
         </p:spPr>
       </p:cxnSp>
@@ -9798,6 +9429,7 @@
           <a:bodyPr lIns="90000" tIns="45000" rIns="90000" bIns="45000" anchor="ctr">
             <a:noAutofit/>
           </a:bodyPr>
+          <a:lstStyle/>
           <a:p>
             <a:pPr algn="ctr" defTabSz="914400">
               <a:lnSpc>
@@ -9868,6 +9500,7 @@
           <a:bodyPr lIns="90000" tIns="45000" rIns="90000" bIns="45000" anchor="ctr">
             <a:noAutofit/>
           </a:bodyPr>
+          <a:lstStyle/>
           <a:p>
             <a:pPr algn="ctr" defTabSz="914400">
               <a:lnSpc>
@@ -9942,6 +9575,7 @@
           <a:bodyPr lIns="90000" tIns="45000" rIns="90000" bIns="45000" anchor="ctr">
             <a:noAutofit/>
           </a:bodyPr>
+          <a:lstStyle/>
           <a:p>
             <a:pPr algn="ctr" defTabSz="914400">
               <a:lnSpc>
@@ -10016,6 +9650,7 @@
           <a:bodyPr lIns="90000" tIns="45000" rIns="90000" bIns="45000" anchor="ctr">
             <a:noAutofit/>
           </a:bodyPr>
+          <a:lstStyle/>
           <a:p>
             <a:pPr algn="ctr" defTabSz="914400">
               <a:lnSpc>
@@ -10063,7 +9698,7 @@
             <a:solidFill>
               <a:srgbClr val="000000"/>
             </a:solidFill>
-            <a:tailEnd len="med" type="triangle" w="med"/>
+            <a:tailEnd type="triangle" w="med" len="med"/>
           </a:ln>
         </p:spPr>
       </p:cxnSp>
@@ -10085,7 +9720,7 @@
             <a:solidFill>
               <a:srgbClr val="000000"/>
             </a:solidFill>
-            <a:tailEnd len="med" type="triangle" w="med"/>
+            <a:tailEnd type="triangle" w="med" len="med"/>
           </a:ln>
         </p:spPr>
       </p:cxnSp>
@@ -10132,6 +9767,7 @@
           <a:bodyPr lIns="90000" tIns="45000" rIns="90000" bIns="45000" anchor="ctr">
             <a:noAutofit/>
           </a:bodyPr>
+          <a:lstStyle/>
           <a:p>
             <a:pPr algn="ctr" defTabSz="914400">
               <a:lnSpc>
@@ -10179,7 +9815,7 @@
             <a:solidFill>
               <a:srgbClr val="000000"/>
             </a:solidFill>
-            <a:tailEnd len="med" type="triangle" w="med"/>
+            <a:tailEnd type="triangle" w="med" len="med"/>
           </a:ln>
         </p:spPr>
       </p:cxnSp>
@@ -10201,7 +9837,7 @@
             <a:solidFill>
               <a:srgbClr val="000000"/>
             </a:solidFill>
-            <a:tailEnd len="med" type="triangle" w="med"/>
+            <a:tailEnd type="triangle" w="med" len="med"/>
           </a:ln>
         </p:spPr>
       </p:cxnSp>
@@ -10223,7 +9859,7 @@
             <a:solidFill>
               <a:srgbClr val="000000"/>
             </a:solidFill>
-            <a:tailEnd len="med" type="triangle" w="med"/>
+            <a:tailEnd type="triangle" w="med" len="med"/>
           </a:ln>
         </p:spPr>
       </p:cxnSp>
@@ -10247,15 +9883,22 @@
           </a:ln>
         </p:spPr>
         <p:style>
-          <a:lnRef idx="0"/>
-          <a:fillRef idx="0"/>
-          <a:effectRef idx="0"/>
+          <a:lnRef idx="0">
+            <a:scrgbClr r="0" g="0" b="0"/>
+          </a:lnRef>
+          <a:fillRef idx="0">
+            <a:scrgbClr r="0" g="0" b="0"/>
+          </a:fillRef>
+          <a:effectRef idx="0">
+            <a:scrgbClr r="0" g="0" b="0"/>
+          </a:effectRef>
           <a:fontRef idx="minor"/>
         </p:style>
         <p:txBody>
           <a:bodyPr wrap="none" lIns="90000" tIns="45000" rIns="90000" bIns="45000" anchor="t">
             <a:spAutoFit/>
           </a:bodyPr>
+          <a:lstStyle/>
           <a:p>
             <a:pPr defTabSz="914400">
               <a:lnSpc>
@@ -10303,7 +9946,7 @@
             <a:solidFill>
               <a:srgbClr val="000000"/>
             </a:solidFill>
-            <a:tailEnd len="med" type="triangle" w="med"/>
+            <a:tailEnd type="triangle" w="med" len="med"/>
           </a:ln>
         </p:spPr>
       </p:cxnSp>
@@ -10348,6 +9991,7 @@
           <a:bodyPr lIns="90000" tIns="45000" rIns="90000" bIns="45000" anchor="ctr">
             <a:noAutofit/>
           </a:bodyPr>
+          <a:lstStyle/>
           <a:p>
             <a:pPr algn="ctr" defTabSz="914400">
               <a:lnSpc>
@@ -10418,6 +10062,7 @@
           <a:bodyPr lIns="90000" tIns="45000" rIns="90000" bIns="45000" anchor="ctr">
             <a:noAutofit/>
           </a:bodyPr>
+          <a:lstStyle/>
           <a:p>
             <a:pPr algn="ctr" defTabSz="914400">
               <a:lnSpc>
@@ -10490,6 +10135,7 @@
           <a:bodyPr lIns="90000" tIns="45000" rIns="90000" bIns="45000" anchor="ctr">
             <a:noAutofit/>
           </a:bodyPr>
+          <a:lstStyle/>
           <a:p>
             <a:pPr algn="ctr" defTabSz="914400">
               <a:lnSpc>
@@ -10567,6 +10213,7 @@
           <a:bodyPr lIns="90000" tIns="45000" rIns="90000" bIns="45000" anchor="ctr">
             <a:noAutofit/>
           </a:bodyPr>
+          <a:lstStyle/>
           <a:p>
             <a:pPr algn="ctr" defTabSz="914400">
               <a:lnSpc>
@@ -10614,7 +10261,7 @@
             <a:solidFill>
               <a:srgbClr val="000000"/>
             </a:solidFill>
-            <a:tailEnd len="med" type="triangle" w="med"/>
+            <a:tailEnd type="triangle" w="med" len="med"/>
           </a:ln>
         </p:spPr>
       </p:cxnSp>
@@ -10636,7 +10283,7 @@
             <a:solidFill>
               <a:srgbClr val="000000"/>
             </a:solidFill>
-            <a:tailEnd len="med" type="triangle" w="med"/>
+            <a:tailEnd type="triangle" w="med" len="med"/>
           </a:ln>
         </p:spPr>
       </p:cxnSp>
@@ -10683,6 +10330,7 @@
           <a:bodyPr lIns="90000" tIns="45000" rIns="90000" bIns="45000" anchor="ctr">
             <a:noAutofit/>
           </a:bodyPr>
+          <a:lstStyle/>
           <a:p>
             <a:pPr algn="ctr" defTabSz="914400">
               <a:lnSpc>
@@ -10730,7 +10378,7 @@
             <a:solidFill>
               <a:srgbClr val="000000"/>
             </a:solidFill>
-            <a:tailEnd len="med" type="triangle" w="med"/>
+            <a:tailEnd type="triangle" w="med" len="med"/>
           </a:ln>
         </p:spPr>
       </p:cxnSp>
@@ -10752,7 +10400,7 @@
             <a:solidFill>
               <a:srgbClr val="000000"/>
             </a:solidFill>
-            <a:tailEnd len="med" type="triangle" w="med"/>
+            <a:tailEnd type="triangle" w="med" len="med"/>
           </a:ln>
         </p:spPr>
       </p:cxnSp>
@@ -10774,7 +10422,7 @@
             <a:solidFill>
               <a:srgbClr val="000000"/>
             </a:solidFill>
-            <a:tailEnd len="med" type="triangle" w="med"/>
+            <a:tailEnd type="triangle" w="med" len="med"/>
           </a:ln>
         </p:spPr>
       </p:cxnSp>
@@ -10798,15 +10446,22 @@
           </a:ln>
         </p:spPr>
         <p:style>
-          <a:lnRef idx="0"/>
-          <a:fillRef idx="0"/>
-          <a:effectRef idx="0"/>
+          <a:lnRef idx="0">
+            <a:scrgbClr r="0" g="0" b="0"/>
+          </a:lnRef>
+          <a:fillRef idx="0">
+            <a:scrgbClr r="0" g="0" b="0"/>
+          </a:fillRef>
+          <a:effectRef idx="0">
+            <a:scrgbClr r="0" g="0" b="0"/>
+          </a:effectRef>
           <a:fontRef idx="minor"/>
         </p:style>
         <p:txBody>
           <a:bodyPr wrap="none" lIns="90000" tIns="45000" rIns="90000" bIns="45000" anchor="t">
             <a:spAutoFit/>
           </a:bodyPr>
+          <a:lstStyle/>
           <a:p>
             <a:pPr defTabSz="914400">
               <a:lnSpc>
@@ -10838,19 +10493,14 @@
       </p:sp>
     </p:spTree>
   </p:cSld>
-  <mc:AlternateContent>
-    <mc:Choice Requires="p14">
-      <p:transition spd="slow" p14:dur="2000"/>
-    </mc:Choice>
-    <mc:Fallback>
-      <p:transition spd="slow"/>
-    </mc:Fallback>
-  </mc:AlternateContent>
+  <p:clrMapOvr>
+    <a:masterClrMapping/>
+  </p:clrMapOvr>
 </p:sld>
 </file>
 
 <file path=ppt/slides/slide13.xml><?xml version="1.0" encoding="utf-8"?>
-<p:sld xmlns:a="http://schemas.openxmlformats.org/drawingml/2006/main" xmlns:p="http://schemas.openxmlformats.org/presentationml/2006/main" xmlns:r="http://schemas.openxmlformats.org/officeDocument/2006/relationships" xmlns:p14="http://schemas.microsoft.com/office/powerpoint/2010/main" xmlns:p15="http://schemas.microsoft.com/office/powerpoint/2012/main" xmlns:mc="http://schemas.openxmlformats.org/markup-compatibility/2006">
+<p:sld xmlns:a="http://schemas.openxmlformats.org/drawingml/2006/main" xmlns:r="http://schemas.openxmlformats.org/officeDocument/2006/relationships" xmlns:p="http://schemas.openxmlformats.org/presentationml/2006/main">
   <p:cSld>
     <p:spTree>
       <p:nvGrpSpPr>
@@ -10973,6 +10623,7 @@
           <a:bodyPr lIns="91440" tIns="45720" rIns="91440" bIns="45720" anchor="ctr">
             <a:noAutofit/>
           </a:bodyPr>
+          <a:lstStyle/>
           <a:p>
             <a:pPr indent="0" algn="l" defTabSz="914400">
               <a:lnSpc>
@@ -11064,7 +10715,7 @@
                 <a:latin typeface="Calibri"/>
                 <a:ea typeface="Calibri"/>
               </a:rPr>
-              <a:t>&lt;number&gt;</a:t>
+              <a:t>13</a:t>
             </a:fld>
             <a:endParaRPr lang="en-GB" sz="900" b="0" u="none" strike="noStrike">
               <a:solidFill>
@@ -11097,15 +10748,22 @@
           </a:ln>
         </p:spPr>
         <p:style>
-          <a:lnRef idx="0"/>
-          <a:fillRef idx="0"/>
-          <a:effectRef idx="0"/>
+          <a:lnRef idx="0">
+            <a:scrgbClr r="0" g="0" b="0"/>
+          </a:lnRef>
+          <a:fillRef idx="0">
+            <a:scrgbClr r="0" g="0" b="0"/>
+          </a:fillRef>
+          <a:effectRef idx="0">
+            <a:scrgbClr r="0" g="0" b="0"/>
+          </a:effectRef>
           <a:fontRef idx="minor"/>
         </p:style>
         <p:txBody>
           <a:bodyPr lIns="90000" tIns="45000" rIns="90000" bIns="45000" anchor="t">
             <a:noAutofit/>
           </a:bodyPr>
+          <a:lstStyle/>
           <a:p>
             <a:endParaRPr lang="sv-SE" sz="2000" b="0" u="none" strike="noStrike">
               <a:solidFill>
@@ -11120,7 +10778,7 @@
       </p:sp>
       <p:sp>
         <p:nvSpPr>
-          <p:cNvPr id="232" name=""/>
+          <p:cNvPr id="232" name="Rektangel 231"/>
           <p:cNvSpPr/>
           <p:nvPr/>
         </p:nvSpPr>
@@ -11138,15 +10796,22 @@
           </a:ln>
         </p:spPr>
         <p:style>
-          <a:lnRef idx="0"/>
-          <a:fillRef idx="0"/>
-          <a:effectRef idx="0"/>
+          <a:lnRef idx="0">
+            <a:scrgbClr r="0" g="0" b="0"/>
+          </a:lnRef>
+          <a:fillRef idx="0">
+            <a:scrgbClr r="0" g="0" b="0"/>
+          </a:fillRef>
+          <a:effectRef idx="0">
+            <a:scrgbClr r="0" g="0" b="0"/>
+          </a:effectRef>
           <a:fontRef idx="minor"/>
         </p:style>
         <p:txBody>
-          <a:bodyPr numCol="1" spcCol="0" horzOverflow="overflow" anchor="t">
+          <a:bodyPr horzOverflow="overflow" numCol="1" spcCol="0" anchor="t">
             <a:spAutoFit/>
           </a:bodyPr>
+          <a:lstStyle/>
           <a:p>
             <a:pPr defTabSz="914400">
               <a:lnSpc>
@@ -11154,18 +10819,282 @@
               </a:lnSpc>
             </a:pPr>
             <a:r>
-              <a:rPr lang="sv-SE" sz="1600" b="0" u="none" strike="noStrike">
-                <a:solidFill>
-                  <a:schemeClr val="dk1"/>
-                </a:solidFill>
-                <a:effectLst/>
-                <a:uFillTx/>
-                <a:latin typeface="Calibri"/>
-                <a:ea typeface="Calibri"/>
-              </a:rPr>
-              <a:t>A software quality team studies the effect of the  introduction of an automated testing framework on post-relase defects of a large system.  They know:</a:t>
-            </a:r>
-            <a:endParaRPr lang="en-GB" sz="1600" b="0" u="none" strike="noStrike">
+              <a:rPr lang="sv-SE" sz="1600" b="0" u="none" strike="noStrike" dirty="0">
+                <a:solidFill>
+                  <a:schemeClr val="dk1"/>
+                </a:solidFill>
+                <a:effectLst/>
+                <a:uFillTx/>
+                <a:latin typeface="Calibri"/>
+                <a:ea typeface="Calibri"/>
+              </a:rPr>
+              <a:t>A software </a:t>
+            </a:r>
+            <a:r>
+              <a:rPr lang="sv-SE" sz="1600" b="0" u="none" strike="noStrike" dirty="0" err="1">
+                <a:solidFill>
+                  <a:schemeClr val="dk1"/>
+                </a:solidFill>
+                <a:effectLst/>
+                <a:uFillTx/>
+                <a:latin typeface="Calibri"/>
+                <a:ea typeface="Calibri"/>
+              </a:rPr>
+              <a:t>quality</a:t>
+            </a:r>
+            <a:r>
+              <a:rPr lang="sv-SE" sz="1600" b="0" u="none" strike="noStrike" dirty="0">
+                <a:solidFill>
+                  <a:schemeClr val="dk1"/>
+                </a:solidFill>
+                <a:effectLst/>
+                <a:uFillTx/>
+                <a:latin typeface="Calibri"/>
+                <a:ea typeface="Calibri"/>
+              </a:rPr>
+              <a:t> team studies the </a:t>
+            </a:r>
+            <a:r>
+              <a:rPr lang="sv-SE" sz="1600" b="0" u="none" strike="noStrike" dirty="0" err="1">
+                <a:solidFill>
+                  <a:schemeClr val="dk1"/>
+                </a:solidFill>
+                <a:effectLst/>
+                <a:uFillTx/>
+                <a:latin typeface="Calibri"/>
+                <a:ea typeface="Calibri"/>
+              </a:rPr>
+              <a:t>effect</a:t>
+            </a:r>
+            <a:r>
+              <a:rPr lang="sv-SE" sz="1600" b="0" u="none" strike="noStrike" dirty="0">
+                <a:solidFill>
+                  <a:schemeClr val="dk1"/>
+                </a:solidFill>
+                <a:effectLst/>
+                <a:uFillTx/>
+                <a:latin typeface="Calibri"/>
+                <a:ea typeface="Calibri"/>
+              </a:rPr>
+              <a:t> of the  </a:t>
+            </a:r>
+            <a:r>
+              <a:rPr lang="sv-SE" sz="1600" b="0" u="none" strike="noStrike" dirty="0" err="1">
+                <a:solidFill>
+                  <a:schemeClr val="dk1"/>
+                </a:solidFill>
+                <a:effectLst/>
+                <a:uFillTx/>
+                <a:latin typeface="Calibri"/>
+                <a:ea typeface="Calibri"/>
+              </a:rPr>
+              <a:t>introduction</a:t>
+            </a:r>
+            <a:r>
+              <a:rPr lang="sv-SE" sz="1600" b="0" u="none" strike="noStrike" dirty="0">
+                <a:solidFill>
+                  <a:schemeClr val="dk1"/>
+                </a:solidFill>
+                <a:effectLst/>
+                <a:uFillTx/>
+                <a:latin typeface="Calibri"/>
+                <a:ea typeface="Calibri"/>
+              </a:rPr>
+              <a:t> of an </a:t>
+            </a:r>
+            <a:r>
+              <a:rPr lang="sv-SE" sz="1600" b="0" u="none" strike="noStrike" dirty="0" err="1">
+                <a:solidFill>
+                  <a:schemeClr val="dk1"/>
+                </a:solidFill>
+                <a:effectLst/>
+                <a:uFillTx/>
+                <a:latin typeface="Calibri"/>
+                <a:ea typeface="Calibri"/>
+              </a:rPr>
+              <a:t>automated</a:t>
+            </a:r>
+            <a:r>
+              <a:rPr lang="sv-SE" sz="1600" b="0" u="none" strike="noStrike" dirty="0">
+                <a:solidFill>
+                  <a:schemeClr val="dk1"/>
+                </a:solidFill>
+                <a:effectLst/>
+                <a:uFillTx/>
+                <a:latin typeface="Calibri"/>
+                <a:ea typeface="Calibri"/>
+              </a:rPr>
+              <a:t> </a:t>
+            </a:r>
+            <a:r>
+              <a:rPr lang="sv-SE" sz="1600" b="0" u="none" strike="noStrike" dirty="0" err="1">
+                <a:solidFill>
+                  <a:schemeClr val="dk1"/>
+                </a:solidFill>
+                <a:effectLst/>
+                <a:uFillTx/>
+                <a:latin typeface="Calibri"/>
+                <a:ea typeface="Calibri"/>
+              </a:rPr>
+              <a:t>testing</a:t>
+            </a:r>
+            <a:r>
+              <a:rPr lang="sv-SE" sz="1600" b="0" u="none" strike="noStrike" dirty="0">
+                <a:solidFill>
+                  <a:schemeClr val="dk1"/>
+                </a:solidFill>
+                <a:effectLst/>
+                <a:uFillTx/>
+                <a:latin typeface="Calibri"/>
+                <a:ea typeface="Calibri"/>
+              </a:rPr>
+              <a:t> </a:t>
+            </a:r>
+            <a:r>
+              <a:rPr lang="sv-SE" sz="1600" b="0" u="none" strike="noStrike" dirty="0" err="1">
+                <a:solidFill>
+                  <a:schemeClr val="dk1"/>
+                </a:solidFill>
+                <a:effectLst/>
+                <a:uFillTx/>
+                <a:latin typeface="Calibri"/>
+                <a:ea typeface="Calibri"/>
+              </a:rPr>
+              <a:t>framework</a:t>
+            </a:r>
+            <a:r>
+              <a:rPr lang="sv-SE" sz="1600" b="0" u="none" strike="noStrike" dirty="0">
+                <a:solidFill>
+                  <a:schemeClr val="dk1"/>
+                </a:solidFill>
+                <a:effectLst/>
+                <a:uFillTx/>
+                <a:latin typeface="Calibri"/>
+                <a:ea typeface="Calibri"/>
+              </a:rPr>
+              <a:t> on post-</a:t>
+            </a:r>
+            <a:r>
+              <a:rPr lang="sv-SE" sz="1600" b="0" u="none" strike="noStrike" dirty="0" err="1">
+                <a:solidFill>
+                  <a:schemeClr val="dk1"/>
+                </a:solidFill>
+                <a:effectLst/>
+                <a:uFillTx/>
+                <a:latin typeface="Calibri"/>
+                <a:ea typeface="Calibri"/>
+              </a:rPr>
+              <a:t>relase</a:t>
+            </a:r>
+            <a:r>
+              <a:rPr lang="sv-SE" sz="1600" b="0" u="none" strike="noStrike" dirty="0">
+                <a:solidFill>
+                  <a:schemeClr val="dk1"/>
+                </a:solidFill>
+                <a:effectLst/>
+                <a:uFillTx/>
+                <a:latin typeface="Calibri"/>
+                <a:ea typeface="Calibri"/>
+              </a:rPr>
+              <a:t> </a:t>
+            </a:r>
+            <a:r>
+              <a:rPr lang="sv-SE" sz="1600" b="0" u="none" strike="noStrike" dirty="0" err="1">
+                <a:solidFill>
+                  <a:schemeClr val="dk1"/>
+                </a:solidFill>
+                <a:effectLst/>
+                <a:uFillTx/>
+                <a:latin typeface="Calibri"/>
+                <a:ea typeface="Calibri"/>
+              </a:rPr>
+              <a:t>defects</a:t>
+            </a:r>
+            <a:r>
+              <a:rPr lang="sv-SE" sz="1600" b="0" u="none" strike="noStrike" dirty="0">
+                <a:solidFill>
+                  <a:schemeClr val="dk1"/>
+                </a:solidFill>
+                <a:effectLst/>
+                <a:uFillTx/>
+                <a:latin typeface="Calibri"/>
+                <a:ea typeface="Calibri"/>
+              </a:rPr>
+              <a:t> of a </a:t>
+            </a:r>
+            <a:r>
+              <a:rPr lang="sv-SE" sz="1600" b="0" u="none" strike="noStrike" dirty="0" err="1">
+                <a:solidFill>
+                  <a:schemeClr val="dk1"/>
+                </a:solidFill>
+                <a:effectLst/>
+                <a:uFillTx/>
+                <a:latin typeface="Calibri"/>
+                <a:ea typeface="Calibri"/>
+              </a:rPr>
+              <a:t>large</a:t>
+            </a:r>
+            <a:r>
+              <a:rPr lang="sv-SE" sz="1600" b="0" u="none" strike="noStrike" dirty="0">
+                <a:solidFill>
+                  <a:schemeClr val="dk1"/>
+                </a:solidFill>
+                <a:effectLst/>
+                <a:uFillTx/>
+                <a:latin typeface="Calibri"/>
+                <a:ea typeface="Calibri"/>
+              </a:rPr>
+              <a:t> system.  </a:t>
+            </a:r>
+            <a:r>
+              <a:rPr lang="sv-SE" sz="1600" b="0" u="none" strike="noStrike" dirty="0" err="1">
+                <a:solidFill>
+                  <a:schemeClr val="dk1"/>
+                </a:solidFill>
+                <a:effectLst/>
+                <a:uFillTx/>
+                <a:latin typeface="Calibri"/>
+                <a:ea typeface="Calibri"/>
+              </a:rPr>
+              <a:t>They</a:t>
+            </a:r>
+            <a:r>
+              <a:rPr lang="sv-SE" sz="1600" b="0" u="none" strike="noStrike" dirty="0">
+                <a:solidFill>
+                  <a:schemeClr val="dk1"/>
+                </a:solidFill>
+                <a:effectLst/>
+                <a:uFillTx/>
+                <a:latin typeface="Calibri"/>
+                <a:ea typeface="Calibri"/>
+              </a:rPr>
+              <a:t> </a:t>
+            </a:r>
+            <a:r>
+              <a:rPr lang="sv-SE" sz="1600" b="0" u="none" strike="noStrike" dirty="0" err="1">
+                <a:solidFill>
+                  <a:schemeClr val="dk1"/>
+                </a:solidFill>
+                <a:effectLst/>
+                <a:uFillTx/>
+                <a:latin typeface="Calibri"/>
+                <a:ea typeface="Calibri"/>
+              </a:rPr>
+              <a:t>know</a:t>
+            </a:r>
+            <a:r>
+              <a:rPr lang="sv-SE" sz="1600" b="0" u="none" strike="noStrike" dirty="0">
+                <a:solidFill>
+                  <a:schemeClr val="dk1"/>
+                </a:solidFill>
+                <a:effectLst/>
+                <a:uFillTx/>
+                <a:latin typeface="Calibri"/>
+                <a:ea typeface="Calibri"/>
+              </a:rPr>
+              <a:t>:</a:t>
+            </a:r>
+            <a:endParaRPr lang="en-GB" sz="1600" b="0" u="none" strike="noStrike" dirty="0">
               <a:solidFill>
                 <a:srgbClr val="000000"/>
               </a:solidFill>
@@ -11180,7 +11109,7 @@
                 <a:spcPct val="100000"/>
               </a:lnSpc>
             </a:pPr>
-            <a:endParaRPr lang="en-GB" sz="1800" b="0" u="none" strike="noStrike">
+            <a:endParaRPr lang="en-GB" sz="1800" b="0" u="none" strike="noStrike" dirty="0">
               <a:solidFill>
                 <a:srgbClr val="000000"/>
               </a:solidFill>
@@ -11201,18 +11130,246 @@
               <a:buAutoNum type="arabicPeriod"/>
             </a:pPr>
             <a:r>
-              <a:rPr lang="sv-SE" sz="1600" b="0" u="none" strike="noStrike">
-                <a:solidFill>
-                  <a:schemeClr val="dk1"/>
-                </a:solidFill>
-                <a:effectLst/>
-                <a:uFillTx/>
-                <a:latin typeface="Calibri"/>
-                <a:ea typeface="Calibri"/>
-              </a:rPr>
-              <a:t>Experienced developers are more likely to adopt the framework and to write less defect-prone code. </a:t>
-            </a:r>
-            <a:endParaRPr lang="en-GB" sz="1600" b="0" u="none" strike="noStrike">
+              <a:rPr lang="sv-SE" sz="1600" b="0" u="none" strike="noStrike" dirty="0" err="1">
+                <a:solidFill>
+                  <a:schemeClr val="dk1"/>
+                </a:solidFill>
+                <a:effectLst/>
+                <a:uFillTx/>
+                <a:latin typeface="Calibri"/>
+                <a:ea typeface="Calibri"/>
+              </a:rPr>
+              <a:t>Experienced</a:t>
+            </a:r>
+            <a:r>
+              <a:rPr lang="sv-SE" sz="1600" b="0" u="none" strike="noStrike" dirty="0">
+                <a:solidFill>
+                  <a:schemeClr val="dk1"/>
+                </a:solidFill>
+                <a:effectLst/>
+                <a:uFillTx/>
+                <a:latin typeface="Calibri"/>
+                <a:ea typeface="Calibri"/>
+              </a:rPr>
+              <a:t> </a:t>
+            </a:r>
+            <a:r>
+              <a:rPr lang="sv-SE" sz="1600" b="0" u="none" strike="noStrike" dirty="0" err="1">
+                <a:solidFill>
+                  <a:schemeClr val="dk1"/>
+                </a:solidFill>
+                <a:effectLst/>
+                <a:uFillTx/>
+                <a:latin typeface="Calibri"/>
+                <a:ea typeface="Calibri"/>
+              </a:rPr>
+              <a:t>developers</a:t>
+            </a:r>
+            <a:r>
+              <a:rPr lang="sv-SE" sz="1600" b="0" u="none" strike="noStrike" dirty="0">
+                <a:solidFill>
+                  <a:schemeClr val="dk1"/>
+                </a:solidFill>
+                <a:effectLst/>
+                <a:uFillTx/>
+                <a:latin typeface="Calibri"/>
+                <a:ea typeface="Calibri"/>
+              </a:rPr>
+              <a:t> </a:t>
+            </a:r>
+            <a:r>
+              <a:rPr lang="sv-SE" sz="1600" b="0" u="none" strike="noStrike" dirty="0" err="1">
+                <a:solidFill>
+                  <a:schemeClr val="dk1"/>
+                </a:solidFill>
+                <a:effectLst/>
+                <a:uFillTx/>
+                <a:latin typeface="Calibri"/>
+                <a:ea typeface="Calibri"/>
+              </a:rPr>
+              <a:t>are</a:t>
+            </a:r>
+            <a:r>
+              <a:rPr lang="sv-SE" sz="1600" b="0" u="none" strike="noStrike" dirty="0">
+                <a:solidFill>
+                  <a:schemeClr val="dk1"/>
+                </a:solidFill>
+                <a:effectLst/>
+                <a:uFillTx/>
+                <a:latin typeface="Calibri"/>
+                <a:ea typeface="Calibri"/>
+              </a:rPr>
+              <a:t> </a:t>
+            </a:r>
+            <a:r>
+              <a:rPr lang="sv-SE" sz="1600" b="0" u="none" strike="noStrike" dirty="0" err="1">
+                <a:solidFill>
+                  <a:schemeClr val="dk1"/>
+                </a:solidFill>
+                <a:effectLst/>
+                <a:uFillTx/>
+                <a:latin typeface="Calibri"/>
+                <a:ea typeface="Calibri"/>
+              </a:rPr>
+              <a:t>more</a:t>
+            </a:r>
+            <a:r>
+              <a:rPr lang="sv-SE" sz="1600" b="0" u="none" strike="noStrike" dirty="0">
+                <a:solidFill>
+                  <a:schemeClr val="dk1"/>
+                </a:solidFill>
+                <a:effectLst/>
+                <a:uFillTx/>
+                <a:latin typeface="Calibri"/>
+                <a:ea typeface="Calibri"/>
+              </a:rPr>
+              <a:t> </a:t>
+            </a:r>
+            <a:r>
+              <a:rPr lang="sv-SE" sz="1600" b="0" u="none" strike="noStrike" dirty="0" err="1">
+                <a:solidFill>
+                  <a:schemeClr val="dk1"/>
+                </a:solidFill>
+                <a:effectLst/>
+                <a:uFillTx/>
+                <a:latin typeface="Calibri"/>
+                <a:ea typeface="Calibri"/>
+              </a:rPr>
+              <a:t>likely</a:t>
+            </a:r>
+            <a:r>
+              <a:rPr lang="sv-SE" sz="1600" b="0" u="none" strike="noStrike" dirty="0">
+                <a:solidFill>
+                  <a:schemeClr val="dk1"/>
+                </a:solidFill>
+                <a:effectLst/>
+                <a:uFillTx/>
+                <a:latin typeface="Calibri"/>
+                <a:ea typeface="Calibri"/>
+              </a:rPr>
+              <a:t> to </a:t>
+            </a:r>
+            <a:r>
+              <a:rPr lang="sv-SE" sz="1600" b="0" u="none" strike="noStrike" dirty="0" err="1">
+                <a:solidFill>
+                  <a:schemeClr val="dk1"/>
+                </a:solidFill>
+                <a:effectLst/>
+                <a:uFillTx/>
+                <a:latin typeface="Calibri"/>
+                <a:ea typeface="Calibri"/>
+              </a:rPr>
+              <a:t>adopt</a:t>
+            </a:r>
+            <a:r>
+              <a:rPr lang="sv-SE" sz="1600" b="0" u="none" strike="noStrike" dirty="0">
+                <a:solidFill>
+                  <a:schemeClr val="dk1"/>
+                </a:solidFill>
+                <a:effectLst/>
+                <a:uFillTx/>
+                <a:latin typeface="Calibri"/>
+                <a:ea typeface="Calibri"/>
+              </a:rPr>
+              <a:t> the </a:t>
+            </a:r>
+            <a:r>
+              <a:rPr lang="sv-SE" sz="1600" b="0" u="none" strike="noStrike" dirty="0" err="1">
+                <a:solidFill>
+                  <a:schemeClr val="dk1"/>
+                </a:solidFill>
+                <a:effectLst/>
+                <a:uFillTx/>
+                <a:latin typeface="Calibri"/>
+                <a:ea typeface="Calibri"/>
+              </a:rPr>
+              <a:t>framework</a:t>
+            </a:r>
+            <a:r>
+              <a:rPr lang="sv-SE" sz="1600" b="0" u="none" strike="noStrike" dirty="0">
+                <a:solidFill>
+                  <a:schemeClr val="dk1"/>
+                </a:solidFill>
+                <a:effectLst/>
+                <a:uFillTx/>
+                <a:latin typeface="Calibri"/>
+                <a:ea typeface="Calibri"/>
+              </a:rPr>
+              <a:t> and to </a:t>
+            </a:r>
+            <a:r>
+              <a:rPr lang="sv-SE" sz="1600" b="0" u="none" strike="noStrike" dirty="0" err="1">
+                <a:solidFill>
+                  <a:schemeClr val="dk1"/>
+                </a:solidFill>
+                <a:effectLst/>
+                <a:uFillTx/>
+                <a:latin typeface="Calibri"/>
+                <a:ea typeface="Calibri"/>
+              </a:rPr>
+              <a:t>write</a:t>
+            </a:r>
+            <a:r>
+              <a:rPr lang="sv-SE" sz="1600" b="0" u="none" strike="noStrike" dirty="0">
+                <a:solidFill>
+                  <a:schemeClr val="dk1"/>
+                </a:solidFill>
+                <a:effectLst/>
+                <a:uFillTx/>
+                <a:latin typeface="Calibri"/>
+                <a:ea typeface="Calibri"/>
+              </a:rPr>
+              <a:t> less </a:t>
+            </a:r>
+            <a:r>
+              <a:rPr lang="sv-SE" sz="1600" b="0" u="none" strike="noStrike" dirty="0" err="1">
+                <a:solidFill>
+                  <a:schemeClr val="dk1"/>
+                </a:solidFill>
+                <a:effectLst/>
+                <a:uFillTx/>
+                <a:latin typeface="Calibri"/>
+                <a:ea typeface="Calibri"/>
+              </a:rPr>
+              <a:t>defect-prone</a:t>
+            </a:r>
+            <a:r>
+              <a:rPr lang="sv-SE" sz="1600" b="0" u="none" strike="noStrike" dirty="0">
+                <a:solidFill>
+                  <a:schemeClr val="dk1"/>
+                </a:solidFill>
+                <a:effectLst/>
+                <a:uFillTx/>
+                <a:latin typeface="Calibri"/>
+                <a:ea typeface="Calibri"/>
+              </a:rPr>
+              <a:t> </a:t>
+            </a:r>
+            <a:r>
+              <a:rPr lang="sv-SE" sz="1600" b="0" u="none" strike="noStrike" dirty="0" err="1">
+                <a:solidFill>
+                  <a:schemeClr val="dk1"/>
+                </a:solidFill>
+                <a:effectLst/>
+                <a:uFillTx/>
+                <a:latin typeface="Calibri"/>
+                <a:ea typeface="Calibri"/>
+              </a:rPr>
+              <a:t>code</a:t>
+            </a:r>
+            <a:r>
+              <a:rPr lang="sv-SE" sz="1600" b="0" u="none" strike="noStrike" dirty="0">
+                <a:solidFill>
+                  <a:schemeClr val="dk1"/>
+                </a:solidFill>
+                <a:effectLst/>
+                <a:uFillTx/>
+                <a:latin typeface="Calibri"/>
+                <a:ea typeface="Calibri"/>
+              </a:rPr>
+              <a:t>. </a:t>
+            </a:r>
+            <a:endParaRPr lang="en-GB" sz="1600" b="0" u="none" strike="noStrike" dirty="0">
               <a:solidFill>
                 <a:srgbClr val="000000"/>
               </a:solidFill>
@@ -11233,18 +11390,186 @@
               <a:buAutoNum type="arabicPeriod"/>
             </a:pPr>
             <a:r>
-              <a:rPr lang="sv-SE" sz="1600" b="0" u="none" strike="noStrike">
-                <a:solidFill>
-                  <a:schemeClr val="dk1"/>
-                </a:solidFill>
-                <a:effectLst/>
-                <a:uFillTx/>
-                <a:latin typeface="Calibri"/>
-                <a:ea typeface="Calibri"/>
-              </a:rPr>
-              <a:t>The framework lowers defects directly, and also by raising test coverage. </a:t>
-            </a:r>
-            <a:endParaRPr lang="en-GB" sz="1600" b="0" u="none" strike="noStrike">
+              <a:rPr lang="sv-SE" sz="1600" b="0" u="none" strike="noStrike" dirty="0">
+                <a:solidFill>
+                  <a:schemeClr val="dk1"/>
+                </a:solidFill>
+                <a:effectLst/>
+                <a:uFillTx/>
+                <a:latin typeface="Calibri"/>
+                <a:ea typeface="Calibri"/>
+              </a:rPr>
+              <a:t>The </a:t>
+            </a:r>
+            <a:r>
+              <a:rPr lang="sv-SE" sz="1600" b="0" u="none" strike="noStrike" dirty="0" err="1">
+                <a:solidFill>
+                  <a:schemeClr val="dk1"/>
+                </a:solidFill>
+                <a:effectLst/>
+                <a:uFillTx/>
+                <a:latin typeface="Calibri"/>
+                <a:ea typeface="Calibri"/>
+              </a:rPr>
+              <a:t>framework</a:t>
+            </a:r>
+            <a:r>
+              <a:rPr lang="sv-SE" sz="1600" b="0" u="none" strike="noStrike" dirty="0">
+                <a:solidFill>
+                  <a:schemeClr val="dk1"/>
+                </a:solidFill>
+                <a:effectLst/>
+                <a:uFillTx/>
+                <a:latin typeface="Calibri"/>
+                <a:ea typeface="Calibri"/>
+              </a:rPr>
+              <a:t> </a:t>
+            </a:r>
+            <a:r>
+              <a:rPr lang="sv-SE" sz="1600" b="0" u="none" strike="noStrike" dirty="0" err="1">
+                <a:solidFill>
+                  <a:schemeClr val="dk1"/>
+                </a:solidFill>
+                <a:effectLst/>
+                <a:uFillTx/>
+                <a:latin typeface="Calibri"/>
+                <a:ea typeface="Calibri"/>
+              </a:rPr>
+              <a:t>lowers</a:t>
+            </a:r>
+            <a:r>
+              <a:rPr lang="sv-SE" sz="1600" b="0" u="none" strike="noStrike" dirty="0">
+                <a:solidFill>
+                  <a:schemeClr val="dk1"/>
+                </a:solidFill>
+                <a:effectLst/>
+                <a:uFillTx/>
+                <a:latin typeface="Calibri"/>
+                <a:ea typeface="Calibri"/>
+              </a:rPr>
+              <a:t> </a:t>
+            </a:r>
+            <a:r>
+              <a:rPr lang="sv-SE" sz="1600" b="0" u="none" strike="noStrike" dirty="0" err="1">
+                <a:solidFill>
+                  <a:schemeClr val="dk1"/>
+                </a:solidFill>
+                <a:effectLst/>
+                <a:uFillTx/>
+                <a:latin typeface="Calibri"/>
+                <a:ea typeface="Calibri"/>
+              </a:rPr>
+              <a:t>defects</a:t>
+            </a:r>
+            <a:r>
+              <a:rPr lang="sv-SE" sz="1600" b="0" u="none" strike="noStrike" dirty="0">
+                <a:solidFill>
+                  <a:schemeClr val="dk1"/>
+                </a:solidFill>
+                <a:effectLst/>
+                <a:uFillTx/>
+                <a:latin typeface="Calibri"/>
+                <a:ea typeface="Calibri"/>
+              </a:rPr>
+              <a:t> </a:t>
+            </a:r>
+            <a:r>
+              <a:rPr lang="sv-SE" sz="1600" b="0" u="none" strike="noStrike" dirty="0" err="1">
+                <a:solidFill>
+                  <a:schemeClr val="dk1"/>
+                </a:solidFill>
+                <a:effectLst/>
+                <a:uFillTx/>
+                <a:latin typeface="Calibri"/>
+                <a:ea typeface="Calibri"/>
+              </a:rPr>
+              <a:t>directly</a:t>
+            </a:r>
+            <a:r>
+              <a:rPr lang="sv-SE" sz="1600" b="0" u="none" strike="noStrike" dirty="0">
+                <a:solidFill>
+                  <a:schemeClr val="dk1"/>
+                </a:solidFill>
+                <a:effectLst/>
+                <a:uFillTx/>
+                <a:latin typeface="Calibri"/>
+                <a:ea typeface="Calibri"/>
+              </a:rPr>
+              <a:t>, and </a:t>
+            </a:r>
+            <a:r>
+              <a:rPr lang="sv-SE" sz="1600" b="0" u="none" strike="noStrike" dirty="0" err="1">
+                <a:solidFill>
+                  <a:schemeClr val="dk1"/>
+                </a:solidFill>
+                <a:effectLst/>
+                <a:uFillTx/>
+                <a:latin typeface="Calibri"/>
+                <a:ea typeface="Calibri"/>
+              </a:rPr>
+              <a:t>also</a:t>
+            </a:r>
+            <a:r>
+              <a:rPr lang="sv-SE" sz="1600" b="0" u="none" strike="noStrike" dirty="0">
+                <a:solidFill>
+                  <a:schemeClr val="dk1"/>
+                </a:solidFill>
+                <a:effectLst/>
+                <a:uFillTx/>
+                <a:latin typeface="Calibri"/>
+                <a:ea typeface="Calibri"/>
+              </a:rPr>
+              <a:t> by </a:t>
+            </a:r>
+            <a:r>
+              <a:rPr lang="sv-SE" sz="1600" b="0" u="none" strike="noStrike" dirty="0" err="1">
+                <a:solidFill>
+                  <a:schemeClr val="dk1"/>
+                </a:solidFill>
+                <a:effectLst/>
+                <a:uFillTx/>
+                <a:latin typeface="Calibri"/>
+                <a:ea typeface="Calibri"/>
+              </a:rPr>
+              <a:t>raising</a:t>
+            </a:r>
+            <a:r>
+              <a:rPr lang="sv-SE" sz="1600" b="0" u="none" strike="noStrike" dirty="0">
+                <a:solidFill>
+                  <a:schemeClr val="dk1"/>
+                </a:solidFill>
+                <a:effectLst/>
+                <a:uFillTx/>
+                <a:latin typeface="Calibri"/>
+                <a:ea typeface="Calibri"/>
+              </a:rPr>
+              <a:t> test </a:t>
+            </a:r>
+            <a:r>
+              <a:rPr lang="sv-SE" sz="1600" b="0" u="none" strike="noStrike" dirty="0" err="1">
+                <a:solidFill>
+                  <a:schemeClr val="dk1"/>
+                </a:solidFill>
+                <a:effectLst/>
+                <a:uFillTx/>
+                <a:latin typeface="Calibri"/>
+                <a:ea typeface="Calibri"/>
+              </a:rPr>
+              <a:t>coverage</a:t>
+            </a:r>
+            <a:r>
+              <a:rPr lang="sv-SE" sz="1600" b="0" u="none" strike="noStrike" dirty="0">
+                <a:solidFill>
+                  <a:schemeClr val="dk1"/>
+                </a:solidFill>
+                <a:effectLst/>
+                <a:uFillTx/>
+                <a:latin typeface="Calibri"/>
+                <a:ea typeface="Calibri"/>
+              </a:rPr>
+              <a:t>. </a:t>
+            </a:r>
+            <a:endParaRPr lang="en-GB" sz="1600" b="0" u="none" strike="noStrike" dirty="0">
               <a:solidFill>
                 <a:srgbClr val="000000"/>
               </a:solidFill>
@@ -11265,18 +11590,174 @@
               <a:buAutoNum type="arabicPeriod"/>
             </a:pPr>
             <a:r>
-              <a:rPr lang="sv-SE" sz="1600" b="0" u="none" strike="noStrike">
-                <a:solidFill>
-                  <a:schemeClr val="dk1"/>
-                </a:solidFill>
-                <a:effectLst/>
-                <a:uFillTx/>
-                <a:latin typeface="Calibri"/>
-                <a:ea typeface="Calibri"/>
-              </a:rPr>
-              <a:t>More complex modules tend to have more post-release defects. </a:t>
-            </a:r>
-            <a:endParaRPr lang="en-GB" sz="1600" b="0" u="none" strike="noStrike">
+              <a:rPr lang="sv-SE" sz="1600" b="0" u="none" strike="noStrike" dirty="0" err="1">
+                <a:solidFill>
+                  <a:schemeClr val="dk1"/>
+                </a:solidFill>
+                <a:effectLst/>
+                <a:uFillTx/>
+                <a:latin typeface="Calibri"/>
+                <a:ea typeface="Calibri"/>
+              </a:rPr>
+              <a:t>More</a:t>
+            </a:r>
+            <a:r>
+              <a:rPr lang="sv-SE" sz="1600" b="0" u="none" strike="noStrike" dirty="0">
+                <a:solidFill>
+                  <a:schemeClr val="dk1"/>
+                </a:solidFill>
+                <a:effectLst/>
+                <a:uFillTx/>
+                <a:latin typeface="Calibri"/>
+                <a:ea typeface="Calibri"/>
+              </a:rPr>
+              <a:t> </a:t>
+            </a:r>
+            <a:r>
+              <a:rPr lang="sv-SE" sz="1600" b="0" u="none" strike="noStrike" dirty="0" err="1">
+                <a:solidFill>
+                  <a:schemeClr val="dk1"/>
+                </a:solidFill>
+                <a:effectLst/>
+                <a:uFillTx/>
+                <a:latin typeface="Calibri"/>
+                <a:ea typeface="Calibri"/>
+              </a:rPr>
+              <a:t>complex</a:t>
+            </a:r>
+            <a:r>
+              <a:rPr lang="sv-SE" sz="1600" b="0" u="none" strike="noStrike" dirty="0">
+                <a:solidFill>
+                  <a:schemeClr val="dk1"/>
+                </a:solidFill>
+                <a:effectLst/>
+                <a:uFillTx/>
+                <a:latin typeface="Calibri"/>
+                <a:ea typeface="Calibri"/>
+              </a:rPr>
+              <a:t> </a:t>
+            </a:r>
+            <a:r>
+              <a:rPr lang="sv-SE" sz="1600" b="0" u="none" strike="noStrike" dirty="0" err="1">
+                <a:solidFill>
+                  <a:schemeClr val="dk1"/>
+                </a:solidFill>
+                <a:effectLst/>
+                <a:uFillTx/>
+                <a:latin typeface="Calibri"/>
+                <a:ea typeface="Calibri"/>
+              </a:rPr>
+              <a:t>modules</a:t>
+            </a:r>
+            <a:r>
+              <a:rPr lang="sv-SE" sz="1600" b="0" u="none" strike="noStrike" dirty="0">
+                <a:solidFill>
+                  <a:schemeClr val="dk1"/>
+                </a:solidFill>
+                <a:effectLst/>
+                <a:uFillTx/>
+                <a:latin typeface="Calibri"/>
+                <a:ea typeface="Calibri"/>
+              </a:rPr>
+              <a:t> </a:t>
+            </a:r>
+            <a:r>
+              <a:rPr lang="sv-SE" sz="1600" b="0" u="none" strike="noStrike" dirty="0" err="1">
+                <a:solidFill>
+                  <a:schemeClr val="dk1"/>
+                </a:solidFill>
+                <a:effectLst/>
+                <a:uFillTx/>
+                <a:latin typeface="Calibri"/>
+                <a:ea typeface="Calibri"/>
+              </a:rPr>
+              <a:t>tend</a:t>
+            </a:r>
+            <a:r>
+              <a:rPr lang="sv-SE" sz="1600" b="0" u="none" strike="noStrike" dirty="0">
+                <a:solidFill>
+                  <a:schemeClr val="dk1"/>
+                </a:solidFill>
+                <a:effectLst/>
+                <a:uFillTx/>
+                <a:latin typeface="Calibri"/>
+                <a:ea typeface="Calibri"/>
+              </a:rPr>
+              <a:t> to </a:t>
+            </a:r>
+            <a:r>
+              <a:rPr lang="sv-SE" sz="1600" b="0" u="none" strike="noStrike" dirty="0" err="1">
+                <a:solidFill>
+                  <a:schemeClr val="dk1"/>
+                </a:solidFill>
+                <a:effectLst/>
+                <a:uFillTx/>
+                <a:latin typeface="Calibri"/>
+                <a:ea typeface="Calibri"/>
+              </a:rPr>
+              <a:t>have</a:t>
+            </a:r>
+            <a:r>
+              <a:rPr lang="sv-SE" sz="1600" b="0" u="none" strike="noStrike" dirty="0">
+                <a:solidFill>
+                  <a:schemeClr val="dk1"/>
+                </a:solidFill>
+                <a:effectLst/>
+                <a:uFillTx/>
+                <a:latin typeface="Calibri"/>
+                <a:ea typeface="Calibri"/>
+              </a:rPr>
+              <a:t> </a:t>
+            </a:r>
+            <a:r>
+              <a:rPr lang="sv-SE" sz="1600" b="0" u="none" strike="noStrike" dirty="0" err="1">
+                <a:solidFill>
+                  <a:schemeClr val="dk1"/>
+                </a:solidFill>
+                <a:effectLst/>
+                <a:uFillTx/>
+                <a:latin typeface="Calibri"/>
+                <a:ea typeface="Calibri"/>
+              </a:rPr>
+              <a:t>more</a:t>
+            </a:r>
+            <a:r>
+              <a:rPr lang="sv-SE" sz="1600" b="0" u="none" strike="noStrike" dirty="0">
+                <a:solidFill>
+                  <a:schemeClr val="dk1"/>
+                </a:solidFill>
+                <a:effectLst/>
+                <a:uFillTx/>
+                <a:latin typeface="Calibri"/>
+                <a:ea typeface="Calibri"/>
+              </a:rPr>
+              <a:t> post-release </a:t>
+            </a:r>
+            <a:r>
+              <a:rPr lang="sv-SE" sz="1600" b="0" u="none" strike="noStrike" dirty="0" err="1">
+                <a:solidFill>
+                  <a:schemeClr val="dk1"/>
+                </a:solidFill>
+                <a:effectLst/>
+                <a:uFillTx/>
+                <a:latin typeface="Calibri"/>
+                <a:ea typeface="Calibri"/>
+              </a:rPr>
+              <a:t>defects</a:t>
+            </a:r>
+            <a:r>
+              <a:rPr lang="sv-SE" sz="1600" b="0" u="none" strike="noStrike" dirty="0">
+                <a:solidFill>
+                  <a:schemeClr val="dk1"/>
+                </a:solidFill>
+                <a:effectLst/>
+                <a:uFillTx/>
+                <a:latin typeface="Calibri"/>
+                <a:ea typeface="Calibri"/>
+              </a:rPr>
+              <a:t>. </a:t>
+            </a:r>
+            <a:endParaRPr lang="en-GB" sz="1600" b="0" u="none" strike="noStrike" dirty="0">
               <a:solidFill>
                 <a:srgbClr val="000000"/>
               </a:solidFill>
@@ -11297,18 +11778,198 @@
               <a:buAutoNum type="arabicPeriod"/>
             </a:pPr>
             <a:r>
-              <a:rPr lang="sv-SE" sz="1600" b="0" u="none" strike="noStrike">
-                <a:solidFill>
-                  <a:schemeClr val="dk1"/>
-                </a:solidFill>
-                <a:effectLst/>
-                <a:uFillTx/>
-                <a:latin typeface="Calibri"/>
-                <a:ea typeface="Calibri"/>
-              </a:rPr>
-              <a:t>Both the framework and module complexity raise the number of issues logged. </a:t>
-            </a:r>
-            <a:endParaRPr lang="en-GB" sz="1600" b="0" u="none" strike="noStrike">
+              <a:rPr lang="sv-SE" sz="1600" b="0" u="none" strike="noStrike" dirty="0" err="1">
+                <a:solidFill>
+                  <a:schemeClr val="dk1"/>
+                </a:solidFill>
+                <a:effectLst/>
+                <a:uFillTx/>
+                <a:latin typeface="Calibri"/>
+                <a:ea typeface="Calibri"/>
+              </a:rPr>
+              <a:t>Both</a:t>
+            </a:r>
+            <a:r>
+              <a:rPr lang="sv-SE" sz="1600" b="0" u="none" strike="noStrike" dirty="0">
+                <a:solidFill>
+                  <a:schemeClr val="dk1"/>
+                </a:solidFill>
+                <a:effectLst/>
+                <a:uFillTx/>
+                <a:latin typeface="Calibri"/>
+                <a:ea typeface="Calibri"/>
+              </a:rPr>
+              <a:t> the </a:t>
+            </a:r>
+            <a:r>
+              <a:rPr lang="sv-SE" sz="1600" b="0" u="none" strike="noStrike" dirty="0" err="1">
+                <a:solidFill>
+                  <a:schemeClr val="dk1"/>
+                </a:solidFill>
+                <a:effectLst/>
+                <a:uFillTx/>
+                <a:latin typeface="Calibri"/>
+                <a:ea typeface="Calibri"/>
+              </a:rPr>
+              <a:t>framework</a:t>
+            </a:r>
+            <a:r>
+              <a:rPr lang="sv-SE" sz="1600" b="0" u="none" strike="noStrike" dirty="0">
+                <a:solidFill>
+                  <a:schemeClr val="dk1"/>
+                </a:solidFill>
+                <a:effectLst/>
+                <a:uFillTx/>
+                <a:latin typeface="Calibri"/>
+                <a:ea typeface="Calibri"/>
+              </a:rPr>
+              <a:t> and </a:t>
+            </a:r>
+            <a:r>
+              <a:rPr lang="sv-SE" sz="1600" b="0" u="none" strike="noStrike" dirty="0" err="1">
+                <a:solidFill>
+                  <a:schemeClr val="dk1"/>
+                </a:solidFill>
+                <a:effectLst/>
+                <a:uFillTx/>
+                <a:latin typeface="Calibri"/>
+                <a:ea typeface="Calibri"/>
+              </a:rPr>
+              <a:t>module</a:t>
+            </a:r>
+            <a:r>
+              <a:rPr lang="sv-SE" sz="1600" b="0" u="none" strike="noStrike" dirty="0">
+                <a:solidFill>
+                  <a:schemeClr val="dk1"/>
+                </a:solidFill>
+                <a:effectLst/>
+                <a:uFillTx/>
+                <a:latin typeface="Calibri"/>
+                <a:ea typeface="Calibri"/>
+              </a:rPr>
+              <a:t> </a:t>
+            </a:r>
+            <a:r>
+              <a:rPr lang="sv-SE" sz="1600" b="0" u="none" strike="noStrike" dirty="0" err="1">
+                <a:solidFill>
+                  <a:schemeClr val="dk1"/>
+                </a:solidFill>
+                <a:effectLst/>
+                <a:uFillTx/>
+                <a:latin typeface="Calibri"/>
+                <a:ea typeface="Calibri"/>
+              </a:rPr>
+              <a:t>complexity</a:t>
+            </a:r>
+            <a:r>
+              <a:rPr lang="sv-SE" sz="1600" b="0" u="none" strike="noStrike" dirty="0">
+                <a:solidFill>
+                  <a:schemeClr val="dk1"/>
+                </a:solidFill>
+                <a:effectLst/>
+                <a:uFillTx/>
+                <a:latin typeface="Calibri"/>
+                <a:ea typeface="Calibri"/>
+              </a:rPr>
+              <a:t> </a:t>
+            </a:r>
+            <a:r>
+              <a:rPr lang="sv-SE" sz="1600" b="0" u="none" strike="noStrike" dirty="0" err="1">
+                <a:solidFill>
+                  <a:schemeClr val="dk1"/>
+                </a:solidFill>
+                <a:effectLst/>
+                <a:uFillTx/>
+                <a:latin typeface="Calibri"/>
+                <a:ea typeface="Calibri"/>
+              </a:rPr>
+              <a:t>raise</a:t>
+            </a:r>
+            <a:r>
+              <a:rPr lang="sv-SE" sz="1600" b="0" u="none" strike="noStrike" dirty="0">
+                <a:solidFill>
+                  <a:schemeClr val="dk1"/>
+                </a:solidFill>
+                <a:effectLst/>
+                <a:uFillTx/>
+                <a:latin typeface="Calibri"/>
+                <a:ea typeface="Calibri"/>
+              </a:rPr>
+              <a:t> the </a:t>
+            </a:r>
+            <a:r>
+              <a:rPr lang="sv-SE" sz="1600" b="0" u="none" strike="noStrike" dirty="0" err="1">
+                <a:solidFill>
+                  <a:schemeClr val="dk1"/>
+                </a:solidFill>
+                <a:effectLst/>
+                <a:uFillTx/>
+                <a:latin typeface="Calibri"/>
+                <a:ea typeface="Calibri"/>
+              </a:rPr>
+              <a:t>number</a:t>
+            </a:r>
+            <a:r>
+              <a:rPr lang="sv-SE" sz="1600" b="0" u="none" strike="noStrike" dirty="0">
+                <a:solidFill>
+                  <a:schemeClr val="dk1"/>
+                </a:solidFill>
+                <a:effectLst/>
+                <a:uFillTx/>
+                <a:latin typeface="Calibri"/>
+                <a:ea typeface="Calibri"/>
+              </a:rPr>
+              <a:t> of </a:t>
+            </a:r>
+            <a:r>
+              <a:rPr lang="sv-SE" sz="1600" b="0" u="none" strike="noStrike" dirty="0" err="1">
+                <a:solidFill>
+                  <a:schemeClr val="dk1"/>
+                </a:solidFill>
+                <a:effectLst/>
+                <a:uFillTx/>
+                <a:latin typeface="Calibri"/>
+                <a:ea typeface="Calibri"/>
+              </a:rPr>
+              <a:t>issues</a:t>
+            </a:r>
+            <a:r>
+              <a:rPr lang="sv-SE" sz="1600" b="0" u="none" strike="noStrike" dirty="0">
+                <a:solidFill>
+                  <a:schemeClr val="dk1"/>
+                </a:solidFill>
+                <a:effectLst/>
+                <a:uFillTx/>
+                <a:latin typeface="Calibri"/>
+                <a:ea typeface="Calibri"/>
+              </a:rPr>
+              <a:t> </a:t>
+            </a:r>
+            <a:r>
+              <a:rPr lang="sv-SE" sz="1600" b="0" u="none" strike="noStrike" dirty="0" err="1">
+                <a:solidFill>
+                  <a:schemeClr val="dk1"/>
+                </a:solidFill>
+                <a:effectLst/>
+                <a:uFillTx/>
+                <a:latin typeface="Calibri"/>
+                <a:ea typeface="Calibri"/>
+              </a:rPr>
+              <a:t>logged</a:t>
+            </a:r>
+            <a:r>
+              <a:rPr lang="sv-SE" sz="1600" b="0" u="none" strike="noStrike" dirty="0">
+                <a:solidFill>
+                  <a:schemeClr val="dk1"/>
+                </a:solidFill>
+                <a:effectLst/>
+                <a:uFillTx/>
+                <a:latin typeface="Calibri"/>
+                <a:ea typeface="Calibri"/>
+              </a:rPr>
+              <a:t>. </a:t>
+            </a:r>
+            <a:endParaRPr lang="en-GB" sz="1600" b="0" u="none" strike="noStrike" dirty="0">
               <a:solidFill>
                 <a:srgbClr val="000000"/>
               </a:solidFill>
@@ -11327,8 +11988,8 @@
         </p:nvSpPr>
         <p:spPr>
           <a:xfrm>
-            <a:off x="5231520" y="1174680"/>
-            <a:ext cx="3759480" cy="3729600"/>
+            <a:off x="5221800" y="1533420"/>
+            <a:ext cx="3759480" cy="3120300"/>
           </a:xfrm>
           <a:prstGeom prst="rect">
             <a:avLst/>
@@ -11343,17 +12004,24 @@
           </a:ln>
         </p:spPr>
         <p:style>
-          <a:lnRef idx="0"/>
-          <a:fillRef idx="0"/>
-          <a:effectRef idx="0"/>
+          <a:lnRef idx="0">
+            <a:scrgbClr r="0" g="0" b="0"/>
+          </a:lnRef>
+          <a:fillRef idx="0">
+            <a:scrgbClr r="0" g="0" b="0"/>
+          </a:fillRef>
+          <a:effectRef idx="0">
+            <a:scrgbClr r="0" g="0" b="0"/>
+          </a:effectRef>
           <a:fontRef idx="minor"/>
         </p:style>
         <p:txBody>
           <a:bodyPr lIns="90000" tIns="45000" rIns="90000" bIns="45000" anchor="t">
             <a:noAutofit/>
           </a:bodyPr>
-          <a:p>
-            <a:pPr defTabSz="914400">
+          <a:lstStyle/>
+          <a:p>
+            <a:pPr>
               <a:lnSpc>
                 <a:spcPct val="90000"/>
               </a:lnSpc>
@@ -11365,36 +12033,62 @@
               </a:tabLst>
             </a:pPr>
             <a:r>
-              <a:rPr lang="en-US" sz="2000" b="0" u="none" strike="noStrike">
-                <a:solidFill>
-                  <a:schemeClr val="dk1"/>
-                </a:solidFill>
-                <a:effectLst/>
-                <a:uFillTx/>
-                <a:latin typeface="Aptos"/>
-                <a:ea typeface="Arial"/>
-              </a:rPr>
-              <a:t>Draw a DAG including </a:t>
-            </a:r>
-            <a:r>
-              <a:rPr lang="en-US" sz="2000" b="0" u="none" strike="noStrike">
-                <a:solidFill>
-                  <a:schemeClr val="dk1"/>
-                </a:solidFill>
-                <a:effectLst/>
-                <a:uFillTx/>
-                <a:latin typeface="Aptos"/>
-                <a:ea typeface="Arial"/>
-              </a:rPr>
-              <a:t>the variables: .</a:t>
-            </a:r>
-            <a:endParaRPr lang="en-GB" sz="2000" b="0" u="none" strike="noStrike">
+              <a:rPr lang="en-US" b="0" u="none" strike="noStrike" dirty="0">
+                <a:solidFill>
+                  <a:schemeClr val="dk1"/>
+                </a:solidFill>
+                <a:effectLst/>
+                <a:uFillTx/>
+                <a:latin typeface="Calibri" panose="020F0502020204030204" pitchFamily="34" charset="0"/>
+                <a:ea typeface="Calibri" panose="020F0502020204030204" pitchFamily="34" charset="0"/>
+                <a:cs typeface="Calibri" panose="020F0502020204030204" pitchFamily="34" charset="0"/>
+              </a:rPr>
+              <a:t>Draw a DAG including the variables: Autom. Testing, </a:t>
+            </a:r>
+            <a:r>
+              <a:rPr lang="en-US" dirty="0">
+                <a:solidFill>
+                  <a:schemeClr val="dk1"/>
+                </a:solidFill>
+                <a:latin typeface="Calibri" panose="020F0502020204030204" pitchFamily="34" charset="0"/>
+                <a:ea typeface="Calibri" panose="020F0502020204030204" pitchFamily="34" charset="0"/>
+                <a:cs typeface="Calibri" panose="020F0502020204030204" pitchFamily="34" charset="0"/>
+              </a:rPr>
+              <a:t>Post-Release Defects, </a:t>
+            </a:r>
+            <a:r>
+              <a:rPr lang="en-US" b="0" u="none" strike="noStrike" dirty="0">
+                <a:solidFill>
+                  <a:schemeClr val="dk1"/>
+                </a:solidFill>
+                <a:effectLst/>
+                <a:uFillTx/>
+                <a:latin typeface="Calibri" panose="020F0502020204030204" pitchFamily="34" charset="0"/>
+                <a:ea typeface="Calibri" panose="020F0502020204030204" pitchFamily="34" charset="0"/>
+                <a:cs typeface="Calibri" panose="020F0502020204030204" pitchFamily="34" charset="0"/>
+              </a:rPr>
+              <a:t>Developer Experience, </a:t>
+            </a:r>
+            <a:r>
+              <a:rPr lang="en-US" dirty="0">
+                <a:solidFill>
+                  <a:schemeClr val="dk1"/>
+                </a:solidFill>
+                <a:latin typeface="Calibri" panose="020F0502020204030204" pitchFamily="34" charset="0"/>
+                <a:ea typeface="Calibri" panose="020F0502020204030204" pitchFamily="34" charset="0"/>
+                <a:cs typeface="Calibri" panose="020F0502020204030204" pitchFamily="34" charset="0"/>
+              </a:rPr>
+              <a:t>Test Coverage, Logged Issues, Code Complexity.</a:t>
+            </a:r>
+            <a:endParaRPr lang="en-GB" b="0" u="none" strike="noStrike" dirty="0">
               <a:solidFill>
                 <a:srgbClr val="000000"/>
               </a:solidFill>
               <a:effectLst/>
               <a:uFillTx/>
-              <a:latin typeface="Arial"/>
+              <a:latin typeface="Calibri" panose="020F0502020204030204" pitchFamily="34" charset="0"/>
+              <a:ea typeface="Calibri" panose="020F0502020204030204" pitchFamily="34" charset="0"/>
+              <a:cs typeface="Calibri" panose="020F0502020204030204" pitchFamily="34" charset="0"/>
             </a:endParaRPr>
           </a:p>
           <a:p>
@@ -11410,36 +12104,40 @@
               </a:tabLst>
             </a:pPr>
             <a:r>
-              <a:rPr lang="en-US" sz="1800" b="0" u="none" strike="noStrike">
-                <a:solidFill>
-                  <a:schemeClr val="dk1"/>
-                </a:solidFill>
-                <a:effectLst/>
-                <a:uFillTx/>
-                <a:latin typeface="Aptos"/>
-                <a:ea typeface="Arial"/>
+              <a:rPr lang="en-US" sz="1600" b="0" u="none" strike="noStrike" dirty="0">
+                <a:solidFill>
+                  <a:schemeClr val="dk1"/>
+                </a:solidFill>
+                <a:effectLst/>
+                <a:uFillTx/>
+                <a:latin typeface="Calibri" panose="020F0502020204030204" pitchFamily="34" charset="0"/>
+                <a:ea typeface="Calibri" panose="020F0502020204030204" pitchFamily="34" charset="0"/>
+                <a:cs typeface="Calibri" panose="020F0502020204030204" pitchFamily="34" charset="0"/>
               </a:rPr>
               <a:t>Identify</a:t>
             </a:r>
             <a:r>
-              <a:rPr lang="sv-SE" sz="1800" b="0" u="none" strike="noStrike">
-                <a:solidFill>
-                  <a:schemeClr val="dk1"/>
-                </a:solidFill>
-                <a:effectLst/>
-                <a:uFillTx/>
-                <a:latin typeface="Aptos"/>
-                <a:ea typeface="Arial"/>
+              <a:rPr lang="sv-SE" sz="1600" b="0" u="none" strike="noStrike" dirty="0">
+                <a:solidFill>
+                  <a:schemeClr val="dk1"/>
+                </a:solidFill>
+                <a:effectLst/>
+                <a:uFillTx/>
+                <a:latin typeface="Calibri" panose="020F0502020204030204" pitchFamily="34" charset="0"/>
+                <a:ea typeface="Calibri" panose="020F0502020204030204" pitchFamily="34" charset="0"/>
+                <a:cs typeface="Calibri" panose="020F0502020204030204" pitchFamily="34" charset="0"/>
               </a:rPr>
               <a:t>:</a:t>
             </a:r>
-            <a:endParaRPr lang="en-GB" sz="1800" b="0" u="none" strike="noStrike">
+            <a:endParaRPr lang="en-GB" sz="1600" b="0" u="none" strike="noStrike" dirty="0">
               <a:solidFill>
                 <a:srgbClr val="000000"/>
               </a:solidFill>
               <a:effectLst/>
               <a:uFillTx/>
-              <a:latin typeface="Arial"/>
+              <a:latin typeface="Calibri" panose="020F0502020204030204" pitchFamily="34" charset="0"/>
+              <a:ea typeface="Calibri" panose="020F0502020204030204" pitchFamily="34" charset="0"/>
+              <a:cs typeface="Calibri" panose="020F0502020204030204" pitchFamily="34" charset="0"/>
             </a:endParaRPr>
           </a:p>
           <a:p>
@@ -11453,43 +12151,125 @@
               <a:buClr>
                 <a:srgbClr val="000000"/>
               </a:buClr>
-              <a:buFont typeface="Aptos Display"/>
-              <a:buAutoNum type="arabicPeriod"/>
+              <a:buFont typeface="Arial" panose="020B0604020202020204" pitchFamily="34" charset="0"/>
+              <a:buChar char="•"/>
               <a:tabLst>
                 <a:tab pos="0" algn="l"/>
               </a:tabLst>
             </a:pPr>
             <a:r>
-              <a:rPr lang="sv-SE" sz="1800" b="0" u="none" strike="noStrike">
-                <a:solidFill>
-                  <a:schemeClr val="dk1"/>
-                </a:solidFill>
-                <a:effectLst/>
-                <a:uFillTx/>
-                <a:latin typeface="Aptos"/>
-                <a:ea typeface="Arial"/>
-              </a:rPr>
-              <a:t>Which variables are </a:t>
-            </a:r>
-            <a:r>
-              <a:rPr lang="sv-SE" sz="1800" b="0" u="none" strike="noStrike">
-                <a:solidFill>
-                  <a:schemeClr val="dk1"/>
-                </a:solidFill>
-                <a:effectLst/>
-                <a:uFillTx/>
-                <a:latin typeface="Aptos"/>
-                <a:ea typeface="Arial"/>
-              </a:rPr>
-              <a:t>confounders;</a:t>
-            </a:r>
-            <a:endParaRPr lang="en-GB" sz="1800" b="0" u="none" strike="noStrike">
+              <a:rPr lang="sv-SE" sz="1600" b="0" u="none" strike="noStrike" dirty="0" err="1">
+                <a:solidFill>
+                  <a:schemeClr val="dk1"/>
+                </a:solidFill>
+                <a:effectLst/>
+                <a:uFillTx/>
+                <a:latin typeface="Calibri" panose="020F0502020204030204" pitchFamily="34" charset="0"/>
+                <a:ea typeface="Calibri" panose="020F0502020204030204" pitchFamily="34" charset="0"/>
+                <a:cs typeface="Calibri" panose="020F0502020204030204" pitchFamily="34" charset="0"/>
+              </a:rPr>
+              <a:t>Which</a:t>
+            </a:r>
+            <a:r>
+              <a:rPr lang="sv-SE" sz="1600" b="0" u="none" strike="noStrike" dirty="0">
+                <a:solidFill>
+                  <a:schemeClr val="dk1"/>
+                </a:solidFill>
+                <a:effectLst/>
+                <a:uFillTx/>
+                <a:latin typeface="Calibri" panose="020F0502020204030204" pitchFamily="34" charset="0"/>
+                <a:ea typeface="Calibri" panose="020F0502020204030204" pitchFamily="34" charset="0"/>
+                <a:cs typeface="Calibri" panose="020F0502020204030204" pitchFamily="34" charset="0"/>
+              </a:rPr>
+              <a:t> </a:t>
+            </a:r>
+            <a:r>
+              <a:rPr lang="sv-SE" sz="1600" b="0" u="none" strike="noStrike" dirty="0" err="1">
+                <a:solidFill>
+                  <a:schemeClr val="dk1"/>
+                </a:solidFill>
+                <a:effectLst/>
+                <a:uFillTx/>
+                <a:latin typeface="Calibri" panose="020F0502020204030204" pitchFamily="34" charset="0"/>
+                <a:ea typeface="Calibri" panose="020F0502020204030204" pitchFamily="34" charset="0"/>
+                <a:cs typeface="Calibri" panose="020F0502020204030204" pitchFamily="34" charset="0"/>
+              </a:rPr>
+              <a:t>variables</a:t>
+            </a:r>
+            <a:r>
+              <a:rPr lang="sv-SE" sz="1600" b="0" u="none" strike="noStrike" dirty="0">
+                <a:solidFill>
+                  <a:schemeClr val="dk1"/>
+                </a:solidFill>
+                <a:effectLst/>
+                <a:uFillTx/>
+                <a:latin typeface="Calibri" panose="020F0502020204030204" pitchFamily="34" charset="0"/>
+                <a:ea typeface="Calibri" panose="020F0502020204030204" pitchFamily="34" charset="0"/>
+                <a:cs typeface="Calibri" panose="020F0502020204030204" pitchFamily="34" charset="0"/>
+              </a:rPr>
+              <a:t> </a:t>
+            </a:r>
+            <a:r>
+              <a:rPr lang="sv-SE" sz="1600" b="0" u="none" strike="noStrike" dirty="0" err="1">
+                <a:solidFill>
+                  <a:schemeClr val="dk1"/>
+                </a:solidFill>
+                <a:effectLst/>
+                <a:uFillTx/>
+                <a:latin typeface="Calibri" panose="020F0502020204030204" pitchFamily="34" charset="0"/>
+                <a:ea typeface="Calibri" panose="020F0502020204030204" pitchFamily="34" charset="0"/>
+                <a:cs typeface="Calibri" panose="020F0502020204030204" pitchFamily="34" charset="0"/>
+              </a:rPr>
+              <a:t>are</a:t>
+            </a:r>
+            <a:r>
+              <a:rPr lang="sv-SE" sz="1600" b="0" u="none" strike="noStrike" dirty="0">
+                <a:solidFill>
+                  <a:schemeClr val="dk1"/>
+                </a:solidFill>
+                <a:effectLst/>
+                <a:uFillTx/>
+                <a:latin typeface="Calibri" panose="020F0502020204030204" pitchFamily="34" charset="0"/>
+                <a:ea typeface="Calibri" panose="020F0502020204030204" pitchFamily="34" charset="0"/>
+                <a:cs typeface="Calibri" panose="020F0502020204030204" pitchFamily="34" charset="0"/>
+              </a:rPr>
+              <a:t> </a:t>
+            </a:r>
+            <a:r>
+              <a:rPr lang="sv-SE" sz="1600" b="0" u="none" strike="noStrike" dirty="0" err="1">
+                <a:solidFill>
+                  <a:schemeClr val="dk1"/>
+                </a:solidFill>
+                <a:effectLst/>
+                <a:uFillTx/>
+                <a:latin typeface="Calibri" panose="020F0502020204030204" pitchFamily="34" charset="0"/>
+                <a:ea typeface="Calibri" panose="020F0502020204030204" pitchFamily="34" charset="0"/>
+                <a:cs typeface="Calibri" panose="020F0502020204030204" pitchFamily="34" charset="0"/>
+              </a:rPr>
+              <a:t>confounders</a:t>
+            </a:r>
+            <a:r>
+              <a:rPr lang="sv-SE" sz="1600" b="0" u="none" strike="noStrike" dirty="0">
+                <a:solidFill>
+                  <a:schemeClr val="dk1"/>
+                </a:solidFill>
+                <a:effectLst/>
+                <a:uFillTx/>
+                <a:latin typeface="Calibri" panose="020F0502020204030204" pitchFamily="34" charset="0"/>
+                <a:ea typeface="Calibri" panose="020F0502020204030204" pitchFamily="34" charset="0"/>
+                <a:cs typeface="Calibri" panose="020F0502020204030204" pitchFamily="34" charset="0"/>
+              </a:rPr>
+              <a:t>;</a:t>
+            </a:r>
+            <a:endParaRPr lang="en-GB" sz="1600" b="0" u="none" strike="noStrike" dirty="0">
               <a:solidFill>
                 <a:srgbClr val="000000"/>
               </a:solidFill>
               <a:effectLst/>
               <a:uFillTx/>
-              <a:latin typeface="Arial"/>
+              <a:latin typeface="Calibri" panose="020F0502020204030204" pitchFamily="34" charset="0"/>
+              <a:ea typeface="Calibri" panose="020F0502020204030204" pitchFamily="34" charset="0"/>
+              <a:cs typeface="Calibri" panose="020F0502020204030204" pitchFamily="34" charset="0"/>
             </a:endParaRPr>
           </a:p>
           <a:p>
@@ -11503,31 +12283,99 @@
               <a:buClr>
                 <a:srgbClr val="000000"/>
               </a:buClr>
-              <a:buFont typeface="Aptos Display"/>
-              <a:buAutoNum type="arabicPeriod"/>
+              <a:buFont typeface="Arial" panose="020B0604020202020204" pitchFamily="34" charset="0"/>
+              <a:buChar char="•"/>
               <a:tabLst>
                 <a:tab pos="0" algn="l"/>
               </a:tabLst>
             </a:pPr>
             <a:r>
-              <a:rPr lang="sv-SE" sz="1800" b="0" u="none" strike="noStrike">
-                <a:solidFill>
-                  <a:schemeClr val="dk1"/>
-                </a:solidFill>
-                <a:effectLst/>
-                <a:uFillTx/>
-                <a:latin typeface="Aptos"/>
-                <a:ea typeface="Arial"/>
-              </a:rPr>
-              <a:t>Which are mediators;</a:t>
-            </a:r>
-            <a:endParaRPr lang="en-GB" sz="1800" b="0" u="none" strike="noStrike">
+              <a:rPr lang="sv-SE" sz="1600" b="0" u="none" strike="noStrike" dirty="0" err="1">
+                <a:solidFill>
+                  <a:schemeClr val="dk1"/>
+                </a:solidFill>
+                <a:effectLst/>
+                <a:uFillTx/>
+                <a:latin typeface="Calibri" panose="020F0502020204030204" pitchFamily="34" charset="0"/>
+                <a:ea typeface="Calibri" panose="020F0502020204030204" pitchFamily="34" charset="0"/>
+                <a:cs typeface="Calibri" panose="020F0502020204030204" pitchFamily="34" charset="0"/>
+              </a:rPr>
+              <a:t>Which</a:t>
+            </a:r>
+            <a:r>
+              <a:rPr lang="sv-SE" sz="1600" b="0" u="none" strike="noStrike" dirty="0">
+                <a:solidFill>
+                  <a:schemeClr val="dk1"/>
+                </a:solidFill>
+                <a:effectLst/>
+                <a:uFillTx/>
+                <a:latin typeface="Calibri" panose="020F0502020204030204" pitchFamily="34" charset="0"/>
+                <a:ea typeface="Calibri" panose="020F0502020204030204" pitchFamily="34" charset="0"/>
+                <a:cs typeface="Calibri" panose="020F0502020204030204" pitchFamily="34" charset="0"/>
+              </a:rPr>
+              <a:t> </a:t>
+            </a:r>
+            <a:r>
+              <a:rPr lang="sv-SE" sz="1600" b="0" u="none" strike="noStrike" dirty="0" err="1">
+                <a:solidFill>
+                  <a:schemeClr val="dk1"/>
+                </a:solidFill>
+                <a:effectLst/>
+                <a:uFillTx/>
+                <a:latin typeface="Calibri" panose="020F0502020204030204" pitchFamily="34" charset="0"/>
+                <a:ea typeface="Calibri" panose="020F0502020204030204" pitchFamily="34" charset="0"/>
+                <a:cs typeface="Calibri" panose="020F0502020204030204" pitchFamily="34" charset="0"/>
+              </a:rPr>
+              <a:t>are</a:t>
+            </a:r>
+            <a:r>
+              <a:rPr lang="sv-SE" sz="1600" b="0" u="none" strike="noStrike" dirty="0">
+                <a:solidFill>
+                  <a:schemeClr val="dk1"/>
+                </a:solidFill>
+                <a:effectLst/>
+                <a:uFillTx/>
+                <a:latin typeface="Calibri" panose="020F0502020204030204" pitchFamily="34" charset="0"/>
+                <a:ea typeface="Calibri" panose="020F0502020204030204" pitchFamily="34" charset="0"/>
+                <a:cs typeface="Calibri" panose="020F0502020204030204" pitchFamily="34" charset="0"/>
+              </a:rPr>
+              <a:t> </a:t>
+            </a:r>
+            <a:r>
+              <a:rPr lang="sv-SE" sz="1600" b="0" u="none" strike="noStrike" dirty="0" err="1">
+                <a:solidFill>
+                  <a:schemeClr val="dk1"/>
+                </a:solidFill>
+                <a:effectLst/>
+                <a:uFillTx/>
+                <a:latin typeface="Calibri" panose="020F0502020204030204" pitchFamily="34" charset="0"/>
+                <a:ea typeface="Calibri" panose="020F0502020204030204" pitchFamily="34" charset="0"/>
+                <a:cs typeface="Calibri" panose="020F0502020204030204" pitchFamily="34" charset="0"/>
+              </a:rPr>
+              <a:t>mediators</a:t>
+            </a:r>
+            <a:r>
+              <a:rPr lang="sv-SE" sz="1600" b="0" u="none" strike="noStrike" dirty="0">
+                <a:solidFill>
+                  <a:schemeClr val="dk1"/>
+                </a:solidFill>
+                <a:effectLst/>
+                <a:uFillTx/>
+                <a:latin typeface="Calibri" panose="020F0502020204030204" pitchFamily="34" charset="0"/>
+                <a:ea typeface="Calibri" panose="020F0502020204030204" pitchFamily="34" charset="0"/>
+                <a:cs typeface="Calibri" panose="020F0502020204030204" pitchFamily="34" charset="0"/>
+              </a:rPr>
+              <a:t>;</a:t>
+            </a:r>
+            <a:endParaRPr lang="en-GB" sz="1600" b="0" u="none" strike="noStrike" dirty="0">
               <a:solidFill>
                 <a:srgbClr val="000000"/>
               </a:solidFill>
               <a:effectLst/>
               <a:uFillTx/>
-              <a:latin typeface="Arial"/>
+              <a:latin typeface="Calibri" panose="020F0502020204030204" pitchFamily="34" charset="0"/>
+              <a:ea typeface="Calibri" panose="020F0502020204030204" pitchFamily="34" charset="0"/>
+              <a:cs typeface="Calibri" panose="020F0502020204030204" pitchFamily="34" charset="0"/>
             </a:endParaRPr>
           </a:p>
           <a:p>
@@ -11541,134 +12389,256 @@
               <a:buClr>
                 <a:srgbClr val="000000"/>
               </a:buClr>
-              <a:buFont typeface="Aptos Display"/>
-              <a:buAutoNum type="arabicPeriod"/>
+              <a:buFont typeface="Arial" panose="020B0604020202020204" pitchFamily="34" charset="0"/>
+              <a:buChar char="•"/>
               <a:tabLst>
                 <a:tab pos="0" algn="l"/>
               </a:tabLst>
             </a:pPr>
             <a:r>
-              <a:rPr lang="sv-SE" sz="1800" b="0" u="none" strike="noStrike">
-                <a:solidFill>
-                  <a:schemeClr val="dk1"/>
-                </a:solidFill>
-                <a:effectLst/>
-                <a:uFillTx/>
-                <a:latin typeface="Aptos"/>
-                <a:ea typeface="Arial"/>
+              <a:rPr lang="sv-SE" sz="1600" b="0" u="none" strike="noStrike" dirty="0">
+                <a:solidFill>
+                  <a:schemeClr val="dk1"/>
+                </a:solidFill>
+                <a:effectLst/>
+                <a:uFillTx/>
+                <a:latin typeface="Calibri" panose="020F0502020204030204" pitchFamily="34" charset="0"/>
+                <a:ea typeface="Calibri" panose="020F0502020204030204" pitchFamily="34" charset="0"/>
+                <a:cs typeface="Calibri" panose="020F0502020204030204" pitchFamily="34" charset="0"/>
               </a:rPr>
               <a:t>What is the minimal </a:t>
             </a:r>
             <a:r>
-              <a:rPr lang="sv-SE" sz="1800" b="0" u="none" strike="noStrike">
-                <a:solidFill>
-                  <a:schemeClr val="dk1"/>
-                </a:solidFill>
-                <a:effectLst/>
-                <a:uFillTx/>
-                <a:latin typeface="Aptos"/>
-                <a:ea typeface="Arial"/>
-              </a:rPr>
-              <a:t>adjustment set to </a:t>
-            </a:r>
-            <a:r>
-              <a:rPr lang="sv-SE" sz="1800" b="0" u="none" strike="noStrike">
-                <a:solidFill>
-                  <a:schemeClr val="dk1"/>
-                </a:solidFill>
-                <a:effectLst/>
-                <a:uFillTx/>
-                <a:latin typeface="Aptos"/>
-                <a:ea typeface="Arial"/>
-              </a:rPr>
-              <a:t>estimate </a:t>
-            </a:r>
-            <a:r>
-              <a:rPr lang="sv-SE" sz="1800" b="1" u="none" strike="noStrike">
-                <a:solidFill>
-                  <a:schemeClr val="dk1"/>
-                </a:solidFill>
-                <a:effectLst/>
-                <a:uFillTx/>
-                <a:latin typeface="Aptos"/>
-                <a:ea typeface="Arial"/>
-              </a:rPr>
-              <a:t>the total </a:t>
-            </a:r>
-            <a:r>
-              <a:rPr lang="sv-SE" sz="1800" b="1" u="none" strike="noStrike">
-                <a:solidFill>
-                  <a:schemeClr val="dk1"/>
-                </a:solidFill>
-                <a:effectLst/>
-                <a:uFillTx/>
-                <a:latin typeface="Aptos"/>
-                <a:ea typeface="Arial"/>
-              </a:rPr>
-              <a:t>effect </a:t>
-            </a:r>
-            <a:r>
-              <a:rPr lang="sv-SE" sz="1800" b="0" u="none" strike="noStrike">
-                <a:solidFill>
-                  <a:schemeClr val="dk1"/>
-                </a:solidFill>
-                <a:effectLst/>
-                <a:uFillTx/>
-                <a:latin typeface="Aptos"/>
-                <a:ea typeface="Arial"/>
-              </a:rPr>
-              <a:t>of nitrogen </a:t>
-            </a:r>
-            <a:r>
-              <a:rPr lang="sv-SE" sz="1800" b="0" u="none" strike="noStrike">
-                <a:solidFill>
-                  <a:schemeClr val="dk1"/>
-                </a:solidFill>
-                <a:effectLst/>
-                <a:uFillTx/>
-                <a:latin typeface="Aptos"/>
-                <a:ea typeface="Arial"/>
-              </a:rPr>
-              <a:t>deposition on species </a:t>
-            </a:r>
-            <a:r>
-              <a:rPr lang="sv-SE" sz="1800" b="0" u="none" strike="noStrike">
-                <a:solidFill>
-                  <a:schemeClr val="dk1"/>
-                </a:solidFill>
-                <a:effectLst/>
-                <a:uFillTx/>
-                <a:latin typeface="Aptos"/>
-                <a:ea typeface="Arial"/>
-              </a:rPr>
-              <a:t>richness.</a:t>
-            </a:r>
-            <a:endParaRPr lang="en-GB" sz="1800" b="0" u="none" strike="noStrike">
+              <a:rPr lang="sv-SE" sz="1600" b="0" u="none" strike="noStrike" dirty="0" err="1">
+                <a:solidFill>
+                  <a:schemeClr val="dk1"/>
+                </a:solidFill>
+                <a:effectLst/>
+                <a:uFillTx/>
+                <a:latin typeface="Calibri" panose="020F0502020204030204" pitchFamily="34" charset="0"/>
+                <a:ea typeface="Calibri" panose="020F0502020204030204" pitchFamily="34" charset="0"/>
+                <a:cs typeface="Calibri" panose="020F0502020204030204" pitchFamily="34" charset="0"/>
+              </a:rPr>
+              <a:t>adjustment</a:t>
+            </a:r>
+            <a:r>
+              <a:rPr lang="sv-SE" sz="1600" b="0" u="none" strike="noStrike" dirty="0">
+                <a:solidFill>
+                  <a:schemeClr val="dk1"/>
+                </a:solidFill>
+                <a:effectLst/>
+                <a:uFillTx/>
+                <a:latin typeface="Calibri" panose="020F0502020204030204" pitchFamily="34" charset="0"/>
+                <a:ea typeface="Calibri" panose="020F0502020204030204" pitchFamily="34" charset="0"/>
+                <a:cs typeface="Calibri" panose="020F0502020204030204" pitchFamily="34" charset="0"/>
+              </a:rPr>
+              <a:t> set to </a:t>
+            </a:r>
+            <a:r>
+              <a:rPr lang="sv-SE" sz="1600" b="0" u="none" strike="noStrike" dirty="0" err="1">
+                <a:solidFill>
+                  <a:schemeClr val="dk1"/>
+                </a:solidFill>
+                <a:effectLst/>
+                <a:uFillTx/>
+                <a:latin typeface="Calibri" panose="020F0502020204030204" pitchFamily="34" charset="0"/>
+                <a:ea typeface="Calibri" panose="020F0502020204030204" pitchFamily="34" charset="0"/>
+                <a:cs typeface="Calibri" panose="020F0502020204030204" pitchFamily="34" charset="0"/>
+              </a:rPr>
+              <a:t>estimate</a:t>
+            </a:r>
+            <a:r>
+              <a:rPr lang="sv-SE" sz="1600" b="0" u="none" strike="noStrike" dirty="0">
+                <a:solidFill>
+                  <a:schemeClr val="dk1"/>
+                </a:solidFill>
+                <a:effectLst/>
+                <a:uFillTx/>
+                <a:latin typeface="Calibri" panose="020F0502020204030204" pitchFamily="34" charset="0"/>
+                <a:ea typeface="Calibri" panose="020F0502020204030204" pitchFamily="34" charset="0"/>
+                <a:cs typeface="Calibri" panose="020F0502020204030204" pitchFamily="34" charset="0"/>
+              </a:rPr>
+              <a:t> </a:t>
+            </a:r>
+            <a:r>
+              <a:rPr lang="sv-SE" sz="1600" b="1" u="none" strike="noStrike" dirty="0">
+                <a:solidFill>
+                  <a:schemeClr val="dk1"/>
+                </a:solidFill>
+                <a:effectLst/>
+                <a:uFillTx/>
+                <a:latin typeface="Calibri" panose="020F0502020204030204" pitchFamily="34" charset="0"/>
+                <a:ea typeface="Calibri" panose="020F0502020204030204" pitchFamily="34" charset="0"/>
+                <a:cs typeface="Calibri" panose="020F0502020204030204" pitchFamily="34" charset="0"/>
+              </a:rPr>
+              <a:t>the </a:t>
+            </a:r>
+            <a:r>
+              <a:rPr lang="sv-SE" sz="1600" b="1" u="none" strike="noStrike" dirty="0" err="1">
+                <a:solidFill>
+                  <a:schemeClr val="dk1"/>
+                </a:solidFill>
+                <a:effectLst/>
+                <a:uFillTx/>
+                <a:latin typeface="Calibri" panose="020F0502020204030204" pitchFamily="34" charset="0"/>
+                <a:ea typeface="Calibri" panose="020F0502020204030204" pitchFamily="34" charset="0"/>
+                <a:cs typeface="Calibri" panose="020F0502020204030204" pitchFamily="34" charset="0"/>
+              </a:rPr>
+              <a:t>direct</a:t>
+            </a:r>
+            <a:r>
+              <a:rPr lang="sv-SE" sz="1600" b="1" u="none" strike="noStrike" dirty="0">
+                <a:solidFill>
+                  <a:schemeClr val="dk1"/>
+                </a:solidFill>
+                <a:effectLst/>
+                <a:uFillTx/>
+                <a:latin typeface="Calibri" panose="020F0502020204030204" pitchFamily="34" charset="0"/>
+                <a:ea typeface="Calibri" panose="020F0502020204030204" pitchFamily="34" charset="0"/>
+                <a:cs typeface="Calibri" panose="020F0502020204030204" pitchFamily="34" charset="0"/>
+              </a:rPr>
+              <a:t> and total </a:t>
+            </a:r>
+            <a:r>
+              <a:rPr lang="sv-SE" sz="1600" b="1" u="none" strike="noStrike" dirty="0" err="1">
+                <a:solidFill>
+                  <a:schemeClr val="dk1"/>
+                </a:solidFill>
+                <a:effectLst/>
+                <a:uFillTx/>
+                <a:latin typeface="Calibri" panose="020F0502020204030204" pitchFamily="34" charset="0"/>
+                <a:ea typeface="Calibri" panose="020F0502020204030204" pitchFamily="34" charset="0"/>
+                <a:cs typeface="Calibri" panose="020F0502020204030204" pitchFamily="34" charset="0"/>
+              </a:rPr>
+              <a:t>effect</a:t>
+            </a:r>
+            <a:r>
+              <a:rPr lang="sv-SE" sz="1600" b="1" u="none" strike="noStrike" dirty="0">
+                <a:solidFill>
+                  <a:schemeClr val="dk1"/>
+                </a:solidFill>
+                <a:effectLst/>
+                <a:uFillTx/>
+                <a:latin typeface="Calibri" panose="020F0502020204030204" pitchFamily="34" charset="0"/>
+                <a:ea typeface="Calibri" panose="020F0502020204030204" pitchFamily="34" charset="0"/>
+                <a:cs typeface="Calibri" panose="020F0502020204030204" pitchFamily="34" charset="0"/>
+              </a:rPr>
+              <a:t> </a:t>
+            </a:r>
+            <a:r>
+              <a:rPr lang="sv-SE" sz="1600" b="0" u="none" strike="noStrike" dirty="0">
+                <a:solidFill>
+                  <a:schemeClr val="dk1"/>
+                </a:solidFill>
+                <a:effectLst/>
+                <a:uFillTx/>
+                <a:latin typeface="Calibri" panose="020F0502020204030204" pitchFamily="34" charset="0"/>
+                <a:ea typeface="Calibri" panose="020F0502020204030204" pitchFamily="34" charset="0"/>
+                <a:cs typeface="Calibri" panose="020F0502020204030204" pitchFamily="34" charset="0"/>
+              </a:rPr>
+              <a:t>of </a:t>
+            </a:r>
+            <a:r>
+              <a:rPr lang="sv-SE" sz="1600" b="0" u="none" strike="noStrike" dirty="0" err="1">
+                <a:solidFill>
+                  <a:schemeClr val="dk1"/>
+                </a:solidFill>
+                <a:effectLst/>
+                <a:uFillTx/>
+                <a:latin typeface="Calibri" panose="020F0502020204030204" pitchFamily="34" charset="0"/>
+                <a:ea typeface="Calibri" panose="020F0502020204030204" pitchFamily="34" charset="0"/>
+                <a:cs typeface="Calibri" panose="020F0502020204030204" pitchFamily="34" charset="0"/>
+              </a:rPr>
+              <a:t>automated</a:t>
+            </a:r>
+            <a:r>
+              <a:rPr lang="sv-SE" sz="1600" b="0" u="none" strike="noStrike" dirty="0">
+                <a:solidFill>
+                  <a:schemeClr val="dk1"/>
+                </a:solidFill>
+                <a:effectLst/>
+                <a:uFillTx/>
+                <a:latin typeface="Calibri" panose="020F0502020204030204" pitchFamily="34" charset="0"/>
+                <a:ea typeface="Calibri" panose="020F0502020204030204" pitchFamily="34" charset="0"/>
+                <a:cs typeface="Calibri" panose="020F0502020204030204" pitchFamily="34" charset="0"/>
+              </a:rPr>
+              <a:t> </a:t>
+            </a:r>
+            <a:r>
+              <a:rPr lang="sv-SE" sz="1600" b="0" u="none" strike="noStrike" dirty="0" err="1">
+                <a:solidFill>
+                  <a:schemeClr val="dk1"/>
+                </a:solidFill>
+                <a:effectLst/>
+                <a:uFillTx/>
+                <a:latin typeface="Calibri" panose="020F0502020204030204" pitchFamily="34" charset="0"/>
+                <a:ea typeface="Calibri" panose="020F0502020204030204" pitchFamily="34" charset="0"/>
+                <a:cs typeface="Calibri" panose="020F0502020204030204" pitchFamily="34" charset="0"/>
+              </a:rPr>
+              <a:t>testing</a:t>
+            </a:r>
+            <a:r>
+              <a:rPr lang="sv-SE" sz="1600" b="0" u="none" strike="noStrike" dirty="0">
+                <a:solidFill>
+                  <a:schemeClr val="dk1"/>
+                </a:solidFill>
+                <a:effectLst/>
+                <a:uFillTx/>
+                <a:latin typeface="Calibri" panose="020F0502020204030204" pitchFamily="34" charset="0"/>
+                <a:ea typeface="Calibri" panose="020F0502020204030204" pitchFamily="34" charset="0"/>
+                <a:cs typeface="Calibri" panose="020F0502020204030204" pitchFamily="34" charset="0"/>
+              </a:rPr>
+              <a:t> on post-release </a:t>
+            </a:r>
+            <a:r>
+              <a:rPr lang="sv-SE" sz="1600" b="0" u="none" strike="noStrike" dirty="0" err="1">
+                <a:solidFill>
+                  <a:schemeClr val="dk1"/>
+                </a:solidFill>
+                <a:effectLst/>
+                <a:uFillTx/>
+                <a:latin typeface="Calibri" panose="020F0502020204030204" pitchFamily="34" charset="0"/>
+                <a:ea typeface="Calibri" panose="020F0502020204030204" pitchFamily="34" charset="0"/>
+                <a:cs typeface="Calibri" panose="020F0502020204030204" pitchFamily="34" charset="0"/>
+              </a:rPr>
+              <a:t>defects</a:t>
+            </a:r>
+            <a:r>
+              <a:rPr lang="sv-SE" sz="1600" b="0" u="none" strike="noStrike" dirty="0">
+                <a:solidFill>
+                  <a:schemeClr val="dk1"/>
+                </a:solidFill>
+                <a:effectLst/>
+                <a:uFillTx/>
+                <a:latin typeface="Calibri" panose="020F0502020204030204" pitchFamily="34" charset="0"/>
+                <a:ea typeface="Calibri" panose="020F0502020204030204" pitchFamily="34" charset="0"/>
+                <a:cs typeface="Calibri" panose="020F0502020204030204" pitchFamily="34" charset="0"/>
+              </a:rPr>
+              <a:t>.</a:t>
+            </a:r>
+            <a:endParaRPr lang="en-GB" sz="1600" b="0" u="none" strike="noStrike" dirty="0">
               <a:solidFill>
                 <a:srgbClr val="000000"/>
               </a:solidFill>
               <a:effectLst/>
               <a:uFillTx/>
-              <a:latin typeface="Arial"/>
+              <a:latin typeface="Calibri" panose="020F0502020204030204" pitchFamily="34" charset="0"/>
+              <a:ea typeface="Calibri" panose="020F0502020204030204" pitchFamily="34" charset="0"/>
+              <a:cs typeface="Calibri" panose="020F0502020204030204" pitchFamily="34" charset="0"/>
             </a:endParaRPr>
           </a:p>
         </p:txBody>
       </p:sp>
     </p:spTree>
   </p:cSld>
-  <mc:AlternateContent>
-    <mc:Choice Requires="p14">
-      <p:transition spd="slow" p14:dur="2000"/>
-    </mc:Choice>
-    <mc:Fallback>
-      <p:transition spd="slow"/>
-    </mc:Fallback>
-  </mc:AlternateContent>
+  <p:clrMapOvr>
+    <a:masterClrMapping/>
+  </p:clrMapOvr>
 </p:sld>
 </file>
 
 <file path=ppt/slides/slide14.xml><?xml version="1.0" encoding="utf-8"?>
-<p:sld xmlns:a="http://schemas.openxmlformats.org/drawingml/2006/main" xmlns:p="http://schemas.openxmlformats.org/presentationml/2006/main" xmlns:r="http://schemas.openxmlformats.org/officeDocument/2006/relationships" xmlns:p14="http://schemas.microsoft.com/office/powerpoint/2010/main" xmlns:p15="http://schemas.microsoft.com/office/powerpoint/2012/main" xmlns:mc="http://schemas.openxmlformats.org/markup-compatibility/2006">
+<p:sld xmlns:a="http://schemas.openxmlformats.org/drawingml/2006/main" xmlns:r="http://schemas.openxmlformats.org/officeDocument/2006/relationships" xmlns:p="http://schemas.openxmlformats.org/presentationml/2006/main">
   <p:cSld>
     <p:spTree>
       <p:nvGrpSpPr>
@@ -11791,6 +12761,7 @@
           <a:bodyPr lIns="91440" tIns="45720" rIns="91440" bIns="45720" anchor="ctr">
             <a:noAutofit/>
           </a:bodyPr>
+          <a:lstStyle/>
           <a:p>
             <a:pPr indent="0" algn="l" defTabSz="914400">
               <a:lnSpc>
@@ -11799,7 +12770,7 @@
               <a:buNone/>
             </a:pPr>
             <a:r>
-              <a:rPr lang="sv-SE" sz="2600" b="1" u="none" strike="noStrike">
+              <a:rPr lang="sv-SE" sz="2600" b="1" u="none" strike="noStrike" dirty="0">
                 <a:solidFill>
                   <a:srgbClr val="1E3A5F"/>
                 </a:solidFill>
@@ -11811,7 +12782,7 @@
               <a:t>Problem 4: Solution </a:t>
             </a:r>
             <a:r>
-              <a:rPr lang="sv-SE" sz="2600" b="1" u="sng" strike="noStrike">
+              <a:rPr lang="sv-SE" sz="2600" b="1" u="sng" strike="noStrike" dirty="0">
                 <a:solidFill>
                   <a:srgbClr val="467886"/>
                 </a:solidFill>
@@ -11819,12 +12790,12 @@
                 <a:uFillTx/>
                 <a:latin typeface="Cambria"/>
                 <a:ea typeface="Cambria"/>
-                <a:hlinkClick r:id="rId1"/>
+                <a:hlinkClick r:id="rId3"/>
               </a:rPr>
               <a:t>https://dagitty.net/mFcJtc32s</a:t>
             </a:r>
             <a:r>
-              <a:rPr lang="sv-SE" sz="2600" b="1" u="none" strike="noStrike">
+              <a:rPr lang="sv-SE" sz="2600" b="1" u="none" strike="noStrike" dirty="0">
                 <a:solidFill>
                   <a:srgbClr val="1E3A5F"/>
                 </a:solidFill>
@@ -11835,7 +12806,7 @@
               </a:rPr>
               <a:t> </a:t>
             </a:r>
-            <a:endParaRPr lang="en-GB" sz="2600" b="1" u="none" strike="noStrike">
+            <a:endParaRPr lang="en-GB" sz="2600" b="1" u="none" strike="noStrike" dirty="0">
               <a:solidFill>
                 <a:srgbClr val="1E3A5F"/>
               </a:solidFill>
@@ -11907,7 +12878,7 @@
                 <a:latin typeface="Calibri"/>
                 <a:ea typeface="Calibri"/>
               </a:rPr>
-              <a:t>&lt;number&gt;</a:t>
+              <a:t>14</a:t>
             </a:fld>
             <a:endParaRPr lang="en-GB" sz="900" b="0" u="none" strike="noStrike">
               <a:solidFill>
@@ -11940,15 +12911,22 @@
           </a:ln>
         </p:spPr>
         <p:style>
-          <a:lnRef idx="0"/>
-          <a:fillRef idx="0"/>
-          <a:effectRef idx="0"/>
+          <a:lnRef idx="0">
+            <a:scrgbClr r="0" g="0" b="0"/>
+          </a:lnRef>
+          <a:fillRef idx="0">
+            <a:scrgbClr r="0" g="0" b="0"/>
+          </a:fillRef>
+          <a:effectRef idx="0">
+            <a:scrgbClr r="0" g="0" b="0"/>
+          </a:effectRef>
           <a:fontRef idx="minor"/>
         </p:style>
         <p:txBody>
           <a:bodyPr lIns="90000" tIns="45000" rIns="90000" bIns="45000" anchor="t">
             <a:noAutofit/>
           </a:bodyPr>
+          <a:lstStyle/>
           <a:p>
             <a:endParaRPr lang="sv-SE" sz="2000" b="0" u="none" strike="noStrike">
               <a:solidFill>
@@ -11963,7 +12941,7 @@
       </p:sp>
       <p:sp>
         <p:nvSpPr>
-          <p:cNvPr id="238" name=""/>
+          <p:cNvPr id="238" name="Rektangel 237"/>
           <p:cNvSpPr/>
           <p:nvPr/>
         </p:nvSpPr>
@@ -11981,15 +12959,22 @@
           </a:ln>
         </p:spPr>
         <p:style>
-          <a:lnRef idx="0"/>
-          <a:fillRef idx="0"/>
-          <a:effectRef idx="0"/>
+          <a:lnRef idx="0">
+            <a:scrgbClr r="0" g="0" b="0"/>
+          </a:lnRef>
+          <a:fillRef idx="0">
+            <a:scrgbClr r="0" g="0" b="0"/>
+          </a:fillRef>
+          <a:effectRef idx="0">
+            <a:scrgbClr r="0" g="0" b="0"/>
+          </a:effectRef>
           <a:fontRef idx="minor"/>
         </p:style>
         <p:txBody>
-          <a:bodyPr numCol="1" spcCol="0" horzOverflow="overflow" anchor="t">
+          <a:bodyPr horzOverflow="overflow" numCol="1" spcCol="0" anchor="t">
             <a:spAutoFit/>
           </a:bodyPr>
+          <a:lstStyle/>
           <a:p>
             <a:pPr defTabSz="914400">
               <a:lnSpc>
@@ -11997,18 +12982,282 @@
               </a:lnSpc>
             </a:pPr>
             <a:r>
-              <a:rPr lang="sv-SE" sz="1600" b="0" u="none" strike="noStrike">
-                <a:solidFill>
-                  <a:schemeClr val="dk1"/>
-                </a:solidFill>
-                <a:effectLst/>
-                <a:uFillTx/>
-                <a:latin typeface="Calibri"/>
-                <a:ea typeface="Calibri"/>
-              </a:rPr>
-              <a:t>A software quality team studies the effect of the  introduction of an automated testing framework on post-relase defects of a large system.  They know:</a:t>
-            </a:r>
-            <a:endParaRPr lang="en-GB" sz="1600" b="0" u="none" strike="noStrike">
+              <a:rPr lang="sv-SE" sz="1600" b="0" u="none" strike="noStrike" dirty="0">
+                <a:solidFill>
+                  <a:schemeClr val="dk1"/>
+                </a:solidFill>
+                <a:effectLst/>
+                <a:uFillTx/>
+                <a:latin typeface="Calibri"/>
+                <a:ea typeface="Calibri"/>
+              </a:rPr>
+              <a:t>A software </a:t>
+            </a:r>
+            <a:r>
+              <a:rPr lang="sv-SE" sz="1600" b="0" u="none" strike="noStrike" dirty="0" err="1">
+                <a:solidFill>
+                  <a:schemeClr val="dk1"/>
+                </a:solidFill>
+                <a:effectLst/>
+                <a:uFillTx/>
+                <a:latin typeface="Calibri"/>
+                <a:ea typeface="Calibri"/>
+              </a:rPr>
+              <a:t>quality</a:t>
+            </a:r>
+            <a:r>
+              <a:rPr lang="sv-SE" sz="1600" b="0" u="none" strike="noStrike" dirty="0">
+                <a:solidFill>
+                  <a:schemeClr val="dk1"/>
+                </a:solidFill>
+                <a:effectLst/>
+                <a:uFillTx/>
+                <a:latin typeface="Calibri"/>
+                <a:ea typeface="Calibri"/>
+              </a:rPr>
+              <a:t> team studies the </a:t>
+            </a:r>
+            <a:r>
+              <a:rPr lang="sv-SE" sz="1600" b="0" u="none" strike="noStrike" dirty="0" err="1">
+                <a:solidFill>
+                  <a:schemeClr val="dk1"/>
+                </a:solidFill>
+                <a:effectLst/>
+                <a:uFillTx/>
+                <a:latin typeface="Calibri"/>
+                <a:ea typeface="Calibri"/>
+              </a:rPr>
+              <a:t>effect</a:t>
+            </a:r>
+            <a:r>
+              <a:rPr lang="sv-SE" sz="1600" b="0" u="none" strike="noStrike" dirty="0">
+                <a:solidFill>
+                  <a:schemeClr val="dk1"/>
+                </a:solidFill>
+                <a:effectLst/>
+                <a:uFillTx/>
+                <a:latin typeface="Calibri"/>
+                <a:ea typeface="Calibri"/>
+              </a:rPr>
+              <a:t> of the  </a:t>
+            </a:r>
+            <a:r>
+              <a:rPr lang="sv-SE" sz="1600" b="0" u="none" strike="noStrike" dirty="0" err="1">
+                <a:solidFill>
+                  <a:schemeClr val="dk1"/>
+                </a:solidFill>
+                <a:effectLst/>
+                <a:uFillTx/>
+                <a:latin typeface="Calibri"/>
+                <a:ea typeface="Calibri"/>
+              </a:rPr>
+              <a:t>introduction</a:t>
+            </a:r>
+            <a:r>
+              <a:rPr lang="sv-SE" sz="1600" b="0" u="none" strike="noStrike" dirty="0">
+                <a:solidFill>
+                  <a:schemeClr val="dk1"/>
+                </a:solidFill>
+                <a:effectLst/>
+                <a:uFillTx/>
+                <a:latin typeface="Calibri"/>
+                <a:ea typeface="Calibri"/>
+              </a:rPr>
+              <a:t> of an </a:t>
+            </a:r>
+            <a:r>
+              <a:rPr lang="sv-SE" sz="1600" b="0" u="none" strike="noStrike" dirty="0" err="1">
+                <a:solidFill>
+                  <a:schemeClr val="dk1"/>
+                </a:solidFill>
+                <a:effectLst/>
+                <a:uFillTx/>
+                <a:latin typeface="Calibri"/>
+                <a:ea typeface="Calibri"/>
+              </a:rPr>
+              <a:t>automated</a:t>
+            </a:r>
+            <a:r>
+              <a:rPr lang="sv-SE" sz="1600" b="0" u="none" strike="noStrike" dirty="0">
+                <a:solidFill>
+                  <a:schemeClr val="dk1"/>
+                </a:solidFill>
+                <a:effectLst/>
+                <a:uFillTx/>
+                <a:latin typeface="Calibri"/>
+                <a:ea typeface="Calibri"/>
+              </a:rPr>
+              <a:t> </a:t>
+            </a:r>
+            <a:r>
+              <a:rPr lang="sv-SE" sz="1600" b="0" u="none" strike="noStrike" dirty="0" err="1">
+                <a:solidFill>
+                  <a:schemeClr val="dk1"/>
+                </a:solidFill>
+                <a:effectLst/>
+                <a:uFillTx/>
+                <a:latin typeface="Calibri"/>
+                <a:ea typeface="Calibri"/>
+              </a:rPr>
+              <a:t>testing</a:t>
+            </a:r>
+            <a:r>
+              <a:rPr lang="sv-SE" sz="1600" b="0" u="none" strike="noStrike" dirty="0">
+                <a:solidFill>
+                  <a:schemeClr val="dk1"/>
+                </a:solidFill>
+                <a:effectLst/>
+                <a:uFillTx/>
+                <a:latin typeface="Calibri"/>
+                <a:ea typeface="Calibri"/>
+              </a:rPr>
+              <a:t> </a:t>
+            </a:r>
+            <a:r>
+              <a:rPr lang="sv-SE" sz="1600" b="0" u="none" strike="noStrike" dirty="0" err="1">
+                <a:solidFill>
+                  <a:schemeClr val="dk1"/>
+                </a:solidFill>
+                <a:effectLst/>
+                <a:uFillTx/>
+                <a:latin typeface="Calibri"/>
+                <a:ea typeface="Calibri"/>
+              </a:rPr>
+              <a:t>framework</a:t>
+            </a:r>
+            <a:r>
+              <a:rPr lang="sv-SE" sz="1600" b="0" u="none" strike="noStrike" dirty="0">
+                <a:solidFill>
+                  <a:schemeClr val="dk1"/>
+                </a:solidFill>
+                <a:effectLst/>
+                <a:uFillTx/>
+                <a:latin typeface="Calibri"/>
+                <a:ea typeface="Calibri"/>
+              </a:rPr>
+              <a:t> on post-</a:t>
+            </a:r>
+            <a:r>
+              <a:rPr lang="sv-SE" sz="1600" b="0" u="none" strike="noStrike" dirty="0" err="1">
+                <a:solidFill>
+                  <a:schemeClr val="dk1"/>
+                </a:solidFill>
+                <a:effectLst/>
+                <a:uFillTx/>
+                <a:latin typeface="Calibri"/>
+                <a:ea typeface="Calibri"/>
+              </a:rPr>
+              <a:t>relase</a:t>
+            </a:r>
+            <a:r>
+              <a:rPr lang="sv-SE" sz="1600" b="0" u="none" strike="noStrike" dirty="0">
+                <a:solidFill>
+                  <a:schemeClr val="dk1"/>
+                </a:solidFill>
+                <a:effectLst/>
+                <a:uFillTx/>
+                <a:latin typeface="Calibri"/>
+                <a:ea typeface="Calibri"/>
+              </a:rPr>
+              <a:t> </a:t>
+            </a:r>
+            <a:r>
+              <a:rPr lang="sv-SE" sz="1600" b="0" u="none" strike="noStrike" dirty="0" err="1">
+                <a:solidFill>
+                  <a:schemeClr val="dk1"/>
+                </a:solidFill>
+                <a:effectLst/>
+                <a:uFillTx/>
+                <a:latin typeface="Calibri"/>
+                <a:ea typeface="Calibri"/>
+              </a:rPr>
+              <a:t>defects</a:t>
+            </a:r>
+            <a:r>
+              <a:rPr lang="sv-SE" sz="1600" b="0" u="none" strike="noStrike" dirty="0">
+                <a:solidFill>
+                  <a:schemeClr val="dk1"/>
+                </a:solidFill>
+                <a:effectLst/>
+                <a:uFillTx/>
+                <a:latin typeface="Calibri"/>
+                <a:ea typeface="Calibri"/>
+              </a:rPr>
+              <a:t> of a </a:t>
+            </a:r>
+            <a:r>
+              <a:rPr lang="sv-SE" sz="1600" b="0" u="none" strike="noStrike" dirty="0" err="1">
+                <a:solidFill>
+                  <a:schemeClr val="dk1"/>
+                </a:solidFill>
+                <a:effectLst/>
+                <a:uFillTx/>
+                <a:latin typeface="Calibri"/>
+                <a:ea typeface="Calibri"/>
+              </a:rPr>
+              <a:t>large</a:t>
+            </a:r>
+            <a:r>
+              <a:rPr lang="sv-SE" sz="1600" b="0" u="none" strike="noStrike" dirty="0">
+                <a:solidFill>
+                  <a:schemeClr val="dk1"/>
+                </a:solidFill>
+                <a:effectLst/>
+                <a:uFillTx/>
+                <a:latin typeface="Calibri"/>
+                <a:ea typeface="Calibri"/>
+              </a:rPr>
+              <a:t> system.  </a:t>
+            </a:r>
+            <a:r>
+              <a:rPr lang="sv-SE" sz="1600" b="0" u="none" strike="noStrike" dirty="0" err="1">
+                <a:solidFill>
+                  <a:schemeClr val="dk1"/>
+                </a:solidFill>
+                <a:effectLst/>
+                <a:uFillTx/>
+                <a:latin typeface="Calibri"/>
+                <a:ea typeface="Calibri"/>
+              </a:rPr>
+              <a:t>They</a:t>
+            </a:r>
+            <a:r>
+              <a:rPr lang="sv-SE" sz="1600" b="0" u="none" strike="noStrike" dirty="0">
+                <a:solidFill>
+                  <a:schemeClr val="dk1"/>
+                </a:solidFill>
+                <a:effectLst/>
+                <a:uFillTx/>
+                <a:latin typeface="Calibri"/>
+                <a:ea typeface="Calibri"/>
+              </a:rPr>
+              <a:t> </a:t>
+            </a:r>
+            <a:r>
+              <a:rPr lang="sv-SE" sz="1600" b="0" u="none" strike="noStrike" dirty="0" err="1">
+                <a:solidFill>
+                  <a:schemeClr val="dk1"/>
+                </a:solidFill>
+                <a:effectLst/>
+                <a:uFillTx/>
+                <a:latin typeface="Calibri"/>
+                <a:ea typeface="Calibri"/>
+              </a:rPr>
+              <a:t>know</a:t>
+            </a:r>
+            <a:r>
+              <a:rPr lang="sv-SE" sz="1600" b="0" u="none" strike="noStrike" dirty="0">
+                <a:solidFill>
+                  <a:schemeClr val="dk1"/>
+                </a:solidFill>
+                <a:effectLst/>
+                <a:uFillTx/>
+                <a:latin typeface="Calibri"/>
+                <a:ea typeface="Calibri"/>
+              </a:rPr>
+              <a:t>:</a:t>
+            </a:r>
+            <a:endParaRPr lang="en-GB" sz="1600" b="0" u="none" strike="noStrike" dirty="0">
               <a:solidFill>
                 <a:srgbClr val="000000"/>
               </a:solidFill>
@@ -12023,7 +13272,7 @@
                 <a:spcPct val="100000"/>
               </a:lnSpc>
             </a:pPr>
-            <a:endParaRPr lang="en-GB" sz="1800" b="0" u="none" strike="noStrike">
+            <a:endParaRPr lang="en-GB" sz="1800" b="0" u="none" strike="noStrike" dirty="0">
               <a:solidFill>
                 <a:srgbClr val="000000"/>
               </a:solidFill>
@@ -12044,18 +13293,246 @@
               <a:buAutoNum type="arabicPeriod"/>
             </a:pPr>
             <a:r>
-              <a:rPr lang="sv-SE" sz="1600" b="0" u="none" strike="noStrike">
-                <a:solidFill>
-                  <a:schemeClr val="dk1"/>
-                </a:solidFill>
-                <a:effectLst/>
-                <a:uFillTx/>
-                <a:latin typeface="Calibri"/>
-                <a:ea typeface="Calibri"/>
-              </a:rPr>
-              <a:t>Experienced developers are more likely to adopt the framework and to write less defect-prone code. </a:t>
-            </a:r>
-            <a:endParaRPr lang="en-GB" sz="1600" b="0" u="none" strike="noStrike">
+              <a:rPr lang="sv-SE" sz="1600" b="0" u="none" strike="noStrike" dirty="0" err="1">
+                <a:solidFill>
+                  <a:schemeClr val="dk1"/>
+                </a:solidFill>
+                <a:effectLst/>
+                <a:uFillTx/>
+                <a:latin typeface="Calibri"/>
+                <a:ea typeface="Calibri"/>
+              </a:rPr>
+              <a:t>Experienced</a:t>
+            </a:r>
+            <a:r>
+              <a:rPr lang="sv-SE" sz="1600" b="0" u="none" strike="noStrike" dirty="0">
+                <a:solidFill>
+                  <a:schemeClr val="dk1"/>
+                </a:solidFill>
+                <a:effectLst/>
+                <a:uFillTx/>
+                <a:latin typeface="Calibri"/>
+                <a:ea typeface="Calibri"/>
+              </a:rPr>
+              <a:t> </a:t>
+            </a:r>
+            <a:r>
+              <a:rPr lang="sv-SE" sz="1600" b="0" u="none" strike="noStrike" dirty="0" err="1">
+                <a:solidFill>
+                  <a:schemeClr val="dk1"/>
+                </a:solidFill>
+                <a:effectLst/>
+                <a:uFillTx/>
+                <a:latin typeface="Calibri"/>
+                <a:ea typeface="Calibri"/>
+              </a:rPr>
+              <a:t>developers</a:t>
+            </a:r>
+            <a:r>
+              <a:rPr lang="sv-SE" sz="1600" b="0" u="none" strike="noStrike" dirty="0">
+                <a:solidFill>
+                  <a:schemeClr val="dk1"/>
+                </a:solidFill>
+                <a:effectLst/>
+                <a:uFillTx/>
+                <a:latin typeface="Calibri"/>
+                <a:ea typeface="Calibri"/>
+              </a:rPr>
+              <a:t> </a:t>
+            </a:r>
+            <a:r>
+              <a:rPr lang="sv-SE" sz="1600" b="0" u="none" strike="noStrike" dirty="0" err="1">
+                <a:solidFill>
+                  <a:schemeClr val="dk1"/>
+                </a:solidFill>
+                <a:effectLst/>
+                <a:uFillTx/>
+                <a:latin typeface="Calibri"/>
+                <a:ea typeface="Calibri"/>
+              </a:rPr>
+              <a:t>are</a:t>
+            </a:r>
+            <a:r>
+              <a:rPr lang="sv-SE" sz="1600" b="0" u="none" strike="noStrike" dirty="0">
+                <a:solidFill>
+                  <a:schemeClr val="dk1"/>
+                </a:solidFill>
+                <a:effectLst/>
+                <a:uFillTx/>
+                <a:latin typeface="Calibri"/>
+                <a:ea typeface="Calibri"/>
+              </a:rPr>
+              <a:t> </a:t>
+            </a:r>
+            <a:r>
+              <a:rPr lang="sv-SE" sz="1600" b="0" u="none" strike="noStrike" dirty="0" err="1">
+                <a:solidFill>
+                  <a:schemeClr val="dk1"/>
+                </a:solidFill>
+                <a:effectLst/>
+                <a:uFillTx/>
+                <a:latin typeface="Calibri"/>
+                <a:ea typeface="Calibri"/>
+              </a:rPr>
+              <a:t>more</a:t>
+            </a:r>
+            <a:r>
+              <a:rPr lang="sv-SE" sz="1600" b="0" u="none" strike="noStrike" dirty="0">
+                <a:solidFill>
+                  <a:schemeClr val="dk1"/>
+                </a:solidFill>
+                <a:effectLst/>
+                <a:uFillTx/>
+                <a:latin typeface="Calibri"/>
+                <a:ea typeface="Calibri"/>
+              </a:rPr>
+              <a:t> </a:t>
+            </a:r>
+            <a:r>
+              <a:rPr lang="sv-SE" sz="1600" b="0" u="none" strike="noStrike" dirty="0" err="1">
+                <a:solidFill>
+                  <a:schemeClr val="dk1"/>
+                </a:solidFill>
+                <a:effectLst/>
+                <a:uFillTx/>
+                <a:latin typeface="Calibri"/>
+                <a:ea typeface="Calibri"/>
+              </a:rPr>
+              <a:t>likely</a:t>
+            </a:r>
+            <a:r>
+              <a:rPr lang="sv-SE" sz="1600" b="0" u="none" strike="noStrike" dirty="0">
+                <a:solidFill>
+                  <a:schemeClr val="dk1"/>
+                </a:solidFill>
+                <a:effectLst/>
+                <a:uFillTx/>
+                <a:latin typeface="Calibri"/>
+                <a:ea typeface="Calibri"/>
+              </a:rPr>
+              <a:t> to </a:t>
+            </a:r>
+            <a:r>
+              <a:rPr lang="sv-SE" sz="1600" b="0" u="none" strike="noStrike" dirty="0" err="1">
+                <a:solidFill>
+                  <a:schemeClr val="dk1"/>
+                </a:solidFill>
+                <a:effectLst/>
+                <a:uFillTx/>
+                <a:latin typeface="Calibri"/>
+                <a:ea typeface="Calibri"/>
+              </a:rPr>
+              <a:t>adopt</a:t>
+            </a:r>
+            <a:r>
+              <a:rPr lang="sv-SE" sz="1600" b="0" u="none" strike="noStrike" dirty="0">
+                <a:solidFill>
+                  <a:schemeClr val="dk1"/>
+                </a:solidFill>
+                <a:effectLst/>
+                <a:uFillTx/>
+                <a:latin typeface="Calibri"/>
+                <a:ea typeface="Calibri"/>
+              </a:rPr>
+              <a:t> the </a:t>
+            </a:r>
+            <a:r>
+              <a:rPr lang="sv-SE" sz="1600" b="0" u="none" strike="noStrike" dirty="0" err="1">
+                <a:solidFill>
+                  <a:schemeClr val="dk1"/>
+                </a:solidFill>
+                <a:effectLst/>
+                <a:uFillTx/>
+                <a:latin typeface="Calibri"/>
+                <a:ea typeface="Calibri"/>
+              </a:rPr>
+              <a:t>framework</a:t>
+            </a:r>
+            <a:r>
+              <a:rPr lang="sv-SE" sz="1600" b="0" u="none" strike="noStrike" dirty="0">
+                <a:solidFill>
+                  <a:schemeClr val="dk1"/>
+                </a:solidFill>
+                <a:effectLst/>
+                <a:uFillTx/>
+                <a:latin typeface="Calibri"/>
+                <a:ea typeface="Calibri"/>
+              </a:rPr>
+              <a:t> and to </a:t>
+            </a:r>
+            <a:r>
+              <a:rPr lang="sv-SE" sz="1600" b="0" u="none" strike="noStrike" dirty="0" err="1">
+                <a:solidFill>
+                  <a:schemeClr val="dk1"/>
+                </a:solidFill>
+                <a:effectLst/>
+                <a:uFillTx/>
+                <a:latin typeface="Calibri"/>
+                <a:ea typeface="Calibri"/>
+              </a:rPr>
+              <a:t>write</a:t>
+            </a:r>
+            <a:r>
+              <a:rPr lang="sv-SE" sz="1600" b="0" u="none" strike="noStrike" dirty="0">
+                <a:solidFill>
+                  <a:schemeClr val="dk1"/>
+                </a:solidFill>
+                <a:effectLst/>
+                <a:uFillTx/>
+                <a:latin typeface="Calibri"/>
+                <a:ea typeface="Calibri"/>
+              </a:rPr>
+              <a:t> less </a:t>
+            </a:r>
+            <a:r>
+              <a:rPr lang="sv-SE" sz="1600" b="0" u="none" strike="noStrike" dirty="0" err="1">
+                <a:solidFill>
+                  <a:schemeClr val="dk1"/>
+                </a:solidFill>
+                <a:effectLst/>
+                <a:uFillTx/>
+                <a:latin typeface="Calibri"/>
+                <a:ea typeface="Calibri"/>
+              </a:rPr>
+              <a:t>defect-prone</a:t>
+            </a:r>
+            <a:r>
+              <a:rPr lang="sv-SE" sz="1600" b="0" u="none" strike="noStrike" dirty="0">
+                <a:solidFill>
+                  <a:schemeClr val="dk1"/>
+                </a:solidFill>
+                <a:effectLst/>
+                <a:uFillTx/>
+                <a:latin typeface="Calibri"/>
+                <a:ea typeface="Calibri"/>
+              </a:rPr>
+              <a:t> </a:t>
+            </a:r>
+            <a:r>
+              <a:rPr lang="sv-SE" sz="1600" b="0" u="none" strike="noStrike" dirty="0" err="1">
+                <a:solidFill>
+                  <a:schemeClr val="dk1"/>
+                </a:solidFill>
+                <a:effectLst/>
+                <a:uFillTx/>
+                <a:latin typeface="Calibri"/>
+                <a:ea typeface="Calibri"/>
+              </a:rPr>
+              <a:t>code</a:t>
+            </a:r>
+            <a:r>
+              <a:rPr lang="sv-SE" sz="1600" b="0" u="none" strike="noStrike" dirty="0">
+                <a:solidFill>
+                  <a:schemeClr val="dk1"/>
+                </a:solidFill>
+                <a:effectLst/>
+                <a:uFillTx/>
+                <a:latin typeface="Calibri"/>
+                <a:ea typeface="Calibri"/>
+              </a:rPr>
+              <a:t>. </a:t>
+            </a:r>
+            <a:endParaRPr lang="en-GB" sz="1600" b="0" u="none" strike="noStrike" dirty="0">
               <a:solidFill>
                 <a:srgbClr val="000000"/>
               </a:solidFill>
@@ -12076,6 +13553,66 @@
               <a:buAutoNum type="arabicPeriod"/>
             </a:pPr>
             <a:r>
+              <a:rPr lang="sv-SE" sz="1600" b="0" u="none" strike="noStrike" dirty="0">
+                <a:solidFill>
+                  <a:schemeClr val="dk1"/>
+                </a:solidFill>
+                <a:effectLst/>
+                <a:uFillTx/>
+                <a:latin typeface="Calibri"/>
+                <a:ea typeface="Calibri"/>
+              </a:rPr>
+              <a:t>The </a:t>
+            </a:r>
+            <a:r>
+              <a:rPr lang="sv-SE" sz="1600" b="0" u="none" strike="noStrike" dirty="0" err="1">
+                <a:solidFill>
+                  <a:schemeClr val="dk1"/>
+                </a:solidFill>
+                <a:effectLst/>
+                <a:uFillTx/>
+                <a:latin typeface="Calibri"/>
+                <a:ea typeface="Calibri"/>
+              </a:rPr>
+              <a:t>framework</a:t>
+            </a:r>
+            <a:r>
+              <a:rPr lang="sv-SE" sz="1600" b="0" u="none" strike="noStrike" dirty="0">
+                <a:solidFill>
+                  <a:schemeClr val="dk1"/>
+                </a:solidFill>
+                <a:effectLst/>
+                <a:uFillTx/>
+                <a:latin typeface="Calibri"/>
+                <a:ea typeface="Calibri"/>
+              </a:rPr>
+              <a:t> </a:t>
+            </a:r>
+            <a:r>
+              <a:rPr lang="sv-SE" sz="1600" b="0" u="none" strike="noStrike" dirty="0" err="1">
+                <a:solidFill>
+                  <a:schemeClr val="dk1"/>
+                </a:solidFill>
+                <a:effectLst/>
+                <a:uFillTx/>
+                <a:latin typeface="Calibri"/>
+                <a:ea typeface="Calibri"/>
+              </a:rPr>
+              <a:t>lowers</a:t>
+            </a:r>
+            <a:r>
+              <a:rPr lang="sv-SE" sz="1600" b="0" u="none" strike="noStrike" dirty="0">
+                <a:solidFill>
+                  <a:schemeClr val="dk1"/>
+                </a:solidFill>
+                <a:effectLst/>
+                <a:uFillTx/>
+                <a:latin typeface="Calibri"/>
+                <a:ea typeface="Calibri"/>
+              </a:rPr>
+              <a:t> </a:t>
+            </a:r>
+            <a:r>
               <a:rPr lang="sv-SE" sz="1600" b="0" u="none" strike="noStrike">
                 <a:solidFill>
                   <a:schemeClr val="dk1"/>
@@ -12085,9 +13622,117 @@
                 <a:latin typeface="Calibri"/>
                 <a:ea typeface="Calibri"/>
               </a:rPr>
-              <a:t>The framework lowers defects directly, and also by raising test coverage. </a:t>
-            </a:r>
-            <a:endParaRPr lang="en-GB" sz="1600" b="0" u="none" strike="noStrike">
+              <a:t>defects</a:t>
+            </a:r>
+            <a:r>
+              <a:rPr lang="sv-SE" sz="1600" b="0" u="none" strike="noStrike" dirty="0">
+                <a:solidFill>
+                  <a:schemeClr val="dk1"/>
+                </a:solidFill>
+                <a:effectLst/>
+                <a:uFillTx/>
+                <a:latin typeface="Calibri"/>
+                <a:ea typeface="Calibri"/>
+              </a:rPr>
+              <a:t> </a:t>
+            </a:r>
+            <a:r>
+              <a:rPr lang="sv-SE" sz="1600" b="0" u="none" strike="noStrike" dirty="0" err="1">
+                <a:solidFill>
+                  <a:schemeClr val="dk1"/>
+                </a:solidFill>
+                <a:effectLst/>
+                <a:uFillTx/>
+                <a:latin typeface="Calibri"/>
+                <a:ea typeface="Calibri"/>
+              </a:rPr>
+              <a:t>directly</a:t>
+            </a:r>
+            <a:r>
+              <a:rPr lang="sv-SE" sz="1600" b="0" u="none" strike="noStrike" dirty="0">
+                <a:solidFill>
+                  <a:schemeClr val="dk1"/>
+                </a:solidFill>
+                <a:effectLst/>
+                <a:uFillTx/>
+                <a:latin typeface="Calibri"/>
+                <a:ea typeface="Calibri"/>
+              </a:rPr>
+              <a:t>, and </a:t>
+            </a:r>
+            <a:r>
+              <a:rPr lang="sv-SE" sz="1600" b="0" u="none" strike="noStrike" dirty="0" err="1">
+                <a:solidFill>
+                  <a:schemeClr val="dk1"/>
+                </a:solidFill>
+                <a:effectLst/>
+                <a:uFillTx/>
+                <a:latin typeface="Calibri"/>
+                <a:ea typeface="Calibri"/>
+              </a:rPr>
+              <a:t>also</a:t>
+            </a:r>
+            <a:r>
+              <a:rPr lang="sv-SE" sz="1600" b="0" u="none" strike="noStrike" dirty="0">
+                <a:solidFill>
+                  <a:schemeClr val="dk1"/>
+                </a:solidFill>
+                <a:effectLst/>
+                <a:uFillTx/>
+                <a:latin typeface="Calibri"/>
+                <a:ea typeface="Calibri"/>
+              </a:rPr>
+              <a:t> by </a:t>
+            </a:r>
+            <a:r>
+              <a:rPr lang="sv-SE" sz="1600" b="0" u="none" strike="noStrike" dirty="0" err="1">
+                <a:solidFill>
+                  <a:schemeClr val="dk1"/>
+                </a:solidFill>
+                <a:effectLst/>
+                <a:uFillTx/>
+                <a:latin typeface="Calibri"/>
+                <a:ea typeface="Calibri"/>
+              </a:rPr>
+              <a:t>raising</a:t>
+            </a:r>
+            <a:r>
+              <a:rPr lang="sv-SE" sz="1600" b="0" u="none" strike="noStrike" dirty="0">
+                <a:solidFill>
+                  <a:schemeClr val="dk1"/>
+                </a:solidFill>
+                <a:effectLst/>
+                <a:uFillTx/>
+                <a:latin typeface="Calibri"/>
+                <a:ea typeface="Calibri"/>
+              </a:rPr>
+              <a:t> test </a:t>
+            </a:r>
+            <a:r>
+              <a:rPr lang="sv-SE" sz="1600" b="0" u="none" strike="noStrike" dirty="0" err="1">
+                <a:solidFill>
+                  <a:schemeClr val="dk1"/>
+                </a:solidFill>
+                <a:effectLst/>
+                <a:uFillTx/>
+                <a:latin typeface="Calibri"/>
+                <a:ea typeface="Calibri"/>
+              </a:rPr>
+              <a:t>coverage</a:t>
+            </a:r>
+            <a:r>
+              <a:rPr lang="sv-SE" sz="1600" b="0" u="none" strike="noStrike" dirty="0">
+                <a:solidFill>
+                  <a:schemeClr val="dk1"/>
+                </a:solidFill>
+                <a:effectLst/>
+                <a:uFillTx/>
+                <a:latin typeface="Calibri"/>
+                <a:ea typeface="Calibri"/>
+              </a:rPr>
+              <a:t>. </a:t>
+            </a:r>
+            <a:endParaRPr lang="en-GB" sz="1600" b="0" u="none" strike="noStrike" dirty="0">
               <a:solidFill>
                 <a:srgbClr val="000000"/>
               </a:solidFill>
@@ -12108,18 +13753,174 @@
               <a:buAutoNum type="arabicPeriod"/>
             </a:pPr>
             <a:r>
-              <a:rPr lang="sv-SE" sz="1600" b="0" u="none" strike="noStrike">
-                <a:solidFill>
-                  <a:schemeClr val="dk1"/>
-                </a:solidFill>
-                <a:effectLst/>
-                <a:uFillTx/>
-                <a:latin typeface="Calibri"/>
-                <a:ea typeface="Calibri"/>
-              </a:rPr>
-              <a:t>More complex modules tend to have more post-release defects. </a:t>
-            </a:r>
-            <a:endParaRPr lang="en-GB" sz="1600" b="0" u="none" strike="noStrike">
+              <a:rPr lang="sv-SE" sz="1600" b="0" u="none" strike="noStrike" dirty="0" err="1">
+                <a:solidFill>
+                  <a:schemeClr val="dk1"/>
+                </a:solidFill>
+                <a:effectLst/>
+                <a:uFillTx/>
+                <a:latin typeface="Calibri"/>
+                <a:ea typeface="Calibri"/>
+              </a:rPr>
+              <a:t>More</a:t>
+            </a:r>
+            <a:r>
+              <a:rPr lang="sv-SE" sz="1600" b="0" u="none" strike="noStrike" dirty="0">
+                <a:solidFill>
+                  <a:schemeClr val="dk1"/>
+                </a:solidFill>
+                <a:effectLst/>
+                <a:uFillTx/>
+                <a:latin typeface="Calibri"/>
+                <a:ea typeface="Calibri"/>
+              </a:rPr>
+              <a:t> </a:t>
+            </a:r>
+            <a:r>
+              <a:rPr lang="sv-SE" sz="1600" b="0" u="none" strike="noStrike" dirty="0" err="1">
+                <a:solidFill>
+                  <a:schemeClr val="dk1"/>
+                </a:solidFill>
+                <a:effectLst/>
+                <a:uFillTx/>
+                <a:latin typeface="Calibri"/>
+                <a:ea typeface="Calibri"/>
+              </a:rPr>
+              <a:t>complex</a:t>
+            </a:r>
+            <a:r>
+              <a:rPr lang="sv-SE" sz="1600" b="0" u="none" strike="noStrike" dirty="0">
+                <a:solidFill>
+                  <a:schemeClr val="dk1"/>
+                </a:solidFill>
+                <a:effectLst/>
+                <a:uFillTx/>
+                <a:latin typeface="Calibri"/>
+                <a:ea typeface="Calibri"/>
+              </a:rPr>
+              <a:t> </a:t>
+            </a:r>
+            <a:r>
+              <a:rPr lang="sv-SE" sz="1600" b="0" u="none" strike="noStrike" dirty="0" err="1">
+                <a:solidFill>
+                  <a:schemeClr val="dk1"/>
+                </a:solidFill>
+                <a:effectLst/>
+                <a:uFillTx/>
+                <a:latin typeface="Calibri"/>
+                <a:ea typeface="Calibri"/>
+              </a:rPr>
+              <a:t>modules</a:t>
+            </a:r>
+            <a:r>
+              <a:rPr lang="sv-SE" sz="1600" b="0" u="none" strike="noStrike" dirty="0">
+                <a:solidFill>
+                  <a:schemeClr val="dk1"/>
+                </a:solidFill>
+                <a:effectLst/>
+                <a:uFillTx/>
+                <a:latin typeface="Calibri"/>
+                <a:ea typeface="Calibri"/>
+              </a:rPr>
+              <a:t> </a:t>
+            </a:r>
+            <a:r>
+              <a:rPr lang="sv-SE" sz="1600" b="0" u="none" strike="noStrike" dirty="0" err="1">
+                <a:solidFill>
+                  <a:schemeClr val="dk1"/>
+                </a:solidFill>
+                <a:effectLst/>
+                <a:uFillTx/>
+                <a:latin typeface="Calibri"/>
+                <a:ea typeface="Calibri"/>
+              </a:rPr>
+              <a:t>tend</a:t>
+            </a:r>
+            <a:r>
+              <a:rPr lang="sv-SE" sz="1600" b="0" u="none" strike="noStrike" dirty="0">
+                <a:solidFill>
+                  <a:schemeClr val="dk1"/>
+                </a:solidFill>
+                <a:effectLst/>
+                <a:uFillTx/>
+                <a:latin typeface="Calibri"/>
+                <a:ea typeface="Calibri"/>
+              </a:rPr>
+              <a:t> to </a:t>
+            </a:r>
+            <a:r>
+              <a:rPr lang="sv-SE" sz="1600" b="0" u="none" strike="noStrike" dirty="0" err="1">
+                <a:solidFill>
+                  <a:schemeClr val="dk1"/>
+                </a:solidFill>
+                <a:effectLst/>
+                <a:uFillTx/>
+                <a:latin typeface="Calibri"/>
+                <a:ea typeface="Calibri"/>
+              </a:rPr>
+              <a:t>have</a:t>
+            </a:r>
+            <a:r>
+              <a:rPr lang="sv-SE" sz="1600" b="0" u="none" strike="noStrike" dirty="0">
+                <a:solidFill>
+                  <a:schemeClr val="dk1"/>
+                </a:solidFill>
+                <a:effectLst/>
+                <a:uFillTx/>
+                <a:latin typeface="Calibri"/>
+                <a:ea typeface="Calibri"/>
+              </a:rPr>
+              <a:t> </a:t>
+            </a:r>
+            <a:r>
+              <a:rPr lang="sv-SE" sz="1600" b="0" u="none" strike="noStrike" dirty="0" err="1">
+                <a:solidFill>
+                  <a:schemeClr val="dk1"/>
+                </a:solidFill>
+                <a:effectLst/>
+                <a:uFillTx/>
+                <a:latin typeface="Calibri"/>
+                <a:ea typeface="Calibri"/>
+              </a:rPr>
+              <a:t>more</a:t>
+            </a:r>
+            <a:r>
+              <a:rPr lang="sv-SE" sz="1600" b="0" u="none" strike="noStrike" dirty="0">
+                <a:solidFill>
+                  <a:schemeClr val="dk1"/>
+                </a:solidFill>
+                <a:effectLst/>
+                <a:uFillTx/>
+                <a:latin typeface="Calibri"/>
+                <a:ea typeface="Calibri"/>
+              </a:rPr>
+              <a:t> post-release </a:t>
+            </a:r>
+            <a:r>
+              <a:rPr lang="sv-SE" sz="1600" b="0" u="none" strike="noStrike" dirty="0" err="1">
+                <a:solidFill>
+                  <a:schemeClr val="dk1"/>
+                </a:solidFill>
+                <a:effectLst/>
+                <a:uFillTx/>
+                <a:latin typeface="Calibri"/>
+                <a:ea typeface="Calibri"/>
+              </a:rPr>
+              <a:t>defects</a:t>
+            </a:r>
+            <a:r>
+              <a:rPr lang="sv-SE" sz="1600" b="0" u="none" strike="noStrike" dirty="0">
+                <a:solidFill>
+                  <a:schemeClr val="dk1"/>
+                </a:solidFill>
+                <a:effectLst/>
+                <a:uFillTx/>
+                <a:latin typeface="Calibri"/>
+                <a:ea typeface="Calibri"/>
+              </a:rPr>
+              <a:t>. </a:t>
+            </a:r>
+            <a:endParaRPr lang="en-GB" sz="1600" b="0" u="none" strike="noStrike" dirty="0">
               <a:solidFill>
                 <a:srgbClr val="000000"/>
               </a:solidFill>
@@ -12140,18 +13941,198 @@
               <a:buAutoNum type="arabicPeriod"/>
             </a:pPr>
             <a:r>
-              <a:rPr lang="sv-SE" sz="1600" b="0" u="none" strike="noStrike">
-                <a:solidFill>
-                  <a:schemeClr val="dk1"/>
-                </a:solidFill>
-                <a:effectLst/>
-                <a:uFillTx/>
-                <a:latin typeface="Calibri"/>
-                <a:ea typeface="Calibri"/>
-              </a:rPr>
-              <a:t>Both the framework and module complexity raise the number of issues logged. </a:t>
-            </a:r>
-            <a:endParaRPr lang="en-GB" sz="1600" b="0" u="none" strike="noStrike">
+              <a:rPr lang="sv-SE" sz="1600" b="0" u="none" strike="noStrike" dirty="0" err="1">
+                <a:solidFill>
+                  <a:schemeClr val="dk1"/>
+                </a:solidFill>
+                <a:effectLst/>
+                <a:uFillTx/>
+                <a:latin typeface="Calibri"/>
+                <a:ea typeface="Calibri"/>
+              </a:rPr>
+              <a:t>Both</a:t>
+            </a:r>
+            <a:r>
+              <a:rPr lang="sv-SE" sz="1600" b="0" u="none" strike="noStrike" dirty="0">
+                <a:solidFill>
+                  <a:schemeClr val="dk1"/>
+                </a:solidFill>
+                <a:effectLst/>
+                <a:uFillTx/>
+                <a:latin typeface="Calibri"/>
+                <a:ea typeface="Calibri"/>
+              </a:rPr>
+              <a:t> the </a:t>
+            </a:r>
+            <a:r>
+              <a:rPr lang="sv-SE" sz="1600" b="0" u="none" strike="noStrike" dirty="0" err="1">
+                <a:solidFill>
+                  <a:schemeClr val="dk1"/>
+                </a:solidFill>
+                <a:effectLst/>
+                <a:uFillTx/>
+                <a:latin typeface="Calibri"/>
+                <a:ea typeface="Calibri"/>
+              </a:rPr>
+              <a:t>framework</a:t>
+            </a:r>
+            <a:r>
+              <a:rPr lang="sv-SE" sz="1600" b="0" u="none" strike="noStrike" dirty="0">
+                <a:solidFill>
+                  <a:schemeClr val="dk1"/>
+                </a:solidFill>
+                <a:effectLst/>
+                <a:uFillTx/>
+                <a:latin typeface="Calibri"/>
+                <a:ea typeface="Calibri"/>
+              </a:rPr>
+              <a:t> and </a:t>
+            </a:r>
+            <a:r>
+              <a:rPr lang="sv-SE" sz="1600" b="0" u="none" strike="noStrike" dirty="0" err="1">
+                <a:solidFill>
+                  <a:schemeClr val="dk1"/>
+                </a:solidFill>
+                <a:effectLst/>
+                <a:uFillTx/>
+                <a:latin typeface="Calibri"/>
+                <a:ea typeface="Calibri"/>
+              </a:rPr>
+              <a:t>module</a:t>
+            </a:r>
+            <a:r>
+              <a:rPr lang="sv-SE" sz="1600" b="0" u="none" strike="noStrike" dirty="0">
+                <a:solidFill>
+                  <a:schemeClr val="dk1"/>
+                </a:solidFill>
+                <a:effectLst/>
+                <a:uFillTx/>
+                <a:latin typeface="Calibri"/>
+                <a:ea typeface="Calibri"/>
+              </a:rPr>
+              <a:t> </a:t>
+            </a:r>
+            <a:r>
+              <a:rPr lang="sv-SE" sz="1600" b="0" u="none" strike="noStrike" dirty="0" err="1">
+                <a:solidFill>
+                  <a:schemeClr val="dk1"/>
+                </a:solidFill>
+                <a:effectLst/>
+                <a:uFillTx/>
+                <a:latin typeface="Calibri"/>
+                <a:ea typeface="Calibri"/>
+              </a:rPr>
+              <a:t>complexity</a:t>
+            </a:r>
+            <a:r>
+              <a:rPr lang="sv-SE" sz="1600" b="0" u="none" strike="noStrike" dirty="0">
+                <a:solidFill>
+                  <a:schemeClr val="dk1"/>
+                </a:solidFill>
+                <a:effectLst/>
+                <a:uFillTx/>
+                <a:latin typeface="Calibri"/>
+                <a:ea typeface="Calibri"/>
+              </a:rPr>
+              <a:t> </a:t>
+            </a:r>
+            <a:r>
+              <a:rPr lang="sv-SE" sz="1600" b="0" u="none" strike="noStrike" dirty="0" err="1">
+                <a:solidFill>
+                  <a:schemeClr val="dk1"/>
+                </a:solidFill>
+                <a:effectLst/>
+                <a:uFillTx/>
+                <a:latin typeface="Calibri"/>
+                <a:ea typeface="Calibri"/>
+              </a:rPr>
+              <a:t>raise</a:t>
+            </a:r>
+            <a:r>
+              <a:rPr lang="sv-SE" sz="1600" b="0" u="none" strike="noStrike" dirty="0">
+                <a:solidFill>
+                  <a:schemeClr val="dk1"/>
+                </a:solidFill>
+                <a:effectLst/>
+                <a:uFillTx/>
+                <a:latin typeface="Calibri"/>
+                <a:ea typeface="Calibri"/>
+              </a:rPr>
+              <a:t> the </a:t>
+            </a:r>
+            <a:r>
+              <a:rPr lang="sv-SE" sz="1600" b="0" u="none" strike="noStrike" dirty="0" err="1">
+                <a:solidFill>
+                  <a:schemeClr val="dk1"/>
+                </a:solidFill>
+                <a:effectLst/>
+                <a:uFillTx/>
+                <a:latin typeface="Calibri"/>
+                <a:ea typeface="Calibri"/>
+              </a:rPr>
+              <a:t>number</a:t>
+            </a:r>
+            <a:r>
+              <a:rPr lang="sv-SE" sz="1600" b="0" u="none" strike="noStrike" dirty="0">
+                <a:solidFill>
+                  <a:schemeClr val="dk1"/>
+                </a:solidFill>
+                <a:effectLst/>
+                <a:uFillTx/>
+                <a:latin typeface="Calibri"/>
+                <a:ea typeface="Calibri"/>
+              </a:rPr>
+              <a:t> of </a:t>
+            </a:r>
+            <a:r>
+              <a:rPr lang="sv-SE" sz="1600" b="0" u="none" strike="noStrike" dirty="0" err="1">
+                <a:solidFill>
+                  <a:schemeClr val="dk1"/>
+                </a:solidFill>
+                <a:effectLst/>
+                <a:uFillTx/>
+                <a:latin typeface="Calibri"/>
+                <a:ea typeface="Calibri"/>
+              </a:rPr>
+              <a:t>issues</a:t>
+            </a:r>
+            <a:r>
+              <a:rPr lang="sv-SE" sz="1600" b="0" u="none" strike="noStrike" dirty="0">
+                <a:solidFill>
+                  <a:schemeClr val="dk1"/>
+                </a:solidFill>
+                <a:effectLst/>
+                <a:uFillTx/>
+                <a:latin typeface="Calibri"/>
+                <a:ea typeface="Calibri"/>
+              </a:rPr>
+              <a:t> </a:t>
+            </a:r>
+            <a:r>
+              <a:rPr lang="sv-SE" sz="1600" b="0" u="none" strike="noStrike" dirty="0" err="1">
+                <a:solidFill>
+                  <a:schemeClr val="dk1"/>
+                </a:solidFill>
+                <a:effectLst/>
+                <a:uFillTx/>
+                <a:latin typeface="Calibri"/>
+                <a:ea typeface="Calibri"/>
+              </a:rPr>
+              <a:t>logged</a:t>
+            </a:r>
+            <a:r>
+              <a:rPr lang="sv-SE" sz="1600" b="0" u="none" strike="noStrike" dirty="0">
+                <a:solidFill>
+                  <a:schemeClr val="dk1"/>
+                </a:solidFill>
+                <a:effectLst/>
+                <a:uFillTx/>
+                <a:latin typeface="Calibri"/>
+                <a:ea typeface="Calibri"/>
+              </a:rPr>
+              <a:t>. </a:t>
+            </a:r>
+            <a:endParaRPr lang="en-GB" sz="1600" b="0" u="none" strike="noStrike" dirty="0">
               <a:solidFill>
                 <a:srgbClr val="000000"/>
               </a:solidFill>
@@ -12164,13 +14145,13 @@
       </p:sp>
       <p:pic>
         <p:nvPicPr>
-          <p:cNvPr id="239" name=""/>
+          <p:cNvPr id="239" name="Bildobjekt 238"/>
           <p:cNvPicPr/>
           <p:nvPr/>
         </p:nvPicPr>
         <p:blipFill>
-          <a:blip r:embed="rId2"/>
-          <a:srcRect l="4793" t="21753" r="0" b="13270"/>
+          <a:blip r:embed="rId4"/>
+          <a:srcRect l="4793" t="21753" b="13270"/>
           <a:stretch/>
         </p:blipFill>
         <p:spPr>
@@ -12189,25 +14170,21 @@
       </p:pic>
     </p:spTree>
   </p:cSld>
-  <mc:AlternateContent>
-    <mc:Choice Requires="p14">
-      <p:transition spd="slow" p14:dur="2000"/>
-    </mc:Choice>
-    <mc:Fallback>
-      <p:transition spd="slow"/>
-    </mc:Fallback>
-  </mc:AlternateContent>
+  <p:clrMapOvr>
+    <a:masterClrMapping/>
+  </p:clrMapOvr>
 </p:sld>
 </file>
 
 <file path=ppt/slides/slide2.xml><?xml version="1.0" encoding="utf-8"?>
-<p:sld xmlns:a="http://schemas.openxmlformats.org/drawingml/2006/main" xmlns:p="http://schemas.openxmlformats.org/presentationml/2006/main" xmlns:r="http://schemas.openxmlformats.org/officeDocument/2006/relationships" xmlns:p14="http://schemas.microsoft.com/office/powerpoint/2010/main" xmlns:p15="http://schemas.microsoft.com/office/powerpoint/2012/main" xmlns:mc="http://schemas.openxmlformats.org/markup-compatibility/2006">
+<p:sld xmlns:a="http://schemas.openxmlformats.org/drawingml/2006/main" xmlns:r="http://schemas.openxmlformats.org/officeDocument/2006/relationships" xmlns:p="http://schemas.openxmlformats.org/presentationml/2006/main">
   <p:cSld>
     <p:bg>
       <p:bgPr>
         <a:solidFill>
           <a:srgbClr val="FFFFFF"/>
         </a:solidFill>
+        <a:effectLst/>
       </p:bgPr>
     </p:bg>
     <p:spTree>
@@ -12231,7 +14208,7 @@
           <p:nvPr/>
         </p:nvPicPr>
         <p:blipFill>
-          <a:blip r:embed="rId1"/>
+          <a:blip r:embed="rId3"/>
           <a:stretch/>
         </p:blipFill>
         <p:spPr>
@@ -12255,7 +14232,7 @@
           <p:nvPr/>
         </p:nvPicPr>
         <p:blipFill>
-          <a:blip r:embed="rId2"/>
+          <a:blip r:embed="rId4"/>
           <a:stretch/>
         </p:blipFill>
         <p:spPr>
@@ -12279,7 +14256,7 @@
           <p:nvPr/>
         </p:nvPicPr>
         <p:blipFill>
-          <a:blip r:embed="rId3"/>
+          <a:blip r:embed="rId5"/>
           <a:stretch/>
         </p:blipFill>
         <p:spPr>
@@ -12303,7 +14280,7 @@
           <p:nvPr/>
         </p:nvPicPr>
         <p:blipFill>
-          <a:blip r:embed="rId4"/>
+          <a:blip r:embed="rId6"/>
           <a:stretch/>
         </p:blipFill>
         <p:spPr>
@@ -12340,15 +14317,22 @@
           </a:ln>
         </p:spPr>
         <p:style>
-          <a:lnRef idx="0"/>
-          <a:fillRef idx="0"/>
-          <a:effectRef idx="0"/>
+          <a:lnRef idx="0">
+            <a:scrgbClr r="0" g="0" b="0"/>
+          </a:lnRef>
+          <a:fillRef idx="0">
+            <a:scrgbClr r="0" g="0" b="0"/>
+          </a:fillRef>
+          <a:effectRef idx="0">
+            <a:scrgbClr r="0" g="0" b="0"/>
+          </a:effectRef>
           <a:fontRef idx="minor"/>
         </p:style>
         <p:txBody>
           <a:bodyPr lIns="0" tIns="0" rIns="0" bIns="0" anchor="ctr">
             <a:noAutofit/>
           </a:bodyPr>
+          <a:lstStyle/>
           <a:p>
             <a:pPr algn="ctr" defTabSz="914400">
               <a:lnSpc>
@@ -12359,7 +14343,7 @@
               </a:tabLst>
             </a:pPr>
             <a:r>
-              <a:rPr lang="en-US" sz="1400" b="0" u="none" spc="201" strike="noStrike">
+              <a:rPr lang="en-US" sz="1400" b="0" u="none" strike="noStrike" spc="201" dirty="0">
                 <a:solidFill>
                   <a:srgbClr val="7A8794"/>
                 </a:solidFill>
@@ -12368,9 +14352,9 @@
                 <a:latin typeface="Calibri"/>
                 <a:ea typeface="Calibri"/>
               </a:rPr>
-              <a:t>Section number</a:t>
-            </a:r>
-            <a:endParaRPr lang="en-GB" sz="1400" b="0" u="none" strike="noStrike">
+              <a:t>Section 4</a:t>
+            </a:r>
+            <a:endParaRPr lang="en-GB" sz="1400" b="0" u="none" strike="noStrike" dirty="0">
               <a:solidFill>
                 <a:srgbClr val="000000"/>
               </a:solidFill>
@@ -12401,15 +14385,22 @@
           </a:ln>
         </p:spPr>
         <p:style>
-          <a:lnRef idx="0"/>
-          <a:fillRef idx="0"/>
-          <a:effectRef idx="0"/>
+          <a:lnRef idx="0">
+            <a:scrgbClr r="0" g="0" b="0"/>
+          </a:lnRef>
+          <a:fillRef idx="0">
+            <a:scrgbClr r="0" g="0" b="0"/>
+          </a:fillRef>
+          <a:effectRef idx="0">
+            <a:scrgbClr r="0" g="0" b="0"/>
+          </a:effectRef>
           <a:fontRef idx="minor"/>
         </p:style>
         <p:txBody>
           <a:bodyPr lIns="0" tIns="0" rIns="0" bIns="0" anchor="ctr">
             <a:noAutofit/>
           </a:bodyPr>
+          <a:lstStyle/>
           <a:p>
             <a:pPr algn="ctr" defTabSz="914400">
               <a:lnSpc>
@@ -12462,15 +14453,22 @@
           </a:ln>
         </p:spPr>
         <p:style>
-          <a:lnRef idx="0"/>
-          <a:fillRef idx="0"/>
-          <a:effectRef idx="0"/>
+          <a:lnRef idx="0">
+            <a:scrgbClr r="0" g="0" b="0"/>
+          </a:lnRef>
+          <a:fillRef idx="0">
+            <a:scrgbClr r="0" g="0" b="0"/>
+          </a:fillRef>
+          <a:effectRef idx="0">
+            <a:scrgbClr r="0" g="0" b="0"/>
+          </a:effectRef>
           <a:fontRef idx="minor"/>
         </p:style>
         <p:txBody>
           <a:bodyPr lIns="0" tIns="0" rIns="0" bIns="0" anchor="ctr">
             <a:noAutofit/>
           </a:bodyPr>
+          <a:lstStyle/>
           <a:p>
             <a:pPr algn="ctr" defTabSz="914400">
               <a:lnSpc>
@@ -12490,31 +14488,7 @@
                 <a:latin typeface="Calibri"/>
                 <a:ea typeface="Calibri"/>
               </a:rPr>
-              <a:t>Exer</a:t>
-            </a:r>
-            <a:r>
-              <a:rPr lang="sv-SE" sz="900" b="0" u="none" strike="noStrike">
-                <a:solidFill>
-                  <a:srgbClr val="7A8794"/>
-                </a:solidFill>
-                <a:effectLst/>
-                <a:uFillTx/>
-                <a:latin typeface="Calibri"/>
-                <a:ea typeface="Calibri"/>
-              </a:rPr>
-              <a:t>cise</a:t>
-            </a:r>
-            <a:r>
-              <a:rPr lang="sv-SE" sz="900" b="0" u="none" strike="noStrike">
-                <a:solidFill>
-                  <a:srgbClr val="7A8794"/>
-                </a:solidFill>
-                <a:effectLst/>
-                <a:uFillTx/>
-                <a:latin typeface="Calibri"/>
-                <a:ea typeface="Calibri"/>
-              </a:rPr>
-              <a:t>s</a:t>
+              <a:t>Exercises</a:t>
             </a:r>
             <a:endParaRPr lang="en-GB" sz="900" b="0" u="none" strike="noStrike">
               <a:solidFill>
@@ -12547,15 +14521,22 @@
           </a:ln>
         </p:spPr>
         <p:style>
-          <a:lnRef idx="0"/>
-          <a:fillRef idx="0"/>
-          <a:effectRef idx="0"/>
+          <a:lnRef idx="0">
+            <a:scrgbClr r="0" g="0" b="0"/>
+          </a:lnRef>
+          <a:fillRef idx="0">
+            <a:scrgbClr r="0" g="0" b="0"/>
+          </a:fillRef>
+          <a:effectRef idx="0">
+            <a:scrgbClr r="0" g="0" b="0"/>
+          </a:effectRef>
           <a:fontRef idx="minor"/>
         </p:style>
         <p:txBody>
           <a:bodyPr lIns="90000" tIns="45000" rIns="90000" bIns="45000" anchor="t">
             <a:noAutofit/>
           </a:bodyPr>
+          <a:lstStyle/>
           <a:p>
             <a:pPr algn="r" defTabSz="914400">
               <a:lnSpc>
@@ -12572,7 +14553,7 @@
                 <a:latin typeface="Calibri"/>
                 <a:ea typeface="Calibri"/>
               </a:rPr>
-              <a:t>&lt;number&gt;</a:t>
+              <a:t>2</a:t>
             </a:fld>
             <a:endParaRPr lang="en-GB" sz="900" b="0" u="none" strike="noStrike">
               <a:solidFill>
@@ -12587,19 +14568,14 @@
       </p:sp>
     </p:spTree>
   </p:cSld>
-  <mc:AlternateContent>
-    <mc:Choice Requires="p14">
-      <p:transition spd="slow" p14:dur="2000"/>
-    </mc:Choice>
-    <mc:Fallback>
-      <p:transition spd="slow"/>
-    </mc:Fallback>
-  </mc:AlternateContent>
+  <p:clrMapOvr>
+    <a:masterClrMapping/>
+  </p:clrMapOvr>
 </p:sld>
 </file>
 
 <file path=ppt/slides/slide3.xml><?xml version="1.0" encoding="utf-8"?>
-<p:sld xmlns:a="http://schemas.openxmlformats.org/drawingml/2006/main" xmlns:p="http://schemas.openxmlformats.org/presentationml/2006/main" xmlns:r="http://schemas.openxmlformats.org/officeDocument/2006/relationships" xmlns:p14="http://schemas.microsoft.com/office/powerpoint/2010/main" xmlns:p15="http://schemas.microsoft.com/office/powerpoint/2012/main" xmlns:mc="http://schemas.openxmlformats.org/markup-compatibility/2006">
+<p:sld xmlns:a="http://schemas.openxmlformats.org/drawingml/2006/main" xmlns:r="http://schemas.openxmlformats.org/officeDocument/2006/relationships" xmlns:p="http://schemas.openxmlformats.org/presentationml/2006/main">
   <p:cSld>
     <p:spTree>
       <p:nvGrpSpPr>
@@ -12720,6 +14696,7 @@
           <a:bodyPr lIns="91440" tIns="45720" rIns="91440" bIns="45720" anchor="ctr">
             <a:noAutofit/>
           </a:bodyPr>
+          <a:lstStyle/>
           <a:p>
             <a:pPr indent="0" algn="l" defTabSz="914400">
               <a:lnSpc>
@@ -12777,6 +14754,7 @@
           <a:bodyPr lIns="91440" tIns="45720" rIns="91440" bIns="45720" anchor="t">
             <a:noAutofit/>
           </a:bodyPr>
+          <a:lstStyle/>
           <a:p>
             <a:pPr marL="228600" indent="-228600" algn="l" defTabSz="914400">
               <a:lnSpc>
@@ -12792,31 +14770,126 @@
               <a:buChar char="•"/>
             </a:pPr>
             <a:r>
-              <a:rPr lang="sv-SE" sz="2000" b="0" u="none" strike="noStrike">
-                <a:solidFill>
-                  <a:schemeClr val="dk1"/>
-                </a:solidFill>
-                <a:effectLst/>
-                <a:uFillTx/>
-                <a:latin typeface="Calibri"/>
-                <a:ea typeface="Calibri"/>
-              </a:rPr>
-              <a:t>Access it here: </a:t>
-            </a:r>
-            <a:r>
-              <a:rPr lang="en-US" sz="2000" b="0" u="sng" strike="noStrike">
-                <a:solidFill>
-                  <a:schemeClr val="dk1"/>
-                </a:solidFill>
-                <a:effectLst/>
-                <a:uFillTx/>
-                <a:latin typeface="Calibri"/>
-                <a:ea typeface="Calibri"/>
-                <a:hlinkClick r:id="rId1"/>
-              </a:rPr>
-              <a:t>https://dagitty.net/</a:t>
-            </a:r>
-            <a:endParaRPr lang="en-GB" sz="2000" b="0" u="none" strike="noStrike">
+              <a:rPr lang="sv-SE" sz="2000" b="0" u="none" strike="noStrike" dirty="0" err="1">
+                <a:solidFill>
+                  <a:schemeClr val="dk1"/>
+                </a:solidFill>
+                <a:effectLst/>
+                <a:uFillTx/>
+                <a:latin typeface="Calibri"/>
+                <a:ea typeface="Calibri"/>
+              </a:rPr>
+              <a:t>DAGitty</a:t>
+            </a:r>
+            <a:r>
+              <a:rPr lang="sv-SE" sz="2000" b="0" u="none" strike="noStrike" dirty="0">
+                <a:solidFill>
+                  <a:schemeClr val="dk1"/>
+                </a:solidFill>
+                <a:effectLst/>
+                <a:uFillTx/>
+                <a:latin typeface="Calibri"/>
+                <a:ea typeface="Calibri"/>
+              </a:rPr>
+              <a:t> is a browser-</a:t>
+            </a:r>
+            <a:r>
+              <a:rPr lang="sv-SE" sz="2000" b="0" u="none" strike="noStrike" dirty="0" err="1">
+                <a:solidFill>
+                  <a:schemeClr val="dk1"/>
+                </a:solidFill>
+                <a:effectLst/>
+                <a:uFillTx/>
+                <a:latin typeface="Calibri"/>
+                <a:ea typeface="Calibri"/>
+              </a:rPr>
+              <a:t>based</a:t>
+            </a:r>
+            <a:r>
+              <a:rPr lang="sv-SE" sz="2000" b="0" u="none" strike="noStrike" dirty="0">
+                <a:solidFill>
+                  <a:schemeClr val="dk1"/>
+                </a:solidFill>
+                <a:effectLst/>
+                <a:uFillTx/>
+                <a:latin typeface="Calibri"/>
+                <a:ea typeface="Calibri"/>
+              </a:rPr>
+              <a:t> </a:t>
+            </a:r>
+            <a:r>
+              <a:rPr lang="sv-SE" sz="2000" b="0" u="none" strike="noStrike" dirty="0" err="1">
+                <a:solidFill>
+                  <a:schemeClr val="dk1"/>
+                </a:solidFill>
+                <a:effectLst/>
+                <a:uFillTx/>
+                <a:latin typeface="Calibri"/>
+                <a:ea typeface="Calibri"/>
+              </a:rPr>
+              <a:t>tool</a:t>
+            </a:r>
+            <a:r>
+              <a:rPr lang="sv-SE" sz="2000" b="0" u="none" strike="noStrike" dirty="0">
+                <a:solidFill>
+                  <a:schemeClr val="dk1"/>
+                </a:solidFill>
+                <a:effectLst/>
+                <a:uFillTx/>
+                <a:latin typeface="Calibri"/>
+                <a:ea typeface="Calibri"/>
+              </a:rPr>
+              <a:t> to </a:t>
+            </a:r>
+            <a:r>
+              <a:rPr lang="sv-SE" sz="2000" b="0" u="none" strike="noStrike" dirty="0" err="1">
+                <a:solidFill>
+                  <a:schemeClr val="dk1"/>
+                </a:solidFill>
+                <a:effectLst/>
+                <a:uFillTx/>
+                <a:latin typeface="Calibri"/>
+                <a:ea typeface="Calibri"/>
+              </a:rPr>
+              <a:t>create</a:t>
+            </a:r>
+            <a:r>
+              <a:rPr lang="sv-SE" sz="2000" b="0" u="none" strike="noStrike" dirty="0">
+                <a:solidFill>
+                  <a:schemeClr val="dk1"/>
+                </a:solidFill>
+                <a:effectLst/>
+                <a:uFillTx/>
+                <a:latin typeface="Calibri"/>
+                <a:ea typeface="Calibri"/>
+              </a:rPr>
+              <a:t> and </a:t>
+            </a:r>
+            <a:r>
+              <a:rPr lang="sv-SE" sz="2000" b="0" u="none" strike="noStrike" dirty="0" err="1">
+                <a:solidFill>
+                  <a:schemeClr val="dk1"/>
+                </a:solidFill>
+                <a:effectLst/>
+                <a:uFillTx/>
+                <a:latin typeface="Calibri"/>
+                <a:ea typeface="Calibri"/>
+              </a:rPr>
+              <a:t>analyse</a:t>
+            </a:r>
+            <a:r>
+              <a:rPr lang="sv-SE" sz="2000" b="0" u="none" strike="noStrike" dirty="0">
+                <a:solidFill>
+                  <a:schemeClr val="dk1"/>
+                </a:solidFill>
+                <a:effectLst/>
+                <a:uFillTx/>
+                <a:latin typeface="Calibri"/>
+                <a:ea typeface="Calibri"/>
+              </a:rPr>
+              <a:t> DAGs</a:t>
+            </a:r>
+            <a:endParaRPr lang="en-GB" sz="2000" b="0" u="none" strike="noStrike" dirty="0">
               <a:solidFill>
                 <a:schemeClr val="dk1"/>
               </a:solidFill>
@@ -12840,18 +14913,186 @@
               <a:buChar char="•"/>
             </a:pPr>
             <a:r>
-              <a:rPr lang="sv-SE" sz="2000" b="0" u="none" strike="noStrike">
-                <a:solidFill>
-                  <a:schemeClr val="dk1"/>
-                </a:solidFill>
-                <a:effectLst/>
-                <a:uFillTx/>
-                <a:latin typeface="Calibri"/>
-                <a:ea typeface="Calibri"/>
-              </a:rPr>
-              <a:t>DAGitty is a browser-based tool to create and analyse DAGs</a:t>
-            </a:r>
-            <a:endParaRPr lang="en-GB" sz="2000" b="0" u="none" strike="noStrike">
+              <a:rPr lang="sv-SE" sz="2000" b="0" u="none" strike="noStrike" dirty="0">
+                <a:solidFill>
+                  <a:schemeClr val="dk1"/>
+                </a:solidFill>
+                <a:effectLst/>
+                <a:uFillTx/>
+                <a:latin typeface="Calibri"/>
+                <a:ea typeface="Calibri"/>
+              </a:rPr>
+              <a:t>It </a:t>
+            </a:r>
+            <a:r>
+              <a:rPr lang="sv-SE" sz="2000" b="0" u="none" strike="noStrike" dirty="0" err="1">
+                <a:solidFill>
+                  <a:schemeClr val="dk1"/>
+                </a:solidFill>
+                <a:effectLst/>
+                <a:uFillTx/>
+                <a:latin typeface="Calibri"/>
+                <a:ea typeface="Calibri"/>
+              </a:rPr>
+              <a:t>helps</a:t>
+            </a:r>
+            <a:r>
+              <a:rPr lang="sv-SE" sz="2000" b="0" u="none" strike="noStrike" dirty="0">
+                <a:solidFill>
+                  <a:schemeClr val="dk1"/>
+                </a:solidFill>
+                <a:effectLst/>
+                <a:uFillTx/>
+                <a:latin typeface="Calibri"/>
+                <a:ea typeface="Calibri"/>
+              </a:rPr>
+              <a:t> </a:t>
+            </a:r>
+            <a:r>
+              <a:rPr lang="sv-SE" sz="2000" b="0" u="none" strike="noStrike" dirty="0" err="1">
+                <a:solidFill>
+                  <a:schemeClr val="dk1"/>
+                </a:solidFill>
+                <a:effectLst/>
+                <a:uFillTx/>
+                <a:latin typeface="Calibri"/>
+                <a:ea typeface="Calibri"/>
+              </a:rPr>
+              <a:t>causal</a:t>
+            </a:r>
+            <a:r>
+              <a:rPr lang="sv-SE" sz="2000" b="0" u="none" strike="noStrike" dirty="0">
+                <a:solidFill>
+                  <a:schemeClr val="dk1"/>
+                </a:solidFill>
+                <a:effectLst/>
+                <a:uFillTx/>
+                <a:latin typeface="Calibri"/>
+                <a:ea typeface="Calibri"/>
+              </a:rPr>
+              <a:t> </a:t>
+            </a:r>
+            <a:r>
+              <a:rPr lang="sv-SE" sz="2000" b="0" u="none" strike="noStrike" dirty="0" err="1">
+                <a:solidFill>
+                  <a:schemeClr val="dk1"/>
+                </a:solidFill>
+                <a:effectLst/>
+                <a:uFillTx/>
+                <a:latin typeface="Calibri"/>
+                <a:ea typeface="Calibri"/>
+              </a:rPr>
+              <a:t>inference</a:t>
+            </a:r>
+            <a:r>
+              <a:rPr lang="sv-SE" sz="2000" b="0" u="none" strike="noStrike" dirty="0">
+                <a:solidFill>
+                  <a:schemeClr val="dk1"/>
+                </a:solidFill>
+                <a:effectLst/>
+                <a:uFillTx/>
+                <a:latin typeface="Calibri"/>
+                <a:ea typeface="Calibri"/>
+              </a:rPr>
+              <a:t> by </a:t>
+            </a:r>
+            <a:r>
+              <a:rPr lang="sv-SE" sz="2000" b="0" u="none" strike="noStrike" dirty="0" err="1">
+                <a:solidFill>
+                  <a:schemeClr val="dk1"/>
+                </a:solidFill>
+                <a:effectLst/>
+                <a:uFillTx/>
+                <a:latin typeface="Calibri"/>
+                <a:ea typeface="Calibri"/>
+              </a:rPr>
+              <a:t>automatically</a:t>
+            </a:r>
+            <a:r>
+              <a:rPr lang="sv-SE" sz="2000" b="0" u="none" strike="noStrike" dirty="0">
+                <a:solidFill>
+                  <a:schemeClr val="dk1"/>
+                </a:solidFill>
+                <a:effectLst/>
+                <a:uFillTx/>
+                <a:latin typeface="Calibri"/>
+                <a:ea typeface="Calibri"/>
+              </a:rPr>
+              <a:t> </a:t>
+            </a:r>
+            <a:r>
+              <a:rPr lang="sv-SE" sz="2000" b="0" u="none" strike="noStrike" dirty="0" err="1">
+                <a:solidFill>
+                  <a:schemeClr val="dk1"/>
+                </a:solidFill>
+                <a:effectLst/>
+                <a:uFillTx/>
+                <a:latin typeface="Calibri"/>
+                <a:ea typeface="Calibri"/>
+              </a:rPr>
+              <a:t>identifiying</a:t>
+            </a:r>
+            <a:r>
+              <a:rPr lang="sv-SE" sz="2000" b="0" u="none" strike="noStrike" dirty="0">
+                <a:solidFill>
+                  <a:schemeClr val="dk1"/>
+                </a:solidFill>
+                <a:effectLst/>
+                <a:uFillTx/>
+                <a:latin typeface="Calibri"/>
+                <a:ea typeface="Calibri"/>
+              </a:rPr>
+              <a:t> </a:t>
+            </a:r>
+            <a:r>
+              <a:rPr lang="sv-SE" sz="2000" b="0" u="none" strike="noStrike" dirty="0" err="1">
+                <a:solidFill>
+                  <a:schemeClr val="dk1"/>
+                </a:solidFill>
+                <a:effectLst/>
+                <a:uFillTx/>
+                <a:latin typeface="Calibri"/>
+                <a:ea typeface="Calibri"/>
+              </a:rPr>
+              <a:t>necessary</a:t>
+            </a:r>
+            <a:r>
+              <a:rPr lang="sv-SE" sz="2000" b="0" u="none" strike="noStrike" dirty="0">
+                <a:solidFill>
+                  <a:schemeClr val="dk1"/>
+                </a:solidFill>
+                <a:effectLst/>
+                <a:uFillTx/>
+                <a:latin typeface="Calibri"/>
+                <a:ea typeface="Calibri"/>
+              </a:rPr>
+              <a:t> </a:t>
+            </a:r>
+            <a:r>
+              <a:rPr lang="sv-SE" sz="2000" b="0" u="none" strike="noStrike" dirty="0" err="1">
+                <a:solidFill>
+                  <a:schemeClr val="dk1"/>
+                </a:solidFill>
+                <a:effectLst/>
+                <a:uFillTx/>
+                <a:latin typeface="Calibri"/>
+                <a:ea typeface="Calibri"/>
+              </a:rPr>
+              <a:t>adjustment</a:t>
+            </a:r>
+            <a:r>
+              <a:rPr lang="sv-SE" sz="2000" b="0" u="none" strike="noStrike" dirty="0">
+                <a:solidFill>
+                  <a:schemeClr val="dk1"/>
+                </a:solidFill>
+                <a:effectLst/>
+                <a:uFillTx/>
+                <a:latin typeface="Calibri"/>
+                <a:ea typeface="Calibri"/>
+              </a:rPr>
+              <a:t> sets. </a:t>
+            </a:r>
+            <a:endParaRPr lang="en-GB" sz="2000" b="0" u="none" strike="noStrike" dirty="0">
               <a:solidFill>
                 <a:schemeClr val="dk1"/>
               </a:solidFill>
@@ -12875,43 +15116,296 @@
               <a:buChar char="•"/>
             </a:pPr>
             <a:r>
-              <a:rPr lang="sv-SE" sz="2000" b="0" u="none" strike="noStrike">
-                <a:solidFill>
-                  <a:schemeClr val="dk1"/>
-                </a:solidFill>
-                <a:effectLst/>
-                <a:uFillTx/>
-                <a:latin typeface="Calibri"/>
-                <a:ea typeface="Calibri"/>
-              </a:rPr>
-              <a:t>It helps causal inference by automatically identifiying necessary adjustment </a:t>
-            </a:r>
-            <a:r>
-              <a:rPr lang="sv-SE" sz="2000" b="0" u="none" strike="noStrike">
-                <a:solidFill>
-                  <a:schemeClr val="dk1"/>
-                </a:solidFill>
-                <a:effectLst/>
-                <a:uFillTx/>
-                <a:latin typeface="Calibri"/>
-                <a:ea typeface="Calibri"/>
-              </a:rPr>
-              <a:t>sets. </a:t>
-            </a:r>
-            <a:endParaRPr lang="en-GB" sz="2000" b="0" u="none" strike="noStrike">
-              <a:solidFill>
-                <a:schemeClr val="dk1"/>
-              </a:solidFill>
-              <a:effectLst/>
-              <a:uFillTx/>
-              <a:latin typeface="Calibri"/>
-            </a:endParaRPr>
-          </a:p>
-          <a:p>
-            <a:pPr marL="228600" indent="-228600" algn="l" defTabSz="914400">
-              <a:lnSpc>
-                <a:spcPct val="90000"/>
-              </a:lnSpc>
+              <a:rPr lang="sv-SE" sz="2000" b="0" u="none" strike="noStrike" dirty="0" err="1">
+                <a:solidFill>
+                  <a:schemeClr val="dk1"/>
+                </a:solidFill>
+                <a:effectLst/>
+                <a:uFillTx/>
+                <a:latin typeface="Calibri"/>
+                <a:ea typeface="Calibri"/>
+              </a:rPr>
+              <a:t>Based</a:t>
+            </a:r>
+            <a:r>
+              <a:rPr lang="sv-SE" sz="2000" b="0" u="none" strike="noStrike" dirty="0">
+                <a:solidFill>
+                  <a:schemeClr val="dk1"/>
+                </a:solidFill>
+                <a:effectLst/>
+                <a:uFillTx/>
+                <a:latin typeface="Calibri"/>
+                <a:ea typeface="Calibri"/>
+              </a:rPr>
+              <a:t> on the </a:t>
+            </a:r>
+            <a:r>
+              <a:rPr lang="sv-SE" sz="2000" b="0" u="none" strike="noStrike" dirty="0" err="1">
+                <a:solidFill>
+                  <a:schemeClr val="dk1"/>
+                </a:solidFill>
+                <a:effectLst/>
+                <a:uFillTx/>
+                <a:latin typeface="Calibri"/>
+                <a:ea typeface="Calibri"/>
+              </a:rPr>
+              <a:t>graphical</a:t>
+            </a:r>
+            <a:r>
+              <a:rPr lang="sv-SE" sz="2000" b="0" u="none" strike="noStrike" dirty="0">
+                <a:solidFill>
+                  <a:schemeClr val="dk1"/>
+                </a:solidFill>
+                <a:effectLst/>
+                <a:uFillTx/>
+                <a:latin typeface="Calibri"/>
+                <a:ea typeface="Calibri"/>
+              </a:rPr>
+              <a:t> </a:t>
+            </a:r>
+            <a:r>
+              <a:rPr lang="sv-SE" sz="2000" b="0" u="none" strike="noStrike" dirty="0" err="1">
+                <a:solidFill>
+                  <a:schemeClr val="dk1"/>
+                </a:solidFill>
+                <a:effectLst/>
+                <a:uFillTx/>
+                <a:latin typeface="Calibri"/>
+                <a:ea typeface="Calibri"/>
+              </a:rPr>
+              <a:t>causal</a:t>
+            </a:r>
+            <a:r>
+              <a:rPr lang="sv-SE" sz="2000" b="0" u="none" strike="noStrike" dirty="0">
+                <a:solidFill>
+                  <a:schemeClr val="dk1"/>
+                </a:solidFill>
+                <a:effectLst/>
+                <a:uFillTx/>
+                <a:latin typeface="Calibri"/>
+                <a:ea typeface="Calibri"/>
+              </a:rPr>
+              <a:t> </a:t>
+            </a:r>
+            <a:r>
+              <a:rPr lang="sv-SE" sz="2000" b="0" u="none" strike="noStrike" dirty="0" err="1">
+                <a:solidFill>
+                  <a:schemeClr val="dk1"/>
+                </a:solidFill>
+                <a:effectLst/>
+                <a:uFillTx/>
+                <a:latin typeface="Calibri"/>
+                <a:ea typeface="Calibri"/>
+              </a:rPr>
+              <a:t>model</a:t>
+            </a:r>
+            <a:r>
+              <a:rPr lang="sv-SE" sz="2000" b="0" u="none" strike="noStrike" dirty="0">
+                <a:solidFill>
+                  <a:schemeClr val="dk1"/>
+                </a:solidFill>
+                <a:effectLst/>
+                <a:uFillTx/>
+                <a:latin typeface="Calibri"/>
+                <a:ea typeface="Calibri"/>
+              </a:rPr>
+              <a:t>, it </a:t>
+            </a:r>
+            <a:r>
+              <a:rPr lang="sv-SE" sz="2000" b="0" u="none" strike="noStrike" dirty="0" err="1">
+                <a:solidFill>
+                  <a:schemeClr val="dk1"/>
+                </a:solidFill>
+                <a:effectLst/>
+                <a:uFillTx/>
+                <a:latin typeface="Calibri"/>
+                <a:ea typeface="Calibri"/>
+              </a:rPr>
+              <a:t>provides</a:t>
+            </a:r>
+            <a:r>
+              <a:rPr lang="sv-SE" sz="2000" b="0" u="none" strike="noStrike" dirty="0">
+                <a:solidFill>
+                  <a:schemeClr val="dk1"/>
+                </a:solidFill>
+                <a:effectLst/>
+                <a:uFillTx/>
+                <a:latin typeface="Calibri"/>
+                <a:ea typeface="Calibri"/>
+              </a:rPr>
+              <a:t> </a:t>
+            </a:r>
+            <a:r>
+              <a:rPr lang="sv-SE" sz="2000" b="1" i="1" u="none" strike="noStrike" dirty="0" err="1">
+                <a:solidFill>
+                  <a:schemeClr val="dk1"/>
+                </a:solidFill>
+                <a:effectLst/>
+                <a:uFillTx/>
+                <a:latin typeface="Calibri"/>
+                <a:ea typeface="Calibri"/>
+              </a:rPr>
+              <a:t>conditional</a:t>
+            </a:r>
+            <a:r>
+              <a:rPr lang="sv-SE" sz="2000" b="1" i="1" u="none" strike="noStrike" dirty="0">
+                <a:solidFill>
+                  <a:schemeClr val="dk1"/>
+                </a:solidFill>
+                <a:effectLst/>
+                <a:uFillTx/>
+                <a:latin typeface="Calibri"/>
+                <a:ea typeface="Calibri"/>
+              </a:rPr>
+              <a:t> </a:t>
+            </a:r>
+            <a:r>
+              <a:rPr lang="sv-SE" sz="2000" b="1" i="1" u="none" strike="noStrike" dirty="0" err="1">
+                <a:solidFill>
+                  <a:schemeClr val="dk1"/>
+                </a:solidFill>
+                <a:effectLst/>
+                <a:uFillTx/>
+                <a:latin typeface="Calibri"/>
+                <a:ea typeface="Calibri"/>
+              </a:rPr>
+              <a:t>independence</a:t>
+            </a:r>
+            <a:r>
+              <a:rPr lang="sv-SE" sz="2000" b="1" i="1" u="none" strike="noStrike" dirty="0">
+                <a:solidFill>
+                  <a:schemeClr val="dk1"/>
+                </a:solidFill>
+                <a:effectLst/>
+                <a:uFillTx/>
+                <a:latin typeface="Calibri"/>
+                <a:ea typeface="Calibri"/>
+              </a:rPr>
+              <a:t> </a:t>
+            </a:r>
+            <a:r>
+              <a:rPr lang="sv-SE" sz="2000" b="1" i="1" u="none" strike="noStrike" dirty="0" err="1">
+                <a:solidFill>
+                  <a:schemeClr val="dk1"/>
+                </a:solidFill>
+                <a:effectLst/>
+                <a:uFillTx/>
+                <a:latin typeface="Calibri"/>
+                <a:ea typeface="Calibri"/>
+              </a:rPr>
+              <a:t>criteria</a:t>
+            </a:r>
+            <a:r>
+              <a:rPr lang="sv-SE" sz="2000" b="1" i="1" u="none" strike="noStrike" dirty="0">
+                <a:solidFill>
+                  <a:schemeClr val="dk1"/>
+                </a:solidFill>
+                <a:effectLst/>
+                <a:uFillTx/>
+                <a:latin typeface="Calibri"/>
+                <a:ea typeface="Calibri"/>
+              </a:rPr>
+              <a:t> </a:t>
+            </a:r>
+            <a:r>
+              <a:rPr lang="sv-SE" sz="2000" b="0" u="none" strike="noStrike" dirty="0" err="1">
+                <a:solidFill>
+                  <a:schemeClr val="dk1"/>
+                </a:solidFill>
+                <a:effectLst/>
+                <a:uFillTx/>
+                <a:latin typeface="Calibri"/>
+                <a:ea typeface="Calibri"/>
+              </a:rPr>
+              <a:t>that</a:t>
+            </a:r>
+            <a:r>
+              <a:rPr lang="sv-SE" sz="2000" b="0" u="none" strike="noStrike" dirty="0">
+                <a:solidFill>
+                  <a:schemeClr val="dk1"/>
+                </a:solidFill>
+                <a:effectLst/>
+                <a:uFillTx/>
+                <a:latin typeface="Calibri"/>
+                <a:ea typeface="Calibri"/>
+              </a:rPr>
+              <a:t> </a:t>
+            </a:r>
+            <a:r>
+              <a:rPr lang="sv-SE" sz="2000" b="0" u="none" strike="noStrike" dirty="0" err="1">
+                <a:solidFill>
+                  <a:schemeClr val="dk1"/>
+                </a:solidFill>
+                <a:effectLst/>
+                <a:uFillTx/>
+                <a:latin typeface="Calibri"/>
+                <a:ea typeface="Calibri"/>
+              </a:rPr>
+              <a:t>can</a:t>
+            </a:r>
+            <a:r>
+              <a:rPr lang="sv-SE" sz="2000" b="0" u="none" strike="noStrike" dirty="0">
+                <a:solidFill>
+                  <a:schemeClr val="dk1"/>
+                </a:solidFill>
+                <a:effectLst/>
+                <a:uFillTx/>
+                <a:latin typeface="Calibri"/>
+                <a:ea typeface="Calibri"/>
+              </a:rPr>
+              <a:t> be </a:t>
+            </a:r>
+            <a:r>
+              <a:rPr lang="sv-SE" sz="2000" b="0" u="none" strike="noStrike" dirty="0" err="1">
+                <a:solidFill>
+                  <a:schemeClr val="dk1"/>
+                </a:solidFill>
+                <a:effectLst/>
+                <a:uFillTx/>
+                <a:latin typeface="Calibri"/>
+                <a:ea typeface="Calibri"/>
+              </a:rPr>
+              <a:t>used</a:t>
+            </a:r>
+            <a:r>
+              <a:rPr lang="sv-SE" sz="2000" b="0" u="none" strike="noStrike" dirty="0">
+                <a:solidFill>
+                  <a:schemeClr val="dk1"/>
+                </a:solidFill>
+                <a:effectLst/>
+                <a:uFillTx/>
+                <a:latin typeface="Calibri"/>
+                <a:ea typeface="Calibri"/>
+              </a:rPr>
+              <a:t> to test </a:t>
+            </a:r>
+            <a:r>
+              <a:rPr lang="sv-SE" sz="2000" b="0" u="none" strike="noStrike" dirty="0" err="1">
+                <a:solidFill>
+                  <a:schemeClr val="dk1"/>
+                </a:solidFill>
+                <a:effectLst/>
+                <a:uFillTx/>
+                <a:latin typeface="Calibri"/>
+                <a:ea typeface="Calibri"/>
+              </a:rPr>
+              <a:t>models</a:t>
+            </a:r>
+            <a:r>
+              <a:rPr lang="sv-SE" sz="2000" b="0" u="none" strike="noStrike" dirty="0">
+                <a:solidFill>
+                  <a:schemeClr val="dk1"/>
+                </a:solidFill>
+                <a:effectLst/>
+                <a:uFillTx/>
+                <a:latin typeface="Calibri"/>
+                <a:ea typeface="Calibri"/>
+              </a:rPr>
+              <a:t>. </a:t>
+            </a:r>
+          </a:p>
+          <a:p>
+            <a:pPr marL="228600" indent="-228600">
               <a:spcBef>
                 <a:spcPts val="1001"/>
               </a:spcBef>
@@ -12922,59 +15416,50 @@
               <a:buChar char="•"/>
             </a:pPr>
             <a:r>
-              <a:rPr lang="sv-SE" sz="2000" b="0" u="none" strike="noStrike">
-                <a:solidFill>
-                  <a:schemeClr val="dk1"/>
-                </a:solidFill>
-                <a:effectLst/>
-                <a:uFillTx/>
-                <a:latin typeface="Calibri"/>
-                <a:ea typeface="Calibri"/>
-              </a:rPr>
-              <a:t>Based on the graphical causal model, it provides </a:t>
-            </a:r>
-            <a:r>
-              <a:rPr lang="sv-SE" sz="2000" b="1" i="1" u="none" strike="noStrike">
-                <a:solidFill>
-                  <a:schemeClr val="dk1"/>
-                </a:solidFill>
-                <a:effectLst/>
-                <a:uFillTx/>
-                <a:latin typeface="Calibri"/>
-                <a:ea typeface="Calibri"/>
-              </a:rPr>
-              <a:t>conditional independence </a:t>
-            </a:r>
-            <a:r>
-              <a:rPr lang="sv-SE" sz="2000" b="1" i="1" u="none" strike="noStrike">
-                <a:solidFill>
-                  <a:schemeClr val="dk1"/>
-                </a:solidFill>
-                <a:effectLst/>
-                <a:uFillTx/>
-                <a:latin typeface="Calibri"/>
-                <a:ea typeface="Calibri"/>
-              </a:rPr>
-              <a:t>criteria </a:t>
-            </a:r>
-            <a:r>
-              <a:rPr lang="sv-SE" sz="2000" b="0" u="none" strike="noStrike">
-                <a:solidFill>
-                  <a:schemeClr val="dk1"/>
-                </a:solidFill>
-                <a:effectLst/>
-                <a:uFillTx/>
-                <a:latin typeface="Calibri"/>
-                <a:ea typeface="Calibri"/>
-              </a:rPr>
-              <a:t>that can be used to test models. </a:t>
-            </a:r>
-            <a:endParaRPr lang="en-GB" sz="2000" b="0" u="none" strike="noStrike">
+              <a:rPr lang="sv-SE" sz="2000" b="0" dirty="0">
+                <a:solidFill>
+                  <a:schemeClr val="dk1"/>
+                </a:solidFill>
+                <a:latin typeface="Calibri"/>
+                <a:ea typeface="Calibri"/>
+              </a:rPr>
+              <a:t>Access it </a:t>
+            </a:r>
+            <a:r>
+              <a:rPr lang="sv-SE" sz="2000" b="0" dirty="0" err="1">
+                <a:solidFill>
+                  <a:schemeClr val="dk1"/>
+                </a:solidFill>
+                <a:latin typeface="Calibri"/>
+                <a:ea typeface="Calibri"/>
+              </a:rPr>
+              <a:t>here</a:t>
+            </a:r>
+            <a:r>
+              <a:rPr lang="sv-SE" sz="2000" b="0" dirty="0">
+                <a:solidFill>
+                  <a:schemeClr val="dk1"/>
+                </a:solidFill>
+                <a:latin typeface="Calibri"/>
+                <a:ea typeface="Calibri"/>
+              </a:rPr>
+              <a:t>: </a:t>
+            </a:r>
+            <a:r>
+              <a:rPr lang="en-US" sz="2000" b="0" u="sng" dirty="0">
+                <a:solidFill>
+                  <a:schemeClr val="dk1"/>
+                </a:solidFill>
+                <a:latin typeface="Calibri"/>
+                <a:ea typeface="Calibri"/>
+                <a:hlinkClick r:id="rId3"/>
+              </a:rPr>
+              <a:t>https://dagitty.net/</a:t>
+            </a:r>
+            <a:endParaRPr lang="en-GB" sz="2000" b="0" dirty="0">
               <a:solidFill>
                 <a:schemeClr val="dk1"/>
               </a:solidFill>
-              <a:effectLst/>
-              <a:uFillTx/>
               <a:latin typeface="Calibri"/>
             </a:endParaRPr>
           </a:p>
@@ -13041,7 +15526,7 @@
                 <a:latin typeface="Calibri"/>
                 <a:ea typeface="Calibri"/>
               </a:rPr>
-              <a:t>&lt;number&gt;</a:t>
+              <a:t>3</a:t>
             </a:fld>
             <a:endParaRPr lang="en-GB" sz="900" b="0" u="none" strike="noStrike">
               <a:solidFill>
@@ -13056,12 +15541,12 @@
       </p:sp>
       <p:pic>
         <p:nvPicPr>
-          <p:cNvPr id="70" name=""/>
+          <p:cNvPr id="70" name="Bildobjekt 69"/>
           <p:cNvPicPr/>
           <p:nvPr/>
         </p:nvPicPr>
         <p:blipFill>
-          <a:blip r:embed="rId2"/>
+          <a:blip r:embed="rId4"/>
           <a:stretch/>
         </p:blipFill>
         <p:spPr>
@@ -13080,7 +15565,7 @@
       </p:pic>
       <p:sp>
         <p:nvSpPr>
-          <p:cNvPr id="71" name=""/>
+          <p:cNvPr id="71" name="Rektangel 70"/>
           <p:cNvSpPr/>
           <p:nvPr/>
         </p:nvSpPr>
@@ -13098,15 +15583,22 @@
           </a:ln>
         </p:spPr>
         <p:style>
-          <a:lnRef idx="0"/>
-          <a:fillRef idx="0"/>
-          <a:effectRef idx="0"/>
+          <a:lnRef idx="0">
+            <a:scrgbClr r="0" g="0" b="0"/>
+          </a:lnRef>
+          <a:fillRef idx="0">
+            <a:scrgbClr r="0" g="0" b="0"/>
+          </a:fillRef>
+          <a:effectRef idx="0">
+            <a:scrgbClr r="0" g="0" b="0"/>
+          </a:effectRef>
           <a:fontRef idx="minor"/>
         </p:style>
         <p:txBody>
-          <a:bodyPr numCol="1" spcCol="0" horzOverflow="overflow" anchor="t">
+          <a:bodyPr horzOverflow="overflow" numCol="1" spcCol="0" anchor="t">
             <a:spAutoFit/>
           </a:bodyPr>
+          <a:lstStyle/>
           <a:p>
             <a:pPr defTabSz="914400">
               <a:lnSpc>
@@ -13146,7 +15638,7 @@
                 <a:uFillTx/>
                 <a:latin typeface="Times New Roman"/>
                 <a:ea typeface="Times New Roman"/>
-                <a:hlinkClick r:id="rId3"/>
+                <a:hlinkClick r:id="rId5"/>
               </a:rPr>
               <a:t>Robust causal inference using directed acyclic graphs: the R package 'dagitty'.</a:t>
             </a:r>
@@ -13187,25 +15679,330 @@
       </p:sp>
     </p:spTree>
   </p:cSld>
-  <mc:AlternateContent>
-    <mc:Choice Requires="p14">
-      <p:transition spd="slow" p14:dur="2000"/>
-    </mc:Choice>
-    <mc:Fallback>
-      <p:transition spd="slow"/>
-    </mc:Fallback>
-  </mc:AlternateContent>
+  <p:clrMapOvr>
+    <a:masterClrMapping/>
+  </p:clrMapOvr>
+  <p:timing>
+    <p:tnLst>
+      <p:par>
+        <p:cTn id="1" dur="indefinite" restart="never" nodeType="tmRoot">
+          <p:childTnLst>
+            <p:seq concurrent="1" nextAc="seek">
+              <p:cTn id="2" dur="indefinite" nodeType="mainSeq">
+                <p:childTnLst>
+                  <p:par>
+                    <p:cTn id="3" fill="hold">
+                      <p:stCondLst>
+                        <p:cond delay="indefinite"/>
+                      </p:stCondLst>
+                      <p:childTnLst>
+                        <p:par>
+                          <p:cTn id="4" fill="hold">
+                            <p:stCondLst>
+                              <p:cond delay="0"/>
+                            </p:stCondLst>
+                            <p:childTnLst>
+                              <p:par>
+                                <p:cTn id="5" presetID="10" presetClass="entr" presetSubtype="0" fill="hold" nodeType="clickEffect">
+                                  <p:stCondLst>
+                                    <p:cond delay="0"/>
+                                  </p:stCondLst>
+                                  <p:childTnLst>
+                                    <p:set>
+                                      <p:cBhvr>
+                                        <p:cTn id="6" dur="1" fill="hold">
+                                          <p:stCondLst>
+                                            <p:cond delay="0"/>
+                                          </p:stCondLst>
+                                        </p:cTn>
+                                        <p:tgtEl>
+                                          <p:spTgt spid="68">
+                                            <p:txEl>
+                                              <p:pRg st="0" end="0"/>
+                                            </p:txEl>
+                                          </p:spTgt>
+                                        </p:tgtEl>
+                                        <p:attrNameLst>
+                                          <p:attrName>style.visibility</p:attrName>
+                                        </p:attrNameLst>
+                                      </p:cBhvr>
+                                      <p:to>
+                                        <p:strVal val="visible"/>
+                                      </p:to>
+                                    </p:set>
+                                    <p:animEffect transition="in" filter="fade">
+                                      <p:cBhvr>
+                                        <p:cTn id="7" dur="500"/>
+                                        <p:tgtEl>
+                                          <p:spTgt spid="68">
+                                            <p:txEl>
+                                              <p:pRg st="0" end="0"/>
+                                            </p:txEl>
+                                          </p:spTgt>
+                                        </p:tgtEl>
+                                      </p:cBhvr>
+                                    </p:animEffect>
+                                  </p:childTnLst>
+                                </p:cTn>
+                              </p:par>
+                              <p:par>
+                                <p:cTn id="8" presetID="10" presetClass="entr" presetSubtype="0" fill="hold" nodeType="withEffect">
+                                  <p:stCondLst>
+                                    <p:cond delay="0"/>
+                                  </p:stCondLst>
+                                  <p:childTnLst>
+                                    <p:set>
+                                      <p:cBhvr>
+                                        <p:cTn id="9" dur="1" fill="hold">
+                                          <p:stCondLst>
+                                            <p:cond delay="0"/>
+                                          </p:stCondLst>
+                                        </p:cTn>
+                                        <p:tgtEl>
+                                          <p:spTgt spid="70"/>
+                                        </p:tgtEl>
+                                        <p:attrNameLst>
+                                          <p:attrName>style.visibility</p:attrName>
+                                        </p:attrNameLst>
+                                      </p:cBhvr>
+                                      <p:to>
+                                        <p:strVal val="visible"/>
+                                      </p:to>
+                                    </p:set>
+                                    <p:animEffect transition="in" filter="fade">
+                                      <p:cBhvr>
+                                        <p:cTn id="10" dur="500"/>
+                                        <p:tgtEl>
+                                          <p:spTgt spid="70"/>
+                                        </p:tgtEl>
+                                      </p:cBhvr>
+                                    </p:animEffect>
+                                  </p:childTnLst>
+                                </p:cTn>
+                              </p:par>
+                            </p:childTnLst>
+                          </p:cTn>
+                        </p:par>
+                      </p:childTnLst>
+                    </p:cTn>
+                  </p:par>
+                  <p:par>
+                    <p:cTn id="11" fill="hold">
+                      <p:stCondLst>
+                        <p:cond delay="indefinite"/>
+                      </p:stCondLst>
+                      <p:childTnLst>
+                        <p:par>
+                          <p:cTn id="12" fill="hold">
+                            <p:stCondLst>
+                              <p:cond delay="0"/>
+                            </p:stCondLst>
+                            <p:childTnLst>
+                              <p:par>
+                                <p:cTn id="13" presetID="10" presetClass="entr" presetSubtype="0" fill="hold" nodeType="clickEffect">
+                                  <p:stCondLst>
+                                    <p:cond delay="0"/>
+                                  </p:stCondLst>
+                                  <p:childTnLst>
+                                    <p:set>
+                                      <p:cBhvr>
+                                        <p:cTn id="14" dur="1" fill="hold">
+                                          <p:stCondLst>
+                                            <p:cond delay="0"/>
+                                          </p:stCondLst>
+                                        </p:cTn>
+                                        <p:tgtEl>
+                                          <p:spTgt spid="68">
+                                            <p:txEl>
+                                              <p:pRg st="1" end="1"/>
+                                            </p:txEl>
+                                          </p:spTgt>
+                                        </p:tgtEl>
+                                        <p:attrNameLst>
+                                          <p:attrName>style.visibility</p:attrName>
+                                        </p:attrNameLst>
+                                      </p:cBhvr>
+                                      <p:to>
+                                        <p:strVal val="visible"/>
+                                      </p:to>
+                                    </p:set>
+                                    <p:animEffect transition="in" filter="fade">
+                                      <p:cBhvr>
+                                        <p:cTn id="15" dur="500"/>
+                                        <p:tgtEl>
+                                          <p:spTgt spid="68">
+                                            <p:txEl>
+                                              <p:pRg st="1" end="1"/>
+                                            </p:txEl>
+                                          </p:spTgt>
+                                        </p:tgtEl>
+                                      </p:cBhvr>
+                                    </p:animEffect>
+                                  </p:childTnLst>
+                                </p:cTn>
+                              </p:par>
+                            </p:childTnLst>
+                          </p:cTn>
+                        </p:par>
+                      </p:childTnLst>
+                    </p:cTn>
+                  </p:par>
+                  <p:par>
+                    <p:cTn id="16" fill="hold">
+                      <p:stCondLst>
+                        <p:cond delay="indefinite"/>
+                      </p:stCondLst>
+                      <p:childTnLst>
+                        <p:par>
+                          <p:cTn id="17" fill="hold">
+                            <p:stCondLst>
+                              <p:cond delay="0"/>
+                            </p:stCondLst>
+                            <p:childTnLst>
+                              <p:par>
+                                <p:cTn id="18" presetID="10" presetClass="entr" presetSubtype="0" fill="hold" nodeType="clickEffect">
+                                  <p:stCondLst>
+                                    <p:cond delay="0"/>
+                                  </p:stCondLst>
+                                  <p:childTnLst>
+                                    <p:set>
+                                      <p:cBhvr>
+                                        <p:cTn id="19" dur="1" fill="hold">
+                                          <p:stCondLst>
+                                            <p:cond delay="0"/>
+                                          </p:stCondLst>
+                                        </p:cTn>
+                                        <p:tgtEl>
+                                          <p:spTgt spid="68">
+                                            <p:txEl>
+                                              <p:pRg st="2" end="2"/>
+                                            </p:txEl>
+                                          </p:spTgt>
+                                        </p:tgtEl>
+                                        <p:attrNameLst>
+                                          <p:attrName>style.visibility</p:attrName>
+                                        </p:attrNameLst>
+                                      </p:cBhvr>
+                                      <p:to>
+                                        <p:strVal val="visible"/>
+                                      </p:to>
+                                    </p:set>
+                                    <p:animEffect transition="in" filter="fade">
+                                      <p:cBhvr>
+                                        <p:cTn id="20" dur="500"/>
+                                        <p:tgtEl>
+                                          <p:spTgt spid="68">
+                                            <p:txEl>
+                                              <p:pRg st="2" end="2"/>
+                                            </p:txEl>
+                                          </p:spTgt>
+                                        </p:tgtEl>
+                                      </p:cBhvr>
+                                    </p:animEffect>
+                                  </p:childTnLst>
+                                </p:cTn>
+                              </p:par>
+                            </p:childTnLst>
+                          </p:cTn>
+                        </p:par>
+                      </p:childTnLst>
+                    </p:cTn>
+                  </p:par>
+                  <p:par>
+                    <p:cTn id="21" fill="hold">
+                      <p:stCondLst>
+                        <p:cond delay="indefinite"/>
+                      </p:stCondLst>
+                      <p:childTnLst>
+                        <p:par>
+                          <p:cTn id="22" fill="hold">
+                            <p:stCondLst>
+                              <p:cond delay="0"/>
+                            </p:stCondLst>
+                            <p:childTnLst>
+                              <p:par>
+                                <p:cTn id="23" presetID="10" presetClass="entr" presetSubtype="0" fill="hold" nodeType="clickEffect">
+                                  <p:stCondLst>
+                                    <p:cond delay="0"/>
+                                  </p:stCondLst>
+                                  <p:childTnLst>
+                                    <p:set>
+                                      <p:cBhvr>
+                                        <p:cTn id="24" dur="1" fill="hold">
+                                          <p:stCondLst>
+                                            <p:cond delay="0"/>
+                                          </p:stCondLst>
+                                        </p:cTn>
+                                        <p:tgtEl>
+                                          <p:spTgt spid="68">
+                                            <p:txEl>
+                                              <p:pRg st="3" end="3"/>
+                                            </p:txEl>
+                                          </p:spTgt>
+                                        </p:tgtEl>
+                                        <p:attrNameLst>
+                                          <p:attrName>style.visibility</p:attrName>
+                                        </p:attrNameLst>
+                                      </p:cBhvr>
+                                      <p:to>
+                                        <p:strVal val="visible"/>
+                                      </p:to>
+                                    </p:set>
+                                    <p:animEffect transition="in" filter="fade">
+                                      <p:cBhvr>
+                                        <p:cTn id="25" dur="500"/>
+                                        <p:tgtEl>
+                                          <p:spTgt spid="68">
+                                            <p:txEl>
+                                              <p:pRg st="3" end="3"/>
+                                            </p:txEl>
+                                          </p:spTgt>
+                                        </p:tgtEl>
+                                      </p:cBhvr>
+                                    </p:animEffect>
+                                  </p:childTnLst>
+                                </p:cTn>
+                              </p:par>
+                            </p:childTnLst>
+                          </p:cTn>
+                        </p:par>
+                      </p:childTnLst>
+                    </p:cTn>
+                  </p:par>
+                </p:childTnLst>
+              </p:cTn>
+              <p:prevCondLst>
+                <p:cond evt="onPrev" delay="0">
+                  <p:tgtEl>
+                    <p:sldTgt/>
+                  </p:tgtEl>
+                </p:cond>
+              </p:prevCondLst>
+              <p:nextCondLst>
+                <p:cond evt="onNext" delay="0">
+                  <p:tgtEl>
+                    <p:sldTgt/>
+                  </p:tgtEl>
+                </p:cond>
+              </p:nextCondLst>
+            </p:seq>
+          </p:childTnLst>
+        </p:cTn>
+      </p:par>
+    </p:tnLst>
+  </p:timing>
 </p:sld>
 </file>
 
 <file path=ppt/slides/slide4.xml><?xml version="1.0" encoding="utf-8"?>
-<p:sld xmlns:a="http://schemas.openxmlformats.org/drawingml/2006/main" xmlns:p="http://schemas.openxmlformats.org/presentationml/2006/main" xmlns:r="http://schemas.openxmlformats.org/officeDocument/2006/relationships" xmlns:p14="http://schemas.microsoft.com/office/powerpoint/2010/main" xmlns:p15="http://schemas.microsoft.com/office/powerpoint/2012/main" xmlns:mc="http://schemas.openxmlformats.org/markup-compatibility/2006">
+<p:sld xmlns:a="http://schemas.openxmlformats.org/drawingml/2006/main" xmlns:r="http://schemas.openxmlformats.org/officeDocument/2006/relationships" xmlns:p="http://schemas.openxmlformats.org/presentationml/2006/main">
   <p:cSld>
     <p:bg>
       <p:bgPr>
         <a:solidFill>
           <a:srgbClr val="FFFFFF"/>
         </a:solidFill>
+        <a:effectLst/>
       </p:bgPr>
     </p:bg>
     <p:spTree>
@@ -13229,7 +16026,7 @@
           <p:nvPr/>
         </p:nvPicPr>
         <p:blipFill>
-          <a:blip r:embed="rId1"/>
+          <a:blip r:embed="rId3"/>
           <a:stretch/>
         </p:blipFill>
         <p:spPr>
@@ -13253,7 +16050,7 @@
           <p:nvPr/>
         </p:nvPicPr>
         <p:blipFill>
-          <a:blip r:embed="rId2"/>
+          <a:blip r:embed="rId4"/>
           <a:stretch/>
         </p:blipFill>
         <p:spPr>
@@ -13277,7 +16074,7 @@
           <p:nvPr/>
         </p:nvPicPr>
         <p:blipFill>
-          <a:blip r:embed="rId3"/>
+          <a:blip r:embed="rId5"/>
           <a:stretch/>
         </p:blipFill>
         <p:spPr>
@@ -13301,7 +16098,7 @@
           <p:nvPr/>
         </p:nvPicPr>
         <p:blipFill>
-          <a:blip r:embed="rId4"/>
+          <a:blip r:embed="rId6"/>
           <a:stretch/>
         </p:blipFill>
         <p:spPr>
@@ -13338,15 +16135,22 @@
           </a:ln>
         </p:spPr>
         <p:style>
-          <a:lnRef idx="0"/>
-          <a:fillRef idx="0"/>
-          <a:effectRef idx="0"/>
+          <a:lnRef idx="0">
+            <a:scrgbClr r="0" g="0" b="0"/>
+          </a:lnRef>
+          <a:fillRef idx="0">
+            <a:scrgbClr r="0" g="0" b="0"/>
+          </a:fillRef>
+          <a:effectRef idx="0">
+            <a:scrgbClr r="0" g="0" b="0"/>
+          </a:effectRef>
           <a:fontRef idx="minor"/>
         </p:style>
         <p:txBody>
           <a:bodyPr lIns="0" tIns="0" rIns="0" bIns="0" anchor="ctr">
             <a:noAutofit/>
           </a:bodyPr>
+          <a:lstStyle/>
           <a:p>
             <a:pPr algn="ctr" defTabSz="914400">
               <a:lnSpc>
@@ -13399,15 +16203,22 @@
           </a:ln>
         </p:spPr>
         <p:style>
-          <a:lnRef idx="0"/>
-          <a:fillRef idx="0"/>
-          <a:effectRef idx="0"/>
+          <a:lnRef idx="0">
+            <a:scrgbClr r="0" g="0" b="0"/>
+          </a:lnRef>
+          <a:fillRef idx="0">
+            <a:scrgbClr r="0" g="0" b="0"/>
+          </a:fillRef>
+          <a:effectRef idx="0">
+            <a:scrgbClr r="0" g="0" b="0"/>
+          </a:effectRef>
           <a:fontRef idx="minor"/>
         </p:style>
         <p:txBody>
           <a:bodyPr lIns="0" tIns="0" rIns="0" bIns="0" anchor="ctr">
             <a:noAutofit/>
           </a:bodyPr>
+          <a:lstStyle/>
           <a:p>
             <a:pPr algn="ctr" defTabSz="914400">
               <a:lnSpc>
@@ -13460,15 +16271,22 @@
           </a:ln>
         </p:spPr>
         <p:style>
-          <a:lnRef idx="0"/>
-          <a:fillRef idx="0"/>
-          <a:effectRef idx="0"/>
+          <a:lnRef idx="0">
+            <a:scrgbClr r="0" g="0" b="0"/>
+          </a:lnRef>
+          <a:fillRef idx="0">
+            <a:scrgbClr r="0" g="0" b="0"/>
+          </a:fillRef>
+          <a:effectRef idx="0">
+            <a:scrgbClr r="0" g="0" b="0"/>
+          </a:effectRef>
           <a:fontRef idx="minor"/>
         </p:style>
         <p:txBody>
           <a:bodyPr lIns="90000" tIns="45000" rIns="90000" bIns="45000" anchor="t">
             <a:noAutofit/>
           </a:bodyPr>
+          <a:lstStyle/>
           <a:p>
             <a:pPr algn="r" defTabSz="914400">
               <a:lnSpc>
@@ -13485,7 +16303,7 @@
                 <a:latin typeface="Calibri"/>
                 <a:ea typeface="Calibri"/>
               </a:rPr>
-              <a:t>&lt;number&gt;</a:t>
+              <a:t>4</a:t>
             </a:fld>
             <a:endParaRPr lang="en-GB" sz="900" b="0" u="none" strike="noStrike">
               <a:solidFill>
@@ -13500,19 +16318,14 @@
       </p:sp>
     </p:spTree>
   </p:cSld>
-  <mc:AlternateContent>
-    <mc:Choice Requires="p14">
-      <p:transition spd="slow" p14:dur="2000"/>
-    </mc:Choice>
-    <mc:Fallback>
-      <p:transition spd="slow"/>
-    </mc:Fallback>
-  </mc:AlternateContent>
+  <p:clrMapOvr>
+    <a:masterClrMapping/>
+  </p:clrMapOvr>
 </p:sld>
 </file>
 
 <file path=ppt/slides/slide5.xml><?xml version="1.0" encoding="utf-8"?>
-<p:sld xmlns:a="http://schemas.openxmlformats.org/drawingml/2006/main" xmlns:p="http://schemas.openxmlformats.org/presentationml/2006/main" xmlns:r="http://schemas.openxmlformats.org/officeDocument/2006/relationships" xmlns:p14="http://schemas.microsoft.com/office/powerpoint/2010/main" xmlns:p15="http://schemas.microsoft.com/office/powerpoint/2012/main" xmlns:mc="http://schemas.openxmlformats.org/markup-compatibility/2006">
+<p:sld xmlns:a="http://schemas.openxmlformats.org/drawingml/2006/main" xmlns:r="http://schemas.openxmlformats.org/officeDocument/2006/relationships" xmlns:p="http://schemas.openxmlformats.org/presentationml/2006/main">
   <p:cSld>
     <p:spTree>
       <p:nvGrpSpPr>
@@ -13635,6 +16448,7 @@
           <a:bodyPr lIns="91440" tIns="45720" rIns="91440" bIns="45720" anchor="ctr">
             <a:noAutofit/>
           </a:bodyPr>
+          <a:lstStyle/>
           <a:p>
             <a:pPr indent="0" algn="l" defTabSz="914400">
               <a:lnSpc>
@@ -13692,6 +16506,7 @@
           <a:bodyPr lIns="91440" tIns="45720" rIns="91440" bIns="45720" anchor="t">
             <a:noAutofit/>
           </a:bodyPr>
+          <a:lstStyle/>
           <a:p>
             <a:pPr marL="228600" indent="-228600" algn="l" defTabSz="914400">
               <a:lnSpc>
@@ -13814,7 +16629,7 @@
                 <a:latin typeface="Calibri"/>
                 <a:ea typeface="Calibri"/>
               </a:rPr>
-              <a:t>&lt;number&gt;</a:t>
+              <a:t>5</a:t>
             </a:fld>
             <a:endParaRPr lang="en-GB" sz="900" b="0" u="none" strike="noStrike">
               <a:solidFill>
@@ -13845,7 +16660,7 @@
             <a:solidFill>
               <a:srgbClr val="000000"/>
             </a:solidFill>
-            <a:tailEnd len="med" type="triangle" w="med"/>
+            <a:tailEnd type="triangle" w="med" len="med"/>
           </a:ln>
         </p:spPr>
       </p:cxnSp>
@@ -13890,6 +16705,7 @@
           <a:bodyPr lIns="90000" tIns="45000" rIns="90000" bIns="45000" anchor="ctr">
             <a:noAutofit/>
           </a:bodyPr>
+          <a:lstStyle/>
           <a:p>
             <a:pPr algn="ctr" defTabSz="914400">
               <a:lnSpc>
@@ -13960,6 +16776,7 @@
           <a:bodyPr lIns="90000" tIns="45000" rIns="90000" bIns="45000" anchor="ctr">
             <a:noAutofit/>
           </a:bodyPr>
+          <a:lstStyle/>
           <a:p>
             <a:pPr algn="ctr" defTabSz="914400">
               <a:lnSpc>
@@ -14034,6 +16851,7 @@
           <a:bodyPr lIns="90000" tIns="45000" rIns="90000" bIns="45000" anchor="ctr">
             <a:noAutofit/>
           </a:bodyPr>
+          <a:lstStyle/>
           <a:p>
             <a:pPr algn="ctr" defTabSz="914400">
               <a:lnSpc>
@@ -14108,6 +16926,7 @@
           <a:bodyPr lIns="90000" tIns="45000" rIns="90000" bIns="45000" anchor="ctr">
             <a:noAutofit/>
           </a:bodyPr>
+          <a:lstStyle/>
           <a:p>
             <a:pPr algn="ctr" defTabSz="914400">
               <a:lnSpc>
@@ -14155,7 +16974,7 @@
             <a:solidFill>
               <a:srgbClr val="000000"/>
             </a:solidFill>
-            <a:tailEnd len="med" type="triangle" w="med"/>
+            <a:tailEnd type="triangle" w="med" len="med"/>
           </a:ln>
         </p:spPr>
       </p:cxnSp>
@@ -14177,7 +16996,7 @@
             <a:solidFill>
               <a:srgbClr val="000000"/>
             </a:solidFill>
-            <a:tailEnd len="med" type="triangle" w="med"/>
+            <a:tailEnd type="triangle" w="med" len="med"/>
           </a:ln>
         </p:spPr>
       </p:cxnSp>
@@ -14199,25 +17018,20 @@
             <a:solidFill>
               <a:srgbClr val="000000"/>
             </a:solidFill>
-            <a:tailEnd len="med" type="triangle" w="med"/>
+            <a:tailEnd type="triangle" w="med" len="med"/>
           </a:ln>
         </p:spPr>
       </p:cxnSp>
     </p:spTree>
   </p:cSld>
-  <mc:AlternateContent>
-    <mc:Choice Requires="p14">
-      <p:transition spd="slow" p14:dur="2000"/>
-    </mc:Choice>
-    <mc:Fallback>
-      <p:transition spd="slow"/>
-    </mc:Fallback>
-  </mc:AlternateContent>
+  <p:clrMapOvr>
+    <a:masterClrMapping/>
+  </p:clrMapOvr>
 </p:sld>
 </file>
 
 <file path=ppt/slides/slide6.xml><?xml version="1.0" encoding="utf-8"?>
-<p:sld xmlns:a="http://schemas.openxmlformats.org/drawingml/2006/main" xmlns:p="http://schemas.openxmlformats.org/presentationml/2006/main" xmlns:r="http://schemas.openxmlformats.org/officeDocument/2006/relationships" xmlns:p14="http://schemas.microsoft.com/office/powerpoint/2010/main" xmlns:p15="http://schemas.microsoft.com/office/powerpoint/2012/main" xmlns:mc="http://schemas.openxmlformats.org/markup-compatibility/2006">
+<p:sld xmlns:a="http://schemas.openxmlformats.org/drawingml/2006/main" xmlns:r="http://schemas.openxmlformats.org/officeDocument/2006/relationships" xmlns:p="http://schemas.openxmlformats.org/presentationml/2006/main">
   <p:cSld>
     <p:spTree>
       <p:nvGrpSpPr>
@@ -14340,6 +17154,7 @@
           <a:bodyPr lIns="91440" tIns="45720" rIns="91440" bIns="45720" anchor="ctr">
             <a:noAutofit/>
           </a:bodyPr>
+          <a:lstStyle/>
           <a:p>
             <a:pPr indent="0" algn="l" defTabSz="914400">
               <a:lnSpc>
@@ -14348,7 +17163,7 @@
               <a:buNone/>
             </a:pPr>
             <a:r>
-              <a:rPr lang="sv-SE" sz="2600" b="1" u="none" strike="noStrike">
+              <a:rPr lang="sv-SE" sz="2600" b="1" u="none" strike="noStrike" dirty="0">
                 <a:solidFill>
                   <a:srgbClr val="1E3A5F"/>
                 </a:solidFill>
@@ -14360,7 +17175,7 @@
               <a:t>Problem 1 Solution </a:t>
             </a:r>
             <a:r>
-              <a:rPr lang="sv-SE" sz="2600" b="1" u="sng" strike="noStrike">
+              <a:rPr lang="sv-SE" sz="2600" b="1" u="sng" strike="noStrike" dirty="0">
                 <a:solidFill>
                   <a:srgbClr val="467886"/>
                 </a:solidFill>
@@ -14368,12 +17183,12 @@
                 <a:uFillTx/>
                 <a:latin typeface="Cambria"/>
                 <a:ea typeface="Cambria"/>
-                <a:hlinkClick r:id="rId1"/>
+                <a:hlinkClick r:id="rId3"/>
               </a:rPr>
               <a:t>https://dagitty.net/mDymjnHV9</a:t>
             </a:r>
             <a:r>
-              <a:rPr lang="sv-SE" sz="2600" b="1" u="none" strike="noStrike">
+              <a:rPr lang="sv-SE" sz="2600" b="1" u="none" strike="noStrike" dirty="0">
                 <a:solidFill>
                   <a:srgbClr val="1E3A5F"/>
                 </a:solidFill>
@@ -14384,7 +17199,7 @@
               </a:rPr>
               <a:t> </a:t>
             </a:r>
-            <a:endParaRPr lang="en-GB" sz="2600" b="1" u="none" strike="noStrike">
+            <a:endParaRPr lang="en-GB" sz="2600" b="1" u="none" strike="noStrike" dirty="0">
               <a:solidFill>
                 <a:srgbClr val="1E3A5F"/>
               </a:solidFill>
@@ -14422,6 +17237,7 @@
           <a:bodyPr lIns="91440" tIns="45720" rIns="91440" bIns="45720" anchor="t">
             <a:noAutofit/>
           </a:bodyPr>
+          <a:lstStyle/>
           <a:p>
             <a:pPr marL="228600" indent="-228600" algn="l" defTabSz="914400">
               <a:lnSpc>
@@ -14544,7 +17360,7 @@
                 <a:latin typeface="Calibri"/>
                 <a:ea typeface="Calibri"/>
               </a:rPr>
-              <a:t>&lt;number&gt;</a:t>
+              <a:t>6</a:t>
             </a:fld>
             <a:endParaRPr lang="en-GB" sz="900" b="0" u="none" strike="noStrike">
               <a:solidFill>
@@ -14577,15 +17393,22 @@
           </a:ln>
         </p:spPr>
         <p:style>
-          <a:lnRef idx="0"/>
-          <a:fillRef idx="0"/>
-          <a:effectRef idx="0"/>
+          <a:lnRef idx="0">
+            <a:scrgbClr r="0" g="0" b="0"/>
+          </a:lnRef>
+          <a:fillRef idx="0">
+            <a:scrgbClr r="0" g="0" b="0"/>
+          </a:fillRef>
+          <a:effectRef idx="0">
+            <a:scrgbClr r="0" g="0" b="0"/>
+          </a:effectRef>
           <a:fontRef idx="minor"/>
         </p:style>
         <p:txBody>
           <a:bodyPr wrap="none" lIns="90000" tIns="45000" rIns="90000" bIns="45000" anchor="t">
             <a:spAutoFit/>
           </a:bodyPr>
+          <a:lstStyle/>
           <a:p>
             <a:pPr defTabSz="914400">
               <a:lnSpc>
@@ -14635,15 +17458,22 @@
           </a:ln>
         </p:spPr>
         <p:style>
-          <a:lnRef idx="0"/>
-          <a:fillRef idx="0"/>
-          <a:effectRef idx="0"/>
+          <a:lnRef idx="0">
+            <a:scrgbClr r="0" g="0" b="0"/>
+          </a:lnRef>
+          <a:fillRef idx="0">
+            <a:scrgbClr r="0" g="0" b="0"/>
+          </a:fillRef>
+          <a:effectRef idx="0">
+            <a:scrgbClr r="0" g="0" b="0"/>
+          </a:effectRef>
           <a:fontRef idx="minor"/>
         </p:style>
         <p:txBody>
           <a:bodyPr wrap="none" lIns="90000" tIns="45000" rIns="90000" bIns="45000" anchor="t">
             <a:spAutoFit/>
           </a:bodyPr>
+          <a:lstStyle/>
           <a:p>
             <a:pPr defTabSz="914400">
               <a:lnSpc>
@@ -14691,7 +17521,7 @@
             <a:solidFill>
               <a:srgbClr val="000000"/>
             </a:solidFill>
-            <a:tailEnd len="med" type="triangle" w="med"/>
+            <a:tailEnd type="triangle" w="med" len="med"/>
           </a:ln>
         </p:spPr>
       </p:cxnSp>
@@ -14736,6 +17566,7 @@
           <a:bodyPr lIns="90000" tIns="45000" rIns="90000" bIns="45000" anchor="ctr">
             <a:noAutofit/>
           </a:bodyPr>
+          <a:lstStyle/>
           <a:p>
             <a:pPr algn="ctr" defTabSz="914400">
               <a:lnSpc>
@@ -14806,6 +17637,7 @@
           <a:bodyPr lIns="90000" tIns="45000" rIns="90000" bIns="45000" anchor="ctr">
             <a:noAutofit/>
           </a:bodyPr>
+          <a:lstStyle/>
           <a:p>
             <a:pPr algn="ctr" defTabSz="914400">
               <a:lnSpc>
@@ -14878,6 +17710,7 @@
           <a:bodyPr lIns="90000" tIns="45000" rIns="90000" bIns="45000" anchor="ctr">
             <a:noAutofit/>
           </a:bodyPr>
+          <a:lstStyle/>
           <a:p>
             <a:pPr algn="ctr" defTabSz="914400">
               <a:lnSpc>
@@ -14952,6 +17785,7 @@
           <a:bodyPr lIns="90000" tIns="45000" rIns="90000" bIns="45000" anchor="ctr">
             <a:noAutofit/>
           </a:bodyPr>
+          <a:lstStyle/>
           <a:p>
             <a:pPr algn="ctr" defTabSz="914400">
               <a:lnSpc>
@@ -14999,7 +17833,7 @@
             <a:solidFill>
               <a:srgbClr val="000000"/>
             </a:solidFill>
-            <a:tailEnd len="med" type="triangle" w="med"/>
+            <a:tailEnd type="triangle" w="med" len="med"/>
           </a:ln>
         </p:spPr>
       </p:cxnSp>
@@ -15021,7 +17855,7 @@
             <a:solidFill>
               <a:srgbClr val="000000"/>
             </a:solidFill>
-            <a:tailEnd len="med" type="triangle" w="med"/>
+            <a:tailEnd type="triangle" w="med" len="med"/>
           </a:ln>
         </p:spPr>
       </p:cxnSp>
@@ -15043,7 +17877,7 @@
             <a:solidFill>
               <a:srgbClr val="000000"/>
             </a:solidFill>
-            <a:tailEnd len="med" type="triangle" w="med"/>
+            <a:tailEnd type="triangle" w="med" len="med"/>
           </a:ln>
         </p:spPr>
       </p:cxnSp>
@@ -15065,7 +17899,7 @@
             <a:solidFill>
               <a:srgbClr val="000000"/>
             </a:solidFill>
-            <a:tailEnd len="med" type="triangle" w="med"/>
+            <a:tailEnd type="triangle" w="med" len="med"/>
           </a:ln>
         </p:spPr>
       </p:cxnSp>
@@ -15110,6 +17944,7 @@
           <a:bodyPr lIns="90000" tIns="45000" rIns="90000" bIns="45000" anchor="ctr">
             <a:noAutofit/>
           </a:bodyPr>
+          <a:lstStyle/>
           <a:p>
             <a:pPr algn="ctr" defTabSz="914400">
               <a:lnSpc>
@@ -15180,6 +18015,7 @@
           <a:bodyPr lIns="90000" tIns="45000" rIns="90000" bIns="45000" anchor="ctr">
             <a:noAutofit/>
           </a:bodyPr>
+          <a:lstStyle/>
           <a:p>
             <a:pPr algn="ctr" defTabSz="914400">
               <a:lnSpc>
@@ -15254,6 +18090,7 @@
           <a:bodyPr lIns="90000" tIns="45000" rIns="90000" bIns="45000" anchor="ctr">
             <a:noAutofit/>
           </a:bodyPr>
+          <a:lstStyle/>
           <a:p>
             <a:pPr algn="ctr" defTabSz="914400">
               <a:lnSpc>
@@ -15326,6 +18163,7 @@
           <a:bodyPr lIns="90000" tIns="45000" rIns="90000" bIns="45000" anchor="ctr">
             <a:noAutofit/>
           </a:bodyPr>
+          <a:lstStyle/>
           <a:p>
             <a:pPr algn="ctr" defTabSz="914400">
               <a:lnSpc>
@@ -15373,7 +18211,7 @@
             <a:solidFill>
               <a:srgbClr val="000000"/>
             </a:solidFill>
-            <a:tailEnd len="med" type="triangle" w="med"/>
+            <a:tailEnd type="triangle" w="med" len="med"/>
           </a:ln>
         </p:spPr>
       </p:cxnSp>
@@ -15395,7 +18233,7 @@
             <a:solidFill>
               <a:srgbClr val="000000"/>
             </a:solidFill>
-            <a:tailEnd len="med" type="triangle" w="med"/>
+            <a:tailEnd type="triangle" w="med" len="med"/>
           </a:ln>
         </p:spPr>
       </p:cxnSp>
@@ -15417,25 +18255,20 @@
             <a:solidFill>
               <a:srgbClr val="000000"/>
             </a:solidFill>
-            <a:tailEnd len="med" type="triangle" w="med"/>
+            <a:tailEnd type="triangle" w="med" len="med"/>
           </a:ln>
         </p:spPr>
       </p:cxnSp>
     </p:spTree>
   </p:cSld>
-  <mc:AlternateContent>
-    <mc:Choice Requires="p14">
-      <p:transition spd="slow" p14:dur="2000"/>
-    </mc:Choice>
-    <mc:Fallback>
-      <p:transition spd="slow"/>
-    </mc:Fallback>
-  </mc:AlternateContent>
+  <p:clrMapOvr>
+    <a:masterClrMapping/>
+  </p:clrMapOvr>
 </p:sld>
 </file>
 
 <file path=ppt/slides/slide7.xml><?xml version="1.0" encoding="utf-8"?>
-<p:sld xmlns:a="http://schemas.openxmlformats.org/drawingml/2006/main" xmlns:p="http://schemas.openxmlformats.org/presentationml/2006/main" xmlns:r="http://schemas.openxmlformats.org/officeDocument/2006/relationships" xmlns:p14="http://schemas.microsoft.com/office/powerpoint/2010/main" xmlns:p15="http://schemas.microsoft.com/office/powerpoint/2012/main" xmlns:mc="http://schemas.openxmlformats.org/markup-compatibility/2006">
+<p:sld xmlns:a="http://schemas.openxmlformats.org/drawingml/2006/main" xmlns:r="http://schemas.openxmlformats.org/officeDocument/2006/relationships" xmlns:p="http://schemas.openxmlformats.org/presentationml/2006/main">
   <p:cSld>
     <p:spTree>
       <p:nvGrpSpPr>
@@ -15558,6 +18391,7 @@
           <a:bodyPr lIns="91440" tIns="45720" rIns="91440" bIns="45720" anchor="ctr">
             <a:noAutofit/>
           </a:bodyPr>
+          <a:lstStyle/>
           <a:p>
             <a:pPr indent="0" algn="l" defTabSz="914400">
               <a:lnSpc>
@@ -15615,6 +18449,7 @@
           <a:bodyPr lIns="91440" tIns="45720" rIns="91440" bIns="45720" anchor="t">
             <a:noAutofit/>
           </a:bodyPr>
+          <a:lstStyle/>
           <a:p>
             <a:pPr marL="228600" indent="-228600" algn="l" defTabSz="914400">
               <a:lnSpc>
@@ -15737,7 +18572,7 @@
                 <a:latin typeface="Calibri"/>
                 <a:ea typeface="Calibri"/>
               </a:rPr>
-              <a:t>&lt;number&gt;</a:t>
+              <a:t>7</a:t>
             </a:fld>
             <a:endParaRPr lang="en-GB" sz="900" b="0" u="none" strike="noStrike">
               <a:solidFill>
@@ -15768,7 +18603,7 @@
             <a:solidFill>
               <a:srgbClr val="000000"/>
             </a:solidFill>
-            <a:tailEnd len="med" type="triangle" w="med"/>
+            <a:tailEnd type="triangle" w="med" len="med"/>
           </a:ln>
         </p:spPr>
       </p:cxnSp>
@@ -15813,6 +18648,7 @@
           <a:bodyPr lIns="90000" tIns="45000" rIns="90000" bIns="45000" anchor="ctr">
             <a:noAutofit/>
           </a:bodyPr>
+          <a:lstStyle/>
           <a:p>
             <a:pPr algn="ctr" defTabSz="914400">
               <a:lnSpc>
@@ -15883,6 +18719,7 @@
           <a:bodyPr lIns="90000" tIns="45000" rIns="90000" bIns="45000" anchor="ctr">
             <a:noAutofit/>
           </a:bodyPr>
+          <a:lstStyle/>
           <a:p>
             <a:pPr algn="ctr" defTabSz="914400">
               <a:lnSpc>
@@ -15957,6 +18794,7 @@
           <a:bodyPr lIns="90000" tIns="45000" rIns="90000" bIns="45000" anchor="ctr">
             <a:noAutofit/>
           </a:bodyPr>
+          <a:lstStyle/>
           <a:p>
             <a:pPr algn="ctr" defTabSz="914400">
               <a:lnSpc>
@@ -16031,6 +18869,7 @@
           <a:bodyPr lIns="90000" tIns="45000" rIns="90000" bIns="45000" anchor="ctr">
             <a:noAutofit/>
           </a:bodyPr>
+          <a:lstStyle/>
           <a:p>
             <a:pPr algn="ctr" defTabSz="914400">
               <a:lnSpc>
@@ -16078,7 +18917,7 @@
             <a:solidFill>
               <a:srgbClr val="000000"/>
             </a:solidFill>
-            <a:tailEnd len="med" type="triangle" w="med"/>
+            <a:tailEnd type="triangle" w="med" len="med"/>
           </a:ln>
         </p:spPr>
       </p:cxnSp>
@@ -16100,7 +18939,7 @@
             <a:solidFill>
               <a:srgbClr val="000000"/>
             </a:solidFill>
-            <a:tailEnd len="med" type="triangle" w="med"/>
+            <a:tailEnd type="triangle" w="med" len="med"/>
           </a:ln>
         </p:spPr>
       </p:cxnSp>
@@ -16149,6 +18988,7 @@
           <a:bodyPr lIns="90000" tIns="45000" rIns="90000" bIns="45000" anchor="ctr">
             <a:noAutofit/>
           </a:bodyPr>
+          <a:lstStyle/>
           <a:p>
             <a:pPr algn="ctr" defTabSz="914400">
               <a:lnSpc>
@@ -16196,7 +19036,7 @@
             <a:solidFill>
               <a:srgbClr val="000000"/>
             </a:solidFill>
-            <a:tailEnd len="med" type="triangle" w="med"/>
+            <a:tailEnd type="triangle" w="med" len="med"/>
           </a:ln>
         </p:spPr>
       </p:cxnSp>
@@ -16218,25 +19058,20 @@
             <a:solidFill>
               <a:srgbClr val="000000"/>
             </a:solidFill>
-            <a:tailEnd len="med" type="triangle" w="med"/>
+            <a:tailEnd type="triangle" w="med" len="med"/>
           </a:ln>
         </p:spPr>
       </p:cxnSp>
     </p:spTree>
   </p:cSld>
-  <mc:AlternateContent>
-    <mc:Choice Requires="p14">
-      <p:transition spd="slow" p14:dur="2000"/>
-    </mc:Choice>
-    <mc:Fallback>
-      <p:transition spd="slow"/>
-    </mc:Fallback>
-  </mc:AlternateContent>
+  <p:clrMapOvr>
+    <a:masterClrMapping/>
+  </p:clrMapOvr>
 </p:sld>
 </file>
 
 <file path=ppt/slides/slide8.xml><?xml version="1.0" encoding="utf-8"?>
-<p:sld xmlns:a="http://schemas.openxmlformats.org/drawingml/2006/main" xmlns:p="http://schemas.openxmlformats.org/presentationml/2006/main" xmlns:r="http://schemas.openxmlformats.org/officeDocument/2006/relationships" xmlns:p14="http://schemas.microsoft.com/office/powerpoint/2010/main" xmlns:p15="http://schemas.microsoft.com/office/powerpoint/2012/main" xmlns:mc="http://schemas.openxmlformats.org/markup-compatibility/2006">
+<p:sld xmlns:a="http://schemas.openxmlformats.org/drawingml/2006/main" xmlns:r="http://schemas.openxmlformats.org/officeDocument/2006/relationships" xmlns:p="http://schemas.openxmlformats.org/presentationml/2006/main">
   <p:cSld>
     <p:spTree>
       <p:nvGrpSpPr>
@@ -16359,6 +19194,7 @@
           <a:bodyPr lIns="91440" tIns="45720" rIns="91440" bIns="45720" anchor="ctr">
             <a:noAutofit/>
           </a:bodyPr>
+          <a:lstStyle/>
           <a:p>
             <a:pPr indent="0" algn="l" defTabSz="914400">
               <a:lnSpc>
@@ -16367,7 +19203,7 @@
               <a:buNone/>
             </a:pPr>
             <a:r>
-              <a:rPr lang="sv-SE" sz="2600" b="1" u="none" strike="noStrike">
+              <a:rPr lang="sv-SE" sz="2600" b="1" u="none" strike="noStrike" dirty="0">
                 <a:solidFill>
                   <a:srgbClr val="1E3A5F"/>
                 </a:solidFill>
@@ -16379,7 +19215,7 @@
               <a:t>Problem 2 Solution </a:t>
             </a:r>
             <a:r>
-              <a:rPr lang="sv-SE" sz="2600" b="1" u="sng" strike="noStrike">
+              <a:rPr lang="sv-SE" sz="2600" b="1" u="sng" strike="noStrike" dirty="0">
                 <a:solidFill>
                   <a:srgbClr val="467886"/>
                 </a:solidFill>
@@ -16387,12 +19223,12 @@
                 <a:uFillTx/>
                 <a:latin typeface="Cambria"/>
                 <a:ea typeface="Cambria"/>
-                <a:hlinkClick r:id="rId1"/>
+                <a:hlinkClick r:id="rId3"/>
               </a:rPr>
               <a:t>https://dagitty.net/mPxsokVRw</a:t>
             </a:r>
             <a:r>
-              <a:rPr lang="sv-SE" sz="2600" b="1" u="none" strike="noStrike">
+              <a:rPr lang="sv-SE" sz="2600" b="1" u="none" strike="noStrike" dirty="0">
                 <a:solidFill>
                   <a:srgbClr val="1E3A5F"/>
                 </a:solidFill>
@@ -16403,7 +19239,7 @@
               </a:rPr>
               <a:t> </a:t>
             </a:r>
-            <a:endParaRPr lang="en-GB" sz="2600" b="1" u="none" strike="noStrike">
+            <a:endParaRPr lang="en-GB" sz="2600" b="1" u="none" strike="noStrike" dirty="0">
               <a:solidFill>
                 <a:srgbClr val="1E3A5F"/>
               </a:solidFill>
@@ -16441,6 +19277,7 @@
           <a:bodyPr lIns="91440" tIns="45720" rIns="91440" bIns="45720" anchor="t">
             <a:noAutofit/>
           </a:bodyPr>
+          <a:lstStyle/>
           <a:p>
             <a:pPr marL="228600" indent="-228600" algn="l" defTabSz="914400">
               <a:lnSpc>
@@ -16563,7 +19400,7 @@
                 <a:latin typeface="Calibri"/>
                 <a:ea typeface="Calibri"/>
               </a:rPr>
-              <a:t>&lt;number&gt;</a:t>
+              <a:t>8</a:t>
             </a:fld>
             <a:endParaRPr lang="en-GB" sz="900" b="0" u="none" strike="noStrike">
               <a:solidFill>
@@ -16594,7 +19431,7 @@
             <a:solidFill>
               <a:srgbClr val="000000"/>
             </a:solidFill>
-            <a:tailEnd len="med" type="triangle" w="med"/>
+            <a:tailEnd type="triangle" w="med" len="med"/>
           </a:ln>
         </p:spPr>
       </p:cxnSp>
@@ -16639,6 +19476,7 @@
           <a:bodyPr lIns="90000" tIns="45000" rIns="90000" bIns="45000" anchor="ctr">
             <a:noAutofit/>
           </a:bodyPr>
+          <a:lstStyle/>
           <a:p>
             <a:pPr algn="ctr" defTabSz="914400">
               <a:lnSpc>
@@ -16709,6 +19547,7 @@
           <a:bodyPr lIns="90000" tIns="45000" rIns="90000" bIns="45000" anchor="ctr">
             <a:noAutofit/>
           </a:bodyPr>
+          <a:lstStyle/>
           <a:p>
             <a:pPr algn="ctr" defTabSz="914400">
               <a:lnSpc>
@@ -16783,6 +19622,7 @@
           <a:bodyPr lIns="90000" tIns="45000" rIns="90000" bIns="45000" anchor="ctr">
             <a:noAutofit/>
           </a:bodyPr>
+          <a:lstStyle/>
           <a:p>
             <a:pPr algn="ctr" defTabSz="914400">
               <a:lnSpc>
@@ -16855,6 +19695,7 @@
           <a:bodyPr lIns="90000" tIns="45000" rIns="90000" bIns="45000" anchor="ctr">
             <a:noAutofit/>
           </a:bodyPr>
+          <a:lstStyle/>
           <a:p>
             <a:pPr algn="ctr" defTabSz="914400">
               <a:lnSpc>
@@ -16902,7 +19743,7 @@
             <a:solidFill>
               <a:srgbClr val="000000"/>
             </a:solidFill>
-            <a:tailEnd len="med" type="triangle" w="med"/>
+            <a:tailEnd type="triangle" w="med" len="med"/>
           </a:ln>
         </p:spPr>
       </p:cxnSp>
@@ -16924,7 +19765,7 @@
             <a:solidFill>
               <a:srgbClr val="000000"/>
             </a:solidFill>
-            <a:tailEnd len="med" type="triangle" w="med"/>
+            <a:tailEnd type="triangle" w="med" len="med"/>
           </a:ln>
         </p:spPr>
       </p:cxnSp>
@@ -16973,6 +19814,7 @@
           <a:bodyPr lIns="90000" tIns="45000" rIns="90000" bIns="45000" anchor="ctr">
             <a:noAutofit/>
           </a:bodyPr>
+          <a:lstStyle/>
           <a:p>
             <a:pPr algn="ctr" defTabSz="914400">
               <a:lnSpc>
@@ -17020,7 +19862,7 @@
             <a:solidFill>
               <a:srgbClr val="000000"/>
             </a:solidFill>
-            <a:tailEnd len="med" type="triangle" w="med"/>
+            <a:tailEnd type="triangle" w="med" len="med"/>
           </a:ln>
         </p:spPr>
       </p:cxnSp>
@@ -17042,7 +19884,7 @@
             <a:solidFill>
               <a:srgbClr val="000000"/>
             </a:solidFill>
-            <a:tailEnd len="med" type="triangle" w="med"/>
+            <a:tailEnd type="triangle" w="med" len="med"/>
           </a:ln>
         </p:spPr>
       </p:cxnSp>
@@ -17066,15 +19908,22 @@
           </a:ln>
         </p:spPr>
         <p:style>
-          <a:lnRef idx="0"/>
-          <a:fillRef idx="0"/>
-          <a:effectRef idx="0"/>
+          <a:lnRef idx="0">
+            <a:scrgbClr r="0" g="0" b="0"/>
+          </a:lnRef>
+          <a:fillRef idx="0">
+            <a:scrgbClr r="0" g="0" b="0"/>
+          </a:fillRef>
+          <a:effectRef idx="0">
+            <a:scrgbClr r="0" g="0" b="0"/>
+          </a:effectRef>
           <a:fontRef idx="minor"/>
         </p:style>
         <p:txBody>
           <a:bodyPr wrap="none" lIns="90000" tIns="45000" rIns="90000" bIns="45000" anchor="t">
             <a:spAutoFit/>
           </a:bodyPr>
+          <a:lstStyle/>
           <a:p>
             <a:pPr defTabSz="914400">
               <a:lnSpc>
@@ -17106,19 +19955,14 @@
       </p:sp>
     </p:spTree>
   </p:cSld>
-  <mc:AlternateContent>
-    <mc:Choice Requires="p14">
-      <p:transition spd="slow" p14:dur="2000"/>
-    </mc:Choice>
-    <mc:Fallback>
-      <p:transition spd="slow"/>
-    </mc:Fallback>
-  </mc:AlternateContent>
+  <p:clrMapOvr>
+    <a:masterClrMapping/>
+  </p:clrMapOvr>
 </p:sld>
 </file>
 
 <file path=ppt/slides/slide9.xml><?xml version="1.0" encoding="utf-8"?>
-<p:sld xmlns:a="http://schemas.openxmlformats.org/drawingml/2006/main" xmlns:p="http://schemas.openxmlformats.org/presentationml/2006/main" xmlns:r="http://schemas.openxmlformats.org/officeDocument/2006/relationships" xmlns:p14="http://schemas.microsoft.com/office/powerpoint/2010/main" xmlns:p15="http://schemas.microsoft.com/office/powerpoint/2012/main" xmlns:mc="http://schemas.openxmlformats.org/markup-compatibility/2006">
+<p:sld xmlns:a="http://schemas.openxmlformats.org/drawingml/2006/main" xmlns:r="http://schemas.openxmlformats.org/officeDocument/2006/relationships" xmlns:p="http://schemas.openxmlformats.org/presentationml/2006/main">
   <p:cSld>
     <p:spTree>
       <p:nvGrpSpPr>
@@ -17241,6 +20085,7 @@
           <a:bodyPr lIns="91440" tIns="45720" rIns="91440" bIns="45720" anchor="ctr">
             <a:noAutofit/>
           </a:bodyPr>
+          <a:lstStyle/>
           <a:p>
             <a:pPr indent="0" algn="l" defTabSz="914400">
               <a:lnSpc>
@@ -17298,6 +20143,7 @@
           <a:bodyPr lIns="91440" tIns="45720" rIns="91440" bIns="45720" anchor="t">
             <a:noAutofit/>
           </a:bodyPr>
+          <a:lstStyle/>
           <a:p>
             <a:pPr marL="228600" indent="-228600" algn="l" defTabSz="914400">
               <a:lnSpc>
@@ -17420,7 +20266,7 @@
                 <a:latin typeface="Calibri"/>
                 <a:ea typeface="Calibri"/>
               </a:rPr>
-              <a:t>&lt;number&gt;</a:t>
+              <a:t>9</a:t>
             </a:fld>
             <a:endParaRPr lang="en-GB" sz="900" b="0" u="none" strike="noStrike">
               <a:solidFill>
@@ -17451,7 +20297,7 @@
             <a:solidFill>
               <a:srgbClr val="000000"/>
             </a:solidFill>
-            <a:tailEnd len="med" type="triangle" w="med"/>
+            <a:tailEnd type="triangle" w="med" len="med"/>
           </a:ln>
         </p:spPr>
       </p:cxnSp>
@@ -17496,6 +20342,7 @@
           <a:bodyPr lIns="90000" tIns="45000" rIns="90000" bIns="45000" anchor="ctr">
             <a:noAutofit/>
           </a:bodyPr>
+          <a:lstStyle/>
           <a:p>
             <a:pPr algn="ctr" defTabSz="914400">
               <a:lnSpc>
@@ -17566,6 +20413,7 @@
           <a:bodyPr lIns="90000" tIns="45000" rIns="90000" bIns="45000" anchor="ctr">
             <a:noAutofit/>
           </a:bodyPr>
+          <a:lstStyle/>
           <a:p>
             <a:pPr algn="ctr" defTabSz="914400">
               <a:lnSpc>
@@ -17640,6 +20488,7 @@
           <a:bodyPr lIns="90000" tIns="45000" rIns="90000" bIns="45000" anchor="ctr">
             <a:noAutofit/>
           </a:bodyPr>
+          <a:lstStyle/>
           <a:p>
             <a:pPr algn="ctr" defTabSz="914400">
               <a:lnSpc>
@@ -17714,6 +20563,7 @@
           <a:bodyPr lIns="90000" tIns="45000" rIns="90000" bIns="45000" anchor="ctr">
             <a:noAutofit/>
           </a:bodyPr>
+          <a:lstStyle/>
           <a:p>
             <a:pPr algn="ctr" defTabSz="914400">
               <a:lnSpc>
@@ -17761,7 +20611,7 @@
             <a:solidFill>
               <a:srgbClr val="000000"/>
             </a:solidFill>
-            <a:tailEnd len="med" type="triangle" w="med"/>
+            <a:tailEnd type="triangle" w="med" len="med"/>
           </a:ln>
         </p:spPr>
       </p:cxnSp>
@@ -17783,7 +20633,7 @@
             <a:solidFill>
               <a:srgbClr val="000000"/>
             </a:solidFill>
-            <a:tailEnd len="med" type="triangle" w="med"/>
+            <a:tailEnd type="triangle" w="med" len="med"/>
           </a:ln>
         </p:spPr>
       </p:cxnSp>
@@ -17832,6 +20682,7 @@
           <a:bodyPr lIns="90000" tIns="45000" rIns="90000" bIns="45000" anchor="ctr">
             <a:noAutofit/>
           </a:bodyPr>
+          <a:lstStyle/>
           <a:p>
             <a:pPr algn="ctr" defTabSz="914400">
               <a:lnSpc>
@@ -17879,7 +20730,7 @@
             <a:solidFill>
               <a:srgbClr val="000000"/>
             </a:solidFill>
-            <a:tailEnd len="med" type="triangle" w="med"/>
+            <a:tailEnd type="triangle" w="med" len="med"/>
           </a:ln>
         </p:spPr>
       </p:cxnSp>
@@ -17901,7 +20752,7 @@
             <a:solidFill>
               <a:srgbClr val="000000"/>
             </a:solidFill>
-            <a:tailEnd len="med" type="triangle" w="med"/>
+            <a:tailEnd type="triangle" w="med" len="med"/>
           </a:ln>
         </p:spPr>
       </p:cxnSp>
@@ -17923,25 +20774,20 @@
             <a:solidFill>
               <a:srgbClr val="000000"/>
             </a:solidFill>
-            <a:tailEnd len="med" type="triangle" w="med"/>
+            <a:tailEnd type="triangle" w="med" len="med"/>
           </a:ln>
         </p:spPr>
       </p:cxnSp>
     </p:spTree>
   </p:cSld>
-  <mc:AlternateContent>
-    <mc:Choice Requires="p14">
-      <p:transition spd="slow" p14:dur="2000"/>
-    </mc:Choice>
-    <mc:Fallback>
-      <p:transition spd="slow"/>
-    </mc:Fallback>
-  </mc:AlternateContent>
+  <p:clrMapOvr>
+    <a:masterClrMapping/>
+  </p:clrMapOvr>
 </p:sld>
 </file>
 
 <file path=ppt/theme/theme1.xml><?xml version="1.0" encoding="utf-8"?>
-<a:theme xmlns:a="http://schemas.openxmlformats.org/drawingml/2006/main" xmlns:r="http://schemas.openxmlformats.org/officeDocument/2006/relationships" name="Anpassad formgivning">
+<a:theme xmlns:a="http://schemas.openxmlformats.org/drawingml/2006/main" name="Anpassad formgivning">
   <a:themeElements>
     <a:clrScheme name="Office">
       <a:dk1>
@@ -17983,14 +20829,14 @@
     </a:clrScheme>
     <a:fontScheme name="Office">
       <a:majorFont>
-        <a:latin typeface="Aptos Display" pitchFamily="0" charset="1"/>
-        <a:ea typeface="Arial" pitchFamily="0" charset="1"/>
-        <a:cs typeface="Arial" pitchFamily="0" charset="1"/>
+        <a:latin typeface="Aptos Display"/>
+        <a:ea typeface="Arial"/>
+        <a:cs typeface="Arial"/>
       </a:majorFont>
       <a:minorFont>
-        <a:latin typeface="Aptos" pitchFamily="0" charset="1"/>
-        <a:ea typeface="Arial" pitchFamily="0" charset="1"/>
-        <a:cs typeface="Arial" pitchFamily="0" charset="1"/>
+        <a:latin typeface="Aptos"/>
+        <a:ea typeface="Arial"/>
+        <a:cs typeface="Arial"/>
       </a:minorFont>
     </a:fontScheme>
     <a:fmtScheme>
@@ -18020,7 +20866,7 @@
             </a:gs>
           </a:gsLst>
           <a:lin ang="5400000" scaled="0"/>
-          <a:tileRect l="0" t="0" r="0" b="0"/>
+          <a:tileRect/>
         </a:gradFill>
         <a:gradFill>
           <a:gsLst>
@@ -18044,7 +20890,7 @@
             </a:gs>
           </a:gsLst>
           <a:lin ang="5400000" scaled="0"/>
-          <a:tileRect l="0" t="0" r="0" b="0"/>
+          <a:tileRect/>
         </a:gradFill>
       </a:fillStyleLst>
       <a:lnStyleLst>
@@ -18104,16 +20950,18 @@
             </a:gs>
           </a:gsLst>
           <a:lin ang="5400000" scaled="0"/>
-          <a:tileRect l="0" t="0" r="0" b="0"/>
+          <a:tileRect/>
         </a:gradFill>
       </a:bgFillStyleLst>
     </a:fmtScheme>
   </a:themeElements>
+  <a:objectDefaults/>
+  <a:extraClrSchemeLst/>
 </a:theme>
 </file>
 
-<file path=ppt/theme/theme6.xml><?xml version="1.0" encoding="utf-8"?>
-<a:theme xmlns:a="http://schemas.openxmlformats.org/drawingml/2006/main" xmlns:r="http://schemas.openxmlformats.org/officeDocument/2006/relationships" name="Office Theme">
+<file path=ppt/theme/theme2.xml><?xml version="1.0" encoding="utf-8"?>
+<a:theme xmlns:a="http://schemas.openxmlformats.org/drawingml/2006/main" name="Office Theme">
   <a:themeElements>
     <a:clrScheme name="LibreOffice">
       <a:dk1>
@@ -18155,14 +21003,14 @@
     </a:clrScheme>
     <a:fontScheme name="Office">
       <a:majorFont>
-        <a:latin typeface="Arial" pitchFamily="0" charset="1"/>
-        <a:ea typeface="DejaVu Sans" pitchFamily="0" charset="1"/>
-        <a:cs typeface="DejaVu Sans" pitchFamily="0" charset="1"/>
+        <a:latin typeface="Arial"/>
+        <a:ea typeface="DejaVu Sans"/>
+        <a:cs typeface="DejaVu Sans"/>
       </a:majorFont>
       <a:minorFont>
-        <a:latin typeface="Arial" pitchFamily="0" charset="1"/>
-        <a:ea typeface="DejaVu Sans" pitchFamily="0" charset="1"/>
-        <a:cs typeface="DejaVu Sans" pitchFamily="0" charset="1"/>
+        <a:latin typeface="Arial"/>
+        <a:ea typeface="DejaVu Sans"/>
+        <a:cs typeface="DejaVu Sans"/>
       </a:minorFont>
     </a:fontScheme>
     <a:fmtScheme>
@@ -18215,5 +21063,7 @@
       </a:bgFillStyleLst>
     </a:fmtScheme>
   </a:themeElements>
+  <a:objectDefaults/>
+  <a:extraClrSchemeLst/>
 </a:theme>
 </file>